--- a/ppt-gtsebrae/G1-Hyrla-Mariana.pptx
+++ b/ppt-gtsebrae/G1-Hyrla-Mariana.pptx
@@ -1,53 +1,53 @@
 
 <file path=ppt/presentation.xml><?xml version="1.0" encoding="utf-8"?>
-<p:presentation xmlns:a="http://schemas.openxmlformats.org/drawingml/2006/main" xmlns:r="http://schemas.openxmlformats.org/officeDocument/2006/relationships" xmlns:mc="http://schemas.openxmlformats.org/markup-compatibility/2006" xmlns:mv="urn:schemas-microsoft-com:mac:vml" xmlns:p="http://schemas.openxmlformats.org/presentationml/2006/main" xmlns:c="http://schemas.openxmlformats.org/drawingml/2006/chart" xmlns:dgm="http://schemas.openxmlformats.org/drawingml/2006/diagram" xmlns:o="urn:schemas-microsoft-com:office:office" xmlns:v="urn:schemas-microsoft-com:vml" xmlns:pvml="urn:schemas-microsoft-com:office:powerpoint" xmlns:com="http://schemas.openxmlformats.org/drawingml/2006/compatibility" xmlns:p14="http://schemas.microsoft.com/office/powerpoint/2010/main" xmlns:p15="http://schemas.microsoft.com/office/powerpoint/2012/main" xmlns:ahyp="http://schemas.microsoft.com/office/drawing/2018/hyperlinkcolor" autoCompressPictures="0" embedTrueTypeFonts="1" strictFirstAndLastChars="0" saveSubsetFonts="1">
+<p:presentation xmlns:a="http://schemas.openxmlformats.org/drawingml/2006/main" xmlns:r="http://schemas.openxmlformats.org/officeDocument/2006/relationships" xmlns:p="http://schemas.openxmlformats.org/presentationml/2006/main" strictFirstAndLastChars="0" embedTrueTypeFonts="1" saveSubsetFonts="1" autoCompressPictures="0">
   <p:sldMasterIdLst>
-    <p:sldMasterId id="2147483659" r:id="rId4"/>
+    <p:sldMasterId id="2147483659" r:id="rId1"/>
   </p:sldMasterIdLst>
   <p:notesMasterIdLst>
-    <p:notesMasterId r:id="rId5"/>
+    <p:notesMasterId r:id="rId28"/>
   </p:notesMasterIdLst>
   <p:sldIdLst>
-    <p:sldId id="256" r:id="rId6"/>
-    <p:sldId id="257" r:id="rId7"/>
-    <p:sldId id="258" r:id="rId8"/>
-    <p:sldId id="259" r:id="rId9"/>
-    <p:sldId id="260" r:id="rId10"/>
-    <p:sldId id="261" r:id="rId11"/>
-    <p:sldId id="262" r:id="rId12"/>
-    <p:sldId id="263" r:id="rId13"/>
-    <p:sldId id="264" r:id="rId14"/>
-    <p:sldId id="265" r:id="rId15"/>
-    <p:sldId id="266" r:id="rId16"/>
-    <p:sldId id="267" r:id="rId17"/>
-    <p:sldId id="268" r:id="rId18"/>
-    <p:sldId id="269" r:id="rId19"/>
-    <p:sldId id="270" r:id="rId20"/>
-    <p:sldId id="271" r:id="rId21"/>
-    <p:sldId id="272" r:id="rId22"/>
-    <p:sldId id="273" r:id="rId23"/>
-    <p:sldId id="274" r:id="rId24"/>
-    <p:sldId id="275" r:id="rId25"/>
-    <p:sldId id="276" r:id="rId26"/>
-    <p:sldId id="277" r:id="rId27"/>
-    <p:sldId id="278" r:id="rId28"/>
-    <p:sldId id="279" r:id="rId29"/>
-    <p:sldId id="280" r:id="rId30"/>
-    <p:sldId id="281" r:id="rId31"/>
+    <p:sldId id="256" r:id="rId2"/>
+    <p:sldId id="257" r:id="rId3"/>
+    <p:sldId id="258" r:id="rId4"/>
+    <p:sldId id="259" r:id="rId5"/>
+    <p:sldId id="260" r:id="rId6"/>
+    <p:sldId id="261" r:id="rId7"/>
+    <p:sldId id="262" r:id="rId8"/>
+    <p:sldId id="263" r:id="rId9"/>
+    <p:sldId id="264" r:id="rId10"/>
+    <p:sldId id="265" r:id="rId11"/>
+    <p:sldId id="266" r:id="rId12"/>
+    <p:sldId id="267" r:id="rId13"/>
+    <p:sldId id="268" r:id="rId14"/>
+    <p:sldId id="269" r:id="rId15"/>
+    <p:sldId id="270" r:id="rId16"/>
+    <p:sldId id="271" r:id="rId17"/>
+    <p:sldId id="272" r:id="rId18"/>
+    <p:sldId id="273" r:id="rId19"/>
+    <p:sldId id="274" r:id="rId20"/>
+    <p:sldId id="275" r:id="rId21"/>
+    <p:sldId id="276" r:id="rId22"/>
+    <p:sldId id="277" r:id="rId23"/>
+    <p:sldId id="278" r:id="rId24"/>
+    <p:sldId id="279" r:id="rId25"/>
+    <p:sldId id="280" r:id="rId26"/>
+    <p:sldId id="281" r:id="rId27"/>
   </p:sldIdLst>
-  <p:sldSz cy="5143500" cx="9144000"/>
+  <p:sldSz cx="9144000" cy="5143500" type="screen16x9"/>
   <p:notesSz cx="6858000" cy="9144000"/>
   <p:embeddedFontLst>
     <p:embeddedFont>
-      <p:font typeface="Figtree"/>
-      <p:regular r:id="rId32"/>
-      <p:bold r:id="rId33"/>
-      <p:italic r:id="rId34"/>
-      <p:boldItalic r:id="rId35"/>
+      <p:font typeface="Figtree" panose="020B0604020202020204" charset="0"/>
+      <p:regular r:id="rId29"/>
+      <p:bold r:id="rId30"/>
+      <p:italic r:id="rId31"/>
+      <p:boldItalic r:id="rId32"/>
     </p:embeddedFont>
   </p:embeddedFontLst>
   <p:defaultTextStyle>
-    <a:defPPr lvl="0" marR="0" rtl="0" algn="l">
+    <a:defPPr marR="0" lvl="0" algn="l" rtl="0">
       <a:lnSpc>
         <a:spcPct val="100000"/>
       </a:lnSpc>
@@ -58,7 +58,7 @@
         <a:spcPts val="0"/>
       </a:spcAft>
     </a:defPPr>
-    <a:lvl1pPr lvl="0" marR="0" rtl="0" algn="l">
+    <a:lvl1pPr marR="0" lvl="0" algn="l" rtl="0">
       <a:lnSpc>
         <a:spcPct val="100000"/>
       </a:lnSpc>
@@ -72,7 +72,7 @@
         <a:srgbClr val="000000"/>
       </a:buClr>
       <a:buFont typeface="Arial"/>
-      <a:defRPr b="0" i="0" spc="0" sz="1400" u="none" cap="none" strike="noStrike">
+      <a:defRPr sz="1400" b="0" i="0" u="none" strike="noStrike" cap="none" spc="0">
         <a:solidFill>
           <a:srgbClr val="000000"/>
         </a:solidFill>
@@ -82,7 +82,7 @@
         <a:sym typeface="Arial"/>
       </a:defRPr>
     </a:lvl1pPr>
-    <a:lvl2pPr lvl="1" marR="0" rtl="0" algn="l">
+    <a:lvl2pPr marR="0" lvl="1" algn="l" rtl="0">
       <a:lnSpc>
         <a:spcPct val="100000"/>
       </a:lnSpc>
@@ -96,7 +96,7 @@
         <a:srgbClr val="000000"/>
       </a:buClr>
       <a:buFont typeface="Arial"/>
-      <a:defRPr b="0" i="0" spc="0" sz="1400" u="none" cap="none" strike="noStrike">
+      <a:defRPr sz="1400" b="0" i="0" u="none" strike="noStrike" cap="none" spc="0">
         <a:solidFill>
           <a:srgbClr val="000000"/>
         </a:solidFill>
@@ -106,7 +106,7 @@
         <a:sym typeface="Arial"/>
       </a:defRPr>
     </a:lvl2pPr>
-    <a:lvl3pPr lvl="2" marR="0" rtl="0" algn="l">
+    <a:lvl3pPr marR="0" lvl="2" algn="l" rtl="0">
       <a:lnSpc>
         <a:spcPct val="100000"/>
       </a:lnSpc>
@@ -120,7 +120,7 @@
         <a:srgbClr val="000000"/>
       </a:buClr>
       <a:buFont typeface="Arial"/>
-      <a:defRPr b="0" i="0" spc="0" sz="1400" u="none" cap="none" strike="noStrike">
+      <a:defRPr sz="1400" b="0" i="0" u="none" strike="noStrike" cap="none" spc="0">
         <a:solidFill>
           <a:srgbClr val="000000"/>
         </a:solidFill>
@@ -130,7 +130,7 @@
         <a:sym typeface="Arial"/>
       </a:defRPr>
     </a:lvl3pPr>
-    <a:lvl4pPr lvl="3" marR="0" rtl="0" algn="l">
+    <a:lvl4pPr marR="0" lvl="3" algn="l" rtl="0">
       <a:lnSpc>
         <a:spcPct val="100000"/>
       </a:lnSpc>
@@ -144,7 +144,7 @@
         <a:srgbClr val="000000"/>
       </a:buClr>
       <a:buFont typeface="Arial"/>
-      <a:defRPr b="0" i="0" spc="0" sz="1400" u="none" cap="none" strike="noStrike">
+      <a:defRPr sz="1400" b="0" i="0" u="none" strike="noStrike" cap="none" spc="0">
         <a:solidFill>
           <a:srgbClr val="000000"/>
         </a:solidFill>
@@ -154,7 +154,7 @@
         <a:sym typeface="Arial"/>
       </a:defRPr>
     </a:lvl4pPr>
-    <a:lvl5pPr lvl="4" marR="0" rtl="0" algn="l">
+    <a:lvl5pPr marR="0" lvl="4" algn="l" rtl="0">
       <a:lnSpc>
         <a:spcPct val="100000"/>
       </a:lnSpc>
@@ -168,7 +168,7 @@
         <a:srgbClr val="000000"/>
       </a:buClr>
       <a:buFont typeface="Arial"/>
-      <a:defRPr b="0" i="0" spc="0" sz="1400" u="none" cap="none" strike="noStrike">
+      <a:defRPr sz="1400" b="0" i="0" u="none" strike="noStrike" cap="none" spc="0">
         <a:solidFill>
           <a:srgbClr val="000000"/>
         </a:solidFill>
@@ -178,7 +178,7 @@
         <a:sym typeface="Arial"/>
       </a:defRPr>
     </a:lvl5pPr>
-    <a:lvl6pPr lvl="5" marR="0" rtl="0" algn="l">
+    <a:lvl6pPr marR="0" lvl="5" algn="l" rtl="0">
       <a:lnSpc>
         <a:spcPct val="100000"/>
       </a:lnSpc>
@@ -192,7 +192,7 @@
         <a:srgbClr val="000000"/>
       </a:buClr>
       <a:buFont typeface="Arial"/>
-      <a:defRPr b="0" i="0" spc="0" sz="1400" u="none" cap="none" strike="noStrike">
+      <a:defRPr sz="1400" b="0" i="0" u="none" strike="noStrike" cap="none" spc="0">
         <a:solidFill>
           <a:srgbClr val="000000"/>
         </a:solidFill>
@@ -202,7 +202,7 @@
         <a:sym typeface="Arial"/>
       </a:defRPr>
     </a:lvl6pPr>
-    <a:lvl7pPr lvl="6" marR="0" rtl="0" algn="l">
+    <a:lvl7pPr marR="0" lvl="6" algn="l" rtl="0">
       <a:lnSpc>
         <a:spcPct val="100000"/>
       </a:lnSpc>
@@ -216,7 +216,7 @@
         <a:srgbClr val="000000"/>
       </a:buClr>
       <a:buFont typeface="Arial"/>
-      <a:defRPr b="0" i="0" spc="0" sz="1400" u="none" cap="none" strike="noStrike">
+      <a:defRPr sz="1400" b="0" i="0" u="none" strike="noStrike" cap="none" spc="0">
         <a:solidFill>
           <a:srgbClr val="000000"/>
         </a:solidFill>
@@ -226,7 +226,7 @@
         <a:sym typeface="Arial"/>
       </a:defRPr>
     </a:lvl7pPr>
-    <a:lvl8pPr lvl="7" marR="0" rtl="0" algn="l">
+    <a:lvl8pPr marR="0" lvl="7" algn="l" rtl="0">
       <a:lnSpc>
         <a:spcPct val="100000"/>
       </a:lnSpc>
@@ -240,7 +240,7 @@
         <a:srgbClr val="000000"/>
       </a:buClr>
       <a:buFont typeface="Arial"/>
-      <a:defRPr b="0" i="0" spc="0" sz="1400" u="none" cap="none" strike="noStrike">
+      <a:defRPr sz="1400" b="0" i="0" u="none" strike="noStrike" cap="none" spc="0">
         <a:solidFill>
           <a:srgbClr val="000000"/>
         </a:solidFill>
@@ -250,7 +250,7 @@
         <a:sym typeface="Arial"/>
       </a:defRPr>
     </a:lvl8pPr>
-    <a:lvl9pPr lvl="8" marR="0" rtl="0" algn="l">
+    <a:lvl9pPr marR="0" lvl="8" algn="l" rtl="0">
       <a:lnSpc>
         <a:spcPct val="100000"/>
       </a:lnSpc>
@@ -264,7 +264,7 @@
         <a:srgbClr val="000000"/>
       </a:buClr>
       <a:buFont typeface="Arial"/>
-      <a:defRPr b="0" i="0" spc="0" sz="1400" u="none" cap="none" strike="noStrike">
+      <a:defRPr sz="1400" b="0" i="0" u="none" strike="noStrike" cap="none" spc="0">
         <a:solidFill>
           <a:srgbClr val="000000"/>
         </a:solidFill>
@@ -277,7 +277,7 @@
   </p:defaultTextStyle>
   <p:extLst>
     <p:ext uri="{EFAFB233-063F-42B5-8137-9DF3F51BA10A}">
-      <p15:sldGuideLst>
+      <p15:sldGuideLst xmlns:p15="http://schemas.microsoft.com/office/powerpoint/2012/main">
         <p15:guide id="1" orient="horz" pos="1620">
           <p15:clr>
             <a:srgbClr val="747775"/>
@@ -295,11 +295,16 @@
 </file>
 
 <file path=ppt/notesMasters/notesMaster1.xml><?xml version="1.0" encoding="utf-8"?>
-<p:notesMaster xmlns:a="http://schemas.openxmlformats.org/drawingml/2006/main" xmlns:r="http://schemas.openxmlformats.org/officeDocument/2006/relationships" xmlns:mc="http://schemas.openxmlformats.org/markup-compatibility/2006" xmlns:mv="urn:schemas-microsoft-com:mac:vml" xmlns:p="http://schemas.openxmlformats.org/presentationml/2006/main" xmlns:c="http://schemas.openxmlformats.org/drawingml/2006/chart" xmlns:dgm="http://schemas.openxmlformats.org/drawingml/2006/diagram" xmlns:o="urn:schemas-microsoft-com:office:office" xmlns:v="urn:schemas-microsoft-com:vml" xmlns:pvml="urn:schemas-microsoft-com:office:powerpoint" xmlns:com="http://schemas.openxmlformats.org/drawingml/2006/compatibility" xmlns:p14="http://schemas.microsoft.com/office/powerpoint/2010/main" xmlns:p15="http://schemas.microsoft.com/office/powerpoint/2012/main" xmlns:ahyp="http://schemas.microsoft.com/office/drawing/2018/hyperlinkcolor">
+<p:notesMaster xmlns:a="http://schemas.openxmlformats.org/drawingml/2006/main" xmlns:r="http://schemas.openxmlformats.org/officeDocument/2006/relationships" xmlns:p="http://schemas.openxmlformats.org/presentationml/2006/main">
   <p:cSld>
+    <p:bg>
+      <p:bgRef idx="1001">
+        <a:schemeClr val="bg1"/>
+      </p:bgRef>
+    </p:bg>
     <p:spTree>
       <p:nvGrpSpPr>
-        <p:cNvPr id="2" name="Shape 2"/>
+        <p:cNvPr id="1" name="Shape 2"/>
         <p:cNvGrpSpPr/>
         <p:nvPr/>
       </p:nvGrpSpPr>
@@ -314,9 +319,11 @@
       <p:sp>
         <p:nvSpPr>
           <p:cNvPr id="3" name="Google Shape;3;n"/>
-          <p:cNvSpPr/>
+          <p:cNvSpPr>
+            <a:spLocks noGrp="1" noRot="1" noChangeAspect="1"/>
+          </p:cNvSpPr>
           <p:nvPr>
-            <p:ph idx="2" type="sldImg"/>
+            <p:ph type="sldImg" idx="2"/>
           </p:nvPr>
         </p:nvSpPr>
         <p:spPr>
@@ -325,9 +332,13 @@
             <a:ext cx="6096075" cy="3429000"/>
           </a:xfrm>
           <a:custGeom>
-            <a:rect b="b" l="l" r="r" t="t"/>
+            <a:avLst/>
+            <a:gdLst/>
+            <a:ahLst/>
+            <a:cxnLst/>
+            <a:rect l="l" t="t" r="r" b="b"/>
             <a:pathLst>
-              <a:path extrusionOk="0" h="120000" w="120000">
+              <a:path w="120000" h="120000" extrusionOk="0">
                 <a:moveTo>
                   <a:pt x="0" y="0"/>
                 </a:moveTo>
@@ -345,23 +356,25 @@
             </a:pathLst>
           </a:custGeom>
           <a:noFill/>
-          <a:ln cap="flat" cmpd="sng" w="9525">
+          <a:ln w="9525" cap="flat" cmpd="sng">
             <a:solidFill>
               <a:srgbClr val="000000"/>
             </a:solidFill>
             <a:prstDash val="solid"/>
             <a:round/>
-            <a:headEnd len="sm" w="sm" type="none"/>
-            <a:tailEnd len="sm" w="sm" type="none"/>
+            <a:headEnd type="none" w="sm" len="sm"/>
+            <a:tailEnd type="none" w="sm" len="sm"/>
           </a:ln>
         </p:spPr>
       </p:sp>
       <p:sp>
         <p:nvSpPr>
           <p:cNvPr id="4" name="Google Shape;4;n"/>
-          <p:cNvSpPr txBox="1"/>
+          <p:cNvSpPr txBox="1">
+            <a:spLocks noGrp="1"/>
+          </p:cNvSpPr>
           <p:nvPr>
-            <p:ph idx="1" type="body"/>
+            <p:ph type="body" idx="1"/>
           </p:nvPr>
         </p:nvSpPr>
         <p:spPr>
@@ -378,11 +391,11 @@
           </a:ln>
         </p:spPr>
         <p:txBody>
-          <a:bodyPr anchorCtr="0" anchor="t" bIns="91425" lIns="91425" spcFirstLastPara="1" rIns="91425" wrap="square" tIns="91425">
+          <a:bodyPr spcFirstLastPara="1" wrap="square" lIns="91425" tIns="91425" rIns="91425" bIns="91425" anchor="t" anchorCtr="0">
             <a:noAutofit/>
           </a:bodyPr>
           <a:lstStyle>
-            <a:lvl1pPr indent="-298450" lvl="0" marL="457200">
+            <a:lvl1pPr marL="457200" lvl="0" indent="-298450">
               <a:spcBef>
                 <a:spcPts val="0"/>
               </a:spcBef>
@@ -393,7 +406,7 @@
               <a:buChar char="●"/>
               <a:defRPr sz="1100"/>
             </a:lvl1pPr>
-            <a:lvl2pPr indent="-298450" lvl="1" marL="914400">
+            <a:lvl2pPr marL="914400" lvl="1" indent="-298450">
               <a:spcBef>
                 <a:spcPts val="0"/>
               </a:spcBef>
@@ -404,7 +417,7 @@
               <a:buChar char="○"/>
               <a:defRPr sz="1100"/>
             </a:lvl2pPr>
-            <a:lvl3pPr indent="-298450" lvl="2" marL="1371600">
+            <a:lvl3pPr marL="1371600" lvl="2" indent="-298450">
               <a:spcBef>
                 <a:spcPts val="0"/>
               </a:spcBef>
@@ -415,7 +428,7 @@
               <a:buChar char="■"/>
               <a:defRPr sz="1100"/>
             </a:lvl3pPr>
-            <a:lvl4pPr indent="-298450" lvl="3" marL="1828800">
+            <a:lvl4pPr marL="1828800" lvl="3" indent="-298450">
               <a:spcBef>
                 <a:spcPts val="0"/>
               </a:spcBef>
@@ -426,7 +439,7 @@
               <a:buChar char="●"/>
               <a:defRPr sz="1100"/>
             </a:lvl4pPr>
-            <a:lvl5pPr indent="-298450" lvl="4" marL="2286000">
+            <a:lvl5pPr marL="2286000" lvl="4" indent="-298450">
               <a:spcBef>
                 <a:spcPts val="0"/>
               </a:spcBef>
@@ -437,7 +450,7 @@
               <a:buChar char="○"/>
               <a:defRPr sz="1100"/>
             </a:lvl5pPr>
-            <a:lvl6pPr indent="-298450" lvl="5" marL="2743200">
+            <a:lvl6pPr marL="2743200" lvl="5" indent="-298450">
               <a:spcBef>
                 <a:spcPts val="0"/>
               </a:spcBef>
@@ -448,7 +461,7 @@
               <a:buChar char="■"/>
               <a:defRPr sz="1100"/>
             </a:lvl6pPr>
-            <a:lvl7pPr indent="-298450" lvl="6" marL="3200400">
+            <a:lvl7pPr marL="3200400" lvl="6" indent="-298450">
               <a:spcBef>
                 <a:spcPts val="0"/>
               </a:spcBef>
@@ -459,7 +472,7 @@
               <a:buChar char="●"/>
               <a:defRPr sz="1100"/>
             </a:lvl7pPr>
-            <a:lvl8pPr indent="-298450" lvl="7" marL="3657600">
+            <a:lvl8pPr marL="3657600" lvl="7" indent="-298450">
               <a:spcBef>
                 <a:spcPts val="0"/>
               </a:spcBef>
@@ -470,7 +483,7 @@
               <a:buChar char="○"/>
               <a:defRPr sz="1100"/>
             </a:lvl8pPr>
-            <a:lvl9pPr indent="-298450" lvl="8" marL="4114800">
+            <a:lvl9pPr marL="4114800" lvl="8" indent="-298450">
               <a:spcBef>
                 <a:spcPts val="0"/>
               </a:spcBef>
@@ -482,14 +495,16 @@
               <a:defRPr sz="1100"/>
             </a:lvl9pPr>
           </a:lstStyle>
-          <a:p/>
+          <a:p>
+            <a:endParaRPr/>
+          </a:p>
         </p:txBody>
       </p:sp>
     </p:spTree>
   </p:cSld>
-  <p:clrMap accent1="accent1" accent2="accent2" accent3="accent3" accent4="accent4" accent5="accent5" accent6="accent6" bg1="lt1" bg2="dk2" tx1="dk1" tx2="lt2" folHlink="folHlink" hlink="hlink"/>
+  <p:clrMap bg1="lt1" tx1="dk1" bg2="dk2" tx2="lt2" accent1="accent1" accent2="accent2" accent3="accent3" accent4="accent4" accent5="accent5" accent6="accent6" hlink="hlink" folHlink="folHlink"/>
   <p:notesStyle>
-    <a:defPPr lvl="0" marR="0" rtl="0" algn="l">
+    <a:defPPr marR="0" lvl="0" algn="l" rtl="0">
       <a:lnSpc>
         <a:spcPct val="100000"/>
       </a:lnSpc>
@@ -500,7 +515,7 @@
         <a:spcPts val="0"/>
       </a:spcAft>
     </a:defPPr>
-    <a:lvl1pPr lvl="0" marR="0" rtl="0" algn="l">
+    <a:lvl1pPr marR="0" lvl="0" algn="l" rtl="0">
       <a:lnSpc>
         <a:spcPct val="100000"/>
       </a:lnSpc>
@@ -514,7 +529,7 @@
         <a:srgbClr val="000000"/>
       </a:buClr>
       <a:buFont typeface="Arial"/>
-      <a:defRPr b="0" i="0" spc="0" sz="1400" u="none" cap="none" strike="noStrike">
+      <a:defRPr sz="1400" b="0" i="0" u="none" strike="noStrike" cap="none" spc="0">
         <a:solidFill>
           <a:srgbClr val="000000"/>
         </a:solidFill>
@@ -524,7 +539,7 @@
         <a:sym typeface="Arial"/>
       </a:defRPr>
     </a:lvl1pPr>
-    <a:lvl2pPr lvl="1" marR="0" rtl="0" algn="l">
+    <a:lvl2pPr marR="0" lvl="1" algn="l" rtl="0">
       <a:lnSpc>
         <a:spcPct val="100000"/>
       </a:lnSpc>
@@ -538,7 +553,7 @@
         <a:srgbClr val="000000"/>
       </a:buClr>
       <a:buFont typeface="Arial"/>
-      <a:defRPr b="0" i="0" spc="0" sz="1400" u="none" cap="none" strike="noStrike">
+      <a:defRPr sz="1400" b="0" i="0" u="none" strike="noStrike" cap="none" spc="0">
         <a:solidFill>
           <a:srgbClr val="000000"/>
         </a:solidFill>
@@ -548,7 +563,7 @@
         <a:sym typeface="Arial"/>
       </a:defRPr>
     </a:lvl2pPr>
-    <a:lvl3pPr lvl="2" marR="0" rtl="0" algn="l">
+    <a:lvl3pPr marR="0" lvl="2" algn="l" rtl="0">
       <a:lnSpc>
         <a:spcPct val="100000"/>
       </a:lnSpc>
@@ -562,7 +577,7 @@
         <a:srgbClr val="000000"/>
       </a:buClr>
       <a:buFont typeface="Arial"/>
-      <a:defRPr b="0" i="0" spc="0" sz="1400" u="none" cap="none" strike="noStrike">
+      <a:defRPr sz="1400" b="0" i="0" u="none" strike="noStrike" cap="none" spc="0">
         <a:solidFill>
           <a:srgbClr val="000000"/>
         </a:solidFill>
@@ -572,7 +587,7 @@
         <a:sym typeface="Arial"/>
       </a:defRPr>
     </a:lvl3pPr>
-    <a:lvl4pPr lvl="3" marR="0" rtl="0" algn="l">
+    <a:lvl4pPr marR="0" lvl="3" algn="l" rtl="0">
       <a:lnSpc>
         <a:spcPct val="100000"/>
       </a:lnSpc>
@@ -586,7 +601,7 @@
         <a:srgbClr val="000000"/>
       </a:buClr>
       <a:buFont typeface="Arial"/>
-      <a:defRPr b="0" i="0" spc="0" sz="1400" u="none" cap="none" strike="noStrike">
+      <a:defRPr sz="1400" b="0" i="0" u="none" strike="noStrike" cap="none" spc="0">
         <a:solidFill>
           <a:srgbClr val="000000"/>
         </a:solidFill>
@@ -596,7 +611,7 @@
         <a:sym typeface="Arial"/>
       </a:defRPr>
     </a:lvl4pPr>
-    <a:lvl5pPr lvl="4" marR="0" rtl="0" algn="l">
+    <a:lvl5pPr marR="0" lvl="4" algn="l" rtl="0">
       <a:lnSpc>
         <a:spcPct val="100000"/>
       </a:lnSpc>
@@ -610,7 +625,7 @@
         <a:srgbClr val="000000"/>
       </a:buClr>
       <a:buFont typeface="Arial"/>
-      <a:defRPr b="0" i="0" spc="0" sz="1400" u="none" cap="none" strike="noStrike">
+      <a:defRPr sz="1400" b="0" i="0" u="none" strike="noStrike" cap="none" spc="0">
         <a:solidFill>
           <a:srgbClr val="000000"/>
         </a:solidFill>
@@ -620,7 +635,7 @@
         <a:sym typeface="Arial"/>
       </a:defRPr>
     </a:lvl5pPr>
-    <a:lvl6pPr lvl="5" marR="0" rtl="0" algn="l">
+    <a:lvl6pPr marR="0" lvl="5" algn="l" rtl="0">
       <a:lnSpc>
         <a:spcPct val="100000"/>
       </a:lnSpc>
@@ -634,7 +649,7 @@
         <a:srgbClr val="000000"/>
       </a:buClr>
       <a:buFont typeface="Arial"/>
-      <a:defRPr b="0" i="0" spc="0" sz="1400" u="none" cap="none" strike="noStrike">
+      <a:defRPr sz="1400" b="0" i="0" u="none" strike="noStrike" cap="none" spc="0">
         <a:solidFill>
           <a:srgbClr val="000000"/>
         </a:solidFill>
@@ -644,7 +659,7 @@
         <a:sym typeface="Arial"/>
       </a:defRPr>
     </a:lvl6pPr>
-    <a:lvl7pPr lvl="6" marR="0" rtl="0" algn="l">
+    <a:lvl7pPr marR="0" lvl="6" algn="l" rtl="0">
       <a:lnSpc>
         <a:spcPct val="100000"/>
       </a:lnSpc>
@@ -658,7 +673,7 @@
         <a:srgbClr val="000000"/>
       </a:buClr>
       <a:buFont typeface="Arial"/>
-      <a:defRPr b="0" i="0" spc="0" sz="1400" u="none" cap="none" strike="noStrike">
+      <a:defRPr sz="1400" b="0" i="0" u="none" strike="noStrike" cap="none" spc="0">
         <a:solidFill>
           <a:srgbClr val="000000"/>
         </a:solidFill>
@@ -668,7 +683,7 @@
         <a:sym typeface="Arial"/>
       </a:defRPr>
     </a:lvl7pPr>
-    <a:lvl8pPr lvl="7" marR="0" rtl="0" algn="l">
+    <a:lvl8pPr marR="0" lvl="7" algn="l" rtl="0">
       <a:lnSpc>
         <a:spcPct val="100000"/>
       </a:lnSpc>
@@ -682,7 +697,7 @@
         <a:srgbClr val="000000"/>
       </a:buClr>
       <a:buFont typeface="Arial"/>
-      <a:defRPr b="0" i="0" spc="0" sz="1400" u="none" cap="none" strike="noStrike">
+      <a:defRPr sz="1400" b="0" i="0" u="none" strike="noStrike" cap="none" spc="0">
         <a:solidFill>
           <a:srgbClr val="000000"/>
         </a:solidFill>
@@ -692,7 +707,7 @@
         <a:sym typeface="Arial"/>
       </a:defRPr>
     </a:lvl8pPr>
-    <a:lvl9pPr lvl="8" marR="0" rtl="0" algn="l">
+    <a:lvl9pPr marR="0" lvl="8" algn="l" rtl="0">
       <a:lnSpc>
         <a:spcPct val="100000"/>
       </a:lnSpc>
@@ -706,7 +721,7 @@
         <a:srgbClr val="000000"/>
       </a:buClr>
       <a:buFont typeface="Arial"/>
-      <a:defRPr b="0" i="0" spc="0" sz="1400" u="none" cap="none" strike="noStrike">
+      <a:defRPr sz="1400" b="0" i="0" u="none" strike="noStrike" cap="none" spc="0">
         <a:solidFill>
           <a:srgbClr val="000000"/>
         </a:solidFill>
@@ -721,11 +736,11 @@
 </file>
 
 <file path=ppt/notesSlides/notesSlide1.xml><?xml version="1.0" encoding="utf-8"?>
-<p:notes xmlns:a="http://schemas.openxmlformats.org/drawingml/2006/main" xmlns:r="http://schemas.openxmlformats.org/officeDocument/2006/relationships" xmlns:mc="http://schemas.openxmlformats.org/markup-compatibility/2006" xmlns:mv="urn:schemas-microsoft-com:mac:vml" xmlns:p="http://schemas.openxmlformats.org/presentationml/2006/main" xmlns:c="http://schemas.openxmlformats.org/drawingml/2006/chart" xmlns:dgm="http://schemas.openxmlformats.org/drawingml/2006/diagram" xmlns:o="urn:schemas-microsoft-com:office:office" xmlns:v="urn:schemas-microsoft-com:vml" xmlns:pvml="urn:schemas-microsoft-com:office:powerpoint" xmlns:com="http://schemas.openxmlformats.org/drawingml/2006/compatibility" xmlns:p14="http://schemas.microsoft.com/office/powerpoint/2010/main" xmlns:p15="http://schemas.microsoft.com/office/powerpoint/2012/main" xmlns:ahyp="http://schemas.microsoft.com/office/drawing/2018/hyperlinkcolor" showMasterPhAnim="0" showMasterSp="0">
+<p:notes xmlns:a="http://schemas.openxmlformats.org/drawingml/2006/main" xmlns:r="http://schemas.openxmlformats.org/officeDocument/2006/relationships" xmlns:p="http://schemas.openxmlformats.org/presentationml/2006/main" showMasterSp="0" showMasterPhAnim="0">
   <p:cSld>
     <p:spTree>
       <p:nvGrpSpPr>
-        <p:cNvPr id="50" name="Shape 50"/>
+        <p:cNvPr id="1" name="Shape 50"/>
         <p:cNvGrpSpPr/>
         <p:nvPr/>
       </p:nvGrpSpPr>
@@ -740,9 +755,11 @@
       <p:sp>
         <p:nvSpPr>
           <p:cNvPr id="51" name="Google Shape;51;p:notes"/>
-          <p:cNvSpPr/>
+          <p:cNvSpPr>
+            <a:spLocks noGrp="1" noRot="1" noChangeAspect="1"/>
+          </p:cNvSpPr>
           <p:nvPr>
-            <p:ph idx="2" type="sldImg"/>
+            <p:ph type="sldImg" idx="2"/>
           </p:nvPr>
         </p:nvSpPr>
         <p:spPr>
@@ -751,9 +768,13 @@
             <a:ext cx="6096075" cy="3429000"/>
           </a:xfrm>
           <a:custGeom>
-            <a:rect b="b" l="l" r="r" t="t"/>
+            <a:avLst/>
+            <a:gdLst/>
+            <a:ahLst/>
+            <a:cxnLst/>
+            <a:rect l="l" t="t" r="r" b="b"/>
             <a:pathLst>
-              <a:path extrusionOk="0" h="120000" w="120000">
+              <a:path w="120000" h="120000" extrusionOk="0">
                 <a:moveTo>
                   <a:pt x="0" y="0"/>
                 </a:moveTo>
@@ -775,9 +796,11 @@
       <p:sp>
         <p:nvSpPr>
           <p:cNvPr id="52" name="Google Shape;52;p:notes"/>
-          <p:cNvSpPr txBox="1"/>
+          <p:cNvSpPr txBox="1">
+            <a:spLocks noGrp="1"/>
+          </p:cNvSpPr>
           <p:nvPr>
-            <p:ph idx="1" type="body"/>
+            <p:ph type="body" idx="1"/>
           </p:nvPr>
         </p:nvSpPr>
         <p:spPr>
@@ -790,12 +813,12 @@
           </a:prstGeom>
         </p:spPr>
         <p:txBody>
-          <a:bodyPr anchorCtr="0" anchor="t" bIns="91425" lIns="91425" spcFirstLastPara="1" rIns="91425" wrap="square" tIns="91425">
+          <a:bodyPr spcFirstLastPara="1" wrap="square" lIns="91425" tIns="91425" rIns="91425" bIns="91425" anchor="t" anchorCtr="0">
             <a:noAutofit/>
           </a:bodyPr>
           <a:lstStyle/>
           <a:p>
-            <a:pPr indent="0" lvl="0" marL="0" rtl="0" algn="l">
+            <a:pPr marL="0" lvl="0" indent="0" algn="l" rtl="0">
               <a:spcBef>
                 <a:spcPts val="0"/>
               </a:spcBef>
@@ -804,9 +827,6 @@
               </a:spcAft>
               <a:buNone/>
             </a:pPr>
-            <a:r>
-              <a:t/>
-            </a:r>
             <a:endParaRPr/>
           </a:p>
         </p:txBody>
@@ -820,11 +840,11 @@
 </file>
 
 <file path=ppt/notesSlides/notesSlide10.xml><?xml version="1.0" encoding="utf-8"?>
-<p:notes xmlns:a="http://schemas.openxmlformats.org/drawingml/2006/main" xmlns:r="http://schemas.openxmlformats.org/officeDocument/2006/relationships" xmlns:mc="http://schemas.openxmlformats.org/markup-compatibility/2006" xmlns:mv="urn:schemas-microsoft-com:mac:vml" xmlns:p="http://schemas.openxmlformats.org/presentationml/2006/main" xmlns:c="http://schemas.openxmlformats.org/drawingml/2006/chart" xmlns:dgm="http://schemas.openxmlformats.org/drawingml/2006/diagram" xmlns:o="urn:schemas-microsoft-com:office:office" xmlns:v="urn:schemas-microsoft-com:vml" xmlns:pvml="urn:schemas-microsoft-com:office:powerpoint" xmlns:com="http://schemas.openxmlformats.org/drawingml/2006/compatibility" xmlns:p14="http://schemas.microsoft.com/office/powerpoint/2010/main" xmlns:p15="http://schemas.microsoft.com/office/powerpoint/2012/main" xmlns:ahyp="http://schemas.microsoft.com/office/drawing/2018/hyperlinkcolor" showMasterPhAnim="0" showMasterSp="0">
+<p:notes xmlns:a="http://schemas.openxmlformats.org/drawingml/2006/main" xmlns:r="http://schemas.openxmlformats.org/officeDocument/2006/relationships" xmlns:p="http://schemas.openxmlformats.org/presentationml/2006/main" showMasterSp="0" showMasterPhAnim="0">
   <p:cSld>
     <p:spTree>
       <p:nvGrpSpPr>
-        <p:cNvPr id="106" name="Shape 106"/>
+        <p:cNvPr id="1" name="Shape 106"/>
         <p:cNvGrpSpPr/>
         <p:nvPr/>
       </p:nvGrpSpPr>
@@ -839,20 +859,26 @@
       <p:sp>
         <p:nvSpPr>
           <p:cNvPr id="107" name="Google Shape;107;g3f7115e0595_0_134:notes"/>
-          <p:cNvSpPr/>
+          <p:cNvSpPr>
+            <a:spLocks noGrp="1" noRot="1" noChangeAspect="1"/>
+          </p:cNvSpPr>
           <p:nvPr>
-            <p:ph idx="2" type="sldImg"/>
+            <p:ph type="sldImg" idx="2"/>
           </p:nvPr>
         </p:nvSpPr>
         <p:spPr>
           <a:xfrm>
-            <a:off x="381300" y="685800"/>
+            <a:off x="381000" y="685800"/>
             <a:ext cx="6096000" cy="3429000"/>
           </a:xfrm>
           <a:custGeom>
-            <a:rect b="b" l="l" r="r" t="t"/>
+            <a:avLst/>
+            <a:gdLst/>
+            <a:ahLst/>
+            <a:cxnLst/>
+            <a:rect l="l" t="t" r="r" b="b"/>
             <a:pathLst>
-              <a:path extrusionOk="0" h="120000" w="120000">
+              <a:path w="120000" h="120000" extrusionOk="0">
                 <a:moveTo>
                   <a:pt x="0" y="0"/>
                 </a:moveTo>
@@ -874,9 +900,11 @@
       <p:sp>
         <p:nvSpPr>
           <p:cNvPr id="108" name="Google Shape;108;g3f7115e0595_0_134:notes"/>
-          <p:cNvSpPr txBox="1"/>
+          <p:cNvSpPr txBox="1">
+            <a:spLocks noGrp="1"/>
+          </p:cNvSpPr>
           <p:nvPr>
-            <p:ph idx="1" type="body"/>
+            <p:ph type="body" idx="1"/>
           </p:nvPr>
         </p:nvSpPr>
         <p:spPr>
@@ -889,12 +917,12 @@
           </a:prstGeom>
         </p:spPr>
         <p:txBody>
-          <a:bodyPr anchorCtr="0" anchor="t" bIns="91425" lIns="91425" spcFirstLastPara="1" rIns="91425" wrap="square" tIns="91425">
+          <a:bodyPr spcFirstLastPara="1" wrap="square" lIns="91425" tIns="91425" rIns="91425" bIns="91425" anchor="t" anchorCtr="0">
             <a:noAutofit/>
           </a:bodyPr>
           <a:lstStyle/>
           <a:p>
-            <a:pPr indent="0" lvl="0" marL="0" rtl="0" algn="l">
+            <a:pPr marL="0" lvl="0" indent="0" algn="l" rtl="0">
               <a:spcBef>
                 <a:spcPts val="0"/>
               </a:spcBef>
@@ -903,9 +931,6 @@
               </a:spcAft>
               <a:buNone/>
             </a:pPr>
-            <a:r>
-              <a:t/>
-            </a:r>
             <a:endParaRPr/>
           </a:p>
         </p:txBody>
@@ -919,11 +944,11 @@
 </file>
 
 <file path=ppt/notesSlides/notesSlide11.xml><?xml version="1.0" encoding="utf-8"?>
-<p:notes xmlns:a="http://schemas.openxmlformats.org/drawingml/2006/main" xmlns:r="http://schemas.openxmlformats.org/officeDocument/2006/relationships" xmlns:mc="http://schemas.openxmlformats.org/markup-compatibility/2006" xmlns:mv="urn:schemas-microsoft-com:mac:vml" xmlns:p="http://schemas.openxmlformats.org/presentationml/2006/main" xmlns:c="http://schemas.openxmlformats.org/drawingml/2006/chart" xmlns:dgm="http://schemas.openxmlformats.org/drawingml/2006/diagram" xmlns:o="urn:schemas-microsoft-com:office:office" xmlns:v="urn:schemas-microsoft-com:vml" xmlns:pvml="urn:schemas-microsoft-com:office:powerpoint" xmlns:com="http://schemas.openxmlformats.org/drawingml/2006/compatibility" xmlns:p14="http://schemas.microsoft.com/office/powerpoint/2010/main" xmlns:p15="http://schemas.microsoft.com/office/powerpoint/2012/main" xmlns:ahyp="http://schemas.microsoft.com/office/drawing/2018/hyperlinkcolor" showMasterPhAnim="0" showMasterSp="0">
+<p:notes xmlns:a="http://schemas.openxmlformats.org/drawingml/2006/main" xmlns:r="http://schemas.openxmlformats.org/officeDocument/2006/relationships" xmlns:p="http://schemas.openxmlformats.org/presentationml/2006/main" showMasterSp="0" showMasterPhAnim="0">
   <p:cSld>
     <p:spTree>
       <p:nvGrpSpPr>
-        <p:cNvPr id="110" name="Shape 110"/>
+        <p:cNvPr id="1" name="Shape 110"/>
         <p:cNvGrpSpPr/>
         <p:nvPr/>
       </p:nvGrpSpPr>
@@ -938,9 +963,11 @@
       <p:sp>
         <p:nvSpPr>
           <p:cNvPr id="111" name="Google Shape;111;g3f7115e0595_0_137:notes"/>
-          <p:cNvSpPr/>
+          <p:cNvSpPr>
+            <a:spLocks noGrp="1" noRot="1" noChangeAspect="1"/>
+          </p:cNvSpPr>
           <p:nvPr>
-            <p:ph idx="2" type="sldImg"/>
+            <p:ph type="sldImg" idx="2"/>
           </p:nvPr>
         </p:nvSpPr>
         <p:spPr>
@@ -949,9 +976,13 @@
             <a:ext cx="6096000" cy="3429000"/>
           </a:xfrm>
           <a:custGeom>
-            <a:rect b="b" l="l" r="r" t="t"/>
+            <a:avLst/>
+            <a:gdLst/>
+            <a:ahLst/>
+            <a:cxnLst/>
+            <a:rect l="l" t="t" r="r" b="b"/>
             <a:pathLst>
-              <a:path extrusionOk="0" h="120000" w="120000">
+              <a:path w="120000" h="120000" extrusionOk="0">
                 <a:moveTo>
                   <a:pt x="0" y="0"/>
                 </a:moveTo>
@@ -973,9 +1004,11 @@
       <p:sp>
         <p:nvSpPr>
           <p:cNvPr id="112" name="Google Shape;112;g3f7115e0595_0_137:notes"/>
-          <p:cNvSpPr txBox="1"/>
+          <p:cNvSpPr txBox="1">
+            <a:spLocks noGrp="1"/>
+          </p:cNvSpPr>
           <p:nvPr>
-            <p:ph idx="1" type="body"/>
+            <p:ph type="body" idx="1"/>
           </p:nvPr>
         </p:nvSpPr>
         <p:spPr>
@@ -988,12 +1021,12 @@
           </a:prstGeom>
         </p:spPr>
         <p:txBody>
-          <a:bodyPr anchorCtr="0" anchor="t" bIns="91425" lIns="91425" spcFirstLastPara="1" rIns="91425" wrap="square" tIns="91425">
+          <a:bodyPr spcFirstLastPara="1" wrap="square" lIns="91425" tIns="91425" rIns="91425" bIns="91425" anchor="t" anchorCtr="0">
             <a:noAutofit/>
           </a:bodyPr>
           <a:lstStyle/>
           <a:p>
-            <a:pPr indent="0" lvl="0" marL="0" rtl="0" algn="l">
+            <a:pPr marL="0" lvl="0" indent="0" algn="l" rtl="0">
               <a:spcBef>
                 <a:spcPts val="0"/>
               </a:spcBef>
@@ -1002,9 +1035,6 @@
               </a:spcAft>
               <a:buNone/>
             </a:pPr>
-            <a:r>
-              <a:t/>
-            </a:r>
             <a:endParaRPr/>
           </a:p>
         </p:txBody>
@@ -1018,11 +1048,11 @@
 </file>
 
 <file path=ppt/notesSlides/notesSlide12.xml><?xml version="1.0" encoding="utf-8"?>
-<p:notes xmlns:a="http://schemas.openxmlformats.org/drawingml/2006/main" xmlns:r="http://schemas.openxmlformats.org/officeDocument/2006/relationships" xmlns:mc="http://schemas.openxmlformats.org/markup-compatibility/2006" xmlns:mv="urn:schemas-microsoft-com:mac:vml" xmlns:p="http://schemas.openxmlformats.org/presentationml/2006/main" xmlns:c="http://schemas.openxmlformats.org/drawingml/2006/chart" xmlns:dgm="http://schemas.openxmlformats.org/drawingml/2006/diagram" xmlns:o="urn:schemas-microsoft-com:office:office" xmlns:v="urn:schemas-microsoft-com:vml" xmlns:pvml="urn:schemas-microsoft-com:office:powerpoint" xmlns:com="http://schemas.openxmlformats.org/drawingml/2006/compatibility" xmlns:p14="http://schemas.microsoft.com/office/powerpoint/2010/main" xmlns:p15="http://schemas.microsoft.com/office/powerpoint/2012/main" xmlns:ahyp="http://schemas.microsoft.com/office/drawing/2018/hyperlinkcolor" showMasterPhAnim="0" showMasterSp="0">
+<p:notes xmlns:a="http://schemas.openxmlformats.org/drawingml/2006/main" xmlns:r="http://schemas.openxmlformats.org/officeDocument/2006/relationships" xmlns:p="http://schemas.openxmlformats.org/presentationml/2006/main" showMasterSp="0" showMasterPhAnim="0">
   <p:cSld>
     <p:spTree>
       <p:nvGrpSpPr>
-        <p:cNvPr id="114" name="Shape 114"/>
+        <p:cNvPr id="1" name="Shape 114"/>
         <p:cNvGrpSpPr/>
         <p:nvPr/>
       </p:nvGrpSpPr>
@@ -1037,9 +1067,11 @@
       <p:sp>
         <p:nvSpPr>
           <p:cNvPr id="115" name="Google Shape;115;g3f7115e0595_0_140:notes"/>
-          <p:cNvSpPr/>
+          <p:cNvSpPr>
+            <a:spLocks noGrp="1" noRot="1" noChangeAspect="1"/>
+          </p:cNvSpPr>
           <p:nvPr>
-            <p:ph idx="2" type="sldImg"/>
+            <p:ph type="sldImg" idx="2"/>
           </p:nvPr>
         </p:nvSpPr>
         <p:spPr>
@@ -1048,9 +1080,13 @@
             <a:ext cx="6096000" cy="3429000"/>
           </a:xfrm>
           <a:custGeom>
-            <a:rect b="b" l="l" r="r" t="t"/>
+            <a:avLst/>
+            <a:gdLst/>
+            <a:ahLst/>
+            <a:cxnLst/>
+            <a:rect l="l" t="t" r="r" b="b"/>
             <a:pathLst>
-              <a:path extrusionOk="0" h="120000" w="120000">
+              <a:path w="120000" h="120000" extrusionOk="0">
                 <a:moveTo>
                   <a:pt x="0" y="0"/>
                 </a:moveTo>
@@ -1072,9 +1108,11 @@
       <p:sp>
         <p:nvSpPr>
           <p:cNvPr id="116" name="Google Shape;116;g3f7115e0595_0_140:notes"/>
-          <p:cNvSpPr txBox="1"/>
+          <p:cNvSpPr txBox="1">
+            <a:spLocks noGrp="1"/>
+          </p:cNvSpPr>
           <p:nvPr>
-            <p:ph idx="1" type="body"/>
+            <p:ph type="body" idx="1"/>
           </p:nvPr>
         </p:nvSpPr>
         <p:spPr>
@@ -1087,12 +1125,12 @@
           </a:prstGeom>
         </p:spPr>
         <p:txBody>
-          <a:bodyPr anchorCtr="0" anchor="t" bIns="91425" lIns="91425" spcFirstLastPara="1" rIns="91425" wrap="square" tIns="91425">
+          <a:bodyPr spcFirstLastPara="1" wrap="square" lIns="91425" tIns="91425" rIns="91425" bIns="91425" anchor="t" anchorCtr="0">
             <a:noAutofit/>
           </a:bodyPr>
           <a:lstStyle/>
           <a:p>
-            <a:pPr indent="0" lvl="0" marL="0" rtl="0" algn="l">
+            <a:pPr marL="0" lvl="0" indent="0" algn="l" rtl="0">
               <a:spcBef>
                 <a:spcPts val="0"/>
               </a:spcBef>
@@ -1101,9 +1139,6 @@
               </a:spcAft>
               <a:buNone/>
             </a:pPr>
-            <a:r>
-              <a:t/>
-            </a:r>
             <a:endParaRPr/>
           </a:p>
         </p:txBody>
@@ -1117,11 +1152,11 @@
 </file>
 
 <file path=ppt/notesSlides/notesSlide13.xml><?xml version="1.0" encoding="utf-8"?>
-<p:notes xmlns:a="http://schemas.openxmlformats.org/drawingml/2006/main" xmlns:r="http://schemas.openxmlformats.org/officeDocument/2006/relationships" xmlns:mc="http://schemas.openxmlformats.org/markup-compatibility/2006" xmlns:mv="urn:schemas-microsoft-com:mac:vml" xmlns:p="http://schemas.openxmlformats.org/presentationml/2006/main" xmlns:c="http://schemas.openxmlformats.org/drawingml/2006/chart" xmlns:dgm="http://schemas.openxmlformats.org/drawingml/2006/diagram" xmlns:o="urn:schemas-microsoft-com:office:office" xmlns:v="urn:schemas-microsoft-com:vml" xmlns:pvml="urn:schemas-microsoft-com:office:powerpoint" xmlns:com="http://schemas.openxmlformats.org/drawingml/2006/compatibility" xmlns:p14="http://schemas.microsoft.com/office/powerpoint/2010/main" xmlns:p15="http://schemas.microsoft.com/office/powerpoint/2012/main" xmlns:ahyp="http://schemas.microsoft.com/office/drawing/2018/hyperlinkcolor" showMasterPhAnim="0" showMasterSp="0">
+<p:notes xmlns:a="http://schemas.openxmlformats.org/drawingml/2006/main" xmlns:r="http://schemas.openxmlformats.org/officeDocument/2006/relationships" xmlns:p="http://schemas.openxmlformats.org/presentationml/2006/main" showMasterSp="0" showMasterPhAnim="0">
   <p:cSld>
     <p:spTree>
       <p:nvGrpSpPr>
-        <p:cNvPr id="125" name="Shape 125"/>
+        <p:cNvPr id="1" name="Shape 125"/>
         <p:cNvGrpSpPr/>
         <p:nvPr/>
       </p:nvGrpSpPr>
@@ -1136,9 +1171,11 @@
       <p:sp>
         <p:nvSpPr>
           <p:cNvPr id="126" name="Google Shape;126;g3f7115e0595_0_150:notes"/>
-          <p:cNvSpPr/>
+          <p:cNvSpPr>
+            <a:spLocks noGrp="1" noRot="1" noChangeAspect="1"/>
+          </p:cNvSpPr>
           <p:nvPr>
-            <p:ph idx="2" type="sldImg"/>
+            <p:ph type="sldImg" idx="2"/>
           </p:nvPr>
         </p:nvSpPr>
         <p:spPr>
@@ -1147,9 +1184,13 @@
             <a:ext cx="6096000" cy="3429000"/>
           </a:xfrm>
           <a:custGeom>
-            <a:rect b="b" l="l" r="r" t="t"/>
+            <a:avLst/>
+            <a:gdLst/>
+            <a:ahLst/>
+            <a:cxnLst/>
+            <a:rect l="l" t="t" r="r" b="b"/>
             <a:pathLst>
-              <a:path extrusionOk="0" h="120000" w="120000">
+              <a:path w="120000" h="120000" extrusionOk="0">
                 <a:moveTo>
                   <a:pt x="0" y="0"/>
                 </a:moveTo>
@@ -1171,9 +1212,11 @@
       <p:sp>
         <p:nvSpPr>
           <p:cNvPr id="127" name="Google Shape;127;g3f7115e0595_0_150:notes"/>
-          <p:cNvSpPr txBox="1"/>
+          <p:cNvSpPr txBox="1">
+            <a:spLocks noGrp="1"/>
+          </p:cNvSpPr>
           <p:nvPr>
-            <p:ph idx="1" type="body"/>
+            <p:ph type="body" idx="1"/>
           </p:nvPr>
         </p:nvSpPr>
         <p:spPr>
@@ -1186,12 +1229,12 @@
           </a:prstGeom>
         </p:spPr>
         <p:txBody>
-          <a:bodyPr anchorCtr="0" anchor="t" bIns="91425" lIns="91425" spcFirstLastPara="1" rIns="91425" wrap="square" tIns="91425">
+          <a:bodyPr spcFirstLastPara="1" wrap="square" lIns="91425" tIns="91425" rIns="91425" bIns="91425" anchor="t" anchorCtr="0">
             <a:noAutofit/>
           </a:bodyPr>
           <a:lstStyle/>
           <a:p>
-            <a:pPr indent="0" lvl="0" marL="0" rtl="0" algn="l">
+            <a:pPr marL="0" lvl="0" indent="0" algn="l" rtl="0">
               <a:spcBef>
                 <a:spcPts val="0"/>
               </a:spcBef>
@@ -1200,9 +1243,6 @@
               </a:spcAft>
               <a:buNone/>
             </a:pPr>
-            <a:r>
-              <a:t/>
-            </a:r>
             <a:endParaRPr/>
           </a:p>
         </p:txBody>
@@ -1216,11 +1256,11 @@
 </file>
 
 <file path=ppt/notesSlides/notesSlide14.xml><?xml version="1.0" encoding="utf-8"?>
-<p:notes xmlns:a="http://schemas.openxmlformats.org/drawingml/2006/main" xmlns:r="http://schemas.openxmlformats.org/officeDocument/2006/relationships" xmlns:mc="http://schemas.openxmlformats.org/markup-compatibility/2006" xmlns:mv="urn:schemas-microsoft-com:mac:vml" xmlns:p="http://schemas.openxmlformats.org/presentationml/2006/main" xmlns:c="http://schemas.openxmlformats.org/drawingml/2006/chart" xmlns:dgm="http://schemas.openxmlformats.org/drawingml/2006/diagram" xmlns:o="urn:schemas-microsoft-com:office:office" xmlns:v="urn:schemas-microsoft-com:vml" xmlns:pvml="urn:schemas-microsoft-com:office:powerpoint" xmlns:com="http://schemas.openxmlformats.org/drawingml/2006/compatibility" xmlns:p14="http://schemas.microsoft.com/office/powerpoint/2010/main" xmlns:p15="http://schemas.microsoft.com/office/powerpoint/2012/main" xmlns:ahyp="http://schemas.microsoft.com/office/drawing/2018/hyperlinkcolor" showMasterPhAnim="0" showMasterSp="0">
+<p:notes xmlns:a="http://schemas.openxmlformats.org/drawingml/2006/main" xmlns:r="http://schemas.openxmlformats.org/officeDocument/2006/relationships" xmlns:p="http://schemas.openxmlformats.org/presentationml/2006/main" showMasterSp="0" showMasterPhAnim="0">
   <p:cSld>
     <p:spTree>
       <p:nvGrpSpPr>
-        <p:cNvPr id="132" name="Shape 132"/>
+        <p:cNvPr id="1" name="Shape 132"/>
         <p:cNvGrpSpPr/>
         <p:nvPr/>
       </p:nvGrpSpPr>
@@ -1235,20 +1275,26 @@
       <p:sp>
         <p:nvSpPr>
           <p:cNvPr id="133" name="Google Shape;133;g3f7115e0595_0_201:notes"/>
-          <p:cNvSpPr/>
+          <p:cNvSpPr>
+            <a:spLocks noGrp="1" noRot="1" noChangeAspect="1"/>
+          </p:cNvSpPr>
           <p:nvPr>
-            <p:ph idx="2" type="sldImg"/>
+            <p:ph type="sldImg" idx="2"/>
           </p:nvPr>
         </p:nvSpPr>
         <p:spPr>
           <a:xfrm>
-            <a:off x="381300" y="685800"/>
+            <a:off x="381000" y="685800"/>
             <a:ext cx="6096000" cy="3429000"/>
           </a:xfrm>
           <a:custGeom>
-            <a:rect b="b" l="l" r="r" t="t"/>
+            <a:avLst/>
+            <a:gdLst/>
+            <a:ahLst/>
+            <a:cxnLst/>
+            <a:rect l="l" t="t" r="r" b="b"/>
             <a:pathLst>
-              <a:path extrusionOk="0" h="120000" w="120000">
+              <a:path w="120000" h="120000" extrusionOk="0">
                 <a:moveTo>
                   <a:pt x="0" y="0"/>
                 </a:moveTo>
@@ -1270,9 +1316,11 @@
       <p:sp>
         <p:nvSpPr>
           <p:cNvPr id="134" name="Google Shape;134;g3f7115e0595_0_201:notes"/>
-          <p:cNvSpPr txBox="1"/>
+          <p:cNvSpPr txBox="1">
+            <a:spLocks noGrp="1"/>
+          </p:cNvSpPr>
           <p:nvPr>
-            <p:ph idx="1" type="body"/>
+            <p:ph type="body" idx="1"/>
           </p:nvPr>
         </p:nvSpPr>
         <p:spPr>
@@ -1285,12 +1333,12 @@
           </a:prstGeom>
         </p:spPr>
         <p:txBody>
-          <a:bodyPr anchorCtr="0" anchor="t" bIns="91425" lIns="91425" spcFirstLastPara="1" rIns="91425" wrap="square" tIns="91425">
+          <a:bodyPr spcFirstLastPara="1" wrap="square" lIns="91425" tIns="91425" rIns="91425" bIns="91425" anchor="t" anchorCtr="0">
             <a:noAutofit/>
           </a:bodyPr>
           <a:lstStyle/>
           <a:p>
-            <a:pPr indent="0" lvl="0" marL="0" rtl="0" algn="l">
+            <a:pPr marL="0" lvl="0" indent="0" algn="l" rtl="0">
               <a:spcBef>
                 <a:spcPts val="0"/>
               </a:spcBef>
@@ -1299,9 +1347,6 @@
               </a:spcAft>
               <a:buNone/>
             </a:pPr>
-            <a:r>
-              <a:t/>
-            </a:r>
             <a:endParaRPr/>
           </a:p>
         </p:txBody>
@@ -1315,11 +1360,11 @@
 </file>
 
 <file path=ppt/notesSlides/notesSlide15.xml><?xml version="1.0" encoding="utf-8"?>
-<p:notes xmlns:a="http://schemas.openxmlformats.org/drawingml/2006/main" xmlns:r="http://schemas.openxmlformats.org/officeDocument/2006/relationships" xmlns:mc="http://schemas.openxmlformats.org/markup-compatibility/2006" xmlns:mv="urn:schemas-microsoft-com:mac:vml" xmlns:p="http://schemas.openxmlformats.org/presentationml/2006/main" xmlns:c="http://schemas.openxmlformats.org/drawingml/2006/chart" xmlns:dgm="http://schemas.openxmlformats.org/drawingml/2006/diagram" xmlns:o="urn:schemas-microsoft-com:office:office" xmlns:v="urn:schemas-microsoft-com:vml" xmlns:pvml="urn:schemas-microsoft-com:office:powerpoint" xmlns:com="http://schemas.openxmlformats.org/drawingml/2006/compatibility" xmlns:p14="http://schemas.microsoft.com/office/powerpoint/2010/main" xmlns:p15="http://schemas.microsoft.com/office/powerpoint/2012/main" xmlns:ahyp="http://schemas.microsoft.com/office/drawing/2018/hyperlinkcolor" showMasterPhAnim="0" showMasterSp="0">
+<p:notes xmlns:a="http://schemas.openxmlformats.org/drawingml/2006/main" xmlns:r="http://schemas.openxmlformats.org/officeDocument/2006/relationships" xmlns:p="http://schemas.openxmlformats.org/presentationml/2006/main" showMasterSp="0" showMasterPhAnim="0">
   <p:cSld>
     <p:spTree>
       <p:nvGrpSpPr>
-        <p:cNvPr id="136" name="Shape 136"/>
+        <p:cNvPr id="1" name="Shape 136"/>
         <p:cNvGrpSpPr/>
         <p:nvPr/>
       </p:nvGrpSpPr>
@@ -1334,9 +1379,11 @@
       <p:sp>
         <p:nvSpPr>
           <p:cNvPr id="137" name="Google Shape;137;g3f7115e0595_0_204:notes"/>
-          <p:cNvSpPr/>
+          <p:cNvSpPr>
+            <a:spLocks noGrp="1" noRot="1" noChangeAspect="1"/>
+          </p:cNvSpPr>
           <p:nvPr>
-            <p:ph idx="2" type="sldImg"/>
+            <p:ph type="sldImg" idx="2"/>
           </p:nvPr>
         </p:nvSpPr>
         <p:spPr>
@@ -1345,9 +1392,13 @@
             <a:ext cx="6096000" cy="3429000"/>
           </a:xfrm>
           <a:custGeom>
-            <a:rect b="b" l="l" r="r" t="t"/>
+            <a:avLst/>
+            <a:gdLst/>
+            <a:ahLst/>
+            <a:cxnLst/>
+            <a:rect l="l" t="t" r="r" b="b"/>
             <a:pathLst>
-              <a:path extrusionOk="0" h="120000" w="120000">
+              <a:path w="120000" h="120000" extrusionOk="0">
                 <a:moveTo>
                   <a:pt x="0" y="0"/>
                 </a:moveTo>
@@ -1369,9 +1420,11 @@
       <p:sp>
         <p:nvSpPr>
           <p:cNvPr id="138" name="Google Shape;138;g3f7115e0595_0_204:notes"/>
-          <p:cNvSpPr txBox="1"/>
+          <p:cNvSpPr txBox="1">
+            <a:spLocks noGrp="1"/>
+          </p:cNvSpPr>
           <p:nvPr>
-            <p:ph idx="1" type="body"/>
+            <p:ph type="body" idx="1"/>
           </p:nvPr>
         </p:nvSpPr>
         <p:spPr>
@@ -1384,12 +1437,12 @@
           </a:prstGeom>
         </p:spPr>
         <p:txBody>
-          <a:bodyPr anchorCtr="0" anchor="t" bIns="91425" lIns="91425" spcFirstLastPara="1" rIns="91425" wrap="square" tIns="91425">
+          <a:bodyPr spcFirstLastPara="1" wrap="square" lIns="91425" tIns="91425" rIns="91425" bIns="91425" anchor="t" anchorCtr="0">
             <a:noAutofit/>
           </a:bodyPr>
           <a:lstStyle/>
           <a:p>
-            <a:pPr indent="0" lvl="0" marL="0" rtl="0" algn="l">
+            <a:pPr marL="0" lvl="0" indent="0" algn="l" rtl="0">
               <a:spcBef>
                 <a:spcPts val="0"/>
               </a:spcBef>
@@ -1398,9 +1451,6 @@
               </a:spcAft>
               <a:buNone/>
             </a:pPr>
-            <a:r>
-              <a:t/>
-            </a:r>
             <a:endParaRPr/>
           </a:p>
         </p:txBody>
@@ -1414,11 +1464,11 @@
 </file>
 
 <file path=ppt/notesSlides/notesSlide16.xml><?xml version="1.0" encoding="utf-8"?>
-<p:notes xmlns:a="http://schemas.openxmlformats.org/drawingml/2006/main" xmlns:r="http://schemas.openxmlformats.org/officeDocument/2006/relationships" xmlns:mc="http://schemas.openxmlformats.org/markup-compatibility/2006" xmlns:mv="urn:schemas-microsoft-com:mac:vml" xmlns:p="http://schemas.openxmlformats.org/presentationml/2006/main" xmlns:c="http://schemas.openxmlformats.org/drawingml/2006/chart" xmlns:dgm="http://schemas.openxmlformats.org/drawingml/2006/diagram" xmlns:o="urn:schemas-microsoft-com:office:office" xmlns:v="urn:schemas-microsoft-com:vml" xmlns:pvml="urn:schemas-microsoft-com:office:powerpoint" xmlns:com="http://schemas.openxmlformats.org/drawingml/2006/compatibility" xmlns:p14="http://schemas.microsoft.com/office/powerpoint/2010/main" xmlns:p15="http://schemas.microsoft.com/office/powerpoint/2012/main" xmlns:ahyp="http://schemas.microsoft.com/office/drawing/2018/hyperlinkcolor" showMasterPhAnim="0" showMasterSp="0">
+<p:notes xmlns:a="http://schemas.openxmlformats.org/drawingml/2006/main" xmlns:r="http://schemas.openxmlformats.org/officeDocument/2006/relationships" xmlns:p="http://schemas.openxmlformats.org/presentationml/2006/main" showMasterSp="0" showMasterPhAnim="0">
   <p:cSld>
     <p:spTree>
       <p:nvGrpSpPr>
-        <p:cNvPr id="140" name="Shape 140"/>
+        <p:cNvPr id="1" name="Shape 140"/>
         <p:cNvGrpSpPr/>
         <p:nvPr/>
       </p:nvGrpSpPr>
@@ -1433,9 +1483,11 @@
       <p:sp>
         <p:nvSpPr>
           <p:cNvPr id="141" name="Google Shape;141;g3f7115e0595_0_207:notes"/>
-          <p:cNvSpPr/>
+          <p:cNvSpPr>
+            <a:spLocks noGrp="1" noRot="1" noChangeAspect="1"/>
+          </p:cNvSpPr>
           <p:nvPr>
-            <p:ph idx="2" type="sldImg"/>
+            <p:ph type="sldImg" idx="2"/>
           </p:nvPr>
         </p:nvSpPr>
         <p:spPr>
@@ -1444,9 +1496,13 @@
             <a:ext cx="6096000" cy="3429000"/>
           </a:xfrm>
           <a:custGeom>
-            <a:rect b="b" l="l" r="r" t="t"/>
+            <a:avLst/>
+            <a:gdLst/>
+            <a:ahLst/>
+            <a:cxnLst/>
+            <a:rect l="l" t="t" r="r" b="b"/>
             <a:pathLst>
-              <a:path extrusionOk="0" h="120000" w="120000">
+              <a:path w="120000" h="120000" extrusionOk="0">
                 <a:moveTo>
                   <a:pt x="0" y="0"/>
                 </a:moveTo>
@@ -1468,9 +1524,11 @@
       <p:sp>
         <p:nvSpPr>
           <p:cNvPr id="142" name="Google Shape;142;g3f7115e0595_0_207:notes"/>
-          <p:cNvSpPr txBox="1"/>
+          <p:cNvSpPr txBox="1">
+            <a:spLocks noGrp="1"/>
+          </p:cNvSpPr>
           <p:nvPr>
-            <p:ph idx="1" type="body"/>
+            <p:ph type="body" idx="1"/>
           </p:nvPr>
         </p:nvSpPr>
         <p:spPr>
@@ -1483,12 +1541,12 @@
           </a:prstGeom>
         </p:spPr>
         <p:txBody>
-          <a:bodyPr anchorCtr="0" anchor="t" bIns="91425" lIns="91425" spcFirstLastPara="1" rIns="91425" wrap="square" tIns="91425">
+          <a:bodyPr spcFirstLastPara="1" wrap="square" lIns="91425" tIns="91425" rIns="91425" bIns="91425" anchor="t" anchorCtr="0">
             <a:noAutofit/>
           </a:bodyPr>
           <a:lstStyle/>
           <a:p>
-            <a:pPr indent="0" lvl="0" marL="0" rtl="0" algn="l">
+            <a:pPr marL="0" lvl="0" indent="0" algn="l" rtl="0">
               <a:spcBef>
                 <a:spcPts val="0"/>
               </a:spcBef>
@@ -1497,9 +1555,6 @@
               </a:spcAft>
               <a:buNone/>
             </a:pPr>
-            <a:r>
-              <a:t/>
-            </a:r>
             <a:endParaRPr/>
           </a:p>
         </p:txBody>
@@ -1513,11 +1568,11 @@
 </file>
 
 <file path=ppt/notesSlides/notesSlide17.xml><?xml version="1.0" encoding="utf-8"?>
-<p:notes xmlns:a="http://schemas.openxmlformats.org/drawingml/2006/main" xmlns:r="http://schemas.openxmlformats.org/officeDocument/2006/relationships" xmlns:mc="http://schemas.openxmlformats.org/markup-compatibility/2006" xmlns:mv="urn:schemas-microsoft-com:mac:vml" xmlns:p="http://schemas.openxmlformats.org/presentationml/2006/main" xmlns:c="http://schemas.openxmlformats.org/drawingml/2006/chart" xmlns:dgm="http://schemas.openxmlformats.org/drawingml/2006/diagram" xmlns:o="urn:schemas-microsoft-com:office:office" xmlns:v="urn:schemas-microsoft-com:vml" xmlns:pvml="urn:schemas-microsoft-com:office:powerpoint" xmlns:com="http://schemas.openxmlformats.org/drawingml/2006/compatibility" xmlns:p14="http://schemas.microsoft.com/office/powerpoint/2010/main" xmlns:p15="http://schemas.microsoft.com/office/powerpoint/2012/main" xmlns:ahyp="http://schemas.microsoft.com/office/drawing/2018/hyperlinkcolor" showMasterPhAnim="0" showMasterSp="0">
+<p:notes xmlns:a="http://schemas.openxmlformats.org/drawingml/2006/main" xmlns:r="http://schemas.openxmlformats.org/officeDocument/2006/relationships" xmlns:p="http://schemas.openxmlformats.org/presentationml/2006/main" showMasterSp="0" showMasterPhAnim="0">
   <p:cSld>
     <p:spTree>
       <p:nvGrpSpPr>
-        <p:cNvPr id="151" name="Shape 151"/>
+        <p:cNvPr id="1" name="Shape 151"/>
         <p:cNvGrpSpPr/>
         <p:nvPr/>
       </p:nvGrpSpPr>
@@ -1532,9 +1587,11 @@
       <p:sp>
         <p:nvSpPr>
           <p:cNvPr id="152" name="Google Shape;152;g3f7115e0595_0_217:notes"/>
-          <p:cNvSpPr/>
+          <p:cNvSpPr>
+            <a:spLocks noGrp="1" noRot="1" noChangeAspect="1"/>
+          </p:cNvSpPr>
           <p:nvPr>
-            <p:ph idx="2" type="sldImg"/>
+            <p:ph type="sldImg" idx="2"/>
           </p:nvPr>
         </p:nvSpPr>
         <p:spPr>
@@ -1543,9 +1600,13 @@
             <a:ext cx="6096000" cy="3429000"/>
           </a:xfrm>
           <a:custGeom>
-            <a:rect b="b" l="l" r="r" t="t"/>
+            <a:avLst/>
+            <a:gdLst/>
+            <a:ahLst/>
+            <a:cxnLst/>
+            <a:rect l="l" t="t" r="r" b="b"/>
             <a:pathLst>
-              <a:path extrusionOk="0" h="120000" w="120000">
+              <a:path w="120000" h="120000" extrusionOk="0">
                 <a:moveTo>
                   <a:pt x="0" y="0"/>
                 </a:moveTo>
@@ -1567,9 +1628,11 @@
       <p:sp>
         <p:nvSpPr>
           <p:cNvPr id="153" name="Google Shape;153;g3f7115e0595_0_217:notes"/>
-          <p:cNvSpPr txBox="1"/>
+          <p:cNvSpPr txBox="1">
+            <a:spLocks noGrp="1"/>
+          </p:cNvSpPr>
           <p:nvPr>
-            <p:ph idx="1" type="body"/>
+            <p:ph type="body" idx="1"/>
           </p:nvPr>
         </p:nvSpPr>
         <p:spPr>
@@ -1582,12 +1645,12 @@
           </a:prstGeom>
         </p:spPr>
         <p:txBody>
-          <a:bodyPr anchorCtr="0" anchor="t" bIns="91425" lIns="91425" spcFirstLastPara="1" rIns="91425" wrap="square" tIns="91425">
+          <a:bodyPr spcFirstLastPara="1" wrap="square" lIns="91425" tIns="91425" rIns="91425" bIns="91425" anchor="t" anchorCtr="0">
             <a:noAutofit/>
           </a:bodyPr>
           <a:lstStyle/>
           <a:p>
-            <a:pPr indent="0" lvl="0" marL="0" rtl="0" algn="l">
+            <a:pPr marL="0" lvl="0" indent="0" algn="l" rtl="0">
               <a:spcBef>
                 <a:spcPts val="0"/>
               </a:spcBef>
@@ -1596,9 +1659,6 @@
               </a:spcAft>
               <a:buNone/>
             </a:pPr>
-            <a:r>
-              <a:t/>
-            </a:r>
             <a:endParaRPr/>
           </a:p>
         </p:txBody>
@@ -1612,11 +1672,11 @@
 </file>
 
 <file path=ppt/notesSlides/notesSlide18.xml><?xml version="1.0" encoding="utf-8"?>
-<p:notes xmlns:a="http://schemas.openxmlformats.org/drawingml/2006/main" xmlns:r="http://schemas.openxmlformats.org/officeDocument/2006/relationships" xmlns:mc="http://schemas.openxmlformats.org/markup-compatibility/2006" xmlns:mv="urn:schemas-microsoft-com:mac:vml" xmlns:p="http://schemas.openxmlformats.org/presentationml/2006/main" xmlns:c="http://schemas.openxmlformats.org/drawingml/2006/chart" xmlns:dgm="http://schemas.openxmlformats.org/drawingml/2006/diagram" xmlns:o="urn:schemas-microsoft-com:office:office" xmlns:v="urn:schemas-microsoft-com:vml" xmlns:pvml="urn:schemas-microsoft-com:office:powerpoint" xmlns:com="http://schemas.openxmlformats.org/drawingml/2006/compatibility" xmlns:p14="http://schemas.microsoft.com/office/powerpoint/2010/main" xmlns:p15="http://schemas.microsoft.com/office/powerpoint/2012/main" xmlns:ahyp="http://schemas.microsoft.com/office/drawing/2018/hyperlinkcolor" showMasterPhAnim="0" showMasterSp="0">
+<p:notes xmlns:a="http://schemas.openxmlformats.org/drawingml/2006/main" xmlns:r="http://schemas.openxmlformats.org/officeDocument/2006/relationships" xmlns:p="http://schemas.openxmlformats.org/presentationml/2006/main" showMasterSp="0" showMasterPhAnim="0">
   <p:cSld>
     <p:spTree>
       <p:nvGrpSpPr>
-        <p:cNvPr id="158" name="Shape 158"/>
+        <p:cNvPr id="1" name="Shape 158"/>
         <p:cNvGrpSpPr/>
         <p:nvPr/>
       </p:nvGrpSpPr>
@@ -1631,20 +1691,26 @@
       <p:sp>
         <p:nvSpPr>
           <p:cNvPr id="159" name="Google Shape;159;g3f7115e0595_0_223:notes"/>
-          <p:cNvSpPr/>
+          <p:cNvSpPr>
+            <a:spLocks noGrp="1" noRot="1" noChangeAspect="1"/>
+          </p:cNvSpPr>
           <p:nvPr>
-            <p:ph idx="2" type="sldImg"/>
+            <p:ph type="sldImg" idx="2"/>
           </p:nvPr>
         </p:nvSpPr>
         <p:spPr>
           <a:xfrm>
-            <a:off x="381300" y="685800"/>
+            <a:off x="381000" y="685800"/>
             <a:ext cx="6096000" cy="3429000"/>
           </a:xfrm>
           <a:custGeom>
-            <a:rect b="b" l="l" r="r" t="t"/>
+            <a:avLst/>
+            <a:gdLst/>
+            <a:ahLst/>
+            <a:cxnLst/>
+            <a:rect l="l" t="t" r="r" b="b"/>
             <a:pathLst>
-              <a:path extrusionOk="0" h="120000" w="120000">
+              <a:path w="120000" h="120000" extrusionOk="0">
                 <a:moveTo>
                   <a:pt x="0" y="0"/>
                 </a:moveTo>
@@ -1666,9 +1732,11 @@
       <p:sp>
         <p:nvSpPr>
           <p:cNvPr id="160" name="Google Shape;160;g3f7115e0595_0_223:notes"/>
-          <p:cNvSpPr txBox="1"/>
+          <p:cNvSpPr txBox="1">
+            <a:spLocks noGrp="1"/>
+          </p:cNvSpPr>
           <p:nvPr>
-            <p:ph idx="1" type="body"/>
+            <p:ph type="body" idx="1"/>
           </p:nvPr>
         </p:nvSpPr>
         <p:spPr>
@@ -1681,12 +1749,12 @@
           </a:prstGeom>
         </p:spPr>
         <p:txBody>
-          <a:bodyPr anchorCtr="0" anchor="t" bIns="91425" lIns="91425" spcFirstLastPara="1" rIns="91425" wrap="square" tIns="91425">
+          <a:bodyPr spcFirstLastPara="1" wrap="square" lIns="91425" tIns="91425" rIns="91425" bIns="91425" anchor="t" anchorCtr="0">
             <a:noAutofit/>
           </a:bodyPr>
           <a:lstStyle/>
           <a:p>
-            <a:pPr indent="0" lvl="0" marL="0" rtl="0" algn="l">
+            <a:pPr marL="0" lvl="0" indent="0" algn="l" rtl="0">
               <a:spcBef>
                 <a:spcPts val="0"/>
               </a:spcBef>
@@ -1695,9 +1763,6 @@
               </a:spcAft>
               <a:buNone/>
             </a:pPr>
-            <a:r>
-              <a:t/>
-            </a:r>
             <a:endParaRPr/>
           </a:p>
         </p:txBody>
@@ -1711,11 +1776,11 @@
 </file>
 
 <file path=ppt/notesSlides/notesSlide19.xml><?xml version="1.0" encoding="utf-8"?>
-<p:notes xmlns:a="http://schemas.openxmlformats.org/drawingml/2006/main" xmlns:r="http://schemas.openxmlformats.org/officeDocument/2006/relationships" xmlns:mc="http://schemas.openxmlformats.org/markup-compatibility/2006" xmlns:mv="urn:schemas-microsoft-com:mac:vml" xmlns:p="http://schemas.openxmlformats.org/presentationml/2006/main" xmlns:c="http://schemas.openxmlformats.org/drawingml/2006/chart" xmlns:dgm="http://schemas.openxmlformats.org/drawingml/2006/diagram" xmlns:o="urn:schemas-microsoft-com:office:office" xmlns:v="urn:schemas-microsoft-com:vml" xmlns:pvml="urn:schemas-microsoft-com:office:powerpoint" xmlns:com="http://schemas.openxmlformats.org/drawingml/2006/compatibility" xmlns:p14="http://schemas.microsoft.com/office/powerpoint/2010/main" xmlns:p15="http://schemas.microsoft.com/office/powerpoint/2012/main" xmlns:ahyp="http://schemas.microsoft.com/office/drawing/2018/hyperlinkcolor" showMasterPhAnim="0" showMasterSp="0">
+<p:notes xmlns:a="http://schemas.openxmlformats.org/drawingml/2006/main" xmlns:r="http://schemas.openxmlformats.org/officeDocument/2006/relationships" xmlns:p="http://schemas.openxmlformats.org/presentationml/2006/main" showMasterSp="0" showMasterPhAnim="0">
   <p:cSld>
     <p:spTree>
       <p:nvGrpSpPr>
-        <p:cNvPr id="162" name="Shape 162"/>
+        <p:cNvPr id="1" name="Shape 162"/>
         <p:cNvGrpSpPr/>
         <p:nvPr/>
       </p:nvGrpSpPr>
@@ -1730,9 +1795,11 @@
       <p:sp>
         <p:nvSpPr>
           <p:cNvPr id="163" name="Google Shape;163;g3f7115e0595_0_226:notes"/>
-          <p:cNvSpPr/>
+          <p:cNvSpPr>
+            <a:spLocks noGrp="1" noRot="1" noChangeAspect="1"/>
+          </p:cNvSpPr>
           <p:nvPr>
-            <p:ph idx="2" type="sldImg"/>
+            <p:ph type="sldImg" idx="2"/>
           </p:nvPr>
         </p:nvSpPr>
         <p:spPr>
@@ -1741,9 +1808,13 @@
             <a:ext cx="6096000" cy="3429000"/>
           </a:xfrm>
           <a:custGeom>
-            <a:rect b="b" l="l" r="r" t="t"/>
+            <a:avLst/>
+            <a:gdLst/>
+            <a:ahLst/>
+            <a:cxnLst/>
+            <a:rect l="l" t="t" r="r" b="b"/>
             <a:pathLst>
-              <a:path extrusionOk="0" h="120000" w="120000">
+              <a:path w="120000" h="120000" extrusionOk="0">
                 <a:moveTo>
                   <a:pt x="0" y="0"/>
                 </a:moveTo>
@@ -1765,9 +1836,11 @@
       <p:sp>
         <p:nvSpPr>
           <p:cNvPr id="164" name="Google Shape;164;g3f7115e0595_0_226:notes"/>
-          <p:cNvSpPr txBox="1"/>
+          <p:cNvSpPr txBox="1">
+            <a:spLocks noGrp="1"/>
+          </p:cNvSpPr>
           <p:nvPr>
-            <p:ph idx="1" type="body"/>
+            <p:ph type="body" idx="1"/>
           </p:nvPr>
         </p:nvSpPr>
         <p:spPr>
@@ -1780,12 +1853,12 @@
           </a:prstGeom>
         </p:spPr>
         <p:txBody>
-          <a:bodyPr anchorCtr="0" anchor="t" bIns="91425" lIns="91425" spcFirstLastPara="1" rIns="91425" wrap="square" tIns="91425">
+          <a:bodyPr spcFirstLastPara="1" wrap="square" lIns="91425" tIns="91425" rIns="91425" bIns="91425" anchor="t" anchorCtr="0">
             <a:noAutofit/>
           </a:bodyPr>
           <a:lstStyle/>
           <a:p>
-            <a:pPr indent="0" lvl="0" marL="0" rtl="0" algn="l">
+            <a:pPr marL="0" lvl="0" indent="0" algn="l" rtl="0">
               <a:spcBef>
                 <a:spcPts val="0"/>
               </a:spcBef>
@@ -1794,9 +1867,6 @@
               </a:spcAft>
               <a:buNone/>
             </a:pPr>
-            <a:r>
-              <a:t/>
-            </a:r>
             <a:endParaRPr/>
           </a:p>
         </p:txBody>
@@ -1810,11 +1880,11 @@
 </file>
 
 <file path=ppt/notesSlides/notesSlide2.xml><?xml version="1.0" encoding="utf-8"?>
-<p:notes xmlns:a="http://schemas.openxmlformats.org/drawingml/2006/main" xmlns:r="http://schemas.openxmlformats.org/officeDocument/2006/relationships" xmlns:mc="http://schemas.openxmlformats.org/markup-compatibility/2006" xmlns:mv="urn:schemas-microsoft-com:mac:vml" xmlns:p="http://schemas.openxmlformats.org/presentationml/2006/main" xmlns:c="http://schemas.openxmlformats.org/drawingml/2006/chart" xmlns:dgm="http://schemas.openxmlformats.org/drawingml/2006/diagram" xmlns:o="urn:schemas-microsoft-com:office:office" xmlns:v="urn:schemas-microsoft-com:vml" xmlns:pvml="urn:schemas-microsoft-com:office:powerpoint" xmlns:com="http://schemas.openxmlformats.org/drawingml/2006/compatibility" xmlns:p14="http://schemas.microsoft.com/office/powerpoint/2010/main" xmlns:p15="http://schemas.microsoft.com/office/powerpoint/2012/main" xmlns:ahyp="http://schemas.microsoft.com/office/drawing/2018/hyperlinkcolor" showMasterPhAnim="0" showMasterSp="0">
+<p:notes xmlns:a="http://schemas.openxmlformats.org/drawingml/2006/main" xmlns:r="http://schemas.openxmlformats.org/officeDocument/2006/relationships" xmlns:p="http://schemas.openxmlformats.org/presentationml/2006/main" showMasterSp="0" showMasterPhAnim="0">
   <p:cSld>
     <p:spTree>
       <p:nvGrpSpPr>
-        <p:cNvPr id="54" name="Shape 54"/>
+        <p:cNvPr id="1" name="Shape 54"/>
         <p:cNvGrpSpPr/>
         <p:nvPr/>
       </p:nvGrpSpPr>
@@ -1829,20 +1899,26 @@
       <p:sp>
         <p:nvSpPr>
           <p:cNvPr id="55" name="Google Shape;55;g3f7115e0595_0_0:notes"/>
-          <p:cNvSpPr/>
+          <p:cNvSpPr>
+            <a:spLocks noGrp="1" noRot="1" noChangeAspect="1"/>
+          </p:cNvSpPr>
           <p:nvPr>
-            <p:ph idx="2" type="sldImg"/>
+            <p:ph type="sldImg" idx="2"/>
           </p:nvPr>
         </p:nvSpPr>
         <p:spPr>
           <a:xfrm>
-            <a:off x="381300" y="685800"/>
+            <a:off x="381000" y="685800"/>
             <a:ext cx="6096000" cy="3429000"/>
           </a:xfrm>
           <a:custGeom>
-            <a:rect b="b" l="l" r="r" t="t"/>
+            <a:avLst/>
+            <a:gdLst/>
+            <a:ahLst/>
+            <a:cxnLst/>
+            <a:rect l="l" t="t" r="r" b="b"/>
             <a:pathLst>
-              <a:path extrusionOk="0" h="120000" w="120000">
+              <a:path w="120000" h="120000" extrusionOk="0">
                 <a:moveTo>
                   <a:pt x="0" y="0"/>
                 </a:moveTo>
@@ -1864,9 +1940,11 @@
       <p:sp>
         <p:nvSpPr>
           <p:cNvPr id="56" name="Google Shape;56;g3f7115e0595_0_0:notes"/>
-          <p:cNvSpPr txBox="1"/>
+          <p:cNvSpPr txBox="1">
+            <a:spLocks noGrp="1"/>
+          </p:cNvSpPr>
           <p:nvPr>
-            <p:ph idx="1" type="body"/>
+            <p:ph type="body" idx="1"/>
           </p:nvPr>
         </p:nvSpPr>
         <p:spPr>
@@ -1879,12 +1957,12 @@
           </a:prstGeom>
         </p:spPr>
         <p:txBody>
-          <a:bodyPr anchorCtr="0" anchor="t" bIns="91425" lIns="91425" spcFirstLastPara="1" rIns="91425" wrap="square" tIns="91425">
+          <a:bodyPr spcFirstLastPara="1" wrap="square" lIns="91425" tIns="91425" rIns="91425" bIns="91425" anchor="t" anchorCtr="0">
             <a:noAutofit/>
           </a:bodyPr>
           <a:lstStyle/>
           <a:p>
-            <a:pPr indent="0" lvl="0" marL="0" rtl="0" algn="l">
+            <a:pPr marL="0" lvl="0" indent="0" algn="l" rtl="0">
               <a:spcBef>
                 <a:spcPts val="0"/>
               </a:spcBef>
@@ -1893,9 +1971,6 @@
               </a:spcAft>
               <a:buNone/>
             </a:pPr>
-            <a:r>
-              <a:t/>
-            </a:r>
             <a:endParaRPr/>
           </a:p>
         </p:txBody>
@@ -1909,11 +1984,11 @@
 </file>
 
 <file path=ppt/notesSlides/notesSlide20.xml><?xml version="1.0" encoding="utf-8"?>
-<p:notes xmlns:a="http://schemas.openxmlformats.org/drawingml/2006/main" xmlns:r="http://schemas.openxmlformats.org/officeDocument/2006/relationships" xmlns:mc="http://schemas.openxmlformats.org/markup-compatibility/2006" xmlns:mv="urn:schemas-microsoft-com:mac:vml" xmlns:p="http://schemas.openxmlformats.org/presentationml/2006/main" xmlns:c="http://schemas.openxmlformats.org/drawingml/2006/chart" xmlns:dgm="http://schemas.openxmlformats.org/drawingml/2006/diagram" xmlns:o="urn:schemas-microsoft-com:office:office" xmlns:v="urn:schemas-microsoft-com:vml" xmlns:pvml="urn:schemas-microsoft-com:office:powerpoint" xmlns:com="http://schemas.openxmlformats.org/drawingml/2006/compatibility" xmlns:p14="http://schemas.microsoft.com/office/powerpoint/2010/main" xmlns:p15="http://schemas.microsoft.com/office/powerpoint/2012/main" xmlns:ahyp="http://schemas.microsoft.com/office/drawing/2018/hyperlinkcolor" showMasterPhAnim="0" showMasterSp="0">
+<p:notes xmlns:a="http://schemas.openxmlformats.org/drawingml/2006/main" xmlns:r="http://schemas.openxmlformats.org/officeDocument/2006/relationships" xmlns:p="http://schemas.openxmlformats.org/presentationml/2006/main" showMasterSp="0" showMasterPhAnim="0">
   <p:cSld>
     <p:spTree>
       <p:nvGrpSpPr>
-        <p:cNvPr id="166" name="Shape 166"/>
+        <p:cNvPr id="1" name="Shape 166"/>
         <p:cNvGrpSpPr/>
         <p:nvPr/>
       </p:nvGrpSpPr>
@@ -1928,9 +2003,11 @@
       <p:sp>
         <p:nvSpPr>
           <p:cNvPr id="167" name="Google Shape;167;g3f7115e0595_0_229:notes"/>
-          <p:cNvSpPr/>
+          <p:cNvSpPr>
+            <a:spLocks noGrp="1" noRot="1" noChangeAspect="1"/>
+          </p:cNvSpPr>
           <p:nvPr>
-            <p:ph idx="2" type="sldImg"/>
+            <p:ph type="sldImg" idx="2"/>
           </p:nvPr>
         </p:nvSpPr>
         <p:spPr>
@@ -1939,9 +2016,13 @@
             <a:ext cx="6096000" cy="3429000"/>
           </a:xfrm>
           <a:custGeom>
-            <a:rect b="b" l="l" r="r" t="t"/>
+            <a:avLst/>
+            <a:gdLst/>
+            <a:ahLst/>
+            <a:cxnLst/>
+            <a:rect l="l" t="t" r="r" b="b"/>
             <a:pathLst>
-              <a:path extrusionOk="0" h="120000" w="120000">
+              <a:path w="120000" h="120000" extrusionOk="0">
                 <a:moveTo>
                   <a:pt x="0" y="0"/>
                 </a:moveTo>
@@ -1963,9 +2044,11 @@
       <p:sp>
         <p:nvSpPr>
           <p:cNvPr id="168" name="Google Shape;168;g3f7115e0595_0_229:notes"/>
-          <p:cNvSpPr txBox="1"/>
+          <p:cNvSpPr txBox="1">
+            <a:spLocks noGrp="1"/>
+          </p:cNvSpPr>
           <p:nvPr>
-            <p:ph idx="1" type="body"/>
+            <p:ph type="body" idx="1"/>
           </p:nvPr>
         </p:nvSpPr>
         <p:spPr>
@@ -1978,12 +2061,12 @@
           </a:prstGeom>
         </p:spPr>
         <p:txBody>
-          <a:bodyPr anchorCtr="0" anchor="t" bIns="91425" lIns="91425" spcFirstLastPara="1" rIns="91425" wrap="square" tIns="91425">
+          <a:bodyPr spcFirstLastPara="1" wrap="square" lIns="91425" tIns="91425" rIns="91425" bIns="91425" anchor="t" anchorCtr="0">
             <a:noAutofit/>
           </a:bodyPr>
           <a:lstStyle/>
           <a:p>
-            <a:pPr indent="0" lvl="0" marL="0" rtl="0" algn="l">
+            <a:pPr marL="0" lvl="0" indent="0" algn="l" rtl="0">
               <a:spcBef>
                 <a:spcPts val="0"/>
               </a:spcBef>
@@ -1992,9 +2075,6 @@
               </a:spcAft>
               <a:buNone/>
             </a:pPr>
-            <a:r>
-              <a:t/>
-            </a:r>
             <a:endParaRPr/>
           </a:p>
         </p:txBody>
@@ -2008,11 +2088,11 @@
 </file>
 
 <file path=ppt/notesSlides/notesSlide21.xml><?xml version="1.0" encoding="utf-8"?>
-<p:notes xmlns:a="http://schemas.openxmlformats.org/drawingml/2006/main" xmlns:r="http://schemas.openxmlformats.org/officeDocument/2006/relationships" xmlns:mc="http://schemas.openxmlformats.org/markup-compatibility/2006" xmlns:mv="urn:schemas-microsoft-com:mac:vml" xmlns:p="http://schemas.openxmlformats.org/presentationml/2006/main" xmlns:c="http://schemas.openxmlformats.org/drawingml/2006/chart" xmlns:dgm="http://schemas.openxmlformats.org/drawingml/2006/diagram" xmlns:o="urn:schemas-microsoft-com:office:office" xmlns:v="urn:schemas-microsoft-com:vml" xmlns:pvml="urn:schemas-microsoft-com:office:powerpoint" xmlns:com="http://schemas.openxmlformats.org/drawingml/2006/compatibility" xmlns:p14="http://schemas.microsoft.com/office/powerpoint/2010/main" xmlns:p15="http://schemas.microsoft.com/office/powerpoint/2012/main" xmlns:ahyp="http://schemas.microsoft.com/office/drawing/2018/hyperlinkcolor" showMasterPhAnim="0" showMasterSp="0">
+<p:notes xmlns:a="http://schemas.openxmlformats.org/drawingml/2006/main" xmlns:r="http://schemas.openxmlformats.org/officeDocument/2006/relationships" xmlns:p="http://schemas.openxmlformats.org/presentationml/2006/main" showMasterSp="0" showMasterPhAnim="0">
   <p:cSld>
     <p:spTree>
       <p:nvGrpSpPr>
-        <p:cNvPr id="177" name="Shape 177"/>
+        <p:cNvPr id="1" name="Shape 177"/>
         <p:cNvGrpSpPr/>
         <p:nvPr/>
       </p:nvGrpSpPr>
@@ -2027,9 +2107,11 @@
       <p:sp>
         <p:nvSpPr>
           <p:cNvPr id="178" name="Google Shape;178;g3f7115e0595_0_239:notes"/>
-          <p:cNvSpPr/>
+          <p:cNvSpPr>
+            <a:spLocks noGrp="1" noRot="1" noChangeAspect="1"/>
+          </p:cNvSpPr>
           <p:nvPr>
-            <p:ph idx="2" type="sldImg"/>
+            <p:ph type="sldImg" idx="2"/>
           </p:nvPr>
         </p:nvSpPr>
         <p:spPr>
@@ -2038,9 +2120,13 @@
             <a:ext cx="6096000" cy="3429000"/>
           </a:xfrm>
           <a:custGeom>
-            <a:rect b="b" l="l" r="r" t="t"/>
+            <a:avLst/>
+            <a:gdLst/>
+            <a:ahLst/>
+            <a:cxnLst/>
+            <a:rect l="l" t="t" r="r" b="b"/>
             <a:pathLst>
-              <a:path extrusionOk="0" h="120000" w="120000">
+              <a:path w="120000" h="120000" extrusionOk="0">
                 <a:moveTo>
                   <a:pt x="0" y="0"/>
                 </a:moveTo>
@@ -2062,9 +2148,11 @@
       <p:sp>
         <p:nvSpPr>
           <p:cNvPr id="179" name="Google Shape;179;g3f7115e0595_0_239:notes"/>
-          <p:cNvSpPr txBox="1"/>
+          <p:cNvSpPr txBox="1">
+            <a:spLocks noGrp="1"/>
+          </p:cNvSpPr>
           <p:nvPr>
-            <p:ph idx="1" type="body"/>
+            <p:ph type="body" idx="1"/>
           </p:nvPr>
         </p:nvSpPr>
         <p:spPr>
@@ -2077,12 +2165,12 @@
           </a:prstGeom>
         </p:spPr>
         <p:txBody>
-          <a:bodyPr anchorCtr="0" anchor="t" bIns="91425" lIns="91425" spcFirstLastPara="1" rIns="91425" wrap="square" tIns="91425">
+          <a:bodyPr spcFirstLastPara="1" wrap="square" lIns="91425" tIns="91425" rIns="91425" bIns="91425" anchor="t" anchorCtr="0">
             <a:noAutofit/>
           </a:bodyPr>
           <a:lstStyle/>
           <a:p>
-            <a:pPr indent="0" lvl="0" marL="0" rtl="0" algn="l">
+            <a:pPr marL="0" lvl="0" indent="0" algn="l" rtl="0">
               <a:spcBef>
                 <a:spcPts val="0"/>
               </a:spcBef>
@@ -2091,9 +2179,6 @@
               </a:spcAft>
               <a:buNone/>
             </a:pPr>
-            <a:r>
-              <a:t/>
-            </a:r>
             <a:endParaRPr/>
           </a:p>
         </p:txBody>
@@ -2107,11 +2192,11 @@
 </file>
 
 <file path=ppt/notesSlides/notesSlide22.xml><?xml version="1.0" encoding="utf-8"?>
-<p:notes xmlns:a="http://schemas.openxmlformats.org/drawingml/2006/main" xmlns:r="http://schemas.openxmlformats.org/officeDocument/2006/relationships" xmlns:mc="http://schemas.openxmlformats.org/markup-compatibility/2006" xmlns:mv="urn:schemas-microsoft-com:mac:vml" xmlns:p="http://schemas.openxmlformats.org/presentationml/2006/main" xmlns:c="http://schemas.openxmlformats.org/drawingml/2006/chart" xmlns:dgm="http://schemas.openxmlformats.org/drawingml/2006/diagram" xmlns:o="urn:schemas-microsoft-com:office:office" xmlns:v="urn:schemas-microsoft-com:vml" xmlns:pvml="urn:schemas-microsoft-com:office:powerpoint" xmlns:com="http://schemas.openxmlformats.org/drawingml/2006/compatibility" xmlns:p14="http://schemas.microsoft.com/office/powerpoint/2010/main" xmlns:p15="http://schemas.microsoft.com/office/powerpoint/2012/main" xmlns:ahyp="http://schemas.microsoft.com/office/drawing/2018/hyperlinkcolor" showMasterPhAnim="0" showMasterSp="0">
+<p:notes xmlns:a="http://schemas.openxmlformats.org/drawingml/2006/main" xmlns:r="http://schemas.openxmlformats.org/officeDocument/2006/relationships" xmlns:p="http://schemas.openxmlformats.org/presentationml/2006/main" showMasterSp="0" showMasterPhAnim="0">
   <p:cSld>
     <p:spTree>
       <p:nvGrpSpPr>
-        <p:cNvPr id="184" name="Shape 184"/>
+        <p:cNvPr id="1" name="Shape 184"/>
         <p:cNvGrpSpPr/>
         <p:nvPr/>
       </p:nvGrpSpPr>
@@ -2126,20 +2211,26 @@
       <p:sp>
         <p:nvSpPr>
           <p:cNvPr id="185" name="Google Shape;185;g3f7115e0595_0_290:notes"/>
-          <p:cNvSpPr/>
+          <p:cNvSpPr>
+            <a:spLocks noGrp="1" noRot="1" noChangeAspect="1"/>
+          </p:cNvSpPr>
           <p:nvPr>
-            <p:ph idx="2" type="sldImg"/>
+            <p:ph type="sldImg" idx="2"/>
           </p:nvPr>
         </p:nvSpPr>
         <p:spPr>
           <a:xfrm>
-            <a:off x="381300" y="685800"/>
+            <a:off x="381000" y="685800"/>
             <a:ext cx="6096000" cy="3429000"/>
           </a:xfrm>
           <a:custGeom>
-            <a:rect b="b" l="l" r="r" t="t"/>
+            <a:avLst/>
+            <a:gdLst/>
+            <a:ahLst/>
+            <a:cxnLst/>
+            <a:rect l="l" t="t" r="r" b="b"/>
             <a:pathLst>
-              <a:path extrusionOk="0" h="120000" w="120000">
+              <a:path w="120000" h="120000" extrusionOk="0">
                 <a:moveTo>
                   <a:pt x="0" y="0"/>
                 </a:moveTo>
@@ -2161,9 +2252,11 @@
       <p:sp>
         <p:nvSpPr>
           <p:cNvPr id="186" name="Google Shape;186;g3f7115e0595_0_290:notes"/>
-          <p:cNvSpPr txBox="1"/>
+          <p:cNvSpPr txBox="1">
+            <a:spLocks noGrp="1"/>
+          </p:cNvSpPr>
           <p:nvPr>
-            <p:ph idx="1" type="body"/>
+            <p:ph type="body" idx="1"/>
           </p:nvPr>
         </p:nvSpPr>
         <p:spPr>
@@ -2176,12 +2269,12 @@
           </a:prstGeom>
         </p:spPr>
         <p:txBody>
-          <a:bodyPr anchorCtr="0" anchor="t" bIns="91425" lIns="91425" spcFirstLastPara="1" rIns="91425" wrap="square" tIns="91425">
+          <a:bodyPr spcFirstLastPara="1" wrap="square" lIns="91425" tIns="91425" rIns="91425" bIns="91425" anchor="t" anchorCtr="0">
             <a:noAutofit/>
           </a:bodyPr>
           <a:lstStyle/>
           <a:p>
-            <a:pPr indent="0" lvl="0" marL="0" rtl="0" algn="l">
+            <a:pPr marL="0" lvl="0" indent="0" algn="l" rtl="0">
               <a:spcBef>
                 <a:spcPts val="0"/>
               </a:spcBef>
@@ -2190,9 +2283,6 @@
               </a:spcAft>
               <a:buNone/>
             </a:pPr>
-            <a:r>
-              <a:t/>
-            </a:r>
             <a:endParaRPr/>
           </a:p>
         </p:txBody>
@@ -2206,11 +2296,11 @@
 </file>
 
 <file path=ppt/notesSlides/notesSlide23.xml><?xml version="1.0" encoding="utf-8"?>
-<p:notes xmlns:a="http://schemas.openxmlformats.org/drawingml/2006/main" xmlns:r="http://schemas.openxmlformats.org/officeDocument/2006/relationships" xmlns:mc="http://schemas.openxmlformats.org/markup-compatibility/2006" xmlns:mv="urn:schemas-microsoft-com:mac:vml" xmlns:p="http://schemas.openxmlformats.org/presentationml/2006/main" xmlns:c="http://schemas.openxmlformats.org/drawingml/2006/chart" xmlns:dgm="http://schemas.openxmlformats.org/drawingml/2006/diagram" xmlns:o="urn:schemas-microsoft-com:office:office" xmlns:v="urn:schemas-microsoft-com:vml" xmlns:pvml="urn:schemas-microsoft-com:office:powerpoint" xmlns:com="http://schemas.openxmlformats.org/drawingml/2006/compatibility" xmlns:p14="http://schemas.microsoft.com/office/powerpoint/2010/main" xmlns:p15="http://schemas.microsoft.com/office/powerpoint/2012/main" xmlns:ahyp="http://schemas.microsoft.com/office/drawing/2018/hyperlinkcolor" showMasterPhAnim="0" showMasterSp="0">
+<p:notes xmlns:a="http://schemas.openxmlformats.org/drawingml/2006/main" xmlns:r="http://schemas.openxmlformats.org/officeDocument/2006/relationships" xmlns:p="http://schemas.openxmlformats.org/presentationml/2006/main" showMasterSp="0" showMasterPhAnim="0">
   <p:cSld>
     <p:spTree>
       <p:nvGrpSpPr>
-        <p:cNvPr id="188" name="Shape 188"/>
+        <p:cNvPr id="1" name="Shape 188"/>
         <p:cNvGrpSpPr/>
         <p:nvPr/>
       </p:nvGrpSpPr>
@@ -2225,9 +2315,11 @@
       <p:sp>
         <p:nvSpPr>
           <p:cNvPr id="189" name="Google Shape;189;g3f7115e0595_0_293:notes"/>
-          <p:cNvSpPr/>
+          <p:cNvSpPr>
+            <a:spLocks noGrp="1" noRot="1" noChangeAspect="1"/>
+          </p:cNvSpPr>
           <p:nvPr>
-            <p:ph idx="2" type="sldImg"/>
+            <p:ph type="sldImg" idx="2"/>
           </p:nvPr>
         </p:nvSpPr>
         <p:spPr>
@@ -2236,9 +2328,13 @@
             <a:ext cx="6096000" cy="3429000"/>
           </a:xfrm>
           <a:custGeom>
-            <a:rect b="b" l="l" r="r" t="t"/>
+            <a:avLst/>
+            <a:gdLst/>
+            <a:ahLst/>
+            <a:cxnLst/>
+            <a:rect l="l" t="t" r="r" b="b"/>
             <a:pathLst>
-              <a:path extrusionOk="0" h="120000" w="120000">
+              <a:path w="120000" h="120000" extrusionOk="0">
                 <a:moveTo>
                   <a:pt x="0" y="0"/>
                 </a:moveTo>
@@ -2260,9 +2356,11 @@
       <p:sp>
         <p:nvSpPr>
           <p:cNvPr id="190" name="Google Shape;190;g3f7115e0595_0_293:notes"/>
-          <p:cNvSpPr txBox="1"/>
+          <p:cNvSpPr txBox="1">
+            <a:spLocks noGrp="1"/>
+          </p:cNvSpPr>
           <p:nvPr>
-            <p:ph idx="1" type="body"/>
+            <p:ph type="body" idx="1"/>
           </p:nvPr>
         </p:nvSpPr>
         <p:spPr>
@@ -2275,12 +2373,12 @@
           </a:prstGeom>
         </p:spPr>
         <p:txBody>
-          <a:bodyPr anchorCtr="0" anchor="t" bIns="91425" lIns="91425" spcFirstLastPara="1" rIns="91425" wrap="square" tIns="91425">
+          <a:bodyPr spcFirstLastPara="1" wrap="square" lIns="91425" tIns="91425" rIns="91425" bIns="91425" anchor="t" anchorCtr="0">
             <a:noAutofit/>
           </a:bodyPr>
           <a:lstStyle/>
           <a:p>
-            <a:pPr indent="0" lvl="0" marL="0" rtl="0" algn="l">
+            <a:pPr marL="0" lvl="0" indent="0" algn="l" rtl="0">
               <a:spcBef>
                 <a:spcPts val="0"/>
               </a:spcBef>
@@ -2289,9 +2387,6 @@
               </a:spcAft>
               <a:buNone/>
             </a:pPr>
-            <a:r>
-              <a:t/>
-            </a:r>
             <a:endParaRPr/>
           </a:p>
         </p:txBody>
@@ -2305,11 +2400,11 @@
 </file>
 
 <file path=ppt/notesSlides/notesSlide24.xml><?xml version="1.0" encoding="utf-8"?>
-<p:notes xmlns:a="http://schemas.openxmlformats.org/drawingml/2006/main" xmlns:r="http://schemas.openxmlformats.org/officeDocument/2006/relationships" xmlns:mc="http://schemas.openxmlformats.org/markup-compatibility/2006" xmlns:mv="urn:schemas-microsoft-com:mac:vml" xmlns:p="http://schemas.openxmlformats.org/presentationml/2006/main" xmlns:c="http://schemas.openxmlformats.org/drawingml/2006/chart" xmlns:dgm="http://schemas.openxmlformats.org/drawingml/2006/diagram" xmlns:o="urn:schemas-microsoft-com:office:office" xmlns:v="urn:schemas-microsoft-com:vml" xmlns:pvml="urn:schemas-microsoft-com:office:powerpoint" xmlns:com="http://schemas.openxmlformats.org/drawingml/2006/compatibility" xmlns:p14="http://schemas.microsoft.com/office/powerpoint/2010/main" xmlns:p15="http://schemas.microsoft.com/office/powerpoint/2012/main" xmlns:ahyp="http://schemas.microsoft.com/office/drawing/2018/hyperlinkcolor" showMasterPhAnim="0" showMasterSp="0">
+<p:notes xmlns:a="http://schemas.openxmlformats.org/drawingml/2006/main" xmlns:r="http://schemas.openxmlformats.org/officeDocument/2006/relationships" xmlns:p="http://schemas.openxmlformats.org/presentationml/2006/main" showMasterSp="0" showMasterPhAnim="0">
   <p:cSld>
     <p:spTree>
       <p:nvGrpSpPr>
-        <p:cNvPr id="192" name="Shape 192"/>
+        <p:cNvPr id="1" name="Shape 192"/>
         <p:cNvGrpSpPr/>
         <p:nvPr/>
       </p:nvGrpSpPr>
@@ -2324,9 +2419,11 @@
       <p:sp>
         <p:nvSpPr>
           <p:cNvPr id="193" name="Google Shape;193;g3f7115e0595_0_296:notes"/>
-          <p:cNvSpPr/>
+          <p:cNvSpPr>
+            <a:spLocks noGrp="1" noRot="1" noChangeAspect="1"/>
+          </p:cNvSpPr>
           <p:nvPr>
-            <p:ph idx="2" type="sldImg"/>
+            <p:ph type="sldImg" idx="2"/>
           </p:nvPr>
         </p:nvSpPr>
         <p:spPr>
@@ -2335,9 +2432,13 @@
             <a:ext cx="6096000" cy="3429000"/>
           </a:xfrm>
           <a:custGeom>
-            <a:rect b="b" l="l" r="r" t="t"/>
+            <a:avLst/>
+            <a:gdLst/>
+            <a:ahLst/>
+            <a:cxnLst/>
+            <a:rect l="l" t="t" r="r" b="b"/>
             <a:pathLst>
-              <a:path extrusionOk="0" h="120000" w="120000">
+              <a:path w="120000" h="120000" extrusionOk="0">
                 <a:moveTo>
                   <a:pt x="0" y="0"/>
                 </a:moveTo>
@@ -2359,9 +2460,11 @@
       <p:sp>
         <p:nvSpPr>
           <p:cNvPr id="194" name="Google Shape;194;g3f7115e0595_0_296:notes"/>
-          <p:cNvSpPr txBox="1"/>
+          <p:cNvSpPr txBox="1">
+            <a:spLocks noGrp="1"/>
+          </p:cNvSpPr>
           <p:nvPr>
-            <p:ph idx="1" type="body"/>
+            <p:ph type="body" idx="1"/>
           </p:nvPr>
         </p:nvSpPr>
         <p:spPr>
@@ -2374,12 +2477,12 @@
           </a:prstGeom>
         </p:spPr>
         <p:txBody>
-          <a:bodyPr anchorCtr="0" anchor="t" bIns="91425" lIns="91425" spcFirstLastPara="1" rIns="91425" wrap="square" tIns="91425">
+          <a:bodyPr spcFirstLastPara="1" wrap="square" lIns="91425" tIns="91425" rIns="91425" bIns="91425" anchor="t" anchorCtr="0">
             <a:noAutofit/>
           </a:bodyPr>
           <a:lstStyle/>
           <a:p>
-            <a:pPr indent="0" lvl="0" marL="0" rtl="0" algn="l">
+            <a:pPr marL="0" lvl="0" indent="0" algn="l" rtl="0">
               <a:spcBef>
                 <a:spcPts val="0"/>
               </a:spcBef>
@@ -2388,9 +2491,6 @@
               </a:spcAft>
               <a:buNone/>
             </a:pPr>
-            <a:r>
-              <a:t/>
-            </a:r>
             <a:endParaRPr/>
           </a:p>
         </p:txBody>
@@ -2404,11 +2504,11 @@
 </file>
 
 <file path=ppt/notesSlides/notesSlide25.xml><?xml version="1.0" encoding="utf-8"?>
-<p:notes xmlns:a="http://schemas.openxmlformats.org/drawingml/2006/main" xmlns:r="http://schemas.openxmlformats.org/officeDocument/2006/relationships" xmlns:mc="http://schemas.openxmlformats.org/markup-compatibility/2006" xmlns:mv="urn:schemas-microsoft-com:mac:vml" xmlns:p="http://schemas.openxmlformats.org/presentationml/2006/main" xmlns:c="http://schemas.openxmlformats.org/drawingml/2006/chart" xmlns:dgm="http://schemas.openxmlformats.org/drawingml/2006/diagram" xmlns:o="urn:schemas-microsoft-com:office:office" xmlns:v="urn:schemas-microsoft-com:vml" xmlns:pvml="urn:schemas-microsoft-com:office:powerpoint" xmlns:com="http://schemas.openxmlformats.org/drawingml/2006/compatibility" xmlns:p14="http://schemas.microsoft.com/office/powerpoint/2010/main" xmlns:p15="http://schemas.microsoft.com/office/powerpoint/2012/main" xmlns:ahyp="http://schemas.microsoft.com/office/drawing/2018/hyperlinkcolor" showMasterPhAnim="0" showMasterSp="0">
+<p:notes xmlns:a="http://schemas.openxmlformats.org/drawingml/2006/main" xmlns:r="http://schemas.openxmlformats.org/officeDocument/2006/relationships" xmlns:p="http://schemas.openxmlformats.org/presentationml/2006/main" showMasterSp="0" showMasterPhAnim="0">
   <p:cSld>
     <p:spTree>
       <p:nvGrpSpPr>
-        <p:cNvPr id="203" name="Shape 203"/>
+        <p:cNvPr id="1" name="Shape 203"/>
         <p:cNvGrpSpPr/>
         <p:nvPr/>
       </p:nvGrpSpPr>
@@ -2423,9 +2523,11 @@
       <p:sp>
         <p:nvSpPr>
           <p:cNvPr id="204" name="Google Shape;204;g3f7115e0595_0_306:notes"/>
-          <p:cNvSpPr/>
+          <p:cNvSpPr>
+            <a:spLocks noGrp="1" noRot="1" noChangeAspect="1"/>
+          </p:cNvSpPr>
           <p:nvPr>
-            <p:ph idx="2" type="sldImg"/>
+            <p:ph type="sldImg" idx="2"/>
           </p:nvPr>
         </p:nvSpPr>
         <p:spPr>
@@ -2434,9 +2536,13 @@
             <a:ext cx="6096000" cy="3429000"/>
           </a:xfrm>
           <a:custGeom>
-            <a:rect b="b" l="l" r="r" t="t"/>
+            <a:avLst/>
+            <a:gdLst/>
+            <a:ahLst/>
+            <a:cxnLst/>
+            <a:rect l="l" t="t" r="r" b="b"/>
             <a:pathLst>
-              <a:path extrusionOk="0" h="120000" w="120000">
+              <a:path w="120000" h="120000" extrusionOk="0">
                 <a:moveTo>
                   <a:pt x="0" y="0"/>
                 </a:moveTo>
@@ -2458,9 +2564,11 @@
       <p:sp>
         <p:nvSpPr>
           <p:cNvPr id="205" name="Google Shape;205;g3f7115e0595_0_306:notes"/>
-          <p:cNvSpPr txBox="1"/>
+          <p:cNvSpPr txBox="1">
+            <a:spLocks noGrp="1"/>
+          </p:cNvSpPr>
           <p:nvPr>
-            <p:ph idx="1" type="body"/>
+            <p:ph type="body" idx="1"/>
           </p:nvPr>
         </p:nvSpPr>
         <p:spPr>
@@ -2473,12 +2581,12 @@
           </a:prstGeom>
         </p:spPr>
         <p:txBody>
-          <a:bodyPr anchorCtr="0" anchor="t" bIns="91425" lIns="91425" spcFirstLastPara="1" rIns="91425" wrap="square" tIns="91425">
+          <a:bodyPr spcFirstLastPara="1" wrap="square" lIns="91425" tIns="91425" rIns="91425" bIns="91425" anchor="t" anchorCtr="0">
             <a:noAutofit/>
           </a:bodyPr>
           <a:lstStyle/>
           <a:p>
-            <a:pPr indent="0" lvl="0" marL="0" rtl="0" algn="l">
+            <a:pPr marL="0" lvl="0" indent="0" algn="l" rtl="0">
               <a:spcBef>
                 <a:spcPts val="0"/>
               </a:spcBef>
@@ -2487,9 +2595,6 @@
               </a:spcAft>
               <a:buNone/>
             </a:pPr>
-            <a:r>
-              <a:t/>
-            </a:r>
             <a:endParaRPr/>
           </a:p>
         </p:txBody>
@@ -2503,11 +2608,11 @@
 </file>
 
 <file path=ppt/notesSlides/notesSlide26.xml><?xml version="1.0" encoding="utf-8"?>
-<p:notes xmlns:a="http://schemas.openxmlformats.org/drawingml/2006/main" xmlns:r="http://schemas.openxmlformats.org/officeDocument/2006/relationships" xmlns:mc="http://schemas.openxmlformats.org/markup-compatibility/2006" xmlns:mv="urn:schemas-microsoft-com:mac:vml" xmlns:p="http://schemas.openxmlformats.org/presentationml/2006/main" xmlns:c="http://schemas.openxmlformats.org/drawingml/2006/chart" xmlns:dgm="http://schemas.openxmlformats.org/drawingml/2006/diagram" xmlns:o="urn:schemas-microsoft-com:office:office" xmlns:v="urn:schemas-microsoft-com:vml" xmlns:pvml="urn:schemas-microsoft-com:office:powerpoint" xmlns:com="http://schemas.openxmlformats.org/drawingml/2006/compatibility" xmlns:p14="http://schemas.microsoft.com/office/powerpoint/2010/main" xmlns:p15="http://schemas.microsoft.com/office/powerpoint/2012/main" xmlns:ahyp="http://schemas.microsoft.com/office/drawing/2018/hyperlinkcolor" showMasterPhAnim="0" showMasterSp="0">
+<p:notes xmlns:a="http://schemas.openxmlformats.org/drawingml/2006/main" xmlns:r="http://schemas.openxmlformats.org/officeDocument/2006/relationships" xmlns:p="http://schemas.openxmlformats.org/presentationml/2006/main" showMasterSp="0" showMasterPhAnim="0">
   <p:cSld>
     <p:spTree>
       <p:nvGrpSpPr>
-        <p:cNvPr id="210" name="Shape 210"/>
+        <p:cNvPr id="1" name="Shape 210"/>
         <p:cNvGrpSpPr/>
         <p:nvPr/>
       </p:nvGrpSpPr>
@@ -2522,20 +2627,26 @@
       <p:sp>
         <p:nvSpPr>
           <p:cNvPr id="211" name="Google Shape;211;g3f7115e0595_0_357:notes"/>
-          <p:cNvSpPr/>
+          <p:cNvSpPr>
+            <a:spLocks noGrp="1" noRot="1" noChangeAspect="1"/>
+          </p:cNvSpPr>
           <p:nvPr>
-            <p:ph idx="2" type="sldImg"/>
+            <p:ph type="sldImg" idx="2"/>
           </p:nvPr>
         </p:nvSpPr>
         <p:spPr>
           <a:xfrm>
-            <a:off x="381300" y="685800"/>
+            <a:off x="381000" y="685800"/>
             <a:ext cx="6096000" cy="3429000"/>
           </a:xfrm>
           <a:custGeom>
-            <a:rect b="b" l="l" r="r" t="t"/>
+            <a:avLst/>
+            <a:gdLst/>
+            <a:ahLst/>
+            <a:cxnLst/>
+            <a:rect l="l" t="t" r="r" b="b"/>
             <a:pathLst>
-              <a:path extrusionOk="0" h="120000" w="120000">
+              <a:path w="120000" h="120000" extrusionOk="0">
                 <a:moveTo>
                   <a:pt x="0" y="0"/>
                 </a:moveTo>
@@ -2557,9 +2668,11 @@
       <p:sp>
         <p:nvSpPr>
           <p:cNvPr id="212" name="Google Shape;212;g3f7115e0595_0_357:notes"/>
-          <p:cNvSpPr txBox="1"/>
+          <p:cNvSpPr txBox="1">
+            <a:spLocks noGrp="1"/>
+          </p:cNvSpPr>
           <p:nvPr>
-            <p:ph idx="1" type="body"/>
+            <p:ph type="body" idx="1"/>
           </p:nvPr>
         </p:nvSpPr>
         <p:spPr>
@@ -2572,12 +2685,12 @@
           </a:prstGeom>
         </p:spPr>
         <p:txBody>
-          <a:bodyPr anchorCtr="0" anchor="t" bIns="91425" lIns="91425" spcFirstLastPara="1" rIns="91425" wrap="square" tIns="91425">
+          <a:bodyPr spcFirstLastPara="1" wrap="square" lIns="91425" tIns="91425" rIns="91425" bIns="91425" anchor="t" anchorCtr="0">
             <a:noAutofit/>
           </a:bodyPr>
           <a:lstStyle/>
           <a:p>
-            <a:pPr indent="0" lvl="0" marL="0" rtl="0" algn="l">
+            <a:pPr marL="0" lvl="0" indent="0" algn="l" rtl="0">
               <a:spcBef>
                 <a:spcPts val="0"/>
               </a:spcBef>
@@ -2586,9 +2699,6 @@
               </a:spcAft>
               <a:buNone/>
             </a:pPr>
-            <a:r>
-              <a:t/>
-            </a:r>
             <a:endParaRPr/>
           </a:p>
         </p:txBody>
@@ -2602,11 +2712,11 @@
 </file>
 
 <file path=ppt/notesSlides/notesSlide3.xml><?xml version="1.0" encoding="utf-8"?>
-<p:notes xmlns:a="http://schemas.openxmlformats.org/drawingml/2006/main" xmlns:r="http://schemas.openxmlformats.org/officeDocument/2006/relationships" xmlns:mc="http://schemas.openxmlformats.org/markup-compatibility/2006" xmlns:mv="urn:schemas-microsoft-com:mac:vml" xmlns:p="http://schemas.openxmlformats.org/presentationml/2006/main" xmlns:c="http://schemas.openxmlformats.org/drawingml/2006/chart" xmlns:dgm="http://schemas.openxmlformats.org/drawingml/2006/diagram" xmlns:o="urn:schemas-microsoft-com:office:office" xmlns:v="urn:schemas-microsoft-com:vml" xmlns:pvml="urn:schemas-microsoft-com:office:powerpoint" xmlns:com="http://schemas.openxmlformats.org/drawingml/2006/compatibility" xmlns:p14="http://schemas.microsoft.com/office/powerpoint/2010/main" xmlns:p15="http://schemas.microsoft.com/office/powerpoint/2012/main" xmlns:ahyp="http://schemas.microsoft.com/office/drawing/2018/hyperlinkcolor" showMasterPhAnim="0" showMasterSp="0">
+<p:notes xmlns:a="http://schemas.openxmlformats.org/drawingml/2006/main" xmlns:r="http://schemas.openxmlformats.org/officeDocument/2006/relationships" xmlns:p="http://schemas.openxmlformats.org/presentationml/2006/main" showMasterSp="0" showMasterPhAnim="0">
   <p:cSld>
     <p:spTree>
       <p:nvGrpSpPr>
-        <p:cNvPr id="58" name="Shape 58"/>
+        <p:cNvPr id="1" name="Shape 58"/>
         <p:cNvGrpSpPr/>
         <p:nvPr/>
       </p:nvGrpSpPr>
@@ -2621,9 +2731,11 @@
       <p:sp>
         <p:nvSpPr>
           <p:cNvPr id="59" name="Google Shape;59;g3f7115e0595_0_3:notes"/>
-          <p:cNvSpPr/>
+          <p:cNvSpPr>
+            <a:spLocks noGrp="1" noRot="1" noChangeAspect="1"/>
+          </p:cNvSpPr>
           <p:nvPr>
-            <p:ph idx="2" type="sldImg"/>
+            <p:ph type="sldImg" idx="2"/>
           </p:nvPr>
         </p:nvSpPr>
         <p:spPr>
@@ -2632,9 +2744,13 @@
             <a:ext cx="6096000" cy="3429000"/>
           </a:xfrm>
           <a:custGeom>
-            <a:rect b="b" l="l" r="r" t="t"/>
+            <a:avLst/>
+            <a:gdLst/>
+            <a:ahLst/>
+            <a:cxnLst/>
+            <a:rect l="l" t="t" r="r" b="b"/>
             <a:pathLst>
-              <a:path extrusionOk="0" h="120000" w="120000">
+              <a:path w="120000" h="120000" extrusionOk="0">
                 <a:moveTo>
                   <a:pt x="0" y="0"/>
                 </a:moveTo>
@@ -2656,9 +2772,11 @@
       <p:sp>
         <p:nvSpPr>
           <p:cNvPr id="60" name="Google Shape;60;g3f7115e0595_0_3:notes"/>
-          <p:cNvSpPr txBox="1"/>
+          <p:cNvSpPr txBox="1">
+            <a:spLocks noGrp="1"/>
+          </p:cNvSpPr>
           <p:nvPr>
-            <p:ph idx="1" type="body"/>
+            <p:ph type="body" idx="1"/>
           </p:nvPr>
         </p:nvSpPr>
         <p:spPr>
@@ -2671,12 +2789,12 @@
           </a:prstGeom>
         </p:spPr>
         <p:txBody>
-          <a:bodyPr anchorCtr="0" anchor="t" bIns="91425" lIns="91425" spcFirstLastPara="1" rIns="91425" wrap="square" tIns="91425">
+          <a:bodyPr spcFirstLastPara="1" wrap="square" lIns="91425" tIns="91425" rIns="91425" bIns="91425" anchor="t" anchorCtr="0">
             <a:noAutofit/>
           </a:bodyPr>
           <a:lstStyle/>
           <a:p>
-            <a:pPr indent="0" lvl="0" marL="0" rtl="0" algn="l">
+            <a:pPr marL="0" lvl="0" indent="0" algn="l" rtl="0">
               <a:spcBef>
                 <a:spcPts val="0"/>
               </a:spcBef>
@@ -2685,9 +2803,6 @@
               </a:spcAft>
               <a:buNone/>
             </a:pPr>
-            <a:r>
-              <a:t/>
-            </a:r>
             <a:endParaRPr/>
           </a:p>
         </p:txBody>
@@ -2701,11 +2816,11 @@
 </file>
 
 <file path=ppt/notesSlides/notesSlide4.xml><?xml version="1.0" encoding="utf-8"?>
-<p:notes xmlns:a="http://schemas.openxmlformats.org/drawingml/2006/main" xmlns:r="http://schemas.openxmlformats.org/officeDocument/2006/relationships" xmlns:mc="http://schemas.openxmlformats.org/markup-compatibility/2006" xmlns:mv="urn:schemas-microsoft-com:mac:vml" xmlns:p="http://schemas.openxmlformats.org/presentationml/2006/main" xmlns:c="http://schemas.openxmlformats.org/drawingml/2006/chart" xmlns:dgm="http://schemas.openxmlformats.org/drawingml/2006/diagram" xmlns:o="urn:schemas-microsoft-com:office:office" xmlns:v="urn:schemas-microsoft-com:vml" xmlns:pvml="urn:schemas-microsoft-com:office:powerpoint" xmlns:com="http://schemas.openxmlformats.org/drawingml/2006/compatibility" xmlns:p14="http://schemas.microsoft.com/office/powerpoint/2010/main" xmlns:p15="http://schemas.microsoft.com/office/powerpoint/2012/main" xmlns:ahyp="http://schemas.microsoft.com/office/drawing/2018/hyperlinkcolor" showMasterPhAnim="0" showMasterSp="0">
+<p:notes xmlns:a="http://schemas.openxmlformats.org/drawingml/2006/main" xmlns:r="http://schemas.openxmlformats.org/officeDocument/2006/relationships" xmlns:p="http://schemas.openxmlformats.org/presentationml/2006/main" showMasterSp="0" showMasterPhAnim="0">
   <p:cSld>
     <p:spTree>
       <p:nvGrpSpPr>
-        <p:cNvPr id="62" name="Shape 62"/>
+        <p:cNvPr id="1" name="Shape 62"/>
         <p:cNvGrpSpPr/>
         <p:nvPr/>
       </p:nvGrpSpPr>
@@ -2720,9 +2835,11 @@
       <p:sp>
         <p:nvSpPr>
           <p:cNvPr id="63" name="Google Shape;63;g3f7115e0595_0_6:notes"/>
-          <p:cNvSpPr/>
+          <p:cNvSpPr>
+            <a:spLocks noGrp="1" noRot="1" noChangeAspect="1"/>
+          </p:cNvSpPr>
           <p:nvPr>
-            <p:ph idx="2" type="sldImg"/>
+            <p:ph type="sldImg" idx="2"/>
           </p:nvPr>
         </p:nvSpPr>
         <p:spPr>
@@ -2731,9 +2848,13 @@
             <a:ext cx="6096000" cy="3429000"/>
           </a:xfrm>
           <a:custGeom>
-            <a:rect b="b" l="l" r="r" t="t"/>
+            <a:avLst/>
+            <a:gdLst/>
+            <a:ahLst/>
+            <a:cxnLst/>
+            <a:rect l="l" t="t" r="r" b="b"/>
             <a:pathLst>
-              <a:path extrusionOk="0" h="120000" w="120000">
+              <a:path w="120000" h="120000" extrusionOk="0">
                 <a:moveTo>
                   <a:pt x="0" y="0"/>
                 </a:moveTo>
@@ -2755,9 +2876,11 @@
       <p:sp>
         <p:nvSpPr>
           <p:cNvPr id="64" name="Google Shape;64;g3f7115e0595_0_6:notes"/>
-          <p:cNvSpPr txBox="1"/>
+          <p:cNvSpPr txBox="1">
+            <a:spLocks noGrp="1"/>
+          </p:cNvSpPr>
           <p:nvPr>
-            <p:ph idx="1" type="body"/>
+            <p:ph type="body" idx="1"/>
           </p:nvPr>
         </p:nvSpPr>
         <p:spPr>
@@ -2770,12 +2893,12 @@
           </a:prstGeom>
         </p:spPr>
         <p:txBody>
-          <a:bodyPr anchorCtr="0" anchor="t" bIns="91425" lIns="91425" spcFirstLastPara="1" rIns="91425" wrap="square" tIns="91425">
+          <a:bodyPr spcFirstLastPara="1" wrap="square" lIns="91425" tIns="91425" rIns="91425" bIns="91425" anchor="t" anchorCtr="0">
             <a:noAutofit/>
           </a:bodyPr>
           <a:lstStyle/>
           <a:p>
-            <a:pPr indent="0" lvl="0" marL="0" rtl="0" algn="l">
+            <a:pPr marL="0" lvl="0" indent="0" algn="l" rtl="0">
               <a:spcBef>
                 <a:spcPts val="0"/>
               </a:spcBef>
@@ -2784,9 +2907,6 @@
               </a:spcAft>
               <a:buNone/>
             </a:pPr>
-            <a:r>
-              <a:t/>
-            </a:r>
             <a:endParaRPr/>
           </a:p>
         </p:txBody>
@@ -2800,11 +2920,11 @@
 </file>
 
 <file path=ppt/notesSlides/notesSlide5.xml><?xml version="1.0" encoding="utf-8"?>
-<p:notes xmlns:a="http://schemas.openxmlformats.org/drawingml/2006/main" xmlns:r="http://schemas.openxmlformats.org/officeDocument/2006/relationships" xmlns:mc="http://schemas.openxmlformats.org/markup-compatibility/2006" xmlns:mv="urn:schemas-microsoft-com:mac:vml" xmlns:p="http://schemas.openxmlformats.org/presentationml/2006/main" xmlns:c="http://schemas.openxmlformats.org/drawingml/2006/chart" xmlns:dgm="http://schemas.openxmlformats.org/drawingml/2006/diagram" xmlns:o="urn:schemas-microsoft-com:office:office" xmlns:v="urn:schemas-microsoft-com:vml" xmlns:pvml="urn:schemas-microsoft-com:office:powerpoint" xmlns:com="http://schemas.openxmlformats.org/drawingml/2006/compatibility" xmlns:p14="http://schemas.microsoft.com/office/powerpoint/2010/main" xmlns:p15="http://schemas.microsoft.com/office/powerpoint/2012/main" xmlns:ahyp="http://schemas.microsoft.com/office/drawing/2018/hyperlinkcolor" showMasterPhAnim="0" showMasterSp="0">
+<p:notes xmlns:a="http://schemas.openxmlformats.org/drawingml/2006/main" xmlns:r="http://schemas.openxmlformats.org/officeDocument/2006/relationships" xmlns:p="http://schemas.openxmlformats.org/presentationml/2006/main" showMasterSp="0" showMasterPhAnim="0">
   <p:cSld>
     <p:spTree>
       <p:nvGrpSpPr>
-        <p:cNvPr id="73" name="Shape 73"/>
+        <p:cNvPr id="1" name="Shape 73"/>
         <p:cNvGrpSpPr/>
         <p:nvPr/>
       </p:nvGrpSpPr>
@@ -2819,9 +2939,11 @@
       <p:sp>
         <p:nvSpPr>
           <p:cNvPr id="74" name="Google Shape;74;g3f7115e0595_0_16:notes"/>
-          <p:cNvSpPr/>
+          <p:cNvSpPr>
+            <a:spLocks noGrp="1" noRot="1" noChangeAspect="1"/>
+          </p:cNvSpPr>
           <p:nvPr>
-            <p:ph idx="2" type="sldImg"/>
+            <p:ph type="sldImg" idx="2"/>
           </p:nvPr>
         </p:nvSpPr>
         <p:spPr>
@@ -2830,9 +2952,13 @@
             <a:ext cx="6096000" cy="3429000"/>
           </a:xfrm>
           <a:custGeom>
-            <a:rect b="b" l="l" r="r" t="t"/>
+            <a:avLst/>
+            <a:gdLst/>
+            <a:ahLst/>
+            <a:cxnLst/>
+            <a:rect l="l" t="t" r="r" b="b"/>
             <a:pathLst>
-              <a:path extrusionOk="0" h="120000" w="120000">
+              <a:path w="120000" h="120000" extrusionOk="0">
                 <a:moveTo>
                   <a:pt x="0" y="0"/>
                 </a:moveTo>
@@ -2854,9 +2980,11 @@
       <p:sp>
         <p:nvSpPr>
           <p:cNvPr id="75" name="Google Shape;75;g3f7115e0595_0_16:notes"/>
-          <p:cNvSpPr txBox="1"/>
+          <p:cNvSpPr txBox="1">
+            <a:spLocks noGrp="1"/>
+          </p:cNvSpPr>
           <p:nvPr>
-            <p:ph idx="1" type="body"/>
+            <p:ph type="body" idx="1"/>
           </p:nvPr>
         </p:nvSpPr>
         <p:spPr>
@@ -2869,12 +2997,12 @@
           </a:prstGeom>
         </p:spPr>
         <p:txBody>
-          <a:bodyPr anchorCtr="0" anchor="t" bIns="91425" lIns="91425" spcFirstLastPara="1" rIns="91425" wrap="square" tIns="91425">
+          <a:bodyPr spcFirstLastPara="1" wrap="square" lIns="91425" tIns="91425" rIns="91425" bIns="91425" anchor="t" anchorCtr="0">
             <a:noAutofit/>
           </a:bodyPr>
           <a:lstStyle/>
           <a:p>
-            <a:pPr indent="0" lvl="0" marL="0" rtl="0" algn="l">
+            <a:pPr marL="0" lvl="0" indent="0" algn="l" rtl="0">
               <a:spcBef>
                 <a:spcPts val="0"/>
               </a:spcBef>
@@ -2883,9 +3011,6 @@
               </a:spcAft>
               <a:buNone/>
             </a:pPr>
-            <a:r>
-              <a:t/>
-            </a:r>
             <a:endParaRPr/>
           </a:p>
         </p:txBody>
@@ -2899,11 +3024,11 @@
 </file>
 
 <file path=ppt/notesSlides/notesSlide6.xml><?xml version="1.0" encoding="utf-8"?>
-<p:notes xmlns:a="http://schemas.openxmlformats.org/drawingml/2006/main" xmlns:r="http://schemas.openxmlformats.org/officeDocument/2006/relationships" xmlns:mc="http://schemas.openxmlformats.org/markup-compatibility/2006" xmlns:mv="urn:schemas-microsoft-com:mac:vml" xmlns:p="http://schemas.openxmlformats.org/presentationml/2006/main" xmlns:c="http://schemas.openxmlformats.org/drawingml/2006/chart" xmlns:dgm="http://schemas.openxmlformats.org/drawingml/2006/diagram" xmlns:o="urn:schemas-microsoft-com:office:office" xmlns:v="urn:schemas-microsoft-com:vml" xmlns:pvml="urn:schemas-microsoft-com:office:powerpoint" xmlns:com="http://schemas.openxmlformats.org/drawingml/2006/compatibility" xmlns:p14="http://schemas.microsoft.com/office/powerpoint/2010/main" xmlns:p15="http://schemas.microsoft.com/office/powerpoint/2012/main" xmlns:ahyp="http://schemas.microsoft.com/office/drawing/2018/hyperlinkcolor" showMasterPhAnim="0" showMasterSp="0">
+<p:notes xmlns:a="http://schemas.openxmlformats.org/drawingml/2006/main" xmlns:r="http://schemas.openxmlformats.org/officeDocument/2006/relationships" xmlns:p="http://schemas.openxmlformats.org/presentationml/2006/main" showMasterSp="0" showMasterPhAnim="0">
   <p:cSld>
     <p:spTree>
       <p:nvGrpSpPr>
-        <p:cNvPr id="80" name="Shape 80"/>
+        <p:cNvPr id="1" name="Shape 80"/>
         <p:cNvGrpSpPr/>
         <p:nvPr/>
       </p:nvGrpSpPr>
@@ -2918,20 +3043,26 @@
       <p:sp>
         <p:nvSpPr>
           <p:cNvPr id="81" name="Google Shape;81;g3f7115e0595_0_67:notes"/>
-          <p:cNvSpPr/>
+          <p:cNvSpPr>
+            <a:spLocks noGrp="1" noRot="1" noChangeAspect="1"/>
+          </p:cNvSpPr>
           <p:nvPr>
-            <p:ph idx="2" type="sldImg"/>
+            <p:ph type="sldImg" idx="2"/>
           </p:nvPr>
         </p:nvSpPr>
         <p:spPr>
           <a:xfrm>
-            <a:off x="381300" y="685800"/>
+            <a:off x="381000" y="685800"/>
             <a:ext cx="6096000" cy="3429000"/>
           </a:xfrm>
           <a:custGeom>
-            <a:rect b="b" l="l" r="r" t="t"/>
+            <a:avLst/>
+            <a:gdLst/>
+            <a:ahLst/>
+            <a:cxnLst/>
+            <a:rect l="l" t="t" r="r" b="b"/>
             <a:pathLst>
-              <a:path extrusionOk="0" h="120000" w="120000">
+              <a:path w="120000" h="120000" extrusionOk="0">
                 <a:moveTo>
                   <a:pt x="0" y="0"/>
                 </a:moveTo>
@@ -2953,9 +3084,11 @@
       <p:sp>
         <p:nvSpPr>
           <p:cNvPr id="82" name="Google Shape;82;g3f7115e0595_0_67:notes"/>
-          <p:cNvSpPr txBox="1"/>
+          <p:cNvSpPr txBox="1">
+            <a:spLocks noGrp="1"/>
+          </p:cNvSpPr>
           <p:nvPr>
-            <p:ph idx="1" type="body"/>
+            <p:ph type="body" idx="1"/>
           </p:nvPr>
         </p:nvSpPr>
         <p:spPr>
@@ -2968,12 +3101,12 @@
           </a:prstGeom>
         </p:spPr>
         <p:txBody>
-          <a:bodyPr anchorCtr="0" anchor="t" bIns="91425" lIns="91425" spcFirstLastPara="1" rIns="91425" wrap="square" tIns="91425">
+          <a:bodyPr spcFirstLastPara="1" wrap="square" lIns="91425" tIns="91425" rIns="91425" bIns="91425" anchor="t" anchorCtr="0">
             <a:noAutofit/>
           </a:bodyPr>
           <a:lstStyle/>
           <a:p>
-            <a:pPr indent="0" lvl="0" marL="0" rtl="0" algn="l">
+            <a:pPr marL="0" lvl="0" indent="0" algn="l" rtl="0">
               <a:spcBef>
                 <a:spcPts val="0"/>
               </a:spcBef>
@@ -2982,9 +3115,6 @@
               </a:spcAft>
               <a:buNone/>
             </a:pPr>
-            <a:r>
-              <a:t/>
-            </a:r>
             <a:endParaRPr/>
           </a:p>
         </p:txBody>
@@ -2998,11 +3128,11 @@
 </file>
 
 <file path=ppt/notesSlides/notesSlide7.xml><?xml version="1.0" encoding="utf-8"?>
-<p:notes xmlns:a="http://schemas.openxmlformats.org/drawingml/2006/main" xmlns:r="http://schemas.openxmlformats.org/officeDocument/2006/relationships" xmlns:mc="http://schemas.openxmlformats.org/markup-compatibility/2006" xmlns:mv="urn:schemas-microsoft-com:mac:vml" xmlns:p="http://schemas.openxmlformats.org/presentationml/2006/main" xmlns:c="http://schemas.openxmlformats.org/drawingml/2006/chart" xmlns:dgm="http://schemas.openxmlformats.org/drawingml/2006/diagram" xmlns:o="urn:schemas-microsoft-com:office:office" xmlns:v="urn:schemas-microsoft-com:vml" xmlns:pvml="urn:schemas-microsoft-com:office:powerpoint" xmlns:com="http://schemas.openxmlformats.org/drawingml/2006/compatibility" xmlns:p14="http://schemas.microsoft.com/office/powerpoint/2010/main" xmlns:p15="http://schemas.microsoft.com/office/powerpoint/2012/main" xmlns:ahyp="http://schemas.microsoft.com/office/drawing/2018/hyperlinkcolor" showMasterPhAnim="0" showMasterSp="0">
+<p:notes xmlns:a="http://schemas.openxmlformats.org/drawingml/2006/main" xmlns:r="http://schemas.openxmlformats.org/officeDocument/2006/relationships" xmlns:p="http://schemas.openxmlformats.org/presentationml/2006/main" showMasterSp="0" showMasterPhAnim="0">
   <p:cSld>
     <p:spTree>
       <p:nvGrpSpPr>
-        <p:cNvPr id="84" name="Shape 84"/>
+        <p:cNvPr id="1" name="Shape 84"/>
         <p:cNvGrpSpPr/>
         <p:nvPr/>
       </p:nvGrpSpPr>
@@ -3017,9 +3147,11 @@
       <p:sp>
         <p:nvSpPr>
           <p:cNvPr id="85" name="Google Shape;85;g3f7115e0595_0_70:notes"/>
-          <p:cNvSpPr/>
+          <p:cNvSpPr>
+            <a:spLocks noGrp="1" noRot="1" noChangeAspect="1"/>
+          </p:cNvSpPr>
           <p:nvPr>
-            <p:ph idx="2" type="sldImg"/>
+            <p:ph type="sldImg" idx="2"/>
           </p:nvPr>
         </p:nvSpPr>
         <p:spPr>
@@ -3028,9 +3160,13 @@
             <a:ext cx="6096000" cy="3429000"/>
           </a:xfrm>
           <a:custGeom>
-            <a:rect b="b" l="l" r="r" t="t"/>
+            <a:avLst/>
+            <a:gdLst/>
+            <a:ahLst/>
+            <a:cxnLst/>
+            <a:rect l="l" t="t" r="r" b="b"/>
             <a:pathLst>
-              <a:path extrusionOk="0" h="120000" w="120000">
+              <a:path w="120000" h="120000" extrusionOk="0">
                 <a:moveTo>
                   <a:pt x="0" y="0"/>
                 </a:moveTo>
@@ -3052,9 +3188,11 @@
       <p:sp>
         <p:nvSpPr>
           <p:cNvPr id="86" name="Google Shape;86;g3f7115e0595_0_70:notes"/>
-          <p:cNvSpPr txBox="1"/>
+          <p:cNvSpPr txBox="1">
+            <a:spLocks noGrp="1"/>
+          </p:cNvSpPr>
           <p:nvPr>
-            <p:ph idx="1" type="body"/>
+            <p:ph type="body" idx="1"/>
           </p:nvPr>
         </p:nvSpPr>
         <p:spPr>
@@ -3067,12 +3205,12 @@
           </a:prstGeom>
         </p:spPr>
         <p:txBody>
-          <a:bodyPr anchorCtr="0" anchor="t" bIns="91425" lIns="91425" spcFirstLastPara="1" rIns="91425" wrap="square" tIns="91425">
+          <a:bodyPr spcFirstLastPara="1" wrap="square" lIns="91425" tIns="91425" rIns="91425" bIns="91425" anchor="t" anchorCtr="0">
             <a:noAutofit/>
           </a:bodyPr>
           <a:lstStyle/>
           <a:p>
-            <a:pPr indent="0" lvl="0" marL="0" rtl="0" algn="l">
+            <a:pPr marL="0" lvl="0" indent="0" algn="l" rtl="0">
               <a:spcBef>
                 <a:spcPts val="0"/>
               </a:spcBef>
@@ -3081,9 +3219,6 @@
               </a:spcAft>
               <a:buNone/>
             </a:pPr>
-            <a:r>
-              <a:t/>
-            </a:r>
             <a:endParaRPr/>
           </a:p>
         </p:txBody>
@@ -3097,11 +3232,11 @@
 </file>
 
 <file path=ppt/notesSlides/notesSlide8.xml><?xml version="1.0" encoding="utf-8"?>
-<p:notes xmlns:a="http://schemas.openxmlformats.org/drawingml/2006/main" xmlns:r="http://schemas.openxmlformats.org/officeDocument/2006/relationships" xmlns:mc="http://schemas.openxmlformats.org/markup-compatibility/2006" xmlns:mv="urn:schemas-microsoft-com:mac:vml" xmlns:p="http://schemas.openxmlformats.org/presentationml/2006/main" xmlns:c="http://schemas.openxmlformats.org/drawingml/2006/chart" xmlns:dgm="http://schemas.openxmlformats.org/drawingml/2006/diagram" xmlns:o="urn:schemas-microsoft-com:office:office" xmlns:v="urn:schemas-microsoft-com:vml" xmlns:pvml="urn:schemas-microsoft-com:office:powerpoint" xmlns:com="http://schemas.openxmlformats.org/drawingml/2006/compatibility" xmlns:p14="http://schemas.microsoft.com/office/powerpoint/2010/main" xmlns:p15="http://schemas.microsoft.com/office/powerpoint/2012/main" xmlns:ahyp="http://schemas.microsoft.com/office/drawing/2018/hyperlinkcolor" showMasterPhAnim="0" showMasterSp="0">
+<p:notes xmlns:a="http://schemas.openxmlformats.org/drawingml/2006/main" xmlns:r="http://schemas.openxmlformats.org/officeDocument/2006/relationships" xmlns:p="http://schemas.openxmlformats.org/presentationml/2006/main" showMasterSp="0" showMasterPhAnim="0">
   <p:cSld>
     <p:spTree>
       <p:nvGrpSpPr>
-        <p:cNvPr id="88" name="Shape 88"/>
+        <p:cNvPr id="1" name="Shape 88"/>
         <p:cNvGrpSpPr/>
         <p:nvPr/>
       </p:nvGrpSpPr>
@@ -3116,9 +3251,11 @@
       <p:sp>
         <p:nvSpPr>
           <p:cNvPr id="89" name="Google Shape;89;g3f7115e0595_0_73:notes"/>
-          <p:cNvSpPr/>
+          <p:cNvSpPr>
+            <a:spLocks noGrp="1" noRot="1" noChangeAspect="1"/>
+          </p:cNvSpPr>
           <p:nvPr>
-            <p:ph idx="2" type="sldImg"/>
+            <p:ph type="sldImg" idx="2"/>
           </p:nvPr>
         </p:nvSpPr>
         <p:spPr>
@@ -3127,9 +3264,13 @@
             <a:ext cx="6096000" cy="3429000"/>
           </a:xfrm>
           <a:custGeom>
-            <a:rect b="b" l="l" r="r" t="t"/>
+            <a:avLst/>
+            <a:gdLst/>
+            <a:ahLst/>
+            <a:cxnLst/>
+            <a:rect l="l" t="t" r="r" b="b"/>
             <a:pathLst>
-              <a:path extrusionOk="0" h="120000" w="120000">
+              <a:path w="120000" h="120000" extrusionOk="0">
                 <a:moveTo>
                   <a:pt x="0" y="0"/>
                 </a:moveTo>
@@ -3151,9 +3292,11 @@
       <p:sp>
         <p:nvSpPr>
           <p:cNvPr id="90" name="Google Shape;90;g3f7115e0595_0_73:notes"/>
-          <p:cNvSpPr txBox="1"/>
+          <p:cNvSpPr txBox="1">
+            <a:spLocks noGrp="1"/>
+          </p:cNvSpPr>
           <p:nvPr>
-            <p:ph idx="1" type="body"/>
+            <p:ph type="body" idx="1"/>
           </p:nvPr>
         </p:nvSpPr>
         <p:spPr>
@@ -3166,12 +3309,12 @@
           </a:prstGeom>
         </p:spPr>
         <p:txBody>
-          <a:bodyPr anchorCtr="0" anchor="t" bIns="91425" lIns="91425" spcFirstLastPara="1" rIns="91425" wrap="square" tIns="91425">
+          <a:bodyPr spcFirstLastPara="1" wrap="square" lIns="91425" tIns="91425" rIns="91425" bIns="91425" anchor="t" anchorCtr="0">
             <a:noAutofit/>
           </a:bodyPr>
           <a:lstStyle/>
           <a:p>
-            <a:pPr indent="0" lvl="0" marL="0" rtl="0" algn="l">
+            <a:pPr marL="0" lvl="0" indent="0" algn="l" rtl="0">
               <a:spcBef>
                 <a:spcPts val="0"/>
               </a:spcBef>
@@ -3180,9 +3323,6 @@
               </a:spcAft>
               <a:buNone/>
             </a:pPr>
-            <a:r>
-              <a:t/>
-            </a:r>
             <a:endParaRPr/>
           </a:p>
         </p:txBody>
@@ -3196,11 +3336,11 @@
 </file>
 
 <file path=ppt/notesSlides/notesSlide9.xml><?xml version="1.0" encoding="utf-8"?>
-<p:notes xmlns:a="http://schemas.openxmlformats.org/drawingml/2006/main" xmlns:r="http://schemas.openxmlformats.org/officeDocument/2006/relationships" xmlns:mc="http://schemas.openxmlformats.org/markup-compatibility/2006" xmlns:mv="urn:schemas-microsoft-com:mac:vml" xmlns:p="http://schemas.openxmlformats.org/presentationml/2006/main" xmlns:c="http://schemas.openxmlformats.org/drawingml/2006/chart" xmlns:dgm="http://schemas.openxmlformats.org/drawingml/2006/diagram" xmlns:o="urn:schemas-microsoft-com:office:office" xmlns:v="urn:schemas-microsoft-com:vml" xmlns:pvml="urn:schemas-microsoft-com:office:powerpoint" xmlns:com="http://schemas.openxmlformats.org/drawingml/2006/compatibility" xmlns:p14="http://schemas.microsoft.com/office/powerpoint/2010/main" xmlns:p15="http://schemas.microsoft.com/office/powerpoint/2012/main" xmlns:ahyp="http://schemas.microsoft.com/office/drawing/2018/hyperlinkcolor" showMasterPhAnim="0" showMasterSp="0">
+<p:notes xmlns:a="http://schemas.openxmlformats.org/drawingml/2006/main" xmlns:r="http://schemas.openxmlformats.org/officeDocument/2006/relationships" xmlns:p="http://schemas.openxmlformats.org/presentationml/2006/main" showMasterSp="0" showMasterPhAnim="0">
   <p:cSld>
     <p:spTree>
       <p:nvGrpSpPr>
-        <p:cNvPr id="99" name="Shape 99"/>
+        <p:cNvPr id="1" name="Shape 99"/>
         <p:cNvGrpSpPr/>
         <p:nvPr/>
       </p:nvGrpSpPr>
@@ -3215,9 +3355,11 @@
       <p:sp>
         <p:nvSpPr>
           <p:cNvPr id="100" name="Google Shape;100;g3f7115e0595_0_83:notes"/>
-          <p:cNvSpPr/>
+          <p:cNvSpPr>
+            <a:spLocks noGrp="1" noRot="1" noChangeAspect="1"/>
+          </p:cNvSpPr>
           <p:nvPr>
-            <p:ph idx="2" type="sldImg"/>
+            <p:ph type="sldImg" idx="2"/>
           </p:nvPr>
         </p:nvSpPr>
         <p:spPr>
@@ -3226,9 +3368,13 @@
             <a:ext cx="6096000" cy="3429000"/>
           </a:xfrm>
           <a:custGeom>
-            <a:rect b="b" l="l" r="r" t="t"/>
+            <a:avLst/>
+            <a:gdLst/>
+            <a:ahLst/>
+            <a:cxnLst/>
+            <a:rect l="l" t="t" r="r" b="b"/>
             <a:pathLst>
-              <a:path extrusionOk="0" h="120000" w="120000">
+              <a:path w="120000" h="120000" extrusionOk="0">
                 <a:moveTo>
                   <a:pt x="0" y="0"/>
                 </a:moveTo>
@@ -3250,9 +3396,11 @@
       <p:sp>
         <p:nvSpPr>
           <p:cNvPr id="101" name="Google Shape;101;g3f7115e0595_0_83:notes"/>
-          <p:cNvSpPr txBox="1"/>
+          <p:cNvSpPr txBox="1">
+            <a:spLocks noGrp="1"/>
+          </p:cNvSpPr>
           <p:nvPr>
-            <p:ph idx="1" type="body"/>
+            <p:ph type="body" idx="1"/>
           </p:nvPr>
         </p:nvSpPr>
         <p:spPr>
@@ -3265,12 +3413,12 @@
           </a:prstGeom>
         </p:spPr>
         <p:txBody>
-          <a:bodyPr anchorCtr="0" anchor="t" bIns="91425" lIns="91425" spcFirstLastPara="1" rIns="91425" wrap="square" tIns="91425">
+          <a:bodyPr spcFirstLastPara="1" wrap="square" lIns="91425" tIns="91425" rIns="91425" bIns="91425" anchor="t" anchorCtr="0">
             <a:noAutofit/>
           </a:bodyPr>
           <a:lstStyle/>
           <a:p>
-            <a:pPr indent="0" lvl="0" marL="0" rtl="0" algn="l">
+            <a:pPr marL="0" lvl="0" indent="0" algn="l" rtl="0">
               <a:spcBef>
                 <a:spcPts val="0"/>
               </a:spcBef>
@@ -3279,9 +3427,6 @@
               </a:spcAft>
               <a:buNone/>
             </a:pPr>
-            <a:r>
-              <a:t/>
-            </a:r>
             <a:endParaRPr/>
           </a:p>
         </p:txBody>
@@ -3295,11 +3440,11 @@
 </file>
 
 <file path=ppt/slideLayouts/slideLayout1.xml><?xml version="1.0" encoding="utf-8"?>
-<p:sldLayout xmlns:a="http://schemas.openxmlformats.org/drawingml/2006/main" xmlns:r="http://schemas.openxmlformats.org/officeDocument/2006/relationships" xmlns:mc="http://schemas.openxmlformats.org/markup-compatibility/2006" xmlns:mv="urn:schemas-microsoft-com:mac:vml" xmlns:p="http://schemas.openxmlformats.org/presentationml/2006/main" xmlns:c="http://schemas.openxmlformats.org/drawingml/2006/chart" xmlns:dgm="http://schemas.openxmlformats.org/drawingml/2006/diagram" xmlns:o="urn:schemas-microsoft-com:office:office" xmlns:v="urn:schemas-microsoft-com:vml" xmlns:pvml="urn:schemas-microsoft-com:office:powerpoint" xmlns:com="http://schemas.openxmlformats.org/drawingml/2006/compatibility" xmlns:p14="http://schemas.microsoft.com/office/powerpoint/2010/main" xmlns:p15="http://schemas.microsoft.com/office/powerpoint/2012/main" xmlns:ahyp="http://schemas.microsoft.com/office/drawing/2018/hyperlinkcolor" matchingName="Title slide" type="title">
+<p:sldLayout xmlns:a="http://schemas.openxmlformats.org/drawingml/2006/main" xmlns:r="http://schemas.openxmlformats.org/officeDocument/2006/relationships" xmlns:p="http://schemas.openxmlformats.org/presentationml/2006/main" matchingName="Title slide" type="title">
   <p:cSld name="TITLE">
     <p:spTree>
       <p:nvGrpSpPr>
-        <p:cNvPr id="9" name="Shape 9"/>
+        <p:cNvPr id="1" name="Shape 9"/>
         <p:cNvGrpSpPr/>
         <p:nvPr/>
       </p:nvGrpSpPr>
@@ -3314,7 +3459,9 @@
       <p:sp>
         <p:nvSpPr>
           <p:cNvPr id="10" name="Google Shape;10;p2"/>
-          <p:cNvSpPr txBox="1"/>
+          <p:cNvSpPr txBox="1">
+            <a:spLocks noGrp="1"/>
+          </p:cNvSpPr>
           <p:nvPr>
             <p:ph type="ctrTitle"/>
           </p:nvPr>
@@ -3329,7 +3476,7 @@
           </a:prstGeom>
         </p:spPr>
         <p:txBody>
-          <a:bodyPr anchorCtr="0" anchor="b" bIns="91425" lIns="91425" spcFirstLastPara="1" rIns="91425" wrap="square" tIns="91425">
+          <a:bodyPr spcFirstLastPara="1" wrap="square" lIns="91425" tIns="91425" rIns="91425" bIns="91425" anchor="b" anchorCtr="0">
             <a:normAutofit/>
           </a:bodyPr>
           <a:lstStyle>
@@ -3433,15 +3580,19 @@
               <a:defRPr sz="5200"/>
             </a:lvl9pPr>
           </a:lstStyle>
-          <a:p/>
+          <a:p>
+            <a:endParaRPr/>
+          </a:p>
         </p:txBody>
       </p:sp>
       <p:sp>
         <p:nvSpPr>
           <p:cNvPr id="11" name="Google Shape;11;p2"/>
-          <p:cNvSpPr txBox="1"/>
+          <p:cNvSpPr txBox="1">
+            <a:spLocks noGrp="1"/>
+          </p:cNvSpPr>
           <p:nvPr>
-            <p:ph idx="1" type="subTitle"/>
+            <p:ph type="subTitle" idx="1"/>
           </p:nvPr>
         </p:nvSpPr>
         <p:spPr>
@@ -3454,7 +3605,7 @@
           </a:prstGeom>
         </p:spPr>
         <p:txBody>
-          <a:bodyPr anchorCtr="0" anchor="t" bIns="91425" lIns="91425" spcFirstLastPara="1" rIns="91425" wrap="square" tIns="91425">
+          <a:bodyPr spcFirstLastPara="1" wrap="square" lIns="91425" tIns="91425" rIns="91425" bIns="91425" anchor="t" anchorCtr="0">
             <a:normAutofit/>
           </a:bodyPr>
           <a:lstStyle>
@@ -3585,15 +3736,19 @@
               <a:defRPr sz="2800"/>
             </a:lvl9pPr>
           </a:lstStyle>
-          <a:p/>
+          <a:p>
+            <a:endParaRPr/>
+          </a:p>
         </p:txBody>
       </p:sp>
       <p:sp>
         <p:nvSpPr>
           <p:cNvPr id="12" name="Google Shape;12;p2"/>
-          <p:cNvSpPr txBox="1"/>
+          <p:cNvSpPr txBox="1">
+            <a:spLocks noGrp="1"/>
+          </p:cNvSpPr>
           <p:nvPr>
-            <p:ph idx="12" type="sldNum"/>
+            <p:ph type="sldNum" idx="12"/>
           </p:nvPr>
         </p:nvSpPr>
         <p:spPr>
@@ -3606,7 +3761,7 @@
           </a:prstGeom>
         </p:spPr>
         <p:txBody>
-          <a:bodyPr anchorCtr="0" anchor="ctr" bIns="91425" lIns="91425" spcFirstLastPara="1" rIns="91425" wrap="square" tIns="91425">
+          <a:bodyPr spcFirstLastPara="1" wrap="square" lIns="91425" tIns="91425" rIns="91425" bIns="91425" anchor="ctr" anchorCtr="0">
             <a:normAutofit/>
           </a:bodyPr>
           <a:lstStyle>
@@ -3648,7 +3803,7 @@
             </a:lvl9pPr>
           </a:lstStyle>
           <a:p>
-            <a:pPr indent="0" lvl="0" marL="0" rtl="0" algn="r">
+            <a:pPr marL="0" lvl="0" indent="0" algn="r" rtl="0">
               <a:spcBef>
                 <a:spcPts val="0"/>
               </a:spcBef>
@@ -3674,11 +3829,11 @@
 </file>
 
 <file path=ppt/slideLayouts/slideLayout10.xml><?xml version="1.0" encoding="utf-8"?>
-<p:sldLayout xmlns:a="http://schemas.openxmlformats.org/drawingml/2006/main" xmlns:r="http://schemas.openxmlformats.org/officeDocument/2006/relationships" xmlns:mc="http://schemas.openxmlformats.org/markup-compatibility/2006" xmlns:mv="urn:schemas-microsoft-com:mac:vml" xmlns:p="http://schemas.openxmlformats.org/presentationml/2006/main" xmlns:c="http://schemas.openxmlformats.org/drawingml/2006/chart" xmlns:dgm="http://schemas.openxmlformats.org/drawingml/2006/diagram" xmlns:o="urn:schemas-microsoft-com:office:office" xmlns:v="urn:schemas-microsoft-com:vml" xmlns:pvml="urn:schemas-microsoft-com:office:powerpoint" xmlns:com="http://schemas.openxmlformats.org/drawingml/2006/compatibility" xmlns:p14="http://schemas.microsoft.com/office/powerpoint/2010/main" xmlns:p15="http://schemas.microsoft.com/office/powerpoint/2012/main" xmlns:ahyp="http://schemas.microsoft.com/office/drawing/2018/hyperlinkcolor" matchingName="Big number">
+<p:sldLayout xmlns:a="http://schemas.openxmlformats.org/drawingml/2006/main" xmlns:r="http://schemas.openxmlformats.org/officeDocument/2006/relationships" xmlns:p="http://schemas.openxmlformats.org/presentationml/2006/main" matchingName="Big number">
   <p:cSld name="BIG_NUMBER">
     <p:spTree>
       <p:nvGrpSpPr>
-        <p:cNvPr id="44" name="Shape 44"/>
+        <p:cNvPr id="1" name="Shape 44"/>
         <p:cNvGrpSpPr/>
         <p:nvPr/>
       </p:nvGrpSpPr>
@@ -3693,9 +3848,11 @@
       <p:sp>
         <p:nvSpPr>
           <p:cNvPr id="45" name="Google Shape;45;p11"/>
-          <p:cNvSpPr txBox="1"/>
+          <p:cNvSpPr txBox="1">
+            <a:spLocks noGrp="1"/>
+          </p:cNvSpPr>
           <p:nvPr>
-            <p:ph hasCustomPrompt="1" type="title"/>
+            <p:ph type="title" hasCustomPrompt="1"/>
           </p:nvPr>
         </p:nvSpPr>
         <p:spPr>
@@ -3708,7 +3865,7 @@
           </a:prstGeom>
         </p:spPr>
         <p:txBody>
-          <a:bodyPr anchorCtr="0" anchor="b" bIns="91425" lIns="91425" spcFirstLastPara="1" rIns="91425" wrap="square" tIns="91425">
+          <a:bodyPr spcFirstLastPara="1" wrap="square" lIns="91425" tIns="91425" rIns="91425" bIns="91425" anchor="b" anchorCtr="0">
             <a:normAutofit/>
           </a:bodyPr>
           <a:lstStyle>
@@ -3822,9 +3979,11 @@
       <p:sp>
         <p:nvSpPr>
           <p:cNvPr id="46" name="Google Shape;46;p11"/>
-          <p:cNvSpPr txBox="1"/>
+          <p:cNvSpPr txBox="1">
+            <a:spLocks noGrp="1"/>
+          </p:cNvSpPr>
           <p:nvPr>
-            <p:ph idx="1" type="body"/>
+            <p:ph type="body" idx="1"/>
           </p:nvPr>
         </p:nvSpPr>
         <p:spPr>
@@ -3837,11 +3996,11 @@
           </a:prstGeom>
         </p:spPr>
         <p:txBody>
-          <a:bodyPr anchorCtr="0" anchor="t" bIns="91425" lIns="91425" spcFirstLastPara="1" rIns="91425" wrap="square" tIns="91425">
+          <a:bodyPr spcFirstLastPara="1" wrap="square" lIns="91425" tIns="91425" rIns="91425" bIns="91425" anchor="t" anchorCtr="0">
             <a:normAutofit/>
           </a:bodyPr>
           <a:lstStyle>
-            <a:lvl1pPr indent="-342900" lvl="0" marL="457200" algn="ctr">
+            <a:lvl1pPr marL="457200" lvl="0" indent="-342900" algn="ctr">
               <a:spcBef>
                 <a:spcPts val="0"/>
               </a:spcBef>
@@ -3852,7 +4011,7 @@
               <a:buChar char="●"/>
               <a:defRPr/>
             </a:lvl1pPr>
-            <a:lvl2pPr indent="-317500" lvl="1" marL="914400" algn="ctr">
+            <a:lvl2pPr marL="914400" lvl="1" indent="-317500" algn="ctr">
               <a:spcBef>
                 <a:spcPts val="0"/>
               </a:spcBef>
@@ -3863,7 +4022,7 @@
               <a:buChar char="○"/>
               <a:defRPr/>
             </a:lvl2pPr>
-            <a:lvl3pPr indent="-317500" lvl="2" marL="1371600" algn="ctr">
+            <a:lvl3pPr marL="1371600" lvl="2" indent="-317500" algn="ctr">
               <a:spcBef>
                 <a:spcPts val="0"/>
               </a:spcBef>
@@ -3874,7 +4033,7 @@
               <a:buChar char="■"/>
               <a:defRPr/>
             </a:lvl3pPr>
-            <a:lvl4pPr indent="-317500" lvl="3" marL="1828800" algn="ctr">
+            <a:lvl4pPr marL="1828800" lvl="3" indent="-317500" algn="ctr">
               <a:spcBef>
                 <a:spcPts val="0"/>
               </a:spcBef>
@@ -3885,7 +4044,7 @@
               <a:buChar char="●"/>
               <a:defRPr/>
             </a:lvl4pPr>
-            <a:lvl5pPr indent="-317500" lvl="4" marL="2286000" algn="ctr">
+            <a:lvl5pPr marL="2286000" lvl="4" indent="-317500" algn="ctr">
               <a:spcBef>
                 <a:spcPts val="0"/>
               </a:spcBef>
@@ -3896,7 +4055,7 @@
               <a:buChar char="○"/>
               <a:defRPr/>
             </a:lvl5pPr>
-            <a:lvl6pPr indent="-317500" lvl="5" marL="2743200" algn="ctr">
+            <a:lvl6pPr marL="2743200" lvl="5" indent="-317500" algn="ctr">
               <a:spcBef>
                 <a:spcPts val="0"/>
               </a:spcBef>
@@ -3907,7 +4066,7 @@
               <a:buChar char="■"/>
               <a:defRPr/>
             </a:lvl6pPr>
-            <a:lvl7pPr indent="-317500" lvl="6" marL="3200400" algn="ctr">
+            <a:lvl7pPr marL="3200400" lvl="6" indent="-317500" algn="ctr">
               <a:spcBef>
                 <a:spcPts val="0"/>
               </a:spcBef>
@@ -3918,7 +4077,7 @@
               <a:buChar char="●"/>
               <a:defRPr/>
             </a:lvl7pPr>
-            <a:lvl8pPr indent="-317500" lvl="7" marL="3657600" algn="ctr">
+            <a:lvl8pPr marL="3657600" lvl="7" indent="-317500" algn="ctr">
               <a:spcBef>
                 <a:spcPts val="0"/>
               </a:spcBef>
@@ -3929,7 +4088,7 @@
               <a:buChar char="○"/>
               <a:defRPr/>
             </a:lvl8pPr>
-            <a:lvl9pPr indent="-317500" lvl="8" marL="4114800" algn="ctr">
+            <a:lvl9pPr marL="4114800" lvl="8" indent="-317500" algn="ctr">
               <a:spcBef>
                 <a:spcPts val="0"/>
               </a:spcBef>
@@ -3941,15 +4100,19 @@
               <a:defRPr/>
             </a:lvl9pPr>
           </a:lstStyle>
-          <a:p/>
+          <a:p>
+            <a:endParaRPr/>
+          </a:p>
         </p:txBody>
       </p:sp>
       <p:sp>
         <p:nvSpPr>
           <p:cNvPr id="47" name="Google Shape;47;p11"/>
-          <p:cNvSpPr txBox="1"/>
+          <p:cNvSpPr txBox="1">
+            <a:spLocks noGrp="1"/>
+          </p:cNvSpPr>
           <p:nvPr>
-            <p:ph idx="12" type="sldNum"/>
+            <p:ph type="sldNum" idx="12"/>
           </p:nvPr>
         </p:nvSpPr>
         <p:spPr>
@@ -3962,7 +4125,7 @@
           </a:prstGeom>
         </p:spPr>
         <p:txBody>
-          <a:bodyPr anchorCtr="0" anchor="ctr" bIns="91425" lIns="91425" spcFirstLastPara="1" rIns="91425" wrap="square" tIns="91425">
+          <a:bodyPr spcFirstLastPara="1" wrap="square" lIns="91425" tIns="91425" rIns="91425" bIns="91425" anchor="ctr" anchorCtr="0">
             <a:normAutofit/>
           </a:bodyPr>
           <a:lstStyle>
@@ -4004,7 +4167,7 @@
             </a:lvl9pPr>
           </a:lstStyle>
           <a:p>
-            <a:pPr indent="0" lvl="0" marL="0" rtl="0" algn="r">
+            <a:pPr marL="0" lvl="0" indent="0" algn="r" rtl="0">
               <a:spcBef>
                 <a:spcPts val="0"/>
               </a:spcBef>
@@ -4030,11 +4193,11 @@
 </file>
 
 <file path=ppt/slideLayouts/slideLayout11.xml><?xml version="1.0" encoding="utf-8"?>
-<p:sldLayout xmlns:a="http://schemas.openxmlformats.org/drawingml/2006/main" xmlns:r="http://schemas.openxmlformats.org/officeDocument/2006/relationships" xmlns:mc="http://schemas.openxmlformats.org/markup-compatibility/2006" xmlns:mv="urn:schemas-microsoft-com:mac:vml" xmlns:p="http://schemas.openxmlformats.org/presentationml/2006/main" xmlns:c="http://schemas.openxmlformats.org/drawingml/2006/chart" xmlns:dgm="http://schemas.openxmlformats.org/drawingml/2006/diagram" xmlns:o="urn:schemas-microsoft-com:office:office" xmlns:v="urn:schemas-microsoft-com:vml" xmlns:pvml="urn:schemas-microsoft-com:office:powerpoint" xmlns:com="http://schemas.openxmlformats.org/drawingml/2006/compatibility" xmlns:p14="http://schemas.microsoft.com/office/powerpoint/2010/main" xmlns:p15="http://schemas.microsoft.com/office/powerpoint/2012/main" xmlns:ahyp="http://schemas.microsoft.com/office/drawing/2018/hyperlinkcolor" matchingName="Blank" type="blank">
+<p:sldLayout xmlns:a="http://schemas.openxmlformats.org/drawingml/2006/main" xmlns:r="http://schemas.openxmlformats.org/officeDocument/2006/relationships" xmlns:p="http://schemas.openxmlformats.org/presentationml/2006/main" matchingName="Blank" type="blank">
   <p:cSld name="BLANK">
     <p:spTree>
       <p:nvGrpSpPr>
-        <p:cNvPr id="48" name="Shape 48"/>
+        <p:cNvPr id="1" name="Shape 48"/>
         <p:cNvGrpSpPr/>
         <p:nvPr/>
       </p:nvGrpSpPr>
@@ -4049,9 +4212,11 @@
       <p:sp>
         <p:nvSpPr>
           <p:cNvPr id="49" name="Google Shape;49;p12"/>
-          <p:cNvSpPr txBox="1"/>
+          <p:cNvSpPr txBox="1">
+            <a:spLocks noGrp="1"/>
+          </p:cNvSpPr>
           <p:nvPr>
-            <p:ph idx="12" type="sldNum"/>
+            <p:ph type="sldNum" idx="12"/>
           </p:nvPr>
         </p:nvSpPr>
         <p:spPr>
@@ -4064,7 +4229,7 @@
           </a:prstGeom>
         </p:spPr>
         <p:txBody>
-          <a:bodyPr anchorCtr="0" anchor="ctr" bIns="91425" lIns="91425" spcFirstLastPara="1" rIns="91425" wrap="square" tIns="91425">
+          <a:bodyPr spcFirstLastPara="1" wrap="square" lIns="91425" tIns="91425" rIns="91425" bIns="91425" anchor="ctr" anchorCtr="0">
             <a:normAutofit/>
           </a:bodyPr>
           <a:lstStyle>
@@ -4106,7 +4271,7 @@
             </a:lvl9pPr>
           </a:lstStyle>
           <a:p>
-            <a:pPr indent="0" lvl="0" marL="0" rtl="0" algn="r">
+            <a:pPr marL="0" lvl="0" indent="0" algn="r" rtl="0">
               <a:spcBef>
                 <a:spcPts val="0"/>
               </a:spcBef>
@@ -4132,11 +4297,11 @@
 </file>
 
 <file path=ppt/slideLayouts/slideLayout2.xml><?xml version="1.0" encoding="utf-8"?>
-<p:sldLayout xmlns:a="http://schemas.openxmlformats.org/drawingml/2006/main" xmlns:r="http://schemas.openxmlformats.org/officeDocument/2006/relationships" xmlns:mc="http://schemas.openxmlformats.org/markup-compatibility/2006" xmlns:mv="urn:schemas-microsoft-com:mac:vml" xmlns:p="http://schemas.openxmlformats.org/presentationml/2006/main" xmlns:c="http://schemas.openxmlformats.org/drawingml/2006/chart" xmlns:dgm="http://schemas.openxmlformats.org/drawingml/2006/diagram" xmlns:o="urn:schemas-microsoft-com:office:office" xmlns:v="urn:schemas-microsoft-com:vml" xmlns:pvml="urn:schemas-microsoft-com:office:powerpoint" xmlns:com="http://schemas.openxmlformats.org/drawingml/2006/compatibility" xmlns:p14="http://schemas.microsoft.com/office/powerpoint/2010/main" xmlns:p15="http://schemas.microsoft.com/office/powerpoint/2012/main" xmlns:ahyp="http://schemas.microsoft.com/office/drawing/2018/hyperlinkcolor" matchingName="Section header" type="secHead">
+<p:sldLayout xmlns:a="http://schemas.openxmlformats.org/drawingml/2006/main" xmlns:r="http://schemas.openxmlformats.org/officeDocument/2006/relationships" xmlns:p="http://schemas.openxmlformats.org/presentationml/2006/main" matchingName="Section header" type="secHead">
   <p:cSld name="SECTION_HEADER">
     <p:spTree>
       <p:nvGrpSpPr>
-        <p:cNvPr id="13" name="Shape 13"/>
+        <p:cNvPr id="1" name="Shape 13"/>
         <p:cNvGrpSpPr/>
         <p:nvPr/>
       </p:nvGrpSpPr>
@@ -4151,7 +4316,9 @@
       <p:sp>
         <p:nvSpPr>
           <p:cNvPr id="14" name="Google Shape;14;p3"/>
-          <p:cNvSpPr txBox="1"/>
+          <p:cNvSpPr txBox="1">
+            <a:spLocks noGrp="1"/>
+          </p:cNvSpPr>
           <p:nvPr>
             <p:ph type="title"/>
           </p:nvPr>
@@ -4166,7 +4333,7 @@
           </a:prstGeom>
         </p:spPr>
         <p:txBody>
-          <a:bodyPr anchorCtr="0" anchor="ctr" bIns="91425" lIns="91425" spcFirstLastPara="1" rIns="91425" wrap="square" tIns="91425">
+          <a:bodyPr spcFirstLastPara="1" wrap="square" lIns="91425" tIns="91425" rIns="91425" bIns="91425" anchor="ctr" anchorCtr="0">
             <a:normAutofit/>
           </a:bodyPr>
           <a:lstStyle>
@@ -4270,15 +4437,19 @@
               <a:defRPr sz="3600"/>
             </a:lvl9pPr>
           </a:lstStyle>
-          <a:p/>
+          <a:p>
+            <a:endParaRPr/>
+          </a:p>
         </p:txBody>
       </p:sp>
       <p:sp>
         <p:nvSpPr>
           <p:cNvPr id="15" name="Google Shape;15;p3"/>
-          <p:cNvSpPr txBox="1"/>
+          <p:cNvSpPr txBox="1">
+            <a:spLocks noGrp="1"/>
+          </p:cNvSpPr>
           <p:nvPr>
-            <p:ph idx="12" type="sldNum"/>
+            <p:ph type="sldNum" idx="12"/>
           </p:nvPr>
         </p:nvSpPr>
         <p:spPr>
@@ -4291,7 +4462,7 @@
           </a:prstGeom>
         </p:spPr>
         <p:txBody>
-          <a:bodyPr anchorCtr="0" anchor="ctr" bIns="91425" lIns="91425" spcFirstLastPara="1" rIns="91425" wrap="square" tIns="91425">
+          <a:bodyPr spcFirstLastPara="1" wrap="square" lIns="91425" tIns="91425" rIns="91425" bIns="91425" anchor="ctr" anchorCtr="0">
             <a:normAutofit/>
           </a:bodyPr>
           <a:lstStyle>
@@ -4333,7 +4504,7 @@
             </a:lvl9pPr>
           </a:lstStyle>
           <a:p>
-            <a:pPr indent="0" lvl="0" marL="0" rtl="0" algn="r">
+            <a:pPr marL="0" lvl="0" indent="0" algn="r" rtl="0">
               <a:spcBef>
                 <a:spcPts val="0"/>
               </a:spcBef>
@@ -4359,11 +4530,11 @@
 </file>
 
 <file path=ppt/slideLayouts/slideLayout3.xml><?xml version="1.0" encoding="utf-8"?>
-<p:sldLayout xmlns:a="http://schemas.openxmlformats.org/drawingml/2006/main" xmlns:r="http://schemas.openxmlformats.org/officeDocument/2006/relationships" xmlns:mc="http://schemas.openxmlformats.org/markup-compatibility/2006" xmlns:mv="urn:schemas-microsoft-com:mac:vml" xmlns:p="http://schemas.openxmlformats.org/presentationml/2006/main" xmlns:c="http://schemas.openxmlformats.org/drawingml/2006/chart" xmlns:dgm="http://schemas.openxmlformats.org/drawingml/2006/diagram" xmlns:o="urn:schemas-microsoft-com:office:office" xmlns:v="urn:schemas-microsoft-com:vml" xmlns:pvml="urn:schemas-microsoft-com:office:powerpoint" xmlns:com="http://schemas.openxmlformats.org/drawingml/2006/compatibility" xmlns:p14="http://schemas.microsoft.com/office/powerpoint/2010/main" xmlns:p15="http://schemas.microsoft.com/office/powerpoint/2012/main" xmlns:ahyp="http://schemas.microsoft.com/office/drawing/2018/hyperlinkcolor" matchingName="Title and body" type="tx">
+<p:sldLayout xmlns:a="http://schemas.openxmlformats.org/drawingml/2006/main" xmlns:r="http://schemas.openxmlformats.org/officeDocument/2006/relationships" xmlns:p="http://schemas.openxmlformats.org/presentationml/2006/main" matchingName="Title and body" type="tx">
   <p:cSld name="TITLE_AND_BODY">
     <p:spTree>
       <p:nvGrpSpPr>
-        <p:cNvPr id="16" name="Shape 16"/>
+        <p:cNvPr id="1" name="Shape 16"/>
         <p:cNvGrpSpPr/>
         <p:nvPr/>
       </p:nvGrpSpPr>
@@ -4378,7 +4549,9 @@
       <p:sp>
         <p:nvSpPr>
           <p:cNvPr id="17" name="Google Shape;17;p4"/>
-          <p:cNvSpPr txBox="1"/>
+          <p:cNvSpPr txBox="1">
+            <a:spLocks noGrp="1"/>
+          </p:cNvSpPr>
           <p:nvPr>
             <p:ph type="title"/>
           </p:nvPr>
@@ -4393,7 +4566,7 @@
           </a:prstGeom>
         </p:spPr>
         <p:txBody>
-          <a:bodyPr anchorCtr="0" anchor="t" bIns="91425" lIns="91425" spcFirstLastPara="1" rIns="91425" wrap="square" tIns="91425">
+          <a:bodyPr spcFirstLastPara="1" wrap="square" lIns="91425" tIns="91425" rIns="91425" bIns="91425" anchor="t" anchorCtr="0">
             <a:normAutofit/>
           </a:bodyPr>
           <a:lstStyle>
@@ -4497,15 +4670,19 @@
               <a:defRPr/>
             </a:lvl9pPr>
           </a:lstStyle>
-          <a:p/>
+          <a:p>
+            <a:endParaRPr/>
+          </a:p>
         </p:txBody>
       </p:sp>
       <p:sp>
         <p:nvSpPr>
           <p:cNvPr id="18" name="Google Shape;18;p4"/>
-          <p:cNvSpPr txBox="1"/>
+          <p:cNvSpPr txBox="1">
+            <a:spLocks noGrp="1"/>
+          </p:cNvSpPr>
           <p:nvPr>
-            <p:ph idx="1" type="body"/>
+            <p:ph type="body" idx="1"/>
           </p:nvPr>
         </p:nvSpPr>
         <p:spPr>
@@ -4518,11 +4695,11 @@
           </a:prstGeom>
         </p:spPr>
         <p:txBody>
-          <a:bodyPr anchorCtr="0" anchor="t" bIns="91425" lIns="91425" spcFirstLastPara="1" rIns="91425" wrap="square" tIns="91425">
+          <a:bodyPr spcFirstLastPara="1" wrap="square" lIns="91425" tIns="91425" rIns="91425" bIns="91425" anchor="t" anchorCtr="0">
             <a:normAutofit/>
           </a:bodyPr>
           <a:lstStyle>
-            <a:lvl1pPr indent="-342900" lvl="0" marL="457200">
+            <a:lvl1pPr marL="457200" lvl="0" indent="-342900">
               <a:spcBef>
                 <a:spcPts val="0"/>
               </a:spcBef>
@@ -4533,7 +4710,7 @@
               <a:buChar char="●"/>
               <a:defRPr/>
             </a:lvl1pPr>
-            <a:lvl2pPr indent="-317500" lvl="1" marL="914400">
+            <a:lvl2pPr marL="914400" lvl="1" indent="-317500">
               <a:spcBef>
                 <a:spcPts val="0"/>
               </a:spcBef>
@@ -4544,7 +4721,7 @@
               <a:buChar char="○"/>
               <a:defRPr/>
             </a:lvl2pPr>
-            <a:lvl3pPr indent="-317500" lvl="2" marL="1371600">
+            <a:lvl3pPr marL="1371600" lvl="2" indent="-317500">
               <a:spcBef>
                 <a:spcPts val="0"/>
               </a:spcBef>
@@ -4555,7 +4732,7 @@
               <a:buChar char="■"/>
               <a:defRPr/>
             </a:lvl3pPr>
-            <a:lvl4pPr indent="-317500" lvl="3" marL="1828800">
+            <a:lvl4pPr marL="1828800" lvl="3" indent="-317500">
               <a:spcBef>
                 <a:spcPts val="0"/>
               </a:spcBef>
@@ -4566,7 +4743,7 @@
               <a:buChar char="●"/>
               <a:defRPr/>
             </a:lvl4pPr>
-            <a:lvl5pPr indent="-317500" lvl="4" marL="2286000">
+            <a:lvl5pPr marL="2286000" lvl="4" indent="-317500">
               <a:spcBef>
                 <a:spcPts val="0"/>
               </a:spcBef>
@@ -4577,7 +4754,7 @@
               <a:buChar char="○"/>
               <a:defRPr/>
             </a:lvl5pPr>
-            <a:lvl6pPr indent="-317500" lvl="5" marL="2743200">
+            <a:lvl6pPr marL="2743200" lvl="5" indent="-317500">
               <a:spcBef>
                 <a:spcPts val="0"/>
               </a:spcBef>
@@ -4588,7 +4765,7 @@
               <a:buChar char="■"/>
               <a:defRPr/>
             </a:lvl6pPr>
-            <a:lvl7pPr indent="-317500" lvl="6" marL="3200400">
+            <a:lvl7pPr marL="3200400" lvl="6" indent="-317500">
               <a:spcBef>
                 <a:spcPts val="0"/>
               </a:spcBef>
@@ -4599,7 +4776,7 @@
               <a:buChar char="●"/>
               <a:defRPr/>
             </a:lvl7pPr>
-            <a:lvl8pPr indent="-317500" lvl="7" marL="3657600">
+            <a:lvl8pPr marL="3657600" lvl="7" indent="-317500">
               <a:spcBef>
                 <a:spcPts val="0"/>
               </a:spcBef>
@@ -4610,7 +4787,7 @@
               <a:buChar char="○"/>
               <a:defRPr/>
             </a:lvl8pPr>
-            <a:lvl9pPr indent="-317500" lvl="8" marL="4114800">
+            <a:lvl9pPr marL="4114800" lvl="8" indent="-317500">
               <a:spcBef>
                 <a:spcPts val="0"/>
               </a:spcBef>
@@ -4622,15 +4799,19 @@
               <a:defRPr/>
             </a:lvl9pPr>
           </a:lstStyle>
-          <a:p/>
+          <a:p>
+            <a:endParaRPr/>
+          </a:p>
         </p:txBody>
       </p:sp>
       <p:sp>
         <p:nvSpPr>
           <p:cNvPr id="19" name="Google Shape;19;p4"/>
-          <p:cNvSpPr txBox="1"/>
+          <p:cNvSpPr txBox="1">
+            <a:spLocks noGrp="1"/>
+          </p:cNvSpPr>
           <p:nvPr>
-            <p:ph idx="12" type="sldNum"/>
+            <p:ph type="sldNum" idx="12"/>
           </p:nvPr>
         </p:nvSpPr>
         <p:spPr>
@@ -4643,7 +4824,7 @@
           </a:prstGeom>
         </p:spPr>
         <p:txBody>
-          <a:bodyPr anchorCtr="0" anchor="ctr" bIns="91425" lIns="91425" spcFirstLastPara="1" rIns="91425" wrap="square" tIns="91425">
+          <a:bodyPr spcFirstLastPara="1" wrap="square" lIns="91425" tIns="91425" rIns="91425" bIns="91425" anchor="ctr" anchorCtr="0">
             <a:normAutofit/>
           </a:bodyPr>
           <a:lstStyle>
@@ -4685,7 +4866,7 @@
             </a:lvl9pPr>
           </a:lstStyle>
           <a:p>
-            <a:pPr indent="0" lvl="0" marL="0" rtl="0" algn="r">
+            <a:pPr marL="0" lvl="0" indent="0" algn="r" rtl="0">
               <a:spcBef>
                 <a:spcPts val="0"/>
               </a:spcBef>
@@ -4711,11 +4892,11 @@
 </file>
 
 <file path=ppt/slideLayouts/slideLayout4.xml><?xml version="1.0" encoding="utf-8"?>
-<p:sldLayout xmlns:a="http://schemas.openxmlformats.org/drawingml/2006/main" xmlns:r="http://schemas.openxmlformats.org/officeDocument/2006/relationships" xmlns:mc="http://schemas.openxmlformats.org/markup-compatibility/2006" xmlns:mv="urn:schemas-microsoft-com:mac:vml" xmlns:p="http://schemas.openxmlformats.org/presentationml/2006/main" xmlns:c="http://schemas.openxmlformats.org/drawingml/2006/chart" xmlns:dgm="http://schemas.openxmlformats.org/drawingml/2006/diagram" xmlns:o="urn:schemas-microsoft-com:office:office" xmlns:v="urn:schemas-microsoft-com:vml" xmlns:pvml="urn:schemas-microsoft-com:office:powerpoint" xmlns:com="http://schemas.openxmlformats.org/drawingml/2006/compatibility" xmlns:p14="http://schemas.microsoft.com/office/powerpoint/2010/main" xmlns:p15="http://schemas.microsoft.com/office/powerpoint/2012/main" xmlns:ahyp="http://schemas.microsoft.com/office/drawing/2018/hyperlinkcolor" matchingName="Title and two columns" type="twoColTx">
+<p:sldLayout xmlns:a="http://schemas.openxmlformats.org/drawingml/2006/main" xmlns:r="http://schemas.openxmlformats.org/officeDocument/2006/relationships" xmlns:p="http://schemas.openxmlformats.org/presentationml/2006/main" matchingName="Title and two columns" type="twoColTx">
   <p:cSld name="TITLE_AND_TWO_COLUMNS">
     <p:spTree>
       <p:nvGrpSpPr>
-        <p:cNvPr id="20" name="Shape 20"/>
+        <p:cNvPr id="1" name="Shape 20"/>
         <p:cNvGrpSpPr/>
         <p:nvPr/>
       </p:nvGrpSpPr>
@@ -4730,7 +4911,9 @@
       <p:sp>
         <p:nvSpPr>
           <p:cNvPr id="21" name="Google Shape;21;p5"/>
-          <p:cNvSpPr txBox="1"/>
+          <p:cNvSpPr txBox="1">
+            <a:spLocks noGrp="1"/>
+          </p:cNvSpPr>
           <p:nvPr>
             <p:ph type="title"/>
           </p:nvPr>
@@ -4745,7 +4928,7 @@
           </a:prstGeom>
         </p:spPr>
         <p:txBody>
-          <a:bodyPr anchorCtr="0" anchor="t" bIns="91425" lIns="91425" spcFirstLastPara="1" rIns="91425" wrap="square" tIns="91425">
+          <a:bodyPr spcFirstLastPara="1" wrap="square" lIns="91425" tIns="91425" rIns="91425" bIns="91425" anchor="t" anchorCtr="0">
             <a:normAutofit/>
           </a:bodyPr>
           <a:lstStyle>
@@ -4849,15 +5032,19 @@
               <a:defRPr/>
             </a:lvl9pPr>
           </a:lstStyle>
-          <a:p/>
+          <a:p>
+            <a:endParaRPr/>
+          </a:p>
         </p:txBody>
       </p:sp>
       <p:sp>
         <p:nvSpPr>
           <p:cNvPr id="22" name="Google Shape;22;p5"/>
-          <p:cNvSpPr txBox="1"/>
+          <p:cNvSpPr txBox="1">
+            <a:spLocks noGrp="1"/>
+          </p:cNvSpPr>
           <p:nvPr>
-            <p:ph idx="1" type="body"/>
+            <p:ph type="body" idx="1"/>
           </p:nvPr>
         </p:nvSpPr>
         <p:spPr>
@@ -4870,11 +5057,11 @@
           </a:prstGeom>
         </p:spPr>
         <p:txBody>
-          <a:bodyPr anchorCtr="0" anchor="t" bIns="91425" lIns="91425" spcFirstLastPara="1" rIns="91425" wrap="square" tIns="91425">
+          <a:bodyPr spcFirstLastPara="1" wrap="square" lIns="91425" tIns="91425" rIns="91425" bIns="91425" anchor="t" anchorCtr="0">
             <a:normAutofit/>
           </a:bodyPr>
           <a:lstStyle>
-            <a:lvl1pPr indent="-317500" lvl="0" marL="457200">
+            <a:lvl1pPr marL="457200" lvl="0" indent="-317500">
               <a:spcBef>
                 <a:spcPts val="0"/>
               </a:spcBef>
@@ -4885,7 +5072,7 @@
               <a:buChar char="●"/>
               <a:defRPr sz="1400"/>
             </a:lvl1pPr>
-            <a:lvl2pPr indent="-304800" lvl="1" marL="914400">
+            <a:lvl2pPr marL="914400" lvl="1" indent="-304800">
               <a:spcBef>
                 <a:spcPts val="0"/>
               </a:spcBef>
@@ -4896,7 +5083,7 @@
               <a:buChar char="○"/>
               <a:defRPr sz="1200"/>
             </a:lvl2pPr>
-            <a:lvl3pPr indent="-304800" lvl="2" marL="1371600">
+            <a:lvl3pPr marL="1371600" lvl="2" indent="-304800">
               <a:spcBef>
                 <a:spcPts val="0"/>
               </a:spcBef>
@@ -4907,7 +5094,7 @@
               <a:buChar char="■"/>
               <a:defRPr sz="1200"/>
             </a:lvl3pPr>
-            <a:lvl4pPr indent="-304800" lvl="3" marL="1828800">
+            <a:lvl4pPr marL="1828800" lvl="3" indent="-304800">
               <a:spcBef>
                 <a:spcPts val="0"/>
               </a:spcBef>
@@ -4918,7 +5105,7 @@
               <a:buChar char="●"/>
               <a:defRPr sz="1200"/>
             </a:lvl4pPr>
-            <a:lvl5pPr indent="-304800" lvl="4" marL="2286000">
+            <a:lvl5pPr marL="2286000" lvl="4" indent="-304800">
               <a:spcBef>
                 <a:spcPts val="0"/>
               </a:spcBef>
@@ -4929,7 +5116,7 @@
               <a:buChar char="○"/>
               <a:defRPr sz="1200"/>
             </a:lvl5pPr>
-            <a:lvl6pPr indent="-304800" lvl="5" marL="2743200">
+            <a:lvl6pPr marL="2743200" lvl="5" indent="-304800">
               <a:spcBef>
                 <a:spcPts val="0"/>
               </a:spcBef>
@@ -4940,7 +5127,7 @@
               <a:buChar char="■"/>
               <a:defRPr sz="1200"/>
             </a:lvl6pPr>
-            <a:lvl7pPr indent="-304800" lvl="6" marL="3200400">
+            <a:lvl7pPr marL="3200400" lvl="6" indent="-304800">
               <a:spcBef>
                 <a:spcPts val="0"/>
               </a:spcBef>
@@ -4951,7 +5138,7 @@
               <a:buChar char="●"/>
               <a:defRPr sz="1200"/>
             </a:lvl7pPr>
-            <a:lvl8pPr indent="-304800" lvl="7" marL="3657600">
+            <a:lvl8pPr marL="3657600" lvl="7" indent="-304800">
               <a:spcBef>
                 <a:spcPts val="0"/>
               </a:spcBef>
@@ -4962,7 +5149,7 @@
               <a:buChar char="○"/>
               <a:defRPr sz="1200"/>
             </a:lvl8pPr>
-            <a:lvl9pPr indent="-304800" lvl="8" marL="4114800">
+            <a:lvl9pPr marL="4114800" lvl="8" indent="-304800">
               <a:spcBef>
                 <a:spcPts val="0"/>
               </a:spcBef>
@@ -4974,15 +5161,19 @@
               <a:defRPr sz="1200"/>
             </a:lvl9pPr>
           </a:lstStyle>
-          <a:p/>
+          <a:p>
+            <a:endParaRPr/>
+          </a:p>
         </p:txBody>
       </p:sp>
       <p:sp>
         <p:nvSpPr>
           <p:cNvPr id="23" name="Google Shape;23;p5"/>
-          <p:cNvSpPr txBox="1"/>
+          <p:cNvSpPr txBox="1">
+            <a:spLocks noGrp="1"/>
+          </p:cNvSpPr>
           <p:nvPr>
-            <p:ph idx="2" type="body"/>
+            <p:ph type="body" idx="2"/>
           </p:nvPr>
         </p:nvSpPr>
         <p:spPr>
@@ -4995,11 +5186,11 @@
           </a:prstGeom>
         </p:spPr>
         <p:txBody>
-          <a:bodyPr anchorCtr="0" anchor="t" bIns="91425" lIns="91425" spcFirstLastPara="1" rIns="91425" wrap="square" tIns="91425">
+          <a:bodyPr spcFirstLastPara="1" wrap="square" lIns="91425" tIns="91425" rIns="91425" bIns="91425" anchor="t" anchorCtr="0">
             <a:normAutofit/>
           </a:bodyPr>
           <a:lstStyle>
-            <a:lvl1pPr indent="-317500" lvl="0" marL="457200">
+            <a:lvl1pPr marL="457200" lvl="0" indent="-317500">
               <a:spcBef>
                 <a:spcPts val="0"/>
               </a:spcBef>
@@ -5010,7 +5201,7 @@
               <a:buChar char="●"/>
               <a:defRPr sz="1400"/>
             </a:lvl1pPr>
-            <a:lvl2pPr indent="-304800" lvl="1" marL="914400">
+            <a:lvl2pPr marL="914400" lvl="1" indent="-304800">
               <a:spcBef>
                 <a:spcPts val="0"/>
               </a:spcBef>
@@ -5021,7 +5212,7 @@
               <a:buChar char="○"/>
               <a:defRPr sz="1200"/>
             </a:lvl2pPr>
-            <a:lvl3pPr indent="-304800" lvl="2" marL="1371600">
+            <a:lvl3pPr marL="1371600" lvl="2" indent="-304800">
               <a:spcBef>
                 <a:spcPts val="0"/>
               </a:spcBef>
@@ -5032,7 +5223,7 @@
               <a:buChar char="■"/>
               <a:defRPr sz="1200"/>
             </a:lvl3pPr>
-            <a:lvl4pPr indent="-304800" lvl="3" marL="1828800">
+            <a:lvl4pPr marL="1828800" lvl="3" indent="-304800">
               <a:spcBef>
                 <a:spcPts val="0"/>
               </a:spcBef>
@@ -5043,7 +5234,7 @@
               <a:buChar char="●"/>
               <a:defRPr sz="1200"/>
             </a:lvl4pPr>
-            <a:lvl5pPr indent="-304800" lvl="4" marL="2286000">
+            <a:lvl5pPr marL="2286000" lvl="4" indent="-304800">
               <a:spcBef>
                 <a:spcPts val="0"/>
               </a:spcBef>
@@ -5054,7 +5245,7 @@
               <a:buChar char="○"/>
               <a:defRPr sz="1200"/>
             </a:lvl5pPr>
-            <a:lvl6pPr indent="-304800" lvl="5" marL="2743200">
+            <a:lvl6pPr marL="2743200" lvl="5" indent="-304800">
               <a:spcBef>
                 <a:spcPts val="0"/>
               </a:spcBef>
@@ -5065,7 +5256,7 @@
               <a:buChar char="■"/>
               <a:defRPr sz="1200"/>
             </a:lvl6pPr>
-            <a:lvl7pPr indent="-304800" lvl="6" marL="3200400">
+            <a:lvl7pPr marL="3200400" lvl="6" indent="-304800">
               <a:spcBef>
                 <a:spcPts val="0"/>
               </a:spcBef>
@@ -5076,7 +5267,7 @@
               <a:buChar char="●"/>
               <a:defRPr sz="1200"/>
             </a:lvl7pPr>
-            <a:lvl8pPr indent="-304800" lvl="7" marL="3657600">
+            <a:lvl8pPr marL="3657600" lvl="7" indent="-304800">
               <a:spcBef>
                 <a:spcPts val="0"/>
               </a:spcBef>
@@ -5087,7 +5278,7 @@
               <a:buChar char="○"/>
               <a:defRPr sz="1200"/>
             </a:lvl8pPr>
-            <a:lvl9pPr indent="-304800" lvl="8" marL="4114800">
+            <a:lvl9pPr marL="4114800" lvl="8" indent="-304800">
               <a:spcBef>
                 <a:spcPts val="0"/>
               </a:spcBef>
@@ -5099,15 +5290,19 @@
               <a:defRPr sz="1200"/>
             </a:lvl9pPr>
           </a:lstStyle>
-          <a:p/>
+          <a:p>
+            <a:endParaRPr/>
+          </a:p>
         </p:txBody>
       </p:sp>
       <p:sp>
         <p:nvSpPr>
           <p:cNvPr id="24" name="Google Shape;24;p5"/>
-          <p:cNvSpPr txBox="1"/>
+          <p:cNvSpPr txBox="1">
+            <a:spLocks noGrp="1"/>
+          </p:cNvSpPr>
           <p:nvPr>
-            <p:ph idx="12" type="sldNum"/>
+            <p:ph type="sldNum" idx="12"/>
           </p:nvPr>
         </p:nvSpPr>
         <p:spPr>
@@ -5120,7 +5315,7 @@
           </a:prstGeom>
         </p:spPr>
         <p:txBody>
-          <a:bodyPr anchorCtr="0" anchor="ctr" bIns="91425" lIns="91425" spcFirstLastPara="1" rIns="91425" wrap="square" tIns="91425">
+          <a:bodyPr spcFirstLastPara="1" wrap="square" lIns="91425" tIns="91425" rIns="91425" bIns="91425" anchor="ctr" anchorCtr="0">
             <a:normAutofit/>
           </a:bodyPr>
           <a:lstStyle>
@@ -5162,7 +5357,7 @@
             </a:lvl9pPr>
           </a:lstStyle>
           <a:p>
-            <a:pPr indent="0" lvl="0" marL="0" rtl="0" algn="r">
+            <a:pPr marL="0" lvl="0" indent="0" algn="r" rtl="0">
               <a:spcBef>
                 <a:spcPts val="0"/>
               </a:spcBef>
@@ -5188,11 +5383,11 @@
 </file>
 
 <file path=ppt/slideLayouts/slideLayout5.xml><?xml version="1.0" encoding="utf-8"?>
-<p:sldLayout xmlns:a="http://schemas.openxmlformats.org/drawingml/2006/main" xmlns:r="http://schemas.openxmlformats.org/officeDocument/2006/relationships" xmlns:mc="http://schemas.openxmlformats.org/markup-compatibility/2006" xmlns:mv="urn:schemas-microsoft-com:mac:vml" xmlns:p="http://schemas.openxmlformats.org/presentationml/2006/main" xmlns:c="http://schemas.openxmlformats.org/drawingml/2006/chart" xmlns:dgm="http://schemas.openxmlformats.org/drawingml/2006/diagram" xmlns:o="urn:schemas-microsoft-com:office:office" xmlns:v="urn:schemas-microsoft-com:vml" xmlns:pvml="urn:schemas-microsoft-com:office:powerpoint" xmlns:com="http://schemas.openxmlformats.org/drawingml/2006/compatibility" xmlns:p14="http://schemas.microsoft.com/office/powerpoint/2010/main" xmlns:p15="http://schemas.microsoft.com/office/powerpoint/2012/main" xmlns:ahyp="http://schemas.microsoft.com/office/drawing/2018/hyperlinkcolor" matchingName="Title only" type="titleOnly">
+<p:sldLayout xmlns:a="http://schemas.openxmlformats.org/drawingml/2006/main" xmlns:r="http://schemas.openxmlformats.org/officeDocument/2006/relationships" xmlns:p="http://schemas.openxmlformats.org/presentationml/2006/main" matchingName="Title only" type="titleOnly">
   <p:cSld name="TITLE_ONLY">
     <p:spTree>
       <p:nvGrpSpPr>
-        <p:cNvPr id="25" name="Shape 25"/>
+        <p:cNvPr id="1" name="Shape 25"/>
         <p:cNvGrpSpPr/>
         <p:nvPr/>
       </p:nvGrpSpPr>
@@ -5207,7 +5402,9 @@
       <p:sp>
         <p:nvSpPr>
           <p:cNvPr id="26" name="Google Shape;26;p6"/>
-          <p:cNvSpPr txBox="1"/>
+          <p:cNvSpPr txBox="1">
+            <a:spLocks noGrp="1"/>
+          </p:cNvSpPr>
           <p:nvPr>
             <p:ph type="title"/>
           </p:nvPr>
@@ -5222,7 +5419,7 @@
           </a:prstGeom>
         </p:spPr>
         <p:txBody>
-          <a:bodyPr anchorCtr="0" anchor="t" bIns="91425" lIns="91425" spcFirstLastPara="1" rIns="91425" wrap="square" tIns="91425">
+          <a:bodyPr spcFirstLastPara="1" wrap="square" lIns="91425" tIns="91425" rIns="91425" bIns="91425" anchor="t" anchorCtr="0">
             <a:normAutofit/>
           </a:bodyPr>
           <a:lstStyle>
@@ -5326,15 +5523,19 @@
               <a:defRPr/>
             </a:lvl9pPr>
           </a:lstStyle>
-          <a:p/>
+          <a:p>
+            <a:endParaRPr/>
+          </a:p>
         </p:txBody>
       </p:sp>
       <p:sp>
         <p:nvSpPr>
           <p:cNvPr id="27" name="Google Shape;27;p6"/>
-          <p:cNvSpPr txBox="1"/>
+          <p:cNvSpPr txBox="1">
+            <a:spLocks noGrp="1"/>
+          </p:cNvSpPr>
           <p:nvPr>
-            <p:ph idx="12" type="sldNum"/>
+            <p:ph type="sldNum" idx="12"/>
           </p:nvPr>
         </p:nvSpPr>
         <p:spPr>
@@ -5347,7 +5548,7 @@
           </a:prstGeom>
         </p:spPr>
         <p:txBody>
-          <a:bodyPr anchorCtr="0" anchor="ctr" bIns="91425" lIns="91425" spcFirstLastPara="1" rIns="91425" wrap="square" tIns="91425">
+          <a:bodyPr spcFirstLastPara="1" wrap="square" lIns="91425" tIns="91425" rIns="91425" bIns="91425" anchor="ctr" anchorCtr="0">
             <a:normAutofit/>
           </a:bodyPr>
           <a:lstStyle>
@@ -5389,7 +5590,7 @@
             </a:lvl9pPr>
           </a:lstStyle>
           <a:p>
-            <a:pPr indent="0" lvl="0" marL="0" rtl="0" algn="r">
+            <a:pPr marL="0" lvl="0" indent="0" algn="r" rtl="0">
               <a:spcBef>
                 <a:spcPts val="0"/>
               </a:spcBef>
@@ -5415,11 +5616,11 @@
 </file>
 
 <file path=ppt/slideLayouts/slideLayout6.xml><?xml version="1.0" encoding="utf-8"?>
-<p:sldLayout xmlns:a="http://schemas.openxmlformats.org/drawingml/2006/main" xmlns:r="http://schemas.openxmlformats.org/officeDocument/2006/relationships" xmlns:mc="http://schemas.openxmlformats.org/markup-compatibility/2006" xmlns:mv="urn:schemas-microsoft-com:mac:vml" xmlns:p="http://schemas.openxmlformats.org/presentationml/2006/main" xmlns:c="http://schemas.openxmlformats.org/drawingml/2006/chart" xmlns:dgm="http://schemas.openxmlformats.org/drawingml/2006/diagram" xmlns:o="urn:schemas-microsoft-com:office:office" xmlns:v="urn:schemas-microsoft-com:vml" xmlns:pvml="urn:schemas-microsoft-com:office:powerpoint" xmlns:com="http://schemas.openxmlformats.org/drawingml/2006/compatibility" xmlns:p14="http://schemas.microsoft.com/office/powerpoint/2010/main" xmlns:p15="http://schemas.microsoft.com/office/powerpoint/2012/main" xmlns:ahyp="http://schemas.microsoft.com/office/drawing/2018/hyperlinkcolor" matchingName="One column text">
+<p:sldLayout xmlns:a="http://schemas.openxmlformats.org/drawingml/2006/main" xmlns:r="http://schemas.openxmlformats.org/officeDocument/2006/relationships" xmlns:p="http://schemas.openxmlformats.org/presentationml/2006/main" matchingName="One column text">
   <p:cSld name="ONE_COLUMN_TEXT">
     <p:spTree>
       <p:nvGrpSpPr>
-        <p:cNvPr id="28" name="Shape 28"/>
+        <p:cNvPr id="1" name="Shape 28"/>
         <p:cNvGrpSpPr/>
         <p:nvPr/>
       </p:nvGrpSpPr>
@@ -5434,7 +5635,9 @@
       <p:sp>
         <p:nvSpPr>
           <p:cNvPr id="29" name="Google Shape;29;p7"/>
-          <p:cNvSpPr txBox="1"/>
+          <p:cNvSpPr txBox="1">
+            <a:spLocks noGrp="1"/>
+          </p:cNvSpPr>
           <p:nvPr>
             <p:ph type="title"/>
           </p:nvPr>
@@ -5449,7 +5652,7 @@
           </a:prstGeom>
         </p:spPr>
         <p:txBody>
-          <a:bodyPr anchorCtr="0" anchor="b" bIns="91425" lIns="91425" spcFirstLastPara="1" rIns="91425" wrap="square" tIns="91425">
+          <a:bodyPr spcFirstLastPara="1" wrap="square" lIns="91425" tIns="91425" rIns="91425" bIns="91425" anchor="b" anchorCtr="0">
             <a:normAutofit/>
           </a:bodyPr>
           <a:lstStyle>
@@ -5553,15 +5756,19 @@
               <a:defRPr sz="2400"/>
             </a:lvl9pPr>
           </a:lstStyle>
-          <a:p/>
+          <a:p>
+            <a:endParaRPr/>
+          </a:p>
         </p:txBody>
       </p:sp>
       <p:sp>
         <p:nvSpPr>
           <p:cNvPr id="30" name="Google Shape;30;p7"/>
-          <p:cNvSpPr txBox="1"/>
+          <p:cNvSpPr txBox="1">
+            <a:spLocks noGrp="1"/>
+          </p:cNvSpPr>
           <p:nvPr>
-            <p:ph idx="1" type="body"/>
+            <p:ph type="body" idx="1"/>
           </p:nvPr>
         </p:nvSpPr>
         <p:spPr>
@@ -5574,11 +5781,11 @@
           </a:prstGeom>
         </p:spPr>
         <p:txBody>
-          <a:bodyPr anchorCtr="0" anchor="t" bIns="91425" lIns="91425" spcFirstLastPara="1" rIns="91425" wrap="square" tIns="91425">
+          <a:bodyPr spcFirstLastPara="1" wrap="square" lIns="91425" tIns="91425" rIns="91425" bIns="91425" anchor="t" anchorCtr="0">
             <a:normAutofit/>
           </a:bodyPr>
           <a:lstStyle>
-            <a:lvl1pPr indent="-304800" lvl="0" marL="457200">
+            <a:lvl1pPr marL="457200" lvl="0" indent="-304800">
               <a:spcBef>
                 <a:spcPts val="0"/>
               </a:spcBef>
@@ -5589,7 +5796,7 @@
               <a:buChar char="●"/>
               <a:defRPr sz="1200"/>
             </a:lvl1pPr>
-            <a:lvl2pPr indent="-304800" lvl="1" marL="914400">
+            <a:lvl2pPr marL="914400" lvl="1" indent="-304800">
               <a:spcBef>
                 <a:spcPts val="0"/>
               </a:spcBef>
@@ -5600,7 +5807,7 @@
               <a:buChar char="○"/>
               <a:defRPr sz="1200"/>
             </a:lvl2pPr>
-            <a:lvl3pPr indent="-304800" lvl="2" marL="1371600">
+            <a:lvl3pPr marL="1371600" lvl="2" indent="-304800">
               <a:spcBef>
                 <a:spcPts val="0"/>
               </a:spcBef>
@@ -5611,7 +5818,7 @@
               <a:buChar char="■"/>
               <a:defRPr sz="1200"/>
             </a:lvl3pPr>
-            <a:lvl4pPr indent="-304800" lvl="3" marL="1828800">
+            <a:lvl4pPr marL="1828800" lvl="3" indent="-304800">
               <a:spcBef>
                 <a:spcPts val="0"/>
               </a:spcBef>
@@ -5622,7 +5829,7 @@
               <a:buChar char="●"/>
               <a:defRPr sz="1200"/>
             </a:lvl4pPr>
-            <a:lvl5pPr indent="-304800" lvl="4" marL="2286000">
+            <a:lvl5pPr marL="2286000" lvl="4" indent="-304800">
               <a:spcBef>
                 <a:spcPts val="0"/>
               </a:spcBef>
@@ -5633,7 +5840,7 @@
               <a:buChar char="○"/>
               <a:defRPr sz="1200"/>
             </a:lvl5pPr>
-            <a:lvl6pPr indent="-304800" lvl="5" marL="2743200">
+            <a:lvl6pPr marL="2743200" lvl="5" indent="-304800">
               <a:spcBef>
                 <a:spcPts val="0"/>
               </a:spcBef>
@@ -5644,7 +5851,7 @@
               <a:buChar char="■"/>
               <a:defRPr sz="1200"/>
             </a:lvl6pPr>
-            <a:lvl7pPr indent="-304800" lvl="6" marL="3200400">
+            <a:lvl7pPr marL="3200400" lvl="6" indent="-304800">
               <a:spcBef>
                 <a:spcPts val="0"/>
               </a:spcBef>
@@ -5655,7 +5862,7 @@
               <a:buChar char="●"/>
               <a:defRPr sz="1200"/>
             </a:lvl7pPr>
-            <a:lvl8pPr indent="-304800" lvl="7" marL="3657600">
+            <a:lvl8pPr marL="3657600" lvl="7" indent="-304800">
               <a:spcBef>
                 <a:spcPts val="0"/>
               </a:spcBef>
@@ -5666,7 +5873,7 @@
               <a:buChar char="○"/>
               <a:defRPr sz="1200"/>
             </a:lvl8pPr>
-            <a:lvl9pPr indent="-304800" lvl="8" marL="4114800">
+            <a:lvl9pPr marL="4114800" lvl="8" indent="-304800">
               <a:spcBef>
                 <a:spcPts val="0"/>
               </a:spcBef>
@@ -5678,15 +5885,19 @@
               <a:defRPr sz="1200"/>
             </a:lvl9pPr>
           </a:lstStyle>
-          <a:p/>
+          <a:p>
+            <a:endParaRPr/>
+          </a:p>
         </p:txBody>
       </p:sp>
       <p:sp>
         <p:nvSpPr>
           <p:cNvPr id="31" name="Google Shape;31;p7"/>
-          <p:cNvSpPr txBox="1"/>
+          <p:cNvSpPr txBox="1">
+            <a:spLocks noGrp="1"/>
+          </p:cNvSpPr>
           <p:nvPr>
-            <p:ph idx="12" type="sldNum"/>
+            <p:ph type="sldNum" idx="12"/>
           </p:nvPr>
         </p:nvSpPr>
         <p:spPr>
@@ -5699,7 +5910,7 @@
           </a:prstGeom>
         </p:spPr>
         <p:txBody>
-          <a:bodyPr anchorCtr="0" anchor="ctr" bIns="91425" lIns="91425" spcFirstLastPara="1" rIns="91425" wrap="square" tIns="91425">
+          <a:bodyPr spcFirstLastPara="1" wrap="square" lIns="91425" tIns="91425" rIns="91425" bIns="91425" anchor="ctr" anchorCtr="0">
             <a:normAutofit/>
           </a:bodyPr>
           <a:lstStyle>
@@ -5741,7 +5952,7 @@
             </a:lvl9pPr>
           </a:lstStyle>
           <a:p>
-            <a:pPr indent="0" lvl="0" marL="0" rtl="0" algn="r">
+            <a:pPr marL="0" lvl="0" indent="0" algn="r" rtl="0">
               <a:spcBef>
                 <a:spcPts val="0"/>
               </a:spcBef>
@@ -5767,11 +5978,11 @@
 </file>
 
 <file path=ppt/slideLayouts/slideLayout7.xml><?xml version="1.0" encoding="utf-8"?>
-<p:sldLayout xmlns:a="http://schemas.openxmlformats.org/drawingml/2006/main" xmlns:r="http://schemas.openxmlformats.org/officeDocument/2006/relationships" xmlns:mc="http://schemas.openxmlformats.org/markup-compatibility/2006" xmlns:mv="urn:schemas-microsoft-com:mac:vml" xmlns:p="http://schemas.openxmlformats.org/presentationml/2006/main" xmlns:c="http://schemas.openxmlformats.org/drawingml/2006/chart" xmlns:dgm="http://schemas.openxmlformats.org/drawingml/2006/diagram" xmlns:o="urn:schemas-microsoft-com:office:office" xmlns:v="urn:schemas-microsoft-com:vml" xmlns:pvml="urn:schemas-microsoft-com:office:powerpoint" xmlns:com="http://schemas.openxmlformats.org/drawingml/2006/compatibility" xmlns:p14="http://schemas.microsoft.com/office/powerpoint/2010/main" xmlns:p15="http://schemas.microsoft.com/office/powerpoint/2012/main" xmlns:ahyp="http://schemas.microsoft.com/office/drawing/2018/hyperlinkcolor" matchingName="Main point">
+<p:sldLayout xmlns:a="http://schemas.openxmlformats.org/drawingml/2006/main" xmlns:r="http://schemas.openxmlformats.org/officeDocument/2006/relationships" xmlns:p="http://schemas.openxmlformats.org/presentationml/2006/main" matchingName="Main point">
   <p:cSld name="MAIN_POINT">
     <p:spTree>
       <p:nvGrpSpPr>
-        <p:cNvPr id="32" name="Shape 32"/>
+        <p:cNvPr id="1" name="Shape 32"/>
         <p:cNvGrpSpPr/>
         <p:nvPr/>
       </p:nvGrpSpPr>
@@ -5786,7 +5997,9 @@
       <p:sp>
         <p:nvSpPr>
           <p:cNvPr id="33" name="Google Shape;33;p8"/>
-          <p:cNvSpPr txBox="1"/>
+          <p:cNvSpPr txBox="1">
+            <a:spLocks noGrp="1"/>
+          </p:cNvSpPr>
           <p:nvPr>
             <p:ph type="title"/>
           </p:nvPr>
@@ -5801,7 +6014,7 @@
           </a:prstGeom>
         </p:spPr>
         <p:txBody>
-          <a:bodyPr anchorCtr="0" anchor="ctr" bIns="91425" lIns="91425" spcFirstLastPara="1" rIns="91425" wrap="square" tIns="91425">
+          <a:bodyPr spcFirstLastPara="1" wrap="square" lIns="91425" tIns="91425" rIns="91425" bIns="91425" anchor="ctr" anchorCtr="0">
             <a:normAutofit/>
           </a:bodyPr>
           <a:lstStyle>
@@ -5905,15 +6118,19 @@
               <a:defRPr sz="4800"/>
             </a:lvl9pPr>
           </a:lstStyle>
-          <a:p/>
+          <a:p>
+            <a:endParaRPr/>
+          </a:p>
         </p:txBody>
       </p:sp>
       <p:sp>
         <p:nvSpPr>
           <p:cNvPr id="34" name="Google Shape;34;p8"/>
-          <p:cNvSpPr txBox="1"/>
+          <p:cNvSpPr txBox="1">
+            <a:spLocks noGrp="1"/>
+          </p:cNvSpPr>
           <p:nvPr>
-            <p:ph idx="12" type="sldNum"/>
+            <p:ph type="sldNum" idx="12"/>
           </p:nvPr>
         </p:nvSpPr>
         <p:spPr>
@@ -5926,7 +6143,7 @@
           </a:prstGeom>
         </p:spPr>
         <p:txBody>
-          <a:bodyPr anchorCtr="0" anchor="ctr" bIns="91425" lIns="91425" spcFirstLastPara="1" rIns="91425" wrap="square" tIns="91425">
+          <a:bodyPr spcFirstLastPara="1" wrap="square" lIns="91425" tIns="91425" rIns="91425" bIns="91425" anchor="ctr" anchorCtr="0">
             <a:normAutofit/>
           </a:bodyPr>
           <a:lstStyle>
@@ -5968,7 +6185,7 @@
             </a:lvl9pPr>
           </a:lstStyle>
           <a:p>
-            <a:pPr indent="0" lvl="0" marL="0" rtl="0" algn="r">
+            <a:pPr marL="0" lvl="0" indent="0" algn="r" rtl="0">
               <a:spcBef>
                 <a:spcPts val="0"/>
               </a:spcBef>
@@ -5994,11 +6211,11 @@
 </file>
 
 <file path=ppt/slideLayouts/slideLayout8.xml><?xml version="1.0" encoding="utf-8"?>
-<p:sldLayout xmlns:a="http://schemas.openxmlformats.org/drawingml/2006/main" xmlns:r="http://schemas.openxmlformats.org/officeDocument/2006/relationships" xmlns:mc="http://schemas.openxmlformats.org/markup-compatibility/2006" xmlns:mv="urn:schemas-microsoft-com:mac:vml" xmlns:p="http://schemas.openxmlformats.org/presentationml/2006/main" xmlns:c="http://schemas.openxmlformats.org/drawingml/2006/chart" xmlns:dgm="http://schemas.openxmlformats.org/drawingml/2006/diagram" xmlns:o="urn:schemas-microsoft-com:office:office" xmlns:v="urn:schemas-microsoft-com:vml" xmlns:pvml="urn:schemas-microsoft-com:office:powerpoint" xmlns:com="http://schemas.openxmlformats.org/drawingml/2006/compatibility" xmlns:p14="http://schemas.microsoft.com/office/powerpoint/2010/main" xmlns:p15="http://schemas.microsoft.com/office/powerpoint/2012/main" xmlns:ahyp="http://schemas.microsoft.com/office/drawing/2018/hyperlinkcolor" matchingName="Section title and description">
+<p:sldLayout xmlns:a="http://schemas.openxmlformats.org/drawingml/2006/main" xmlns:r="http://schemas.openxmlformats.org/officeDocument/2006/relationships" xmlns:p="http://schemas.openxmlformats.org/presentationml/2006/main" matchingName="Section title and description">
   <p:cSld name="SECTION_TITLE_AND_DESCRIPTION">
     <p:spTree>
       <p:nvGrpSpPr>
-        <p:cNvPr id="35" name="Shape 35"/>
+        <p:cNvPr id="1" name="Shape 35"/>
         <p:cNvGrpSpPr/>
         <p:nvPr/>
       </p:nvGrpSpPr>
@@ -6032,12 +6249,12 @@
           </a:ln>
         </p:spPr>
         <p:txBody>
-          <a:bodyPr anchorCtr="0" anchor="ctr" bIns="91425" lIns="91425" spcFirstLastPara="1" rIns="91425" wrap="square" tIns="91425">
+          <a:bodyPr spcFirstLastPara="1" wrap="square" lIns="91425" tIns="91425" rIns="91425" bIns="91425" anchor="ctr" anchorCtr="0">
             <a:noAutofit/>
           </a:bodyPr>
           <a:lstStyle/>
           <a:p>
-            <a:pPr indent="0" lvl="0" marL="0" rtl="0" algn="l">
+            <a:pPr marL="0" lvl="0" indent="0" algn="l" rtl="0">
               <a:spcBef>
                 <a:spcPts val="0"/>
               </a:spcBef>
@@ -6046,9 +6263,6 @@
               </a:spcAft>
               <a:buNone/>
             </a:pPr>
-            <a:r>
-              <a:t/>
-            </a:r>
             <a:endParaRPr/>
           </a:p>
         </p:txBody>
@@ -6056,7 +6270,9 @@
       <p:sp>
         <p:nvSpPr>
           <p:cNvPr id="37" name="Google Shape;37;p9"/>
-          <p:cNvSpPr txBox="1"/>
+          <p:cNvSpPr txBox="1">
+            <a:spLocks noGrp="1"/>
+          </p:cNvSpPr>
           <p:nvPr>
             <p:ph type="title"/>
           </p:nvPr>
@@ -6071,7 +6287,7 @@
           </a:prstGeom>
         </p:spPr>
         <p:txBody>
-          <a:bodyPr anchorCtr="0" anchor="b" bIns="91425" lIns="91425" spcFirstLastPara="1" rIns="91425" wrap="square" tIns="91425">
+          <a:bodyPr spcFirstLastPara="1" wrap="square" lIns="91425" tIns="91425" rIns="91425" bIns="91425" anchor="b" anchorCtr="0">
             <a:normAutofit/>
           </a:bodyPr>
           <a:lstStyle>
@@ -6175,15 +6391,19 @@
               <a:defRPr sz="4200"/>
             </a:lvl9pPr>
           </a:lstStyle>
-          <a:p/>
+          <a:p>
+            <a:endParaRPr/>
+          </a:p>
         </p:txBody>
       </p:sp>
       <p:sp>
         <p:nvSpPr>
           <p:cNvPr id="38" name="Google Shape;38;p9"/>
-          <p:cNvSpPr txBox="1"/>
+          <p:cNvSpPr txBox="1">
+            <a:spLocks noGrp="1"/>
+          </p:cNvSpPr>
           <p:nvPr>
-            <p:ph idx="1" type="subTitle"/>
+            <p:ph type="subTitle" idx="1"/>
           </p:nvPr>
         </p:nvSpPr>
         <p:spPr>
@@ -6196,7 +6416,7 @@
           </a:prstGeom>
         </p:spPr>
         <p:txBody>
-          <a:bodyPr anchorCtr="0" anchor="t" bIns="91425" lIns="91425" spcFirstLastPara="1" rIns="91425" wrap="square" tIns="91425">
+          <a:bodyPr spcFirstLastPara="1" wrap="square" lIns="91425" tIns="91425" rIns="91425" bIns="91425" anchor="t" anchorCtr="0">
             <a:normAutofit/>
           </a:bodyPr>
           <a:lstStyle>
@@ -6327,15 +6547,19 @@
               <a:defRPr sz="2100"/>
             </a:lvl9pPr>
           </a:lstStyle>
-          <a:p/>
+          <a:p>
+            <a:endParaRPr/>
+          </a:p>
         </p:txBody>
       </p:sp>
       <p:sp>
         <p:nvSpPr>
           <p:cNvPr id="39" name="Google Shape;39;p9"/>
-          <p:cNvSpPr txBox="1"/>
+          <p:cNvSpPr txBox="1">
+            <a:spLocks noGrp="1"/>
+          </p:cNvSpPr>
           <p:nvPr>
-            <p:ph idx="2" type="body"/>
+            <p:ph type="body" idx="2"/>
           </p:nvPr>
         </p:nvSpPr>
         <p:spPr>
@@ -6348,11 +6572,11 @@
           </a:prstGeom>
         </p:spPr>
         <p:txBody>
-          <a:bodyPr anchorCtr="0" anchor="ctr" bIns="91425" lIns="91425" spcFirstLastPara="1" rIns="91425" wrap="square" tIns="91425">
+          <a:bodyPr spcFirstLastPara="1" wrap="square" lIns="91425" tIns="91425" rIns="91425" bIns="91425" anchor="ctr" anchorCtr="0">
             <a:normAutofit/>
           </a:bodyPr>
           <a:lstStyle>
-            <a:lvl1pPr indent="-342900" lvl="0" marL="457200">
+            <a:lvl1pPr marL="457200" lvl="0" indent="-342900">
               <a:spcBef>
                 <a:spcPts val="0"/>
               </a:spcBef>
@@ -6363,7 +6587,7 @@
               <a:buChar char="●"/>
               <a:defRPr/>
             </a:lvl1pPr>
-            <a:lvl2pPr indent="-317500" lvl="1" marL="914400">
+            <a:lvl2pPr marL="914400" lvl="1" indent="-317500">
               <a:spcBef>
                 <a:spcPts val="0"/>
               </a:spcBef>
@@ -6374,7 +6598,7 @@
               <a:buChar char="○"/>
               <a:defRPr/>
             </a:lvl2pPr>
-            <a:lvl3pPr indent="-317500" lvl="2" marL="1371600">
+            <a:lvl3pPr marL="1371600" lvl="2" indent="-317500">
               <a:spcBef>
                 <a:spcPts val="0"/>
               </a:spcBef>
@@ -6385,7 +6609,7 @@
               <a:buChar char="■"/>
               <a:defRPr/>
             </a:lvl3pPr>
-            <a:lvl4pPr indent="-317500" lvl="3" marL="1828800">
+            <a:lvl4pPr marL="1828800" lvl="3" indent="-317500">
               <a:spcBef>
                 <a:spcPts val="0"/>
               </a:spcBef>
@@ -6396,7 +6620,7 @@
               <a:buChar char="●"/>
               <a:defRPr/>
             </a:lvl4pPr>
-            <a:lvl5pPr indent="-317500" lvl="4" marL="2286000">
+            <a:lvl5pPr marL="2286000" lvl="4" indent="-317500">
               <a:spcBef>
                 <a:spcPts val="0"/>
               </a:spcBef>
@@ -6407,7 +6631,7 @@
               <a:buChar char="○"/>
               <a:defRPr/>
             </a:lvl5pPr>
-            <a:lvl6pPr indent="-317500" lvl="5" marL="2743200">
+            <a:lvl6pPr marL="2743200" lvl="5" indent="-317500">
               <a:spcBef>
                 <a:spcPts val="0"/>
               </a:spcBef>
@@ -6418,7 +6642,7 @@
               <a:buChar char="■"/>
               <a:defRPr/>
             </a:lvl6pPr>
-            <a:lvl7pPr indent="-317500" lvl="6" marL="3200400">
+            <a:lvl7pPr marL="3200400" lvl="6" indent="-317500">
               <a:spcBef>
                 <a:spcPts val="0"/>
               </a:spcBef>
@@ -6429,7 +6653,7 @@
               <a:buChar char="●"/>
               <a:defRPr/>
             </a:lvl7pPr>
-            <a:lvl8pPr indent="-317500" lvl="7" marL="3657600">
+            <a:lvl8pPr marL="3657600" lvl="7" indent="-317500">
               <a:spcBef>
                 <a:spcPts val="0"/>
               </a:spcBef>
@@ -6440,7 +6664,7 @@
               <a:buChar char="○"/>
               <a:defRPr/>
             </a:lvl8pPr>
-            <a:lvl9pPr indent="-317500" lvl="8" marL="4114800">
+            <a:lvl9pPr marL="4114800" lvl="8" indent="-317500">
               <a:spcBef>
                 <a:spcPts val="0"/>
               </a:spcBef>
@@ -6452,15 +6676,19 @@
               <a:defRPr/>
             </a:lvl9pPr>
           </a:lstStyle>
-          <a:p/>
+          <a:p>
+            <a:endParaRPr/>
+          </a:p>
         </p:txBody>
       </p:sp>
       <p:sp>
         <p:nvSpPr>
           <p:cNvPr id="40" name="Google Shape;40;p9"/>
-          <p:cNvSpPr txBox="1"/>
+          <p:cNvSpPr txBox="1">
+            <a:spLocks noGrp="1"/>
+          </p:cNvSpPr>
           <p:nvPr>
-            <p:ph idx="12" type="sldNum"/>
+            <p:ph type="sldNum" idx="12"/>
           </p:nvPr>
         </p:nvSpPr>
         <p:spPr>
@@ -6473,7 +6701,7 @@
           </a:prstGeom>
         </p:spPr>
         <p:txBody>
-          <a:bodyPr anchorCtr="0" anchor="ctr" bIns="91425" lIns="91425" spcFirstLastPara="1" rIns="91425" wrap="square" tIns="91425">
+          <a:bodyPr spcFirstLastPara="1" wrap="square" lIns="91425" tIns="91425" rIns="91425" bIns="91425" anchor="ctr" anchorCtr="0">
             <a:normAutofit/>
           </a:bodyPr>
           <a:lstStyle>
@@ -6515,7 +6743,7 @@
             </a:lvl9pPr>
           </a:lstStyle>
           <a:p>
-            <a:pPr indent="0" lvl="0" marL="0" rtl="0" algn="r">
+            <a:pPr marL="0" lvl="0" indent="0" algn="r" rtl="0">
               <a:spcBef>
                 <a:spcPts val="0"/>
               </a:spcBef>
@@ -6541,11 +6769,11 @@
 </file>
 
 <file path=ppt/slideLayouts/slideLayout9.xml><?xml version="1.0" encoding="utf-8"?>
-<p:sldLayout xmlns:a="http://schemas.openxmlformats.org/drawingml/2006/main" xmlns:r="http://schemas.openxmlformats.org/officeDocument/2006/relationships" xmlns:mc="http://schemas.openxmlformats.org/markup-compatibility/2006" xmlns:mv="urn:schemas-microsoft-com:mac:vml" xmlns:p="http://schemas.openxmlformats.org/presentationml/2006/main" xmlns:c="http://schemas.openxmlformats.org/drawingml/2006/chart" xmlns:dgm="http://schemas.openxmlformats.org/drawingml/2006/diagram" xmlns:o="urn:schemas-microsoft-com:office:office" xmlns:v="urn:schemas-microsoft-com:vml" xmlns:pvml="urn:schemas-microsoft-com:office:powerpoint" xmlns:com="http://schemas.openxmlformats.org/drawingml/2006/compatibility" xmlns:p14="http://schemas.microsoft.com/office/powerpoint/2010/main" xmlns:p15="http://schemas.microsoft.com/office/powerpoint/2012/main" xmlns:ahyp="http://schemas.microsoft.com/office/drawing/2018/hyperlinkcolor" matchingName="Caption">
+<p:sldLayout xmlns:a="http://schemas.openxmlformats.org/drawingml/2006/main" xmlns:r="http://schemas.openxmlformats.org/officeDocument/2006/relationships" xmlns:p="http://schemas.openxmlformats.org/presentationml/2006/main" matchingName="Caption">
   <p:cSld name="CAPTION_ONLY">
     <p:spTree>
       <p:nvGrpSpPr>
-        <p:cNvPr id="41" name="Shape 41"/>
+        <p:cNvPr id="1" name="Shape 41"/>
         <p:cNvGrpSpPr/>
         <p:nvPr/>
       </p:nvGrpSpPr>
@@ -6560,9 +6788,11 @@
       <p:sp>
         <p:nvSpPr>
           <p:cNvPr id="42" name="Google Shape;42;p10"/>
-          <p:cNvSpPr txBox="1"/>
+          <p:cNvSpPr txBox="1">
+            <a:spLocks noGrp="1"/>
+          </p:cNvSpPr>
           <p:nvPr>
-            <p:ph idx="1" type="body"/>
+            <p:ph type="body" idx="1"/>
           </p:nvPr>
         </p:nvSpPr>
         <p:spPr>
@@ -6575,11 +6805,11 @@
           </a:prstGeom>
         </p:spPr>
         <p:txBody>
-          <a:bodyPr anchorCtr="0" anchor="ctr" bIns="91425" lIns="91425" spcFirstLastPara="1" rIns="91425" wrap="square" tIns="91425">
+          <a:bodyPr spcFirstLastPara="1" wrap="square" lIns="91425" tIns="91425" rIns="91425" bIns="91425" anchor="ctr" anchorCtr="0">
             <a:normAutofit/>
           </a:bodyPr>
           <a:lstStyle>
-            <a:lvl1pPr indent="-228600" lvl="0" marL="457200">
+            <a:lvl1pPr marL="457200" lvl="0" indent="-228600">
               <a:lnSpc>
                 <a:spcPct val="100000"/>
               </a:lnSpc>
@@ -6594,15 +6824,19 @@
               <a:defRPr/>
             </a:lvl1pPr>
           </a:lstStyle>
-          <a:p/>
+          <a:p>
+            <a:endParaRPr/>
+          </a:p>
         </p:txBody>
       </p:sp>
       <p:sp>
         <p:nvSpPr>
           <p:cNvPr id="43" name="Google Shape;43;p10"/>
-          <p:cNvSpPr txBox="1"/>
+          <p:cNvSpPr txBox="1">
+            <a:spLocks noGrp="1"/>
+          </p:cNvSpPr>
           <p:nvPr>
-            <p:ph idx="12" type="sldNum"/>
+            <p:ph type="sldNum" idx="12"/>
           </p:nvPr>
         </p:nvSpPr>
         <p:spPr>
@@ -6615,7 +6849,7 @@
           </a:prstGeom>
         </p:spPr>
         <p:txBody>
-          <a:bodyPr anchorCtr="0" anchor="ctr" bIns="91425" lIns="91425" spcFirstLastPara="1" rIns="91425" wrap="square" tIns="91425">
+          <a:bodyPr spcFirstLastPara="1" wrap="square" lIns="91425" tIns="91425" rIns="91425" bIns="91425" anchor="ctr" anchorCtr="0">
             <a:normAutofit/>
           </a:bodyPr>
           <a:lstStyle>
@@ -6657,7 +6891,7 @@
             </a:lvl9pPr>
           </a:lstStyle>
           <a:p>
-            <a:pPr indent="0" lvl="0" marL="0" rtl="0" algn="r">
+            <a:pPr marL="0" lvl="0" indent="0" algn="r" rtl="0">
               <a:spcBef>
                 <a:spcPts val="0"/>
               </a:spcBef>
@@ -6683,18 +6917,19 @@
 </file>
 
 <file path=ppt/slideMasters/slideMaster1.xml><?xml version="1.0" encoding="utf-8"?>
-<p:sldMaster xmlns:a="http://schemas.openxmlformats.org/drawingml/2006/main" xmlns:r="http://schemas.openxmlformats.org/officeDocument/2006/relationships" xmlns:mc="http://schemas.openxmlformats.org/markup-compatibility/2006" xmlns:mv="urn:schemas-microsoft-com:mac:vml" xmlns:p="http://schemas.openxmlformats.org/presentationml/2006/main" xmlns:c="http://schemas.openxmlformats.org/drawingml/2006/chart" xmlns:dgm="http://schemas.openxmlformats.org/drawingml/2006/diagram" xmlns:o="urn:schemas-microsoft-com:office:office" xmlns:v="urn:schemas-microsoft-com:vml" xmlns:pvml="urn:schemas-microsoft-com:office:powerpoint" xmlns:com="http://schemas.openxmlformats.org/drawingml/2006/compatibility" xmlns:p14="http://schemas.microsoft.com/office/powerpoint/2010/main" xmlns:p15="http://schemas.microsoft.com/office/powerpoint/2012/main" xmlns:ahyp="http://schemas.microsoft.com/office/drawing/2018/hyperlinkcolor">
+<p:sldMaster xmlns:a="http://schemas.openxmlformats.org/drawingml/2006/main" xmlns:r="http://schemas.openxmlformats.org/officeDocument/2006/relationships" xmlns:p="http://schemas.openxmlformats.org/presentationml/2006/main">
   <p:cSld name="simple-light-2">
     <p:bg>
       <p:bgPr>
         <a:solidFill>
           <a:schemeClr val="lt1"/>
         </a:solidFill>
+        <a:effectLst/>
       </p:bgPr>
     </p:bg>
     <p:spTree>
       <p:nvGrpSpPr>
-        <p:cNvPr id="5" name="Shape 5"/>
+        <p:cNvPr id="1" name="Shape 5"/>
         <p:cNvGrpSpPr/>
         <p:nvPr/>
       </p:nvGrpSpPr>
@@ -6709,7 +6944,9 @@
       <p:sp>
         <p:nvSpPr>
           <p:cNvPr id="6" name="Google Shape;6;p1"/>
-          <p:cNvSpPr txBox="1"/>
+          <p:cNvSpPr txBox="1">
+            <a:spLocks noGrp="1"/>
+          </p:cNvSpPr>
           <p:nvPr>
             <p:ph type="title"/>
           </p:nvPr>
@@ -6728,7 +6965,7 @@
           </a:ln>
         </p:spPr>
         <p:txBody>
-          <a:bodyPr anchorCtr="0" anchor="t" bIns="91425" lIns="91425" spcFirstLastPara="1" rIns="91425" wrap="square" tIns="91425">
+          <a:bodyPr spcFirstLastPara="1" wrap="square" lIns="91425" tIns="91425" rIns="91425" bIns="91425" anchor="t" anchorCtr="0">
             <a:normAutofit/>
           </a:bodyPr>
           <a:lstStyle>
@@ -6895,15 +7132,19 @@
               </a:defRPr>
             </a:lvl9pPr>
           </a:lstStyle>
-          <a:p/>
+          <a:p>
+            <a:endParaRPr/>
+          </a:p>
         </p:txBody>
       </p:sp>
       <p:sp>
         <p:nvSpPr>
           <p:cNvPr id="7" name="Google Shape;7;p1"/>
-          <p:cNvSpPr txBox="1"/>
+          <p:cNvSpPr txBox="1">
+            <a:spLocks noGrp="1"/>
+          </p:cNvSpPr>
           <p:nvPr>
-            <p:ph idx="1" type="body"/>
+            <p:ph type="body" idx="1"/>
           </p:nvPr>
         </p:nvSpPr>
         <p:spPr>
@@ -6920,11 +7161,11 @@
           </a:ln>
         </p:spPr>
         <p:txBody>
-          <a:bodyPr anchorCtr="0" anchor="t" bIns="91425" lIns="91425" spcFirstLastPara="1" rIns="91425" wrap="square" tIns="91425">
+          <a:bodyPr spcFirstLastPara="1" wrap="square" lIns="91425" tIns="91425" rIns="91425" bIns="91425" anchor="t" anchorCtr="0">
             <a:normAutofit/>
           </a:bodyPr>
           <a:lstStyle>
-            <a:lvl1pPr indent="-342900" lvl="0" marL="457200">
+            <a:lvl1pPr marL="457200" lvl="0" indent="-342900">
               <a:lnSpc>
                 <a:spcPct val="115000"/>
               </a:lnSpc>
@@ -6945,7 +7186,7 @@
                 </a:solidFill>
               </a:defRPr>
             </a:lvl1pPr>
-            <a:lvl2pPr indent="-317500" lvl="1" marL="914400">
+            <a:lvl2pPr marL="914400" lvl="1" indent="-317500">
               <a:lnSpc>
                 <a:spcPct val="115000"/>
               </a:lnSpc>
@@ -6966,7 +7207,7 @@
                 </a:solidFill>
               </a:defRPr>
             </a:lvl2pPr>
-            <a:lvl3pPr indent="-317500" lvl="2" marL="1371600">
+            <a:lvl3pPr marL="1371600" lvl="2" indent="-317500">
               <a:lnSpc>
                 <a:spcPct val="115000"/>
               </a:lnSpc>
@@ -6987,7 +7228,7 @@
                 </a:solidFill>
               </a:defRPr>
             </a:lvl3pPr>
-            <a:lvl4pPr indent="-317500" lvl="3" marL="1828800">
+            <a:lvl4pPr marL="1828800" lvl="3" indent="-317500">
               <a:lnSpc>
                 <a:spcPct val="115000"/>
               </a:lnSpc>
@@ -7008,7 +7249,7 @@
                 </a:solidFill>
               </a:defRPr>
             </a:lvl4pPr>
-            <a:lvl5pPr indent="-317500" lvl="4" marL="2286000">
+            <a:lvl5pPr marL="2286000" lvl="4" indent="-317500">
               <a:lnSpc>
                 <a:spcPct val="115000"/>
               </a:lnSpc>
@@ -7029,7 +7270,7 @@
                 </a:solidFill>
               </a:defRPr>
             </a:lvl5pPr>
-            <a:lvl6pPr indent="-317500" lvl="5" marL="2743200">
+            <a:lvl6pPr marL="2743200" lvl="5" indent="-317500">
               <a:lnSpc>
                 <a:spcPct val="115000"/>
               </a:lnSpc>
@@ -7050,7 +7291,7 @@
                 </a:solidFill>
               </a:defRPr>
             </a:lvl6pPr>
-            <a:lvl7pPr indent="-317500" lvl="6" marL="3200400">
+            <a:lvl7pPr marL="3200400" lvl="6" indent="-317500">
               <a:lnSpc>
                 <a:spcPct val="115000"/>
               </a:lnSpc>
@@ -7071,7 +7312,7 @@
                 </a:solidFill>
               </a:defRPr>
             </a:lvl7pPr>
-            <a:lvl8pPr indent="-317500" lvl="7" marL="3657600">
+            <a:lvl8pPr marL="3657600" lvl="7" indent="-317500">
               <a:lnSpc>
                 <a:spcPct val="115000"/>
               </a:lnSpc>
@@ -7092,7 +7333,7 @@
                 </a:solidFill>
               </a:defRPr>
             </a:lvl8pPr>
-            <a:lvl9pPr indent="-317500" lvl="8" marL="4114800">
+            <a:lvl9pPr marL="4114800" lvl="8" indent="-317500">
               <a:lnSpc>
                 <a:spcPct val="115000"/>
               </a:lnSpc>
@@ -7114,15 +7355,19 @@
               </a:defRPr>
             </a:lvl9pPr>
           </a:lstStyle>
-          <a:p/>
+          <a:p>
+            <a:endParaRPr/>
+          </a:p>
         </p:txBody>
       </p:sp>
       <p:sp>
         <p:nvSpPr>
           <p:cNvPr id="8" name="Google Shape;8;p1"/>
-          <p:cNvSpPr txBox="1"/>
+          <p:cNvSpPr txBox="1">
+            <a:spLocks noGrp="1"/>
+          </p:cNvSpPr>
           <p:nvPr>
-            <p:ph idx="12" type="sldNum"/>
+            <p:ph type="sldNum" idx="12"/>
           </p:nvPr>
         </p:nvSpPr>
         <p:spPr>
@@ -7139,7 +7384,7 @@
           </a:ln>
         </p:spPr>
         <p:txBody>
-          <a:bodyPr anchorCtr="0" anchor="ctr" bIns="91425" lIns="91425" spcFirstLastPara="1" rIns="91425" wrap="square" tIns="91425">
+          <a:bodyPr spcFirstLastPara="1" wrap="square" lIns="91425" tIns="91425" rIns="91425" bIns="91425" anchor="ctr" anchorCtr="0">
             <a:normAutofit/>
           </a:bodyPr>
           <a:lstStyle>
@@ -7217,7 +7462,7 @@
             </a:lvl9pPr>
           </a:lstStyle>
           <a:p>
-            <a:pPr indent="0" lvl="0" marL="0" rtl="0" algn="r">
+            <a:pPr marL="0" lvl="0" indent="0" algn="r" rtl="0">
               <a:spcBef>
                 <a:spcPts val="0"/>
               </a:spcBef>
@@ -7236,7 +7481,7 @@
       </p:sp>
     </p:spTree>
   </p:cSld>
-  <p:clrMap accent1="accent1" accent2="accent2" accent3="accent3" accent4="accent4" accent5="accent5" accent6="accent6" bg1="lt1" bg2="dk2" tx1="dk1" tx2="lt2" folHlink="folHlink" hlink="hlink"/>
+  <p:clrMap bg1="lt1" tx1="dk1" bg2="dk2" tx2="lt2" accent1="accent1" accent2="accent2" accent3="accent3" accent4="accent4" accent5="accent5" accent6="accent6" hlink="hlink" folHlink="folHlink"/>
   <p:sldLayoutIdLst>
     <p:sldLayoutId id="2147483648" r:id="rId1"/>
     <p:sldLayoutId id="2147483649" r:id="rId2"/>
@@ -7250,10 +7495,10 @@
     <p:sldLayoutId id="2147483657" r:id="rId10"/>
     <p:sldLayoutId id="2147483658" r:id="rId11"/>
   </p:sldLayoutIdLst>
-  <p:hf dt="0" ftr="0" hdr="0" sldNum="0"/>
+  <p:hf sldNum="0" hdr="0" ftr="0" dt="0"/>
   <p:txStyles>
     <p:titleStyle>
-      <a:defPPr lvl="0" marR="0" rtl="0" algn="l">
+      <a:defPPr marR="0" lvl="0" algn="l" rtl="0">
         <a:lnSpc>
           <a:spcPct val="100000"/>
         </a:lnSpc>
@@ -7264,7 +7509,7 @@
           <a:spcPts val="0"/>
         </a:spcAft>
       </a:defPPr>
-      <a:lvl1pPr lvl="0" marR="0" rtl="0" algn="l">
+      <a:lvl1pPr marR="0" lvl="0" algn="l" rtl="0">
         <a:lnSpc>
           <a:spcPct val="100000"/>
         </a:lnSpc>
@@ -7278,7 +7523,7 @@
           <a:srgbClr val="000000"/>
         </a:buClr>
         <a:buFont typeface="Arial"/>
-        <a:defRPr b="0" i="0" spc="0" sz="1400" u="none" cap="none" strike="noStrike">
+        <a:defRPr sz="1400" b="0" i="0" u="none" strike="noStrike" cap="none" spc="0">
           <a:solidFill>
             <a:srgbClr val="000000"/>
           </a:solidFill>
@@ -7288,7 +7533,7 @@
           <a:sym typeface="Arial"/>
         </a:defRPr>
       </a:lvl1pPr>
-      <a:lvl2pPr lvl="1" marR="0" rtl="0" algn="l">
+      <a:lvl2pPr marR="0" lvl="1" algn="l" rtl="0">
         <a:lnSpc>
           <a:spcPct val="100000"/>
         </a:lnSpc>
@@ -7302,7 +7547,7 @@
           <a:srgbClr val="000000"/>
         </a:buClr>
         <a:buFont typeface="Arial"/>
-        <a:defRPr b="0" i="0" spc="0" sz="1400" u="none" cap="none" strike="noStrike">
+        <a:defRPr sz="1400" b="0" i="0" u="none" strike="noStrike" cap="none" spc="0">
           <a:solidFill>
             <a:srgbClr val="000000"/>
           </a:solidFill>
@@ -7312,7 +7557,7 @@
           <a:sym typeface="Arial"/>
         </a:defRPr>
       </a:lvl2pPr>
-      <a:lvl3pPr lvl="2" marR="0" rtl="0" algn="l">
+      <a:lvl3pPr marR="0" lvl="2" algn="l" rtl="0">
         <a:lnSpc>
           <a:spcPct val="100000"/>
         </a:lnSpc>
@@ -7326,7 +7571,7 @@
           <a:srgbClr val="000000"/>
         </a:buClr>
         <a:buFont typeface="Arial"/>
-        <a:defRPr b="0" i="0" spc="0" sz="1400" u="none" cap="none" strike="noStrike">
+        <a:defRPr sz="1400" b="0" i="0" u="none" strike="noStrike" cap="none" spc="0">
           <a:solidFill>
             <a:srgbClr val="000000"/>
           </a:solidFill>
@@ -7336,7 +7581,7 @@
           <a:sym typeface="Arial"/>
         </a:defRPr>
       </a:lvl3pPr>
-      <a:lvl4pPr lvl="3" marR="0" rtl="0" algn="l">
+      <a:lvl4pPr marR="0" lvl="3" algn="l" rtl="0">
         <a:lnSpc>
           <a:spcPct val="100000"/>
         </a:lnSpc>
@@ -7350,7 +7595,7 @@
           <a:srgbClr val="000000"/>
         </a:buClr>
         <a:buFont typeface="Arial"/>
-        <a:defRPr b="0" i="0" spc="0" sz="1400" u="none" cap="none" strike="noStrike">
+        <a:defRPr sz="1400" b="0" i="0" u="none" strike="noStrike" cap="none" spc="0">
           <a:solidFill>
             <a:srgbClr val="000000"/>
           </a:solidFill>
@@ -7360,7 +7605,7 @@
           <a:sym typeface="Arial"/>
         </a:defRPr>
       </a:lvl4pPr>
-      <a:lvl5pPr lvl="4" marR="0" rtl="0" algn="l">
+      <a:lvl5pPr marR="0" lvl="4" algn="l" rtl="0">
         <a:lnSpc>
           <a:spcPct val="100000"/>
         </a:lnSpc>
@@ -7374,7 +7619,7 @@
           <a:srgbClr val="000000"/>
         </a:buClr>
         <a:buFont typeface="Arial"/>
-        <a:defRPr b="0" i="0" spc="0" sz="1400" u="none" cap="none" strike="noStrike">
+        <a:defRPr sz="1400" b="0" i="0" u="none" strike="noStrike" cap="none" spc="0">
           <a:solidFill>
             <a:srgbClr val="000000"/>
           </a:solidFill>
@@ -7384,7 +7629,7 @@
           <a:sym typeface="Arial"/>
         </a:defRPr>
       </a:lvl5pPr>
-      <a:lvl6pPr lvl="5" marR="0" rtl="0" algn="l">
+      <a:lvl6pPr marR="0" lvl="5" algn="l" rtl="0">
         <a:lnSpc>
           <a:spcPct val="100000"/>
         </a:lnSpc>
@@ -7398,7 +7643,7 @@
           <a:srgbClr val="000000"/>
         </a:buClr>
         <a:buFont typeface="Arial"/>
-        <a:defRPr b="0" i="0" spc="0" sz="1400" u="none" cap="none" strike="noStrike">
+        <a:defRPr sz="1400" b="0" i="0" u="none" strike="noStrike" cap="none" spc="0">
           <a:solidFill>
             <a:srgbClr val="000000"/>
           </a:solidFill>
@@ -7408,7 +7653,7 @@
           <a:sym typeface="Arial"/>
         </a:defRPr>
       </a:lvl6pPr>
-      <a:lvl7pPr lvl="6" marR="0" rtl="0" algn="l">
+      <a:lvl7pPr marR="0" lvl="6" algn="l" rtl="0">
         <a:lnSpc>
           <a:spcPct val="100000"/>
         </a:lnSpc>
@@ -7422,7 +7667,7 @@
           <a:srgbClr val="000000"/>
         </a:buClr>
         <a:buFont typeface="Arial"/>
-        <a:defRPr b="0" i="0" spc="0" sz="1400" u="none" cap="none" strike="noStrike">
+        <a:defRPr sz="1400" b="0" i="0" u="none" strike="noStrike" cap="none" spc="0">
           <a:solidFill>
             <a:srgbClr val="000000"/>
           </a:solidFill>
@@ -7432,7 +7677,7 @@
           <a:sym typeface="Arial"/>
         </a:defRPr>
       </a:lvl7pPr>
-      <a:lvl8pPr lvl="7" marR="0" rtl="0" algn="l">
+      <a:lvl8pPr marR="0" lvl="7" algn="l" rtl="0">
         <a:lnSpc>
           <a:spcPct val="100000"/>
         </a:lnSpc>
@@ -7446,7 +7691,7 @@
           <a:srgbClr val="000000"/>
         </a:buClr>
         <a:buFont typeface="Arial"/>
-        <a:defRPr b="0" i="0" spc="0" sz="1400" u="none" cap="none" strike="noStrike">
+        <a:defRPr sz="1400" b="0" i="0" u="none" strike="noStrike" cap="none" spc="0">
           <a:solidFill>
             <a:srgbClr val="000000"/>
           </a:solidFill>
@@ -7456,7 +7701,7 @@
           <a:sym typeface="Arial"/>
         </a:defRPr>
       </a:lvl8pPr>
-      <a:lvl9pPr lvl="8" marR="0" rtl="0" algn="l">
+      <a:lvl9pPr marR="0" lvl="8" algn="l" rtl="0">
         <a:lnSpc>
           <a:spcPct val="100000"/>
         </a:lnSpc>
@@ -7470,7 +7715,7 @@
           <a:srgbClr val="000000"/>
         </a:buClr>
         <a:buFont typeface="Arial"/>
-        <a:defRPr b="0" i="0" spc="0" sz="1400" u="none" cap="none" strike="noStrike">
+        <a:defRPr sz="1400" b="0" i="0" u="none" strike="noStrike" cap="none" spc="0">
           <a:solidFill>
             <a:srgbClr val="000000"/>
           </a:solidFill>
@@ -7482,7 +7727,7 @@
       </a:lvl9pPr>
     </p:titleStyle>
     <p:bodyStyle>
-      <a:defPPr lvl="0" marR="0" rtl="0" algn="l">
+      <a:defPPr marR="0" lvl="0" algn="l" rtl="0">
         <a:lnSpc>
           <a:spcPct val="100000"/>
         </a:lnSpc>
@@ -7493,7 +7738,7 @@
           <a:spcPts val="0"/>
         </a:spcAft>
       </a:defPPr>
-      <a:lvl1pPr lvl="0" marR="0" rtl="0" algn="l">
+      <a:lvl1pPr marR="0" lvl="0" algn="l" rtl="0">
         <a:lnSpc>
           <a:spcPct val="100000"/>
         </a:lnSpc>
@@ -7507,7 +7752,7 @@
           <a:srgbClr val="000000"/>
         </a:buClr>
         <a:buFont typeface="Arial"/>
-        <a:defRPr b="0" i="0" spc="0" sz="1400" u="none" cap="none" strike="noStrike">
+        <a:defRPr sz="1400" b="0" i="0" u="none" strike="noStrike" cap="none" spc="0">
           <a:solidFill>
             <a:srgbClr val="000000"/>
           </a:solidFill>
@@ -7517,7 +7762,7 @@
           <a:sym typeface="Arial"/>
         </a:defRPr>
       </a:lvl1pPr>
-      <a:lvl2pPr lvl="1" marR="0" rtl="0" algn="l">
+      <a:lvl2pPr marR="0" lvl="1" algn="l" rtl="0">
         <a:lnSpc>
           <a:spcPct val="100000"/>
         </a:lnSpc>
@@ -7531,7 +7776,7 @@
           <a:srgbClr val="000000"/>
         </a:buClr>
         <a:buFont typeface="Arial"/>
-        <a:defRPr b="0" i="0" spc="0" sz="1400" u="none" cap="none" strike="noStrike">
+        <a:defRPr sz="1400" b="0" i="0" u="none" strike="noStrike" cap="none" spc="0">
           <a:solidFill>
             <a:srgbClr val="000000"/>
           </a:solidFill>
@@ -7541,7 +7786,7 @@
           <a:sym typeface="Arial"/>
         </a:defRPr>
       </a:lvl2pPr>
-      <a:lvl3pPr lvl="2" marR="0" rtl="0" algn="l">
+      <a:lvl3pPr marR="0" lvl="2" algn="l" rtl="0">
         <a:lnSpc>
           <a:spcPct val="100000"/>
         </a:lnSpc>
@@ -7555,7 +7800,7 @@
           <a:srgbClr val="000000"/>
         </a:buClr>
         <a:buFont typeface="Arial"/>
-        <a:defRPr b="0" i="0" spc="0" sz="1400" u="none" cap="none" strike="noStrike">
+        <a:defRPr sz="1400" b="0" i="0" u="none" strike="noStrike" cap="none" spc="0">
           <a:solidFill>
             <a:srgbClr val="000000"/>
           </a:solidFill>
@@ -7565,7 +7810,7 @@
           <a:sym typeface="Arial"/>
         </a:defRPr>
       </a:lvl3pPr>
-      <a:lvl4pPr lvl="3" marR="0" rtl="0" algn="l">
+      <a:lvl4pPr marR="0" lvl="3" algn="l" rtl="0">
         <a:lnSpc>
           <a:spcPct val="100000"/>
         </a:lnSpc>
@@ -7579,7 +7824,7 @@
           <a:srgbClr val="000000"/>
         </a:buClr>
         <a:buFont typeface="Arial"/>
-        <a:defRPr b="0" i="0" spc="0" sz="1400" u="none" cap="none" strike="noStrike">
+        <a:defRPr sz="1400" b="0" i="0" u="none" strike="noStrike" cap="none" spc="0">
           <a:solidFill>
             <a:srgbClr val="000000"/>
           </a:solidFill>
@@ -7589,7 +7834,7 @@
           <a:sym typeface="Arial"/>
         </a:defRPr>
       </a:lvl4pPr>
-      <a:lvl5pPr lvl="4" marR="0" rtl="0" algn="l">
+      <a:lvl5pPr marR="0" lvl="4" algn="l" rtl="0">
         <a:lnSpc>
           <a:spcPct val="100000"/>
         </a:lnSpc>
@@ -7603,7 +7848,7 @@
           <a:srgbClr val="000000"/>
         </a:buClr>
         <a:buFont typeface="Arial"/>
-        <a:defRPr b="0" i="0" spc="0" sz="1400" u="none" cap="none" strike="noStrike">
+        <a:defRPr sz="1400" b="0" i="0" u="none" strike="noStrike" cap="none" spc="0">
           <a:solidFill>
             <a:srgbClr val="000000"/>
           </a:solidFill>
@@ -7613,7 +7858,7 @@
           <a:sym typeface="Arial"/>
         </a:defRPr>
       </a:lvl5pPr>
-      <a:lvl6pPr lvl="5" marR="0" rtl="0" algn="l">
+      <a:lvl6pPr marR="0" lvl="5" algn="l" rtl="0">
         <a:lnSpc>
           <a:spcPct val="100000"/>
         </a:lnSpc>
@@ -7627,7 +7872,7 @@
           <a:srgbClr val="000000"/>
         </a:buClr>
         <a:buFont typeface="Arial"/>
-        <a:defRPr b="0" i="0" spc="0" sz="1400" u="none" cap="none" strike="noStrike">
+        <a:defRPr sz="1400" b="0" i="0" u="none" strike="noStrike" cap="none" spc="0">
           <a:solidFill>
             <a:srgbClr val="000000"/>
           </a:solidFill>
@@ -7637,7 +7882,7 @@
           <a:sym typeface="Arial"/>
         </a:defRPr>
       </a:lvl6pPr>
-      <a:lvl7pPr lvl="6" marR="0" rtl="0" algn="l">
+      <a:lvl7pPr marR="0" lvl="6" algn="l" rtl="0">
         <a:lnSpc>
           <a:spcPct val="100000"/>
         </a:lnSpc>
@@ -7651,7 +7896,7 @@
           <a:srgbClr val="000000"/>
         </a:buClr>
         <a:buFont typeface="Arial"/>
-        <a:defRPr b="0" i="0" spc="0" sz="1400" u="none" cap="none" strike="noStrike">
+        <a:defRPr sz="1400" b="0" i="0" u="none" strike="noStrike" cap="none" spc="0">
           <a:solidFill>
             <a:srgbClr val="000000"/>
           </a:solidFill>
@@ -7661,7 +7906,7 @@
           <a:sym typeface="Arial"/>
         </a:defRPr>
       </a:lvl7pPr>
-      <a:lvl8pPr lvl="7" marR="0" rtl="0" algn="l">
+      <a:lvl8pPr marR="0" lvl="7" algn="l" rtl="0">
         <a:lnSpc>
           <a:spcPct val="100000"/>
         </a:lnSpc>
@@ -7675,7 +7920,7 @@
           <a:srgbClr val="000000"/>
         </a:buClr>
         <a:buFont typeface="Arial"/>
-        <a:defRPr b="0" i="0" spc="0" sz="1400" u="none" cap="none" strike="noStrike">
+        <a:defRPr sz="1400" b="0" i="0" u="none" strike="noStrike" cap="none" spc="0">
           <a:solidFill>
             <a:srgbClr val="000000"/>
           </a:solidFill>
@@ -7685,7 +7930,7 @@
           <a:sym typeface="Arial"/>
         </a:defRPr>
       </a:lvl8pPr>
-      <a:lvl9pPr lvl="8" marR="0" rtl="0" algn="l">
+      <a:lvl9pPr marR="0" lvl="8" algn="l" rtl="0">
         <a:lnSpc>
           <a:spcPct val="100000"/>
         </a:lnSpc>
@@ -7699,7 +7944,7 @@
           <a:srgbClr val="000000"/>
         </a:buClr>
         <a:buFont typeface="Arial"/>
-        <a:defRPr b="0" i="0" spc="0" sz="1400" u="none" cap="none" strike="noStrike">
+        <a:defRPr sz="1400" b="0" i="0" u="none" strike="noStrike" cap="none" spc="0">
           <a:solidFill>
             <a:srgbClr val="000000"/>
           </a:solidFill>
@@ -7711,7 +7956,7 @@
       </a:lvl9pPr>
     </p:bodyStyle>
     <p:otherStyle>
-      <a:defPPr lvl="0" marR="0" rtl="0" algn="l">
+      <a:defPPr marR="0" lvl="0" algn="l" rtl="0">
         <a:lnSpc>
           <a:spcPct val="100000"/>
         </a:lnSpc>
@@ -7722,7 +7967,7 @@
           <a:spcPts val="0"/>
         </a:spcAft>
       </a:defPPr>
-      <a:lvl1pPr lvl="0" marR="0" rtl="0" algn="l">
+      <a:lvl1pPr marR="0" lvl="0" algn="l" rtl="0">
         <a:lnSpc>
           <a:spcPct val="100000"/>
         </a:lnSpc>
@@ -7736,7 +7981,7 @@
           <a:srgbClr val="000000"/>
         </a:buClr>
         <a:buFont typeface="Arial"/>
-        <a:defRPr b="0" i="0" spc="0" sz="1400" u="none" cap="none" strike="noStrike">
+        <a:defRPr sz="1400" b="0" i="0" u="none" strike="noStrike" cap="none" spc="0">
           <a:solidFill>
             <a:srgbClr val="000000"/>
           </a:solidFill>
@@ -7746,7 +7991,7 @@
           <a:sym typeface="Arial"/>
         </a:defRPr>
       </a:lvl1pPr>
-      <a:lvl2pPr lvl="1" marR="0" rtl="0" algn="l">
+      <a:lvl2pPr marR="0" lvl="1" algn="l" rtl="0">
         <a:lnSpc>
           <a:spcPct val="100000"/>
         </a:lnSpc>
@@ -7760,7 +8005,7 @@
           <a:srgbClr val="000000"/>
         </a:buClr>
         <a:buFont typeface="Arial"/>
-        <a:defRPr b="0" i="0" spc="0" sz="1400" u="none" cap="none" strike="noStrike">
+        <a:defRPr sz="1400" b="0" i="0" u="none" strike="noStrike" cap="none" spc="0">
           <a:solidFill>
             <a:srgbClr val="000000"/>
           </a:solidFill>
@@ -7770,7 +8015,7 @@
           <a:sym typeface="Arial"/>
         </a:defRPr>
       </a:lvl2pPr>
-      <a:lvl3pPr lvl="2" marR="0" rtl="0" algn="l">
+      <a:lvl3pPr marR="0" lvl="2" algn="l" rtl="0">
         <a:lnSpc>
           <a:spcPct val="100000"/>
         </a:lnSpc>
@@ -7784,7 +8029,7 @@
           <a:srgbClr val="000000"/>
         </a:buClr>
         <a:buFont typeface="Arial"/>
-        <a:defRPr b="0" i="0" spc="0" sz="1400" u="none" cap="none" strike="noStrike">
+        <a:defRPr sz="1400" b="0" i="0" u="none" strike="noStrike" cap="none" spc="0">
           <a:solidFill>
             <a:srgbClr val="000000"/>
           </a:solidFill>
@@ -7794,7 +8039,7 @@
           <a:sym typeface="Arial"/>
         </a:defRPr>
       </a:lvl3pPr>
-      <a:lvl4pPr lvl="3" marR="0" rtl="0" algn="l">
+      <a:lvl4pPr marR="0" lvl="3" algn="l" rtl="0">
         <a:lnSpc>
           <a:spcPct val="100000"/>
         </a:lnSpc>
@@ -7808,7 +8053,7 @@
           <a:srgbClr val="000000"/>
         </a:buClr>
         <a:buFont typeface="Arial"/>
-        <a:defRPr b="0" i="0" spc="0" sz="1400" u="none" cap="none" strike="noStrike">
+        <a:defRPr sz="1400" b="0" i="0" u="none" strike="noStrike" cap="none" spc="0">
           <a:solidFill>
             <a:srgbClr val="000000"/>
           </a:solidFill>
@@ -7818,7 +8063,7 @@
           <a:sym typeface="Arial"/>
         </a:defRPr>
       </a:lvl4pPr>
-      <a:lvl5pPr lvl="4" marR="0" rtl="0" algn="l">
+      <a:lvl5pPr marR="0" lvl="4" algn="l" rtl="0">
         <a:lnSpc>
           <a:spcPct val="100000"/>
         </a:lnSpc>
@@ -7832,7 +8077,7 @@
           <a:srgbClr val="000000"/>
         </a:buClr>
         <a:buFont typeface="Arial"/>
-        <a:defRPr b="0" i="0" spc="0" sz="1400" u="none" cap="none" strike="noStrike">
+        <a:defRPr sz="1400" b="0" i="0" u="none" strike="noStrike" cap="none" spc="0">
           <a:solidFill>
             <a:srgbClr val="000000"/>
           </a:solidFill>
@@ -7842,7 +8087,7 @@
           <a:sym typeface="Arial"/>
         </a:defRPr>
       </a:lvl5pPr>
-      <a:lvl6pPr lvl="5" marR="0" rtl="0" algn="l">
+      <a:lvl6pPr marR="0" lvl="5" algn="l" rtl="0">
         <a:lnSpc>
           <a:spcPct val="100000"/>
         </a:lnSpc>
@@ -7856,7 +8101,7 @@
           <a:srgbClr val="000000"/>
         </a:buClr>
         <a:buFont typeface="Arial"/>
-        <a:defRPr b="0" i="0" spc="0" sz="1400" u="none" cap="none" strike="noStrike">
+        <a:defRPr sz="1400" b="0" i="0" u="none" strike="noStrike" cap="none" spc="0">
           <a:solidFill>
             <a:srgbClr val="000000"/>
           </a:solidFill>
@@ -7866,7 +8111,7 @@
           <a:sym typeface="Arial"/>
         </a:defRPr>
       </a:lvl6pPr>
-      <a:lvl7pPr lvl="6" marR="0" rtl="0" algn="l">
+      <a:lvl7pPr marR="0" lvl="6" algn="l" rtl="0">
         <a:lnSpc>
           <a:spcPct val="100000"/>
         </a:lnSpc>
@@ -7880,7 +8125,7 @@
           <a:srgbClr val="000000"/>
         </a:buClr>
         <a:buFont typeface="Arial"/>
-        <a:defRPr b="0" i="0" spc="0" sz="1400" u="none" cap="none" strike="noStrike">
+        <a:defRPr sz="1400" b="0" i="0" u="none" strike="noStrike" cap="none" spc="0">
           <a:solidFill>
             <a:srgbClr val="000000"/>
           </a:solidFill>
@@ -7890,7 +8135,7 @@
           <a:sym typeface="Arial"/>
         </a:defRPr>
       </a:lvl7pPr>
-      <a:lvl8pPr lvl="7" marR="0" rtl="0" algn="l">
+      <a:lvl8pPr marR="0" lvl="7" algn="l" rtl="0">
         <a:lnSpc>
           <a:spcPct val="100000"/>
         </a:lnSpc>
@@ -7904,7 +8149,7 @@
           <a:srgbClr val="000000"/>
         </a:buClr>
         <a:buFont typeface="Arial"/>
-        <a:defRPr b="0" i="0" spc="0" sz="1400" u="none" cap="none" strike="noStrike">
+        <a:defRPr sz="1400" b="0" i="0" u="none" strike="noStrike" cap="none" spc="0">
           <a:solidFill>
             <a:srgbClr val="000000"/>
           </a:solidFill>
@@ -7914,7 +8159,7 @@
           <a:sym typeface="Arial"/>
         </a:defRPr>
       </a:lvl8pPr>
-      <a:lvl9pPr lvl="8" marR="0" rtl="0" algn="l">
+      <a:lvl9pPr marR="0" lvl="8" algn="l" rtl="0">
         <a:lnSpc>
           <a:spcPct val="100000"/>
         </a:lnSpc>
@@ -7928,7 +8173,7 @@
           <a:srgbClr val="000000"/>
         </a:buClr>
         <a:buFont typeface="Arial"/>
-        <a:defRPr b="0" i="0" spc="0" sz="1400" u="none" cap="none" strike="noStrike">
+        <a:defRPr sz="1400" b="0" i="0" u="none" strike="noStrike" cap="none" spc="0">
           <a:solidFill>
             <a:srgbClr val="000000"/>
           </a:solidFill>
@@ -7944,7 +8189,7 @@
 </file>
 
 <file path=ppt/slides/slide1.xml><?xml version="1.0" encoding="utf-8"?>
-<p:sld xmlns:a="http://schemas.openxmlformats.org/drawingml/2006/main" xmlns:r="http://schemas.openxmlformats.org/officeDocument/2006/relationships" xmlns:mc="http://schemas.openxmlformats.org/markup-compatibility/2006" xmlns:mv="urn:schemas-microsoft-com:mac:vml" xmlns:p="http://schemas.openxmlformats.org/presentationml/2006/main" xmlns:c="http://schemas.openxmlformats.org/drawingml/2006/chart" xmlns:dgm="http://schemas.openxmlformats.org/drawingml/2006/diagram" xmlns:o="urn:schemas-microsoft-com:office:office" xmlns:v="urn:schemas-microsoft-com:vml" xmlns:pvml="urn:schemas-microsoft-com:office:powerpoint" xmlns:com="http://schemas.openxmlformats.org/drawingml/2006/compatibility" xmlns:p14="http://schemas.microsoft.com/office/powerpoint/2010/main" xmlns:p15="http://schemas.microsoft.com/office/powerpoint/2012/main" xmlns:ahyp="http://schemas.microsoft.com/office/drawing/2018/hyperlinkcolor">
+<p:sld xmlns:a="http://schemas.openxmlformats.org/drawingml/2006/main" xmlns:r="http://schemas.openxmlformats.org/officeDocument/2006/relationships" xmlns:p="http://schemas.openxmlformats.org/presentationml/2006/main">
   <p:cSld>
     <p:bg>
       <p:bgPr>
@@ -7956,11 +8201,12 @@
             <a:fillRect/>
           </a:stretch>
         </a:blipFill>
+        <a:effectLst/>
       </p:bgPr>
     </p:bg>
     <p:spTree>
       <p:nvGrpSpPr>
-        <p:cNvPr id="53" name="Shape 53"/>
+        <p:cNvPr id="1" name="Shape 53"/>
         <p:cNvGrpSpPr/>
         <p:nvPr/>
       </p:nvGrpSpPr>
@@ -7981,7 +8227,7 @@
 </file>
 
 <file path=ppt/slides/slide10.xml><?xml version="1.0" encoding="utf-8"?>
-<p:sld xmlns:a="http://schemas.openxmlformats.org/drawingml/2006/main" xmlns:r="http://schemas.openxmlformats.org/officeDocument/2006/relationships" xmlns:mc="http://schemas.openxmlformats.org/markup-compatibility/2006" xmlns:mv="urn:schemas-microsoft-com:mac:vml" xmlns:p="http://schemas.openxmlformats.org/presentationml/2006/main" xmlns:c="http://schemas.openxmlformats.org/drawingml/2006/chart" xmlns:dgm="http://schemas.openxmlformats.org/drawingml/2006/diagram" xmlns:o="urn:schemas-microsoft-com:office:office" xmlns:v="urn:schemas-microsoft-com:vml" xmlns:pvml="urn:schemas-microsoft-com:office:powerpoint" xmlns:com="http://schemas.openxmlformats.org/drawingml/2006/compatibility" xmlns:p14="http://schemas.microsoft.com/office/powerpoint/2010/main" xmlns:p15="http://schemas.microsoft.com/office/powerpoint/2012/main" xmlns:ahyp="http://schemas.microsoft.com/office/drawing/2018/hyperlinkcolor">
+<p:sld xmlns:a="http://schemas.openxmlformats.org/drawingml/2006/main" xmlns:r="http://schemas.openxmlformats.org/officeDocument/2006/relationships" xmlns:p="http://schemas.openxmlformats.org/presentationml/2006/main">
   <p:cSld>
     <p:bg>
       <p:bgPr>
@@ -7993,11 +8239,12 @@
             <a:fillRect/>
           </a:stretch>
         </a:blipFill>
+        <a:effectLst/>
       </p:bgPr>
     </p:bg>
     <p:spTree>
       <p:nvGrpSpPr>
-        <p:cNvPr id="109" name="Shape 109"/>
+        <p:cNvPr id="1" name="Shape 109"/>
         <p:cNvGrpSpPr/>
         <p:nvPr/>
       </p:nvGrpSpPr>
@@ -8009,6 +8256,36 @@
           <a:chExt cx="0" cy="0"/>
         </a:xfrm>
       </p:grpSpPr>
+      <p:pic>
+        <p:nvPicPr>
+          <p:cNvPr id="3" name="Picture 2">
+            <a:extLst>
+              <a:ext uri="{FF2B5EF4-FFF2-40B4-BE49-F238E27FC236}">
+                <a16:creationId xmlns:a16="http://schemas.microsoft.com/office/drawing/2014/main" id="{F4C263EC-6F0C-F298-FE2C-10A36F546C1D}"/>
+              </a:ext>
+            </a:extLst>
+          </p:cNvPr>
+          <p:cNvPicPr>
+            <a:picLocks noChangeAspect="1"/>
+          </p:cNvPicPr>
+          <p:nvPr/>
+        </p:nvPicPr>
+        <p:blipFill>
+          <a:blip r:embed="rId4"/>
+          <a:stretch>
+            <a:fillRect/>
+          </a:stretch>
+        </p:blipFill>
+        <p:spPr>
+          <a:xfrm>
+            <a:off x="6707903" y="144816"/>
+            <a:ext cx="2263537" cy="488784"/>
+          </a:xfrm>
+          <a:prstGeom prst="rect">
+            <a:avLst/>
+          </a:prstGeom>
+        </p:spPr>
+      </p:pic>
     </p:spTree>
   </p:cSld>
   <p:clrMapOvr>
@@ -8018,7 +8295,7 @@
 </file>
 
 <file path=ppt/slides/slide11.xml><?xml version="1.0" encoding="utf-8"?>
-<p:sld xmlns:a="http://schemas.openxmlformats.org/drawingml/2006/main" xmlns:r="http://schemas.openxmlformats.org/officeDocument/2006/relationships" xmlns:mc="http://schemas.openxmlformats.org/markup-compatibility/2006" xmlns:mv="urn:schemas-microsoft-com:mac:vml" xmlns:p="http://schemas.openxmlformats.org/presentationml/2006/main" xmlns:c="http://schemas.openxmlformats.org/drawingml/2006/chart" xmlns:dgm="http://schemas.openxmlformats.org/drawingml/2006/diagram" xmlns:o="urn:schemas-microsoft-com:office:office" xmlns:v="urn:schemas-microsoft-com:vml" xmlns:pvml="urn:schemas-microsoft-com:office:powerpoint" xmlns:com="http://schemas.openxmlformats.org/drawingml/2006/compatibility" xmlns:p14="http://schemas.microsoft.com/office/powerpoint/2010/main" xmlns:p15="http://schemas.microsoft.com/office/powerpoint/2012/main" xmlns:ahyp="http://schemas.microsoft.com/office/drawing/2018/hyperlinkcolor">
+<p:sld xmlns:a="http://schemas.openxmlformats.org/drawingml/2006/main" xmlns:r="http://schemas.openxmlformats.org/officeDocument/2006/relationships" xmlns:p="http://schemas.openxmlformats.org/presentationml/2006/main">
   <p:cSld>
     <p:bg>
       <p:bgPr>
@@ -8030,11 +8307,12 @@
             <a:fillRect/>
           </a:stretch>
         </a:blipFill>
+        <a:effectLst/>
       </p:bgPr>
     </p:bg>
     <p:spTree>
       <p:nvGrpSpPr>
-        <p:cNvPr id="113" name="Shape 113"/>
+        <p:cNvPr id="1" name="Shape 113"/>
         <p:cNvGrpSpPr/>
         <p:nvPr/>
       </p:nvGrpSpPr>
@@ -8055,7 +8333,7 @@
 </file>
 
 <file path=ppt/slides/slide12.xml><?xml version="1.0" encoding="utf-8"?>
-<p:sld xmlns:a="http://schemas.openxmlformats.org/drawingml/2006/main" xmlns:r="http://schemas.openxmlformats.org/officeDocument/2006/relationships" xmlns:mc="http://schemas.openxmlformats.org/markup-compatibility/2006" xmlns:mv="urn:schemas-microsoft-com:mac:vml" xmlns:p="http://schemas.openxmlformats.org/presentationml/2006/main" xmlns:c="http://schemas.openxmlformats.org/drawingml/2006/chart" xmlns:dgm="http://schemas.openxmlformats.org/drawingml/2006/diagram" xmlns:o="urn:schemas-microsoft-com:office:office" xmlns:v="urn:schemas-microsoft-com:vml" xmlns:pvml="urn:schemas-microsoft-com:office:powerpoint" xmlns:com="http://schemas.openxmlformats.org/drawingml/2006/compatibility" xmlns:p14="http://schemas.microsoft.com/office/powerpoint/2010/main" xmlns:p15="http://schemas.microsoft.com/office/powerpoint/2012/main" xmlns:ahyp="http://schemas.microsoft.com/office/drawing/2018/hyperlinkcolor">
+<p:sld xmlns:a="http://schemas.openxmlformats.org/drawingml/2006/main" xmlns:r="http://schemas.openxmlformats.org/officeDocument/2006/relationships" xmlns:p="http://schemas.openxmlformats.org/presentationml/2006/main">
   <p:cSld>
     <p:bg>
       <p:bgPr>
@@ -8067,11 +8345,12 @@
             <a:fillRect/>
           </a:stretch>
         </a:blipFill>
+        <a:effectLst/>
       </p:bgPr>
     </p:bg>
     <p:spTree>
       <p:nvGrpSpPr>
-        <p:cNvPr id="117" name="Shape 117"/>
+        <p:cNvPr id="1" name="Shape 117"/>
         <p:cNvGrpSpPr/>
         <p:nvPr/>
       </p:nvGrpSpPr>
@@ -8103,12 +8382,12 @@
           </a:ln>
         </p:spPr>
         <p:txBody>
-          <a:bodyPr anchorCtr="0" anchor="t" bIns="91425" lIns="91425" spcFirstLastPara="1" rIns="91425" wrap="square" tIns="91425">
+          <a:bodyPr spcFirstLastPara="1" wrap="square" lIns="91425" tIns="91425" rIns="91425" bIns="91425" anchor="t" anchorCtr="0">
             <a:normAutofit/>
           </a:bodyPr>
           <a:lstStyle/>
           <a:p>
-            <a:pPr indent="0" lvl="0" marL="0" rtl="0" algn="l">
+            <a:pPr marL="0" lvl="0" indent="0" algn="l" rtl="0">
               <a:spcBef>
                 <a:spcPts val="0"/>
               </a:spcBef>
@@ -8161,12 +8440,12 @@
           </a:ln>
         </p:spPr>
         <p:txBody>
-          <a:bodyPr anchorCtr="0" anchor="t" bIns="91425" lIns="91425" spcFirstLastPara="1" rIns="91425" wrap="square" tIns="91425">
+          <a:bodyPr spcFirstLastPara="1" wrap="square" lIns="91425" tIns="91425" rIns="91425" bIns="91425" anchor="t" anchorCtr="0">
             <a:normAutofit/>
           </a:bodyPr>
           <a:lstStyle/>
           <a:p>
-            <a:pPr indent="0" lvl="0" marL="0" rtl="0" algn="l">
+            <a:pPr marL="0" lvl="0" indent="0" algn="l" rtl="0">
               <a:spcBef>
                 <a:spcPts val="0"/>
               </a:spcBef>
@@ -8219,12 +8498,12 @@
           </a:ln>
         </p:spPr>
         <p:txBody>
-          <a:bodyPr anchorCtr="0" anchor="t" bIns="91425" lIns="91425" spcFirstLastPara="1" rIns="91425" wrap="square" tIns="91425">
+          <a:bodyPr spcFirstLastPara="1" wrap="square" lIns="91425" tIns="91425" rIns="91425" bIns="91425" anchor="t" anchorCtr="0">
             <a:normAutofit/>
           </a:bodyPr>
           <a:lstStyle/>
           <a:p>
-            <a:pPr indent="0" lvl="0" marL="0" rtl="0" algn="l">
+            <a:pPr marL="0" lvl="0" indent="0" algn="l" rtl="0">
               <a:spcBef>
                 <a:spcPts val="0"/>
               </a:spcBef>
@@ -8277,12 +8556,12 @@
           </a:ln>
         </p:spPr>
         <p:txBody>
-          <a:bodyPr anchorCtr="0" anchor="t" bIns="91425" lIns="91425" spcFirstLastPara="1" rIns="91425" wrap="square" tIns="91425">
+          <a:bodyPr spcFirstLastPara="1" wrap="square" lIns="91425" tIns="91425" rIns="91425" bIns="91425" anchor="t" anchorCtr="0">
             <a:normAutofit/>
           </a:bodyPr>
           <a:lstStyle/>
           <a:p>
-            <a:pPr indent="0" lvl="0" marL="0" rtl="0" algn="l">
+            <a:pPr marL="0" lvl="0" indent="0" algn="l" rtl="0">
               <a:spcBef>
                 <a:spcPts val="0"/>
               </a:spcBef>
@@ -8335,12 +8614,12 @@
           </a:ln>
         </p:spPr>
         <p:txBody>
-          <a:bodyPr anchorCtr="0" anchor="t" bIns="91425" lIns="91425" spcFirstLastPara="1" rIns="91425" wrap="square" tIns="91425">
+          <a:bodyPr spcFirstLastPara="1" wrap="square" lIns="91425" tIns="91425" rIns="91425" bIns="91425" anchor="t" anchorCtr="0">
             <a:normAutofit/>
           </a:bodyPr>
           <a:lstStyle/>
           <a:p>
-            <a:pPr indent="0" lvl="0" marL="0" rtl="0" algn="l">
+            <a:pPr marL="0" lvl="0" indent="0" algn="l" rtl="0">
               <a:spcBef>
                 <a:spcPts val="0"/>
               </a:spcBef>
@@ -8393,12 +8672,12 @@
           </a:ln>
         </p:spPr>
         <p:txBody>
-          <a:bodyPr anchorCtr="0" anchor="t" bIns="91425" lIns="91425" spcFirstLastPara="1" rIns="91425" wrap="square" tIns="91425">
+          <a:bodyPr spcFirstLastPara="1" wrap="square" lIns="91425" tIns="91425" rIns="91425" bIns="91425" anchor="t" anchorCtr="0">
             <a:normAutofit/>
           </a:bodyPr>
           <a:lstStyle/>
           <a:p>
-            <a:pPr indent="0" lvl="0" marL="0" rtl="0" algn="l">
+            <a:pPr marL="0" lvl="0" indent="0" algn="l" rtl="0">
               <a:spcBef>
                 <a:spcPts val="0"/>
               </a:spcBef>
@@ -8451,12 +8730,12 @@
           </a:ln>
         </p:spPr>
         <p:txBody>
-          <a:bodyPr anchorCtr="0" anchor="t" bIns="91425" lIns="91425" spcFirstLastPara="1" rIns="91425" wrap="square" tIns="91425">
+          <a:bodyPr spcFirstLastPara="1" wrap="square" lIns="91425" tIns="91425" rIns="91425" bIns="91425" anchor="t" anchorCtr="0">
             <a:normAutofit/>
           </a:bodyPr>
           <a:lstStyle/>
           <a:p>
-            <a:pPr indent="0" lvl="0" marL="0" rtl="0" algn="l">
+            <a:pPr marL="0" lvl="0" indent="0" algn="l" rtl="0">
               <a:spcBef>
                 <a:spcPts val="0"/>
               </a:spcBef>
@@ -8498,7 +8777,7 @@
 </file>
 
 <file path=ppt/slides/slide13.xml><?xml version="1.0" encoding="utf-8"?>
-<p:sld xmlns:a="http://schemas.openxmlformats.org/drawingml/2006/main" xmlns:r="http://schemas.openxmlformats.org/officeDocument/2006/relationships" xmlns:mc="http://schemas.openxmlformats.org/markup-compatibility/2006" xmlns:mv="urn:schemas-microsoft-com:mac:vml" xmlns:p="http://schemas.openxmlformats.org/presentationml/2006/main" xmlns:c="http://schemas.openxmlformats.org/drawingml/2006/chart" xmlns:dgm="http://schemas.openxmlformats.org/drawingml/2006/diagram" xmlns:o="urn:schemas-microsoft-com:office:office" xmlns:v="urn:schemas-microsoft-com:vml" xmlns:pvml="urn:schemas-microsoft-com:office:powerpoint" xmlns:com="http://schemas.openxmlformats.org/drawingml/2006/compatibility" xmlns:p14="http://schemas.microsoft.com/office/powerpoint/2010/main" xmlns:p15="http://schemas.microsoft.com/office/powerpoint/2012/main" xmlns:ahyp="http://schemas.microsoft.com/office/drawing/2018/hyperlinkcolor">
+<p:sld xmlns:a="http://schemas.openxmlformats.org/drawingml/2006/main" xmlns:r="http://schemas.openxmlformats.org/officeDocument/2006/relationships" xmlns:p="http://schemas.openxmlformats.org/presentationml/2006/main">
   <p:cSld>
     <p:bg>
       <p:bgPr>
@@ -8510,11 +8789,12 @@
             <a:fillRect/>
           </a:stretch>
         </a:blipFill>
+        <a:effectLst/>
       </p:bgPr>
     </p:bg>
     <p:spTree>
       <p:nvGrpSpPr>
-        <p:cNvPr id="128" name="Shape 128"/>
+        <p:cNvPr id="1" name="Shape 128"/>
         <p:cNvGrpSpPr/>
         <p:nvPr/>
       </p:nvGrpSpPr>
@@ -8546,12 +8826,12 @@
           </a:ln>
         </p:spPr>
         <p:txBody>
-          <a:bodyPr anchorCtr="0" anchor="t" bIns="91425" lIns="91425" spcFirstLastPara="1" rIns="91425" wrap="square" tIns="91425">
+          <a:bodyPr spcFirstLastPara="1" wrap="square" lIns="91425" tIns="91425" rIns="91425" bIns="91425" anchor="t" anchorCtr="0">
             <a:normAutofit/>
           </a:bodyPr>
           <a:lstStyle/>
           <a:p>
-            <a:pPr indent="0" lvl="0" marL="0" rtl="0" algn="l">
+            <a:pPr marL="0" lvl="0" indent="0" algn="l" rtl="0">
               <a:spcBef>
                 <a:spcPts val="0"/>
               </a:spcBef>
@@ -8604,12 +8884,12 @@
           </a:ln>
         </p:spPr>
         <p:txBody>
-          <a:bodyPr anchorCtr="0" anchor="t" bIns="91425" lIns="91425" spcFirstLastPara="1" rIns="91425" wrap="square" tIns="91425">
+          <a:bodyPr spcFirstLastPara="1" wrap="square" lIns="91425" tIns="91425" rIns="91425" bIns="91425" anchor="t" anchorCtr="0">
             <a:normAutofit/>
           </a:bodyPr>
           <a:lstStyle/>
           <a:p>
-            <a:pPr indent="0" lvl="0" marL="0" rtl="0" algn="l">
+            <a:pPr marL="0" lvl="0" indent="0" algn="l" rtl="0">
               <a:spcBef>
                 <a:spcPts val="0"/>
               </a:spcBef>
@@ -8662,12 +8942,12 @@
           </a:ln>
         </p:spPr>
         <p:txBody>
-          <a:bodyPr anchorCtr="0" anchor="t" bIns="91425" lIns="91425" spcFirstLastPara="1" rIns="91425" wrap="square" tIns="91425">
+          <a:bodyPr spcFirstLastPara="1" wrap="square" lIns="91425" tIns="91425" rIns="91425" bIns="91425" anchor="t" anchorCtr="0">
             <a:normAutofit/>
           </a:bodyPr>
           <a:lstStyle/>
           <a:p>
-            <a:pPr indent="0" lvl="0" marL="0" rtl="0" algn="l">
+            <a:pPr marL="0" lvl="0" indent="0" algn="l" rtl="0">
               <a:spcBef>
                 <a:spcPts val="0"/>
               </a:spcBef>
@@ -8709,7 +8989,7 @@
 </file>
 
 <file path=ppt/slides/slide14.xml><?xml version="1.0" encoding="utf-8"?>
-<p:sld xmlns:a="http://schemas.openxmlformats.org/drawingml/2006/main" xmlns:r="http://schemas.openxmlformats.org/officeDocument/2006/relationships" xmlns:mc="http://schemas.openxmlformats.org/markup-compatibility/2006" xmlns:mv="urn:schemas-microsoft-com:mac:vml" xmlns:p="http://schemas.openxmlformats.org/presentationml/2006/main" xmlns:c="http://schemas.openxmlformats.org/drawingml/2006/chart" xmlns:dgm="http://schemas.openxmlformats.org/drawingml/2006/diagram" xmlns:o="urn:schemas-microsoft-com:office:office" xmlns:v="urn:schemas-microsoft-com:vml" xmlns:pvml="urn:schemas-microsoft-com:office:powerpoint" xmlns:com="http://schemas.openxmlformats.org/drawingml/2006/compatibility" xmlns:p14="http://schemas.microsoft.com/office/powerpoint/2010/main" xmlns:p15="http://schemas.microsoft.com/office/powerpoint/2012/main" xmlns:ahyp="http://schemas.microsoft.com/office/drawing/2018/hyperlinkcolor">
+<p:sld xmlns:a="http://schemas.openxmlformats.org/drawingml/2006/main" xmlns:r="http://schemas.openxmlformats.org/officeDocument/2006/relationships" xmlns:p="http://schemas.openxmlformats.org/presentationml/2006/main">
   <p:cSld>
     <p:bg>
       <p:bgPr>
@@ -8721,11 +9001,12 @@
             <a:fillRect/>
           </a:stretch>
         </a:blipFill>
+        <a:effectLst/>
       </p:bgPr>
     </p:bg>
     <p:spTree>
       <p:nvGrpSpPr>
-        <p:cNvPr id="135" name="Shape 135"/>
+        <p:cNvPr id="1" name="Shape 135"/>
         <p:cNvGrpSpPr/>
         <p:nvPr/>
       </p:nvGrpSpPr>
@@ -8737,6 +9018,36 @@
           <a:chExt cx="0" cy="0"/>
         </a:xfrm>
       </p:grpSpPr>
+      <p:pic>
+        <p:nvPicPr>
+          <p:cNvPr id="3" name="Picture 2">
+            <a:extLst>
+              <a:ext uri="{FF2B5EF4-FFF2-40B4-BE49-F238E27FC236}">
+                <a16:creationId xmlns:a16="http://schemas.microsoft.com/office/drawing/2014/main" id="{7B12A0EC-C629-6B56-2570-7D71CD47A4BE}"/>
+              </a:ext>
+            </a:extLst>
+          </p:cNvPr>
+          <p:cNvPicPr>
+            <a:picLocks noChangeAspect="1"/>
+          </p:cNvPicPr>
+          <p:nvPr/>
+        </p:nvPicPr>
+        <p:blipFill>
+          <a:blip r:embed="rId4"/>
+          <a:stretch>
+            <a:fillRect/>
+          </a:stretch>
+        </p:blipFill>
+        <p:spPr>
+          <a:xfrm>
+            <a:off x="6707903" y="144816"/>
+            <a:ext cx="2263537" cy="488784"/>
+          </a:xfrm>
+          <a:prstGeom prst="rect">
+            <a:avLst/>
+          </a:prstGeom>
+        </p:spPr>
+      </p:pic>
     </p:spTree>
   </p:cSld>
   <p:clrMapOvr>
@@ -8746,7 +9057,7 @@
 </file>
 
 <file path=ppt/slides/slide15.xml><?xml version="1.0" encoding="utf-8"?>
-<p:sld xmlns:a="http://schemas.openxmlformats.org/drawingml/2006/main" xmlns:r="http://schemas.openxmlformats.org/officeDocument/2006/relationships" xmlns:mc="http://schemas.openxmlformats.org/markup-compatibility/2006" xmlns:mv="urn:schemas-microsoft-com:mac:vml" xmlns:p="http://schemas.openxmlformats.org/presentationml/2006/main" xmlns:c="http://schemas.openxmlformats.org/drawingml/2006/chart" xmlns:dgm="http://schemas.openxmlformats.org/drawingml/2006/diagram" xmlns:o="urn:schemas-microsoft-com:office:office" xmlns:v="urn:schemas-microsoft-com:vml" xmlns:pvml="urn:schemas-microsoft-com:office:powerpoint" xmlns:com="http://schemas.openxmlformats.org/drawingml/2006/compatibility" xmlns:p14="http://schemas.microsoft.com/office/powerpoint/2010/main" xmlns:p15="http://schemas.microsoft.com/office/powerpoint/2012/main" xmlns:ahyp="http://schemas.microsoft.com/office/drawing/2018/hyperlinkcolor">
+<p:sld xmlns:a="http://schemas.openxmlformats.org/drawingml/2006/main" xmlns:r="http://schemas.openxmlformats.org/officeDocument/2006/relationships" xmlns:p="http://schemas.openxmlformats.org/presentationml/2006/main">
   <p:cSld>
     <p:bg>
       <p:bgPr>
@@ -8758,11 +9069,12 @@
             <a:fillRect/>
           </a:stretch>
         </a:blipFill>
+        <a:effectLst/>
       </p:bgPr>
     </p:bg>
     <p:spTree>
       <p:nvGrpSpPr>
-        <p:cNvPr id="139" name="Shape 139"/>
+        <p:cNvPr id="1" name="Shape 139"/>
         <p:cNvGrpSpPr/>
         <p:nvPr/>
       </p:nvGrpSpPr>
@@ -8783,7 +9095,7 @@
 </file>
 
 <file path=ppt/slides/slide16.xml><?xml version="1.0" encoding="utf-8"?>
-<p:sld xmlns:a="http://schemas.openxmlformats.org/drawingml/2006/main" xmlns:r="http://schemas.openxmlformats.org/officeDocument/2006/relationships" xmlns:mc="http://schemas.openxmlformats.org/markup-compatibility/2006" xmlns:mv="urn:schemas-microsoft-com:mac:vml" xmlns:p="http://schemas.openxmlformats.org/presentationml/2006/main" xmlns:c="http://schemas.openxmlformats.org/drawingml/2006/chart" xmlns:dgm="http://schemas.openxmlformats.org/drawingml/2006/diagram" xmlns:o="urn:schemas-microsoft-com:office:office" xmlns:v="urn:schemas-microsoft-com:vml" xmlns:pvml="urn:schemas-microsoft-com:office:powerpoint" xmlns:com="http://schemas.openxmlformats.org/drawingml/2006/compatibility" xmlns:p14="http://schemas.microsoft.com/office/powerpoint/2010/main" xmlns:p15="http://schemas.microsoft.com/office/powerpoint/2012/main" xmlns:ahyp="http://schemas.microsoft.com/office/drawing/2018/hyperlinkcolor">
+<p:sld xmlns:a="http://schemas.openxmlformats.org/drawingml/2006/main" xmlns:r="http://schemas.openxmlformats.org/officeDocument/2006/relationships" xmlns:p="http://schemas.openxmlformats.org/presentationml/2006/main">
   <p:cSld>
     <p:bg>
       <p:bgPr>
@@ -8795,11 +9107,12 @@
             <a:fillRect/>
           </a:stretch>
         </a:blipFill>
+        <a:effectLst/>
       </p:bgPr>
     </p:bg>
     <p:spTree>
       <p:nvGrpSpPr>
-        <p:cNvPr id="143" name="Shape 143"/>
+        <p:cNvPr id="1" name="Shape 143"/>
         <p:cNvGrpSpPr/>
         <p:nvPr/>
       </p:nvGrpSpPr>
@@ -8831,12 +9144,12 @@
           </a:ln>
         </p:spPr>
         <p:txBody>
-          <a:bodyPr anchorCtr="0" anchor="t" bIns="91425" lIns="91425" spcFirstLastPara="1" rIns="91425" wrap="square" tIns="91425">
+          <a:bodyPr spcFirstLastPara="1" wrap="square" lIns="91425" tIns="91425" rIns="91425" bIns="91425" anchor="t" anchorCtr="0">
             <a:normAutofit/>
           </a:bodyPr>
           <a:lstStyle/>
           <a:p>
-            <a:pPr indent="0" lvl="0" marL="0" rtl="0" algn="l">
+            <a:pPr marL="0" lvl="0" indent="0" algn="l" rtl="0">
               <a:spcBef>
                 <a:spcPts val="0"/>
               </a:spcBef>
@@ -8889,12 +9202,12 @@
           </a:ln>
         </p:spPr>
         <p:txBody>
-          <a:bodyPr anchorCtr="0" anchor="t" bIns="91425" lIns="91425" spcFirstLastPara="1" rIns="91425" wrap="square" tIns="91425">
+          <a:bodyPr spcFirstLastPara="1" wrap="square" lIns="91425" tIns="91425" rIns="91425" bIns="91425" anchor="t" anchorCtr="0">
             <a:normAutofit/>
           </a:bodyPr>
           <a:lstStyle/>
           <a:p>
-            <a:pPr indent="0" lvl="0" marL="0" rtl="0" algn="l">
+            <a:pPr marL="0" lvl="0" indent="0" algn="l" rtl="0">
               <a:spcBef>
                 <a:spcPts val="0"/>
               </a:spcBef>
@@ -8947,12 +9260,12 @@
           </a:ln>
         </p:spPr>
         <p:txBody>
-          <a:bodyPr anchorCtr="0" anchor="t" bIns="91425" lIns="91425" spcFirstLastPara="1" rIns="91425" wrap="square" tIns="91425">
+          <a:bodyPr spcFirstLastPara="1" wrap="square" lIns="91425" tIns="91425" rIns="91425" bIns="91425" anchor="t" anchorCtr="0">
             <a:normAutofit/>
           </a:bodyPr>
           <a:lstStyle/>
           <a:p>
-            <a:pPr indent="0" lvl="0" marL="0" rtl="0" algn="l">
+            <a:pPr marL="0" lvl="0" indent="0" algn="l" rtl="0">
               <a:spcBef>
                 <a:spcPts val="0"/>
               </a:spcBef>
@@ -9005,12 +9318,12 @@
           </a:ln>
         </p:spPr>
         <p:txBody>
-          <a:bodyPr anchorCtr="0" anchor="t" bIns="91425" lIns="91425" spcFirstLastPara="1" rIns="91425" wrap="square" tIns="91425">
+          <a:bodyPr spcFirstLastPara="1" wrap="square" lIns="91425" tIns="91425" rIns="91425" bIns="91425" anchor="t" anchorCtr="0">
             <a:normAutofit/>
           </a:bodyPr>
           <a:lstStyle/>
           <a:p>
-            <a:pPr indent="0" lvl="0" marL="0" rtl="0" algn="l">
+            <a:pPr marL="0" lvl="0" indent="0" algn="l" rtl="0">
               <a:spcBef>
                 <a:spcPts val="0"/>
               </a:spcBef>
@@ -9063,12 +9376,12 @@
           </a:ln>
         </p:spPr>
         <p:txBody>
-          <a:bodyPr anchorCtr="0" anchor="t" bIns="91425" lIns="91425" spcFirstLastPara="1" rIns="91425" wrap="square" tIns="91425">
+          <a:bodyPr spcFirstLastPara="1" wrap="square" lIns="91425" tIns="91425" rIns="91425" bIns="91425" anchor="t" anchorCtr="0">
             <a:normAutofit/>
           </a:bodyPr>
           <a:lstStyle/>
           <a:p>
-            <a:pPr indent="0" lvl="0" marL="0" rtl="0" algn="l">
+            <a:pPr marL="0" lvl="0" indent="0" algn="l" rtl="0">
               <a:spcBef>
                 <a:spcPts val="0"/>
               </a:spcBef>
@@ -9121,12 +9434,12 @@
           </a:ln>
         </p:spPr>
         <p:txBody>
-          <a:bodyPr anchorCtr="0" anchor="t" bIns="91425" lIns="91425" spcFirstLastPara="1" rIns="91425" wrap="square" tIns="91425">
+          <a:bodyPr spcFirstLastPara="1" wrap="square" lIns="91425" tIns="91425" rIns="91425" bIns="91425" anchor="t" anchorCtr="0">
             <a:normAutofit/>
           </a:bodyPr>
           <a:lstStyle/>
           <a:p>
-            <a:pPr indent="0" lvl="0" marL="0" rtl="0" algn="l">
+            <a:pPr marL="0" lvl="0" indent="0" algn="l" rtl="0">
               <a:spcBef>
                 <a:spcPts val="0"/>
               </a:spcBef>
@@ -9179,12 +9492,12 @@
           </a:ln>
         </p:spPr>
         <p:txBody>
-          <a:bodyPr anchorCtr="0" anchor="t" bIns="91425" lIns="91425" spcFirstLastPara="1" rIns="91425" wrap="square" tIns="91425">
+          <a:bodyPr spcFirstLastPara="1" wrap="square" lIns="91425" tIns="91425" rIns="91425" bIns="91425" anchor="t" anchorCtr="0">
             <a:normAutofit/>
           </a:bodyPr>
           <a:lstStyle/>
           <a:p>
-            <a:pPr indent="0" lvl="0" marL="0" rtl="0" algn="l">
+            <a:pPr marL="0" lvl="0" indent="0" algn="l" rtl="0">
               <a:spcBef>
                 <a:spcPts val="0"/>
               </a:spcBef>
@@ -9226,7 +9539,7 @@
 </file>
 
 <file path=ppt/slides/slide17.xml><?xml version="1.0" encoding="utf-8"?>
-<p:sld xmlns:a="http://schemas.openxmlformats.org/drawingml/2006/main" xmlns:r="http://schemas.openxmlformats.org/officeDocument/2006/relationships" xmlns:mc="http://schemas.openxmlformats.org/markup-compatibility/2006" xmlns:mv="urn:schemas-microsoft-com:mac:vml" xmlns:p="http://schemas.openxmlformats.org/presentationml/2006/main" xmlns:c="http://schemas.openxmlformats.org/drawingml/2006/chart" xmlns:dgm="http://schemas.openxmlformats.org/drawingml/2006/diagram" xmlns:o="urn:schemas-microsoft-com:office:office" xmlns:v="urn:schemas-microsoft-com:vml" xmlns:pvml="urn:schemas-microsoft-com:office:powerpoint" xmlns:com="http://schemas.openxmlformats.org/drawingml/2006/compatibility" xmlns:p14="http://schemas.microsoft.com/office/powerpoint/2010/main" xmlns:p15="http://schemas.microsoft.com/office/powerpoint/2012/main" xmlns:ahyp="http://schemas.microsoft.com/office/drawing/2018/hyperlinkcolor">
+<p:sld xmlns:a="http://schemas.openxmlformats.org/drawingml/2006/main" xmlns:r="http://schemas.openxmlformats.org/officeDocument/2006/relationships" xmlns:p="http://schemas.openxmlformats.org/presentationml/2006/main">
   <p:cSld>
     <p:bg>
       <p:bgPr>
@@ -9238,11 +9551,12 @@
             <a:fillRect/>
           </a:stretch>
         </a:blipFill>
+        <a:effectLst/>
       </p:bgPr>
     </p:bg>
     <p:spTree>
       <p:nvGrpSpPr>
-        <p:cNvPr id="154" name="Shape 154"/>
+        <p:cNvPr id="1" name="Shape 154"/>
         <p:cNvGrpSpPr/>
         <p:nvPr/>
       </p:nvGrpSpPr>
@@ -9274,12 +9588,12 @@
           </a:ln>
         </p:spPr>
         <p:txBody>
-          <a:bodyPr anchorCtr="0" anchor="t" bIns="91425" lIns="91425" spcFirstLastPara="1" rIns="91425" wrap="square" tIns="91425">
+          <a:bodyPr spcFirstLastPara="1" wrap="square" lIns="91425" tIns="91425" rIns="91425" bIns="91425" anchor="t" anchorCtr="0">
             <a:normAutofit/>
           </a:bodyPr>
           <a:lstStyle/>
           <a:p>
-            <a:pPr indent="0" lvl="0" marL="0" rtl="0" algn="l">
+            <a:pPr marL="0" lvl="0" indent="0" algn="l" rtl="0">
               <a:spcBef>
                 <a:spcPts val="0"/>
               </a:spcBef>
@@ -9332,12 +9646,12 @@
           </a:ln>
         </p:spPr>
         <p:txBody>
-          <a:bodyPr anchorCtr="0" anchor="t" bIns="91425" lIns="91425" spcFirstLastPara="1" rIns="91425" wrap="square" tIns="91425">
+          <a:bodyPr spcFirstLastPara="1" wrap="square" lIns="91425" tIns="91425" rIns="91425" bIns="91425" anchor="t" anchorCtr="0">
             <a:normAutofit/>
           </a:bodyPr>
           <a:lstStyle/>
           <a:p>
-            <a:pPr indent="0" lvl="0" marL="0" rtl="0" algn="l">
+            <a:pPr marL="0" lvl="0" indent="0" algn="l" rtl="0">
               <a:spcBef>
                 <a:spcPts val="0"/>
               </a:spcBef>
@@ -9390,12 +9704,12 @@
           </a:ln>
         </p:spPr>
         <p:txBody>
-          <a:bodyPr anchorCtr="0" anchor="t" bIns="91425" lIns="91425" spcFirstLastPara="1" rIns="91425" wrap="square" tIns="91425">
+          <a:bodyPr spcFirstLastPara="1" wrap="square" lIns="91425" tIns="91425" rIns="91425" bIns="91425" anchor="t" anchorCtr="0">
             <a:normAutofit/>
           </a:bodyPr>
           <a:lstStyle/>
           <a:p>
-            <a:pPr indent="0" lvl="0" marL="0" rtl="0" algn="l">
+            <a:pPr marL="0" lvl="0" indent="0" algn="l" rtl="0">
               <a:spcBef>
                 <a:spcPts val="0"/>
               </a:spcBef>
@@ -9437,7 +9751,7 @@
 </file>
 
 <file path=ppt/slides/slide18.xml><?xml version="1.0" encoding="utf-8"?>
-<p:sld xmlns:a="http://schemas.openxmlformats.org/drawingml/2006/main" xmlns:r="http://schemas.openxmlformats.org/officeDocument/2006/relationships" xmlns:mc="http://schemas.openxmlformats.org/markup-compatibility/2006" xmlns:mv="urn:schemas-microsoft-com:mac:vml" xmlns:p="http://schemas.openxmlformats.org/presentationml/2006/main" xmlns:c="http://schemas.openxmlformats.org/drawingml/2006/chart" xmlns:dgm="http://schemas.openxmlformats.org/drawingml/2006/diagram" xmlns:o="urn:schemas-microsoft-com:office:office" xmlns:v="urn:schemas-microsoft-com:vml" xmlns:pvml="urn:schemas-microsoft-com:office:powerpoint" xmlns:com="http://schemas.openxmlformats.org/drawingml/2006/compatibility" xmlns:p14="http://schemas.microsoft.com/office/powerpoint/2010/main" xmlns:p15="http://schemas.microsoft.com/office/powerpoint/2012/main" xmlns:ahyp="http://schemas.microsoft.com/office/drawing/2018/hyperlinkcolor">
+<p:sld xmlns:a="http://schemas.openxmlformats.org/drawingml/2006/main" xmlns:r="http://schemas.openxmlformats.org/officeDocument/2006/relationships" xmlns:p="http://schemas.openxmlformats.org/presentationml/2006/main">
   <p:cSld>
     <p:bg>
       <p:bgPr>
@@ -9449,11 +9763,12 @@
             <a:fillRect/>
           </a:stretch>
         </a:blipFill>
+        <a:effectLst/>
       </p:bgPr>
     </p:bg>
     <p:spTree>
       <p:nvGrpSpPr>
-        <p:cNvPr id="161" name="Shape 161"/>
+        <p:cNvPr id="1" name="Shape 161"/>
         <p:cNvGrpSpPr/>
         <p:nvPr/>
       </p:nvGrpSpPr>
@@ -9465,6 +9780,36 @@
           <a:chExt cx="0" cy="0"/>
         </a:xfrm>
       </p:grpSpPr>
+      <p:pic>
+        <p:nvPicPr>
+          <p:cNvPr id="3" name="Picture 2">
+            <a:extLst>
+              <a:ext uri="{FF2B5EF4-FFF2-40B4-BE49-F238E27FC236}">
+                <a16:creationId xmlns:a16="http://schemas.microsoft.com/office/drawing/2014/main" id="{46D66C10-75A3-487F-328E-BDE77C7FABE0}"/>
+              </a:ext>
+            </a:extLst>
+          </p:cNvPr>
+          <p:cNvPicPr>
+            <a:picLocks noChangeAspect="1"/>
+          </p:cNvPicPr>
+          <p:nvPr/>
+        </p:nvPicPr>
+        <p:blipFill>
+          <a:blip r:embed="rId4"/>
+          <a:stretch>
+            <a:fillRect/>
+          </a:stretch>
+        </p:blipFill>
+        <p:spPr>
+          <a:xfrm>
+            <a:off x="6707903" y="144816"/>
+            <a:ext cx="2263537" cy="488784"/>
+          </a:xfrm>
+          <a:prstGeom prst="rect">
+            <a:avLst/>
+          </a:prstGeom>
+        </p:spPr>
+      </p:pic>
     </p:spTree>
   </p:cSld>
   <p:clrMapOvr>
@@ -9474,7 +9819,7 @@
 </file>
 
 <file path=ppt/slides/slide19.xml><?xml version="1.0" encoding="utf-8"?>
-<p:sld xmlns:a="http://schemas.openxmlformats.org/drawingml/2006/main" xmlns:r="http://schemas.openxmlformats.org/officeDocument/2006/relationships" xmlns:mc="http://schemas.openxmlformats.org/markup-compatibility/2006" xmlns:mv="urn:schemas-microsoft-com:mac:vml" xmlns:p="http://schemas.openxmlformats.org/presentationml/2006/main" xmlns:c="http://schemas.openxmlformats.org/drawingml/2006/chart" xmlns:dgm="http://schemas.openxmlformats.org/drawingml/2006/diagram" xmlns:o="urn:schemas-microsoft-com:office:office" xmlns:v="urn:schemas-microsoft-com:vml" xmlns:pvml="urn:schemas-microsoft-com:office:powerpoint" xmlns:com="http://schemas.openxmlformats.org/drawingml/2006/compatibility" xmlns:p14="http://schemas.microsoft.com/office/powerpoint/2010/main" xmlns:p15="http://schemas.microsoft.com/office/powerpoint/2012/main" xmlns:ahyp="http://schemas.microsoft.com/office/drawing/2018/hyperlinkcolor">
+<p:sld xmlns:a="http://schemas.openxmlformats.org/drawingml/2006/main" xmlns:r="http://schemas.openxmlformats.org/officeDocument/2006/relationships" xmlns:p="http://schemas.openxmlformats.org/presentationml/2006/main">
   <p:cSld>
     <p:bg>
       <p:bgPr>
@@ -9486,11 +9831,12 @@
             <a:fillRect/>
           </a:stretch>
         </a:blipFill>
+        <a:effectLst/>
       </p:bgPr>
     </p:bg>
     <p:spTree>
       <p:nvGrpSpPr>
-        <p:cNvPr id="165" name="Shape 165"/>
+        <p:cNvPr id="1" name="Shape 165"/>
         <p:cNvGrpSpPr/>
         <p:nvPr/>
       </p:nvGrpSpPr>
@@ -9511,7 +9857,7 @@
 </file>
 
 <file path=ppt/slides/slide2.xml><?xml version="1.0" encoding="utf-8"?>
-<p:sld xmlns:a="http://schemas.openxmlformats.org/drawingml/2006/main" xmlns:r="http://schemas.openxmlformats.org/officeDocument/2006/relationships" xmlns:mc="http://schemas.openxmlformats.org/markup-compatibility/2006" xmlns:mv="urn:schemas-microsoft-com:mac:vml" xmlns:p="http://schemas.openxmlformats.org/presentationml/2006/main" xmlns:c="http://schemas.openxmlformats.org/drawingml/2006/chart" xmlns:dgm="http://schemas.openxmlformats.org/drawingml/2006/diagram" xmlns:o="urn:schemas-microsoft-com:office:office" xmlns:v="urn:schemas-microsoft-com:vml" xmlns:pvml="urn:schemas-microsoft-com:office:powerpoint" xmlns:com="http://schemas.openxmlformats.org/drawingml/2006/compatibility" xmlns:p14="http://schemas.microsoft.com/office/powerpoint/2010/main" xmlns:p15="http://schemas.microsoft.com/office/powerpoint/2012/main" xmlns:ahyp="http://schemas.microsoft.com/office/drawing/2018/hyperlinkcolor">
+<p:sld xmlns:a="http://schemas.openxmlformats.org/drawingml/2006/main" xmlns:r="http://schemas.openxmlformats.org/officeDocument/2006/relationships" xmlns:p="http://schemas.openxmlformats.org/presentationml/2006/main">
   <p:cSld>
     <p:bg>
       <p:bgPr>
@@ -9523,11 +9869,12 @@
             <a:fillRect/>
           </a:stretch>
         </a:blipFill>
+        <a:effectLst/>
       </p:bgPr>
     </p:bg>
     <p:spTree>
       <p:nvGrpSpPr>
-        <p:cNvPr id="57" name="Shape 57"/>
+        <p:cNvPr id="1" name="Shape 57"/>
         <p:cNvGrpSpPr/>
         <p:nvPr/>
       </p:nvGrpSpPr>
@@ -9539,6 +9886,36 @@
           <a:chExt cx="0" cy="0"/>
         </a:xfrm>
       </p:grpSpPr>
+      <p:pic>
+        <p:nvPicPr>
+          <p:cNvPr id="3" name="Picture 2">
+            <a:extLst>
+              <a:ext uri="{FF2B5EF4-FFF2-40B4-BE49-F238E27FC236}">
+                <a16:creationId xmlns:a16="http://schemas.microsoft.com/office/drawing/2014/main" id="{D2E4FEFF-8F57-055A-BA26-F610011ACC31}"/>
+              </a:ext>
+            </a:extLst>
+          </p:cNvPr>
+          <p:cNvPicPr>
+            <a:picLocks noChangeAspect="1"/>
+          </p:cNvPicPr>
+          <p:nvPr/>
+        </p:nvPicPr>
+        <p:blipFill>
+          <a:blip r:embed="rId4"/>
+          <a:stretch>
+            <a:fillRect/>
+          </a:stretch>
+        </p:blipFill>
+        <p:spPr>
+          <a:xfrm>
+            <a:off x="6707903" y="144816"/>
+            <a:ext cx="2263537" cy="488784"/>
+          </a:xfrm>
+          <a:prstGeom prst="rect">
+            <a:avLst/>
+          </a:prstGeom>
+        </p:spPr>
+      </p:pic>
     </p:spTree>
   </p:cSld>
   <p:clrMapOvr>
@@ -9548,7 +9925,7 @@
 </file>
 
 <file path=ppt/slides/slide20.xml><?xml version="1.0" encoding="utf-8"?>
-<p:sld xmlns:a="http://schemas.openxmlformats.org/drawingml/2006/main" xmlns:r="http://schemas.openxmlformats.org/officeDocument/2006/relationships" xmlns:mc="http://schemas.openxmlformats.org/markup-compatibility/2006" xmlns:mv="urn:schemas-microsoft-com:mac:vml" xmlns:p="http://schemas.openxmlformats.org/presentationml/2006/main" xmlns:c="http://schemas.openxmlformats.org/drawingml/2006/chart" xmlns:dgm="http://schemas.openxmlformats.org/drawingml/2006/diagram" xmlns:o="urn:schemas-microsoft-com:office:office" xmlns:v="urn:schemas-microsoft-com:vml" xmlns:pvml="urn:schemas-microsoft-com:office:powerpoint" xmlns:com="http://schemas.openxmlformats.org/drawingml/2006/compatibility" xmlns:p14="http://schemas.microsoft.com/office/powerpoint/2010/main" xmlns:p15="http://schemas.microsoft.com/office/powerpoint/2012/main" xmlns:ahyp="http://schemas.microsoft.com/office/drawing/2018/hyperlinkcolor">
+<p:sld xmlns:a="http://schemas.openxmlformats.org/drawingml/2006/main" xmlns:r="http://schemas.openxmlformats.org/officeDocument/2006/relationships" xmlns:p="http://schemas.openxmlformats.org/presentationml/2006/main">
   <p:cSld>
     <p:bg>
       <p:bgPr>
@@ -9560,11 +9937,12 @@
             <a:fillRect/>
           </a:stretch>
         </a:blipFill>
+        <a:effectLst/>
       </p:bgPr>
     </p:bg>
     <p:spTree>
       <p:nvGrpSpPr>
-        <p:cNvPr id="169" name="Shape 169"/>
+        <p:cNvPr id="1" name="Shape 169"/>
         <p:cNvGrpSpPr/>
         <p:nvPr/>
       </p:nvGrpSpPr>
@@ -9596,12 +9974,12 @@
           </a:ln>
         </p:spPr>
         <p:txBody>
-          <a:bodyPr anchorCtr="0" anchor="t" bIns="91425" lIns="91425" spcFirstLastPara="1" rIns="91425" wrap="square" tIns="91425">
+          <a:bodyPr spcFirstLastPara="1" wrap="square" lIns="91425" tIns="91425" rIns="91425" bIns="91425" anchor="t" anchorCtr="0">
             <a:normAutofit/>
           </a:bodyPr>
           <a:lstStyle/>
           <a:p>
-            <a:pPr indent="0" lvl="0" marL="0" rtl="0" algn="l">
+            <a:pPr marL="0" lvl="0" indent="0" algn="l" rtl="0">
               <a:spcBef>
                 <a:spcPts val="0"/>
               </a:spcBef>
@@ -9654,12 +10032,12 @@
           </a:ln>
         </p:spPr>
         <p:txBody>
-          <a:bodyPr anchorCtr="0" anchor="t" bIns="91425" lIns="91425" spcFirstLastPara="1" rIns="91425" wrap="square" tIns="91425">
+          <a:bodyPr spcFirstLastPara="1" wrap="square" lIns="91425" tIns="91425" rIns="91425" bIns="91425" anchor="t" anchorCtr="0">
             <a:normAutofit/>
           </a:bodyPr>
           <a:lstStyle/>
           <a:p>
-            <a:pPr indent="0" lvl="0" marL="0" rtl="0" algn="l">
+            <a:pPr marL="0" lvl="0" indent="0" algn="l" rtl="0">
               <a:spcBef>
                 <a:spcPts val="0"/>
               </a:spcBef>
@@ -9712,12 +10090,12 @@
           </a:ln>
         </p:spPr>
         <p:txBody>
-          <a:bodyPr anchorCtr="0" anchor="t" bIns="91425" lIns="91425" spcFirstLastPara="1" rIns="91425" wrap="square" tIns="91425">
+          <a:bodyPr spcFirstLastPara="1" wrap="square" lIns="91425" tIns="91425" rIns="91425" bIns="91425" anchor="t" anchorCtr="0">
             <a:normAutofit/>
           </a:bodyPr>
           <a:lstStyle/>
           <a:p>
-            <a:pPr indent="0" lvl="0" marL="0" rtl="0" algn="l">
+            <a:pPr marL="0" lvl="0" indent="0" algn="l" rtl="0">
               <a:spcBef>
                 <a:spcPts val="0"/>
               </a:spcBef>
@@ -9770,12 +10148,12 @@
           </a:ln>
         </p:spPr>
         <p:txBody>
-          <a:bodyPr anchorCtr="0" anchor="t" bIns="91425" lIns="91425" spcFirstLastPara="1" rIns="91425" wrap="square" tIns="91425">
+          <a:bodyPr spcFirstLastPara="1" wrap="square" lIns="91425" tIns="91425" rIns="91425" bIns="91425" anchor="t" anchorCtr="0">
             <a:normAutofit/>
           </a:bodyPr>
           <a:lstStyle/>
           <a:p>
-            <a:pPr indent="0" lvl="0" marL="0" rtl="0" algn="l">
+            <a:pPr marL="0" lvl="0" indent="0" algn="l" rtl="0">
               <a:spcBef>
                 <a:spcPts val="0"/>
               </a:spcBef>
@@ -9828,12 +10206,12 @@
           </a:ln>
         </p:spPr>
         <p:txBody>
-          <a:bodyPr anchorCtr="0" anchor="t" bIns="91425" lIns="91425" spcFirstLastPara="1" rIns="91425" wrap="square" tIns="91425">
+          <a:bodyPr spcFirstLastPara="1" wrap="square" lIns="91425" tIns="91425" rIns="91425" bIns="91425" anchor="t" anchorCtr="0">
             <a:normAutofit/>
           </a:bodyPr>
           <a:lstStyle/>
           <a:p>
-            <a:pPr indent="0" lvl="0" marL="0" rtl="0" algn="l">
+            <a:pPr marL="0" lvl="0" indent="0" algn="l" rtl="0">
               <a:spcBef>
                 <a:spcPts val="0"/>
               </a:spcBef>
@@ -9886,12 +10264,12 @@
           </a:ln>
         </p:spPr>
         <p:txBody>
-          <a:bodyPr anchorCtr="0" anchor="t" bIns="91425" lIns="91425" spcFirstLastPara="1" rIns="91425" wrap="square" tIns="91425">
+          <a:bodyPr spcFirstLastPara="1" wrap="square" lIns="91425" tIns="91425" rIns="91425" bIns="91425" anchor="t" anchorCtr="0">
             <a:normAutofit/>
           </a:bodyPr>
           <a:lstStyle/>
           <a:p>
-            <a:pPr indent="0" lvl="0" marL="0" rtl="0" algn="l">
+            <a:pPr marL="0" lvl="0" indent="0" algn="l" rtl="0">
               <a:spcBef>
                 <a:spcPts val="0"/>
               </a:spcBef>
@@ -9944,12 +10322,12 @@
           </a:ln>
         </p:spPr>
         <p:txBody>
-          <a:bodyPr anchorCtr="0" anchor="t" bIns="91425" lIns="91425" spcFirstLastPara="1" rIns="91425" wrap="square" tIns="91425">
+          <a:bodyPr spcFirstLastPara="1" wrap="square" lIns="91425" tIns="91425" rIns="91425" bIns="91425" anchor="t" anchorCtr="0">
             <a:normAutofit/>
           </a:bodyPr>
           <a:lstStyle/>
           <a:p>
-            <a:pPr indent="0" lvl="0" marL="0" rtl="0" algn="l">
+            <a:pPr marL="0" lvl="0" indent="0" algn="l" rtl="0">
               <a:spcBef>
                 <a:spcPts val="0"/>
               </a:spcBef>
@@ -9991,7 +10369,7 @@
 </file>
 
 <file path=ppt/slides/slide21.xml><?xml version="1.0" encoding="utf-8"?>
-<p:sld xmlns:a="http://schemas.openxmlformats.org/drawingml/2006/main" xmlns:r="http://schemas.openxmlformats.org/officeDocument/2006/relationships" xmlns:mc="http://schemas.openxmlformats.org/markup-compatibility/2006" xmlns:mv="urn:schemas-microsoft-com:mac:vml" xmlns:p="http://schemas.openxmlformats.org/presentationml/2006/main" xmlns:c="http://schemas.openxmlformats.org/drawingml/2006/chart" xmlns:dgm="http://schemas.openxmlformats.org/drawingml/2006/diagram" xmlns:o="urn:schemas-microsoft-com:office:office" xmlns:v="urn:schemas-microsoft-com:vml" xmlns:pvml="urn:schemas-microsoft-com:office:powerpoint" xmlns:com="http://schemas.openxmlformats.org/drawingml/2006/compatibility" xmlns:p14="http://schemas.microsoft.com/office/powerpoint/2010/main" xmlns:p15="http://schemas.microsoft.com/office/powerpoint/2012/main" xmlns:ahyp="http://schemas.microsoft.com/office/drawing/2018/hyperlinkcolor">
+<p:sld xmlns:a="http://schemas.openxmlformats.org/drawingml/2006/main" xmlns:r="http://schemas.openxmlformats.org/officeDocument/2006/relationships" xmlns:p="http://schemas.openxmlformats.org/presentationml/2006/main">
   <p:cSld>
     <p:bg>
       <p:bgPr>
@@ -10003,11 +10381,12 @@
             <a:fillRect/>
           </a:stretch>
         </a:blipFill>
+        <a:effectLst/>
       </p:bgPr>
     </p:bg>
     <p:spTree>
       <p:nvGrpSpPr>
-        <p:cNvPr id="180" name="Shape 180"/>
+        <p:cNvPr id="1" name="Shape 180"/>
         <p:cNvGrpSpPr/>
         <p:nvPr/>
       </p:nvGrpSpPr>
@@ -10039,12 +10418,12 @@
           </a:ln>
         </p:spPr>
         <p:txBody>
-          <a:bodyPr anchorCtr="0" anchor="t" bIns="91425" lIns="91425" spcFirstLastPara="1" rIns="91425" wrap="square" tIns="91425">
+          <a:bodyPr spcFirstLastPara="1" wrap="square" lIns="91425" tIns="91425" rIns="91425" bIns="91425" anchor="t" anchorCtr="0">
             <a:normAutofit/>
           </a:bodyPr>
           <a:lstStyle/>
           <a:p>
-            <a:pPr indent="0" lvl="0" marL="0" rtl="0" algn="l">
+            <a:pPr marL="0" lvl="0" indent="0" algn="l" rtl="0">
               <a:spcBef>
                 <a:spcPts val="0"/>
               </a:spcBef>
@@ -10097,12 +10476,12 @@
           </a:ln>
         </p:spPr>
         <p:txBody>
-          <a:bodyPr anchorCtr="0" anchor="t" bIns="91425" lIns="91425" spcFirstLastPara="1" rIns="91425" wrap="square" tIns="91425">
+          <a:bodyPr spcFirstLastPara="1" wrap="square" lIns="91425" tIns="91425" rIns="91425" bIns="91425" anchor="t" anchorCtr="0">
             <a:normAutofit/>
           </a:bodyPr>
           <a:lstStyle/>
           <a:p>
-            <a:pPr indent="0" lvl="0" marL="0" rtl="0" algn="l">
+            <a:pPr marL="0" lvl="0" indent="0" algn="l" rtl="0">
               <a:spcBef>
                 <a:spcPts val="0"/>
               </a:spcBef>
@@ -10155,12 +10534,12 @@
           </a:ln>
         </p:spPr>
         <p:txBody>
-          <a:bodyPr anchorCtr="0" anchor="t" bIns="91425" lIns="91425" spcFirstLastPara="1" rIns="91425" wrap="square" tIns="91425">
+          <a:bodyPr spcFirstLastPara="1" wrap="square" lIns="91425" tIns="91425" rIns="91425" bIns="91425" anchor="t" anchorCtr="0">
             <a:normAutofit/>
           </a:bodyPr>
           <a:lstStyle/>
           <a:p>
-            <a:pPr indent="0" lvl="0" marL="0" rtl="0" algn="l">
+            <a:pPr marL="0" lvl="0" indent="0" algn="l" rtl="0">
               <a:spcBef>
                 <a:spcPts val="0"/>
               </a:spcBef>
@@ -10202,7 +10581,7 @@
 </file>
 
 <file path=ppt/slides/slide22.xml><?xml version="1.0" encoding="utf-8"?>
-<p:sld xmlns:a="http://schemas.openxmlformats.org/drawingml/2006/main" xmlns:r="http://schemas.openxmlformats.org/officeDocument/2006/relationships" xmlns:mc="http://schemas.openxmlformats.org/markup-compatibility/2006" xmlns:mv="urn:schemas-microsoft-com:mac:vml" xmlns:p="http://schemas.openxmlformats.org/presentationml/2006/main" xmlns:c="http://schemas.openxmlformats.org/drawingml/2006/chart" xmlns:dgm="http://schemas.openxmlformats.org/drawingml/2006/diagram" xmlns:o="urn:schemas-microsoft-com:office:office" xmlns:v="urn:schemas-microsoft-com:vml" xmlns:pvml="urn:schemas-microsoft-com:office:powerpoint" xmlns:com="http://schemas.openxmlformats.org/drawingml/2006/compatibility" xmlns:p14="http://schemas.microsoft.com/office/powerpoint/2010/main" xmlns:p15="http://schemas.microsoft.com/office/powerpoint/2012/main" xmlns:ahyp="http://schemas.microsoft.com/office/drawing/2018/hyperlinkcolor">
+<p:sld xmlns:a="http://schemas.openxmlformats.org/drawingml/2006/main" xmlns:r="http://schemas.openxmlformats.org/officeDocument/2006/relationships" xmlns:p="http://schemas.openxmlformats.org/presentationml/2006/main">
   <p:cSld>
     <p:bg>
       <p:bgPr>
@@ -10214,11 +10593,12 @@
             <a:fillRect/>
           </a:stretch>
         </a:blipFill>
+        <a:effectLst/>
       </p:bgPr>
     </p:bg>
     <p:spTree>
       <p:nvGrpSpPr>
-        <p:cNvPr id="187" name="Shape 187"/>
+        <p:cNvPr id="1" name="Shape 187"/>
         <p:cNvGrpSpPr/>
         <p:nvPr/>
       </p:nvGrpSpPr>
@@ -10230,6 +10610,36 @@
           <a:chExt cx="0" cy="0"/>
         </a:xfrm>
       </p:grpSpPr>
+      <p:pic>
+        <p:nvPicPr>
+          <p:cNvPr id="3" name="Picture 2">
+            <a:extLst>
+              <a:ext uri="{FF2B5EF4-FFF2-40B4-BE49-F238E27FC236}">
+                <a16:creationId xmlns:a16="http://schemas.microsoft.com/office/drawing/2014/main" id="{F1136DE9-6F9D-FE6C-258E-E98F505C20C8}"/>
+              </a:ext>
+            </a:extLst>
+          </p:cNvPr>
+          <p:cNvPicPr>
+            <a:picLocks noChangeAspect="1"/>
+          </p:cNvPicPr>
+          <p:nvPr/>
+        </p:nvPicPr>
+        <p:blipFill>
+          <a:blip r:embed="rId4"/>
+          <a:stretch>
+            <a:fillRect/>
+          </a:stretch>
+        </p:blipFill>
+        <p:spPr>
+          <a:xfrm>
+            <a:off x="6707903" y="144816"/>
+            <a:ext cx="2263537" cy="488784"/>
+          </a:xfrm>
+          <a:prstGeom prst="rect">
+            <a:avLst/>
+          </a:prstGeom>
+        </p:spPr>
+      </p:pic>
     </p:spTree>
   </p:cSld>
   <p:clrMapOvr>
@@ -10239,7 +10649,7 @@
 </file>
 
 <file path=ppt/slides/slide23.xml><?xml version="1.0" encoding="utf-8"?>
-<p:sld xmlns:a="http://schemas.openxmlformats.org/drawingml/2006/main" xmlns:r="http://schemas.openxmlformats.org/officeDocument/2006/relationships" xmlns:mc="http://schemas.openxmlformats.org/markup-compatibility/2006" xmlns:mv="urn:schemas-microsoft-com:mac:vml" xmlns:p="http://schemas.openxmlformats.org/presentationml/2006/main" xmlns:c="http://schemas.openxmlformats.org/drawingml/2006/chart" xmlns:dgm="http://schemas.openxmlformats.org/drawingml/2006/diagram" xmlns:o="urn:schemas-microsoft-com:office:office" xmlns:v="urn:schemas-microsoft-com:vml" xmlns:pvml="urn:schemas-microsoft-com:office:powerpoint" xmlns:com="http://schemas.openxmlformats.org/drawingml/2006/compatibility" xmlns:p14="http://schemas.microsoft.com/office/powerpoint/2010/main" xmlns:p15="http://schemas.microsoft.com/office/powerpoint/2012/main" xmlns:ahyp="http://schemas.microsoft.com/office/drawing/2018/hyperlinkcolor">
+<p:sld xmlns:a="http://schemas.openxmlformats.org/drawingml/2006/main" xmlns:r="http://schemas.openxmlformats.org/officeDocument/2006/relationships" xmlns:p="http://schemas.openxmlformats.org/presentationml/2006/main">
   <p:cSld>
     <p:bg>
       <p:bgPr>
@@ -10251,11 +10661,12 @@
             <a:fillRect/>
           </a:stretch>
         </a:blipFill>
+        <a:effectLst/>
       </p:bgPr>
     </p:bg>
     <p:spTree>
       <p:nvGrpSpPr>
-        <p:cNvPr id="191" name="Shape 191"/>
+        <p:cNvPr id="1" name="Shape 191"/>
         <p:cNvGrpSpPr/>
         <p:nvPr/>
       </p:nvGrpSpPr>
@@ -10276,7 +10687,7 @@
 </file>
 
 <file path=ppt/slides/slide24.xml><?xml version="1.0" encoding="utf-8"?>
-<p:sld xmlns:a="http://schemas.openxmlformats.org/drawingml/2006/main" xmlns:r="http://schemas.openxmlformats.org/officeDocument/2006/relationships" xmlns:mc="http://schemas.openxmlformats.org/markup-compatibility/2006" xmlns:mv="urn:schemas-microsoft-com:mac:vml" xmlns:p="http://schemas.openxmlformats.org/presentationml/2006/main" xmlns:c="http://schemas.openxmlformats.org/drawingml/2006/chart" xmlns:dgm="http://schemas.openxmlformats.org/drawingml/2006/diagram" xmlns:o="urn:schemas-microsoft-com:office:office" xmlns:v="urn:schemas-microsoft-com:vml" xmlns:pvml="urn:schemas-microsoft-com:office:powerpoint" xmlns:com="http://schemas.openxmlformats.org/drawingml/2006/compatibility" xmlns:p14="http://schemas.microsoft.com/office/powerpoint/2010/main" xmlns:p15="http://schemas.microsoft.com/office/powerpoint/2012/main" xmlns:ahyp="http://schemas.microsoft.com/office/drawing/2018/hyperlinkcolor">
+<p:sld xmlns:a="http://schemas.openxmlformats.org/drawingml/2006/main" xmlns:r="http://schemas.openxmlformats.org/officeDocument/2006/relationships" xmlns:p="http://schemas.openxmlformats.org/presentationml/2006/main">
   <p:cSld>
     <p:bg>
       <p:bgPr>
@@ -10288,11 +10699,12 @@
             <a:fillRect/>
           </a:stretch>
         </a:blipFill>
+        <a:effectLst/>
       </p:bgPr>
     </p:bg>
     <p:spTree>
       <p:nvGrpSpPr>
-        <p:cNvPr id="195" name="Shape 195"/>
+        <p:cNvPr id="1" name="Shape 195"/>
         <p:cNvGrpSpPr/>
         <p:nvPr/>
       </p:nvGrpSpPr>
@@ -10324,12 +10736,12 @@
           </a:ln>
         </p:spPr>
         <p:txBody>
-          <a:bodyPr anchorCtr="0" anchor="t" bIns="91425" lIns="91425" spcFirstLastPara="1" rIns="91425" wrap="square" tIns="91425">
+          <a:bodyPr spcFirstLastPara="1" wrap="square" lIns="91425" tIns="91425" rIns="91425" bIns="91425" anchor="t" anchorCtr="0">
             <a:normAutofit/>
           </a:bodyPr>
           <a:lstStyle/>
           <a:p>
-            <a:pPr indent="0" lvl="0" marL="0" rtl="0" algn="l">
+            <a:pPr marL="0" lvl="0" indent="0" algn="l" rtl="0">
               <a:spcBef>
                 <a:spcPts val="0"/>
               </a:spcBef>
@@ -10382,12 +10794,12 @@
           </a:ln>
         </p:spPr>
         <p:txBody>
-          <a:bodyPr anchorCtr="0" anchor="t" bIns="91425" lIns="91425" spcFirstLastPara="1" rIns="91425" wrap="square" tIns="91425">
+          <a:bodyPr spcFirstLastPara="1" wrap="square" lIns="91425" tIns="91425" rIns="91425" bIns="91425" anchor="t" anchorCtr="0">
             <a:normAutofit/>
           </a:bodyPr>
           <a:lstStyle/>
           <a:p>
-            <a:pPr indent="0" lvl="0" marL="0" rtl="0" algn="l">
+            <a:pPr marL="0" lvl="0" indent="0" algn="l" rtl="0">
               <a:spcBef>
                 <a:spcPts val="0"/>
               </a:spcBef>
@@ -10440,12 +10852,12 @@
           </a:ln>
         </p:spPr>
         <p:txBody>
-          <a:bodyPr anchorCtr="0" anchor="t" bIns="91425" lIns="91425" spcFirstLastPara="1" rIns="91425" wrap="square" tIns="91425">
+          <a:bodyPr spcFirstLastPara="1" wrap="square" lIns="91425" tIns="91425" rIns="91425" bIns="91425" anchor="t" anchorCtr="0">
             <a:normAutofit/>
           </a:bodyPr>
           <a:lstStyle/>
           <a:p>
-            <a:pPr indent="0" lvl="0" marL="0" rtl="0" algn="l">
+            <a:pPr marL="0" lvl="0" indent="0" algn="l" rtl="0">
               <a:spcBef>
                 <a:spcPts val="0"/>
               </a:spcBef>
@@ -10498,12 +10910,12 @@
           </a:ln>
         </p:spPr>
         <p:txBody>
-          <a:bodyPr anchorCtr="0" anchor="t" bIns="91425" lIns="91425" spcFirstLastPara="1" rIns="91425" wrap="square" tIns="91425">
+          <a:bodyPr spcFirstLastPara="1" wrap="square" lIns="91425" tIns="91425" rIns="91425" bIns="91425" anchor="t" anchorCtr="0">
             <a:normAutofit/>
           </a:bodyPr>
           <a:lstStyle/>
           <a:p>
-            <a:pPr indent="0" lvl="0" marL="0" rtl="0" algn="l">
+            <a:pPr marL="0" lvl="0" indent="0" algn="l" rtl="0">
               <a:spcBef>
                 <a:spcPts val="0"/>
               </a:spcBef>
@@ -10556,12 +10968,12 @@
           </a:ln>
         </p:spPr>
         <p:txBody>
-          <a:bodyPr anchorCtr="0" anchor="t" bIns="91425" lIns="91425" spcFirstLastPara="1" rIns="91425" wrap="square" tIns="91425">
+          <a:bodyPr spcFirstLastPara="1" wrap="square" lIns="91425" tIns="91425" rIns="91425" bIns="91425" anchor="t" anchorCtr="0">
             <a:normAutofit/>
           </a:bodyPr>
           <a:lstStyle/>
           <a:p>
-            <a:pPr indent="0" lvl="0" marL="0" rtl="0" algn="l">
+            <a:pPr marL="0" lvl="0" indent="0" algn="l" rtl="0">
               <a:spcBef>
                 <a:spcPts val="0"/>
               </a:spcBef>
@@ -10614,12 +11026,12 @@
           </a:ln>
         </p:spPr>
         <p:txBody>
-          <a:bodyPr anchorCtr="0" anchor="t" bIns="91425" lIns="91425" spcFirstLastPara="1" rIns="91425" wrap="square" tIns="91425">
+          <a:bodyPr spcFirstLastPara="1" wrap="square" lIns="91425" tIns="91425" rIns="91425" bIns="91425" anchor="t" anchorCtr="0">
             <a:normAutofit/>
           </a:bodyPr>
           <a:lstStyle/>
           <a:p>
-            <a:pPr indent="0" lvl="0" marL="0" rtl="0" algn="l">
+            <a:pPr marL="0" lvl="0" indent="0" algn="l" rtl="0">
               <a:spcBef>
                 <a:spcPts val="0"/>
               </a:spcBef>
@@ -10672,12 +11084,12 @@
           </a:ln>
         </p:spPr>
         <p:txBody>
-          <a:bodyPr anchorCtr="0" anchor="t" bIns="91425" lIns="91425" spcFirstLastPara="1" rIns="91425" wrap="square" tIns="91425">
+          <a:bodyPr spcFirstLastPara="1" wrap="square" lIns="91425" tIns="91425" rIns="91425" bIns="91425" anchor="t" anchorCtr="0">
             <a:normAutofit/>
           </a:bodyPr>
           <a:lstStyle/>
           <a:p>
-            <a:pPr indent="0" lvl="0" marL="0" rtl="0" algn="l">
+            <a:pPr marL="0" lvl="0" indent="0" algn="l" rtl="0">
               <a:spcBef>
                 <a:spcPts val="0"/>
               </a:spcBef>
@@ -10719,7 +11131,7 @@
 </file>
 
 <file path=ppt/slides/slide25.xml><?xml version="1.0" encoding="utf-8"?>
-<p:sld xmlns:a="http://schemas.openxmlformats.org/drawingml/2006/main" xmlns:r="http://schemas.openxmlformats.org/officeDocument/2006/relationships" xmlns:mc="http://schemas.openxmlformats.org/markup-compatibility/2006" xmlns:mv="urn:schemas-microsoft-com:mac:vml" xmlns:p="http://schemas.openxmlformats.org/presentationml/2006/main" xmlns:c="http://schemas.openxmlformats.org/drawingml/2006/chart" xmlns:dgm="http://schemas.openxmlformats.org/drawingml/2006/diagram" xmlns:o="urn:schemas-microsoft-com:office:office" xmlns:v="urn:schemas-microsoft-com:vml" xmlns:pvml="urn:schemas-microsoft-com:office:powerpoint" xmlns:com="http://schemas.openxmlformats.org/drawingml/2006/compatibility" xmlns:p14="http://schemas.microsoft.com/office/powerpoint/2010/main" xmlns:p15="http://schemas.microsoft.com/office/powerpoint/2012/main" xmlns:ahyp="http://schemas.microsoft.com/office/drawing/2018/hyperlinkcolor">
+<p:sld xmlns:a="http://schemas.openxmlformats.org/drawingml/2006/main" xmlns:r="http://schemas.openxmlformats.org/officeDocument/2006/relationships" xmlns:p="http://schemas.openxmlformats.org/presentationml/2006/main">
   <p:cSld>
     <p:bg>
       <p:bgPr>
@@ -10731,11 +11143,12 @@
             <a:fillRect/>
           </a:stretch>
         </a:blipFill>
+        <a:effectLst/>
       </p:bgPr>
     </p:bg>
     <p:spTree>
       <p:nvGrpSpPr>
-        <p:cNvPr id="206" name="Shape 206"/>
+        <p:cNvPr id="1" name="Shape 206"/>
         <p:cNvGrpSpPr/>
         <p:nvPr/>
       </p:nvGrpSpPr>
@@ -10767,12 +11180,12 @@
           </a:ln>
         </p:spPr>
         <p:txBody>
-          <a:bodyPr anchorCtr="0" anchor="t" bIns="91425" lIns="91425" spcFirstLastPara="1" rIns="91425" wrap="square" tIns="91425">
+          <a:bodyPr spcFirstLastPara="1" wrap="square" lIns="91425" tIns="91425" rIns="91425" bIns="91425" anchor="t" anchorCtr="0">
             <a:normAutofit/>
           </a:bodyPr>
           <a:lstStyle/>
           <a:p>
-            <a:pPr indent="0" lvl="0" marL="0" rtl="0" algn="l">
+            <a:pPr marL="0" lvl="0" indent="0" algn="l" rtl="0">
               <a:spcBef>
                 <a:spcPts val="0"/>
               </a:spcBef>
@@ -10825,12 +11238,12 @@
           </a:ln>
         </p:spPr>
         <p:txBody>
-          <a:bodyPr anchorCtr="0" anchor="t" bIns="91425" lIns="91425" spcFirstLastPara="1" rIns="91425" wrap="square" tIns="91425">
+          <a:bodyPr spcFirstLastPara="1" wrap="square" lIns="91425" tIns="91425" rIns="91425" bIns="91425" anchor="t" anchorCtr="0">
             <a:normAutofit/>
           </a:bodyPr>
           <a:lstStyle/>
           <a:p>
-            <a:pPr indent="0" lvl="0" marL="0" rtl="0" algn="l">
+            <a:pPr marL="0" lvl="0" indent="0" algn="l" rtl="0">
               <a:spcBef>
                 <a:spcPts val="0"/>
               </a:spcBef>
@@ -10883,12 +11296,12 @@
           </a:ln>
         </p:spPr>
         <p:txBody>
-          <a:bodyPr anchorCtr="0" anchor="t" bIns="91425" lIns="91425" spcFirstLastPara="1" rIns="91425" wrap="square" tIns="91425">
+          <a:bodyPr spcFirstLastPara="1" wrap="square" lIns="91425" tIns="91425" rIns="91425" bIns="91425" anchor="t" anchorCtr="0">
             <a:normAutofit/>
           </a:bodyPr>
           <a:lstStyle/>
           <a:p>
-            <a:pPr indent="0" lvl="0" marL="0" rtl="0" algn="l">
+            <a:pPr marL="0" lvl="0" indent="0" algn="l" rtl="0">
               <a:spcBef>
                 <a:spcPts val="0"/>
               </a:spcBef>
@@ -10930,7 +11343,7 @@
 </file>
 
 <file path=ppt/slides/slide26.xml><?xml version="1.0" encoding="utf-8"?>
-<p:sld xmlns:a="http://schemas.openxmlformats.org/drawingml/2006/main" xmlns:r="http://schemas.openxmlformats.org/officeDocument/2006/relationships" xmlns:mc="http://schemas.openxmlformats.org/markup-compatibility/2006" xmlns:mv="urn:schemas-microsoft-com:mac:vml" xmlns:p="http://schemas.openxmlformats.org/presentationml/2006/main" xmlns:c="http://schemas.openxmlformats.org/drawingml/2006/chart" xmlns:dgm="http://schemas.openxmlformats.org/drawingml/2006/diagram" xmlns:o="urn:schemas-microsoft-com:office:office" xmlns:v="urn:schemas-microsoft-com:vml" xmlns:pvml="urn:schemas-microsoft-com:office:powerpoint" xmlns:com="http://schemas.openxmlformats.org/drawingml/2006/compatibility" xmlns:p14="http://schemas.microsoft.com/office/powerpoint/2010/main" xmlns:p15="http://schemas.microsoft.com/office/powerpoint/2012/main" xmlns:ahyp="http://schemas.microsoft.com/office/drawing/2018/hyperlinkcolor">
+<p:sld xmlns:a="http://schemas.openxmlformats.org/drawingml/2006/main" xmlns:r="http://schemas.openxmlformats.org/officeDocument/2006/relationships" xmlns:p="http://schemas.openxmlformats.org/presentationml/2006/main">
   <p:cSld>
     <p:bg>
       <p:bgPr>
@@ -10942,11 +11355,12 @@
             <a:fillRect/>
           </a:stretch>
         </a:blipFill>
+        <a:effectLst/>
       </p:bgPr>
     </p:bg>
     <p:spTree>
       <p:nvGrpSpPr>
-        <p:cNvPr id="213" name="Shape 213"/>
+        <p:cNvPr id="1" name="Shape 213"/>
         <p:cNvGrpSpPr/>
         <p:nvPr/>
       </p:nvGrpSpPr>
@@ -10958,6 +11372,36 @@
           <a:chExt cx="0" cy="0"/>
         </a:xfrm>
       </p:grpSpPr>
+      <p:pic>
+        <p:nvPicPr>
+          <p:cNvPr id="3" name="Picture 2">
+            <a:extLst>
+              <a:ext uri="{FF2B5EF4-FFF2-40B4-BE49-F238E27FC236}">
+                <a16:creationId xmlns:a16="http://schemas.microsoft.com/office/drawing/2014/main" id="{8D4DB9A6-6031-161E-210F-BB430F678D21}"/>
+              </a:ext>
+            </a:extLst>
+          </p:cNvPr>
+          <p:cNvPicPr>
+            <a:picLocks noChangeAspect="1"/>
+          </p:cNvPicPr>
+          <p:nvPr/>
+        </p:nvPicPr>
+        <p:blipFill>
+          <a:blip r:embed="rId4"/>
+          <a:stretch>
+            <a:fillRect/>
+          </a:stretch>
+        </p:blipFill>
+        <p:spPr>
+          <a:xfrm>
+            <a:off x="6707903" y="144816"/>
+            <a:ext cx="2263537" cy="488784"/>
+          </a:xfrm>
+          <a:prstGeom prst="rect">
+            <a:avLst/>
+          </a:prstGeom>
+        </p:spPr>
+      </p:pic>
     </p:spTree>
   </p:cSld>
   <p:clrMapOvr>
@@ -10967,7 +11411,7 @@
 </file>
 
 <file path=ppt/slides/slide3.xml><?xml version="1.0" encoding="utf-8"?>
-<p:sld xmlns:a="http://schemas.openxmlformats.org/drawingml/2006/main" xmlns:r="http://schemas.openxmlformats.org/officeDocument/2006/relationships" xmlns:mc="http://schemas.openxmlformats.org/markup-compatibility/2006" xmlns:mv="urn:schemas-microsoft-com:mac:vml" xmlns:p="http://schemas.openxmlformats.org/presentationml/2006/main" xmlns:c="http://schemas.openxmlformats.org/drawingml/2006/chart" xmlns:dgm="http://schemas.openxmlformats.org/drawingml/2006/diagram" xmlns:o="urn:schemas-microsoft-com:office:office" xmlns:v="urn:schemas-microsoft-com:vml" xmlns:pvml="urn:schemas-microsoft-com:office:powerpoint" xmlns:com="http://schemas.openxmlformats.org/drawingml/2006/compatibility" xmlns:p14="http://schemas.microsoft.com/office/powerpoint/2010/main" xmlns:p15="http://schemas.microsoft.com/office/powerpoint/2012/main" xmlns:ahyp="http://schemas.microsoft.com/office/drawing/2018/hyperlinkcolor">
+<p:sld xmlns:a="http://schemas.openxmlformats.org/drawingml/2006/main" xmlns:r="http://schemas.openxmlformats.org/officeDocument/2006/relationships" xmlns:p="http://schemas.openxmlformats.org/presentationml/2006/main">
   <p:cSld>
     <p:bg>
       <p:bgPr>
@@ -10979,11 +11423,12 @@
             <a:fillRect/>
           </a:stretch>
         </a:blipFill>
+        <a:effectLst/>
       </p:bgPr>
     </p:bg>
     <p:spTree>
       <p:nvGrpSpPr>
-        <p:cNvPr id="61" name="Shape 61"/>
+        <p:cNvPr id="1" name="Shape 61"/>
         <p:cNvGrpSpPr/>
         <p:nvPr/>
       </p:nvGrpSpPr>
@@ -11004,7 +11449,7 @@
 </file>
 
 <file path=ppt/slides/slide4.xml><?xml version="1.0" encoding="utf-8"?>
-<p:sld xmlns:a="http://schemas.openxmlformats.org/drawingml/2006/main" xmlns:r="http://schemas.openxmlformats.org/officeDocument/2006/relationships" xmlns:mc="http://schemas.openxmlformats.org/markup-compatibility/2006" xmlns:mv="urn:schemas-microsoft-com:mac:vml" xmlns:p="http://schemas.openxmlformats.org/presentationml/2006/main" xmlns:c="http://schemas.openxmlformats.org/drawingml/2006/chart" xmlns:dgm="http://schemas.openxmlformats.org/drawingml/2006/diagram" xmlns:o="urn:schemas-microsoft-com:office:office" xmlns:v="urn:schemas-microsoft-com:vml" xmlns:pvml="urn:schemas-microsoft-com:office:powerpoint" xmlns:com="http://schemas.openxmlformats.org/drawingml/2006/compatibility" xmlns:p14="http://schemas.microsoft.com/office/powerpoint/2010/main" xmlns:p15="http://schemas.microsoft.com/office/powerpoint/2012/main" xmlns:ahyp="http://schemas.microsoft.com/office/drawing/2018/hyperlinkcolor">
+<p:sld xmlns:a="http://schemas.openxmlformats.org/drawingml/2006/main" xmlns:r="http://schemas.openxmlformats.org/officeDocument/2006/relationships" xmlns:p="http://schemas.openxmlformats.org/presentationml/2006/main">
   <p:cSld>
     <p:bg>
       <p:bgPr>
@@ -11016,11 +11461,12 @@
             <a:fillRect/>
           </a:stretch>
         </a:blipFill>
+        <a:effectLst/>
       </p:bgPr>
     </p:bg>
     <p:spTree>
       <p:nvGrpSpPr>
-        <p:cNvPr id="65" name="Shape 65"/>
+        <p:cNvPr id="1" name="Shape 65"/>
         <p:cNvGrpSpPr/>
         <p:nvPr/>
       </p:nvGrpSpPr>
@@ -11052,12 +11498,12 @@
           </a:ln>
         </p:spPr>
         <p:txBody>
-          <a:bodyPr anchorCtr="0" anchor="t" bIns="91425" lIns="91425" spcFirstLastPara="1" rIns="91425" wrap="square" tIns="91425">
+          <a:bodyPr spcFirstLastPara="1" wrap="square" lIns="91425" tIns="91425" rIns="91425" bIns="91425" anchor="t" anchorCtr="0">
             <a:normAutofit/>
           </a:bodyPr>
           <a:lstStyle/>
           <a:p>
-            <a:pPr indent="0" lvl="0" marL="0" rtl="0" algn="l">
+            <a:pPr marL="0" lvl="0" indent="0" algn="l" rtl="0">
               <a:spcBef>
                 <a:spcPts val="0"/>
               </a:spcBef>
@@ -11110,12 +11556,12 @@
           </a:ln>
         </p:spPr>
         <p:txBody>
-          <a:bodyPr anchorCtr="0" anchor="t" bIns="91425" lIns="91425" spcFirstLastPara="1" rIns="91425" wrap="square" tIns="91425">
+          <a:bodyPr spcFirstLastPara="1" wrap="square" lIns="91425" tIns="91425" rIns="91425" bIns="91425" anchor="t" anchorCtr="0">
             <a:normAutofit/>
           </a:bodyPr>
           <a:lstStyle/>
           <a:p>
-            <a:pPr indent="0" lvl="0" marL="0" rtl="0" algn="l">
+            <a:pPr marL="0" lvl="0" indent="0" algn="l" rtl="0">
               <a:spcBef>
                 <a:spcPts val="0"/>
               </a:spcBef>
@@ -11168,12 +11614,12 @@
           </a:ln>
         </p:spPr>
         <p:txBody>
-          <a:bodyPr anchorCtr="0" anchor="t" bIns="91425" lIns="91425" spcFirstLastPara="1" rIns="91425" wrap="square" tIns="91425">
+          <a:bodyPr spcFirstLastPara="1" wrap="square" lIns="91425" tIns="91425" rIns="91425" bIns="91425" anchor="t" anchorCtr="0">
             <a:normAutofit/>
           </a:bodyPr>
           <a:lstStyle/>
           <a:p>
-            <a:pPr indent="0" lvl="0" marL="0" rtl="0" algn="l">
+            <a:pPr marL="0" lvl="0" indent="0" algn="l" rtl="0">
               <a:spcBef>
                 <a:spcPts val="0"/>
               </a:spcBef>
@@ -11226,12 +11672,12 @@
           </a:ln>
         </p:spPr>
         <p:txBody>
-          <a:bodyPr anchorCtr="0" anchor="t" bIns="91425" lIns="91425" spcFirstLastPara="1" rIns="91425" wrap="square" tIns="91425">
+          <a:bodyPr spcFirstLastPara="1" wrap="square" lIns="91425" tIns="91425" rIns="91425" bIns="91425" anchor="t" anchorCtr="0">
             <a:normAutofit/>
           </a:bodyPr>
           <a:lstStyle/>
           <a:p>
-            <a:pPr indent="0" lvl="0" marL="0" rtl="0" algn="l">
+            <a:pPr marL="0" lvl="0" indent="0" algn="l" rtl="0">
               <a:spcBef>
                 <a:spcPts val="0"/>
               </a:spcBef>
@@ -11284,12 +11730,12 @@
           </a:ln>
         </p:spPr>
         <p:txBody>
-          <a:bodyPr anchorCtr="0" anchor="t" bIns="91425" lIns="91425" spcFirstLastPara="1" rIns="91425" wrap="square" tIns="91425">
+          <a:bodyPr spcFirstLastPara="1" wrap="square" lIns="91425" tIns="91425" rIns="91425" bIns="91425" anchor="t" anchorCtr="0">
             <a:normAutofit/>
           </a:bodyPr>
           <a:lstStyle/>
           <a:p>
-            <a:pPr indent="0" lvl="0" marL="0" rtl="0" algn="l">
+            <a:pPr marL="0" lvl="0" indent="0" algn="l" rtl="0">
               <a:spcBef>
                 <a:spcPts val="0"/>
               </a:spcBef>
@@ -11342,12 +11788,12 @@
           </a:ln>
         </p:spPr>
         <p:txBody>
-          <a:bodyPr anchorCtr="0" anchor="t" bIns="91425" lIns="91425" spcFirstLastPara="1" rIns="91425" wrap="square" tIns="91425">
+          <a:bodyPr spcFirstLastPara="1" wrap="square" lIns="91425" tIns="91425" rIns="91425" bIns="91425" anchor="t" anchorCtr="0">
             <a:normAutofit/>
           </a:bodyPr>
           <a:lstStyle/>
           <a:p>
-            <a:pPr indent="0" lvl="0" marL="0" rtl="0" algn="l">
+            <a:pPr marL="0" lvl="0" indent="0" algn="l" rtl="0">
               <a:spcBef>
                 <a:spcPts val="0"/>
               </a:spcBef>
@@ -11400,12 +11846,12 @@
           </a:ln>
         </p:spPr>
         <p:txBody>
-          <a:bodyPr anchorCtr="0" anchor="t" bIns="91425" lIns="91425" spcFirstLastPara="1" rIns="91425" wrap="square" tIns="91425">
+          <a:bodyPr spcFirstLastPara="1" wrap="square" lIns="91425" tIns="91425" rIns="91425" bIns="91425" anchor="t" anchorCtr="0">
             <a:normAutofit/>
           </a:bodyPr>
           <a:lstStyle/>
           <a:p>
-            <a:pPr indent="0" lvl="0" marL="0" rtl="0" algn="l">
+            <a:pPr marL="0" lvl="0" indent="0" algn="l" rtl="0">
               <a:spcBef>
                 <a:spcPts val="0"/>
               </a:spcBef>
@@ -11447,7 +11893,7 @@
 </file>
 
 <file path=ppt/slides/slide5.xml><?xml version="1.0" encoding="utf-8"?>
-<p:sld xmlns:a="http://schemas.openxmlformats.org/drawingml/2006/main" xmlns:r="http://schemas.openxmlformats.org/officeDocument/2006/relationships" xmlns:mc="http://schemas.openxmlformats.org/markup-compatibility/2006" xmlns:mv="urn:schemas-microsoft-com:mac:vml" xmlns:p="http://schemas.openxmlformats.org/presentationml/2006/main" xmlns:c="http://schemas.openxmlformats.org/drawingml/2006/chart" xmlns:dgm="http://schemas.openxmlformats.org/drawingml/2006/diagram" xmlns:o="urn:schemas-microsoft-com:office:office" xmlns:v="urn:schemas-microsoft-com:vml" xmlns:pvml="urn:schemas-microsoft-com:office:powerpoint" xmlns:com="http://schemas.openxmlformats.org/drawingml/2006/compatibility" xmlns:p14="http://schemas.microsoft.com/office/powerpoint/2010/main" xmlns:p15="http://schemas.microsoft.com/office/powerpoint/2012/main" xmlns:ahyp="http://schemas.microsoft.com/office/drawing/2018/hyperlinkcolor">
+<p:sld xmlns:a="http://schemas.openxmlformats.org/drawingml/2006/main" xmlns:r="http://schemas.openxmlformats.org/officeDocument/2006/relationships" xmlns:p="http://schemas.openxmlformats.org/presentationml/2006/main">
   <p:cSld>
     <p:bg>
       <p:bgPr>
@@ -11459,11 +11905,12 @@
             <a:fillRect/>
           </a:stretch>
         </a:blipFill>
+        <a:effectLst/>
       </p:bgPr>
     </p:bg>
     <p:spTree>
       <p:nvGrpSpPr>
-        <p:cNvPr id="76" name="Shape 76"/>
+        <p:cNvPr id="1" name="Shape 76"/>
         <p:cNvGrpSpPr/>
         <p:nvPr/>
       </p:nvGrpSpPr>
@@ -11495,12 +11942,12 @@
           </a:ln>
         </p:spPr>
         <p:txBody>
-          <a:bodyPr anchorCtr="0" anchor="t" bIns="91425" lIns="91425" spcFirstLastPara="1" rIns="91425" wrap="square" tIns="91425">
+          <a:bodyPr spcFirstLastPara="1" wrap="square" lIns="91425" tIns="91425" rIns="91425" bIns="91425" anchor="t" anchorCtr="0">
             <a:normAutofit/>
           </a:bodyPr>
           <a:lstStyle/>
           <a:p>
-            <a:pPr indent="0" lvl="0" marL="0" rtl="0" algn="l">
+            <a:pPr marL="0" lvl="0" indent="0" algn="l" rtl="0">
               <a:spcBef>
                 <a:spcPts val="0"/>
               </a:spcBef>
@@ -11553,12 +12000,12 @@
           </a:ln>
         </p:spPr>
         <p:txBody>
-          <a:bodyPr anchorCtr="0" anchor="t" bIns="91425" lIns="91425" spcFirstLastPara="1" rIns="91425" wrap="square" tIns="91425">
+          <a:bodyPr spcFirstLastPara="1" wrap="square" lIns="91425" tIns="91425" rIns="91425" bIns="91425" anchor="t" anchorCtr="0">
             <a:normAutofit/>
           </a:bodyPr>
           <a:lstStyle/>
           <a:p>
-            <a:pPr indent="0" lvl="0" marL="0" rtl="0" algn="l">
+            <a:pPr marL="0" lvl="0" indent="0" algn="l" rtl="0">
               <a:spcBef>
                 <a:spcPts val="0"/>
               </a:spcBef>
@@ -11611,12 +12058,12 @@
           </a:ln>
         </p:spPr>
         <p:txBody>
-          <a:bodyPr anchorCtr="0" anchor="t" bIns="91425" lIns="91425" spcFirstLastPara="1" rIns="91425" wrap="square" tIns="91425">
+          <a:bodyPr spcFirstLastPara="1" wrap="square" lIns="91425" tIns="91425" rIns="91425" bIns="91425" anchor="t" anchorCtr="0">
             <a:normAutofit/>
           </a:bodyPr>
           <a:lstStyle/>
           <a:p>
-            <a:pPr indent="0" lvl="0" marL="0" rtl="0" algn="l">
+            <a:pPr marL="0" lvl="0" indent="0" algn="l" rtl="0">
               <a:spcBef>
                 <a:spcPts val="0"/>
               </a:spcBef>
@@ -11658,7 +12105,7 @@
 </file>
 
 <file path=ppt/slides/slide6.xml><?xml version="1.0" encoding="utf-8"?>
-<p:sld xmlns:a="http://schemas.openxmlformats.org/drawingml/2006/main" xmlns:r="http://schemas.openxmlformats.org/officeDocument/2006/relationships" xmlns:mc="http://schemas.openxmlformats.org/markup-compatibility/2006" xmlns:mv="urn:schemas-microsoft-com:mac:vml" xmlns:p="http://schemas.openxmlformats.org/presentationml/2006/main" xmlns:c="http://schemas.openxmlformats.org/drawingml/2006/chart" xmlns:dgm="http://schemas.openxmlformats.org/drawingml/2006/diagram" xmlns:o="urn:schemas-microsoft-com:office:office" xmlns:v="urn:schemas-microsoft-com:vml" xmlns:pvml="urn:schemas-microsoft-com:office:powerpoint" xmlns:com="http://schemas.openxmlformats.org/drawingml/2006/compatibility" xmlns:p14="http://schemas.microsoft.com/office/powerpoint/2010/main" xmlns:p15="http://schemas.microsoft.com/office/powerpoint/2012/main" xmlns:ahyp="http://schemas.microsoft.com/office/drawing/2018/hyperlinkcolor">
+<p:sld xmlns:a="http://schemas.openxmlformats.org/drawingml/2006/main" xmlns:r="http://schemas.openxmlformats.org/officeDocument/2006/relationships" xmlns:p="http://schemas.openxmlformats.org/presentationml/2006/main">
   <p:cSld>
     <p:bg>
       <p:bgPr>
@@ -11670,11 +12117,12 @@
             <a:fillRect/>
           </a:stretch>
         </a:blipFill>
+        <a:effectLst/>
       </p:bgPr>
     </p:bg>
     <p:spTree>
       <p:nvGrpSpPr>
-        <p:cNvPr id="83" name="Shape 83"/>
+        <p:cNvPr id="1" name="Shape 83"/>
         <p:cNvGrpSpPr/>
         <p:nvPr/>
       </p:nvGrpSpPr>
@@ -11686,6 +12134,36 @@
           <a:chExt cx="0" cy="0"/>
         </a:xfrm>
       </p:grpSpPr>
+      <p:pic>
+        <p:nvPicPr>
+          <p:cNvPr id="3" name="Picture 2">
+            <a:extLst>
+              <a:ext uri="{FF2B5EF4-FFF2-40B4-BE49-F238E27FC236}">
+                <a16:creationId xmlns:a16="http://schemas.microsoft.com/office/drawing/2014/main" id="{6D3174F4-174B-3FA1-FDAF-3160B46BC2D8}"/>
+              </a:ext>
+            </a:extLst>
+          </p:cNvPr>
+          <p:cNvPicPr>
+            <a:picLocks noChangeAspect="1"/>
+          </p:cNvPicPr>
+          <p:nvPr/>
+        </p:nvPicPr>
+        <p:blipFill>
+          <a:blip r:embed="rId4"/>
+          <a:stretch>
+            <a:fillRect/>
+          </a:stretch>
+        </p:blipFill>
+        <p:spPr>
+          <a:xfrm>
+            <a:off x="6707903" y="144816"/>
+            <a:ext cx="2263537" cy="488784"/>
+          </a:xfrm>
+          <a:prstGeom prst="rect">
+            <a:avLst/>
+          </a:prstGeom>
+        </p:spPr>
+      </p:pic>
     </p:spTree>
   </p:cSld>
   <p:clrMapOvr>
@@ -11695,7 +12173,7 @@
 </file>
 
 <file path=ppt/slides/slide7.xml><?xml version="1.0" encoding="utf-8"?>
-<p:sld xmlns:a="http://schemas.openxmlformats.org/drawingml/2006/main" xmlns:r="http://schemas.openxmlformats.org/officeDocument/2006/relationships" xmlns:mc="http://schemas.openxmlformats.org/markup-compatibility/2006" xmlns:mv="urn:schemas-microsoft-com:mac:vml" xmlns:p="http://schemas.openxmlformats.org/presentationml/2006/main" xmlns:c="http://schemas.openxmlformats.org/drawingml/2006/chart" xmlns:dgm="http://schemas.openxmlformats.org/drawingml/2006/diagram" xmlns:o="urn:schemas-microsoft-com:office:office" xmlns:v="urn:schemas-microsoft-com:vml" xmlns:pvml="urn:schemas-microsoft-com:office:powerpoint" xmlns:com="http://schemas.openxmlformats.org/drawingml/2006/compatibility" xmlns:p14="http://schemas.microsoft.com/office/powerpoint/2010/main" xmlns:p15="http://schemas.microsoft.com/office/powerpoint/2012/main" xmlns:ahyp="http://schemas.microsoft.com/office/drawing/2018/hyperlinkcolor">
+<p:sld xmlns:a="http://schemas.openxmlformats.org/drawingml/2006/main" xmlns:r="http://schemas.openxmlformats.org/officeDocument/2006/relationships" xmlns:p="http://schemas.openxmlformats.org/presentationml/2006/main">
   <p:cSld>
     <p:bg>
       <p:bgPr>
@@ -11707,11 +12185,12 @@
             <a:fillRect/>
           </a:stretch>
         </a:blipFill>
+        <a:effectLst/>
       </p:bgPr>
     </p:bg>
     <p:spTree>
       <p:nvGrpSpPr>
-        <p:cNvPr id="87" name="Shape 87"/>
+        <p:cNvPr id="1" name="Shape 87"/>
         <p:cNvGrpSpPr/>
         <p:nvPr/>
       </p:nvGrpSpPr>
@@ -11732,7 +12211,7 @@
 </file>
 
 <file path=ppt/slides/slide8.xml><?xml version="1.0" encoding="utf-8"?>
-<p:sld xmlns:a="http://schemas.openxmlformats.org/drawingml/2006/main" xmlns:r="http://schemas.openxmlformats.org/officeDocument/2006/relationships" xmlns:mc="http://schemas.openxmlformats.org/markup-compatibility/2006" xmlns:mv="urn:schemas-microsoft-com:mac:vml" xmlns:p="http://schemas.openxmlformats.org/presentationml/2006/main" xmlns:c="http://schemas.openxmlformats.org/drawingml/2006/chart" xmlns:dgm="http://schemas.openxmlformats.org/drawingml/2006/diagram" xmlns:o="urn:schemas-microsoft-com:office:office" xmlns:v="urn:schemas-microsoft-com:vml" xmlns:pvml="urn:schemas-microsoft-com:office:powerpoint" xmlns:com="http://schemas.openxmlformats.org/drawingml/2006/compatibility" xmlns:p14="http://schemas.microsoft.com/office/powerpoint/2010/main" xmlns:p15="http://schemas.microsoft.com/office/powerpoint/2012/main" xmlns:ahyp="http://schemas.microsoft.com/office/drawing/2018/hyperlinkcolor">
+<p:sld xmlns:a="http://schemas.openxmlformats.org/drawingml/2006/main" xmlns:r="http://schemas.openxmlformats.org/officeDocument/2006/relationships" xmlns:p="http://schemas.openxmlformats.org/presentationml/2006/main">
   <p:cSld>
     <p:bg>
       <p:bgPr>
@@ -11744,11 +12223,12 @@
             <a:fillRect/>
           </a:stretch>
         </a:blipFill>
+        <a:effectLst/>
       </p:bgPr>
     </p:bg>
     <p:spTree>
       <p:nvGrpSpPr>
-        <p:cNvPr id="91" name="Shape 91"/>
+        <p:cNvPr id="1" name="Shape 91"/>
         <p:cNvGrpSpPr/>
         <p:nvPr/>
       </p:nvGrpSpPr>
@@ -11780,12 +12260,12 @@
           </a:ln>
         </p:spPr>
         <p:txBody>
-          <a:bodyPr anchorCtr="0" anchor="t" bIns="91425" lIns="91425" spcFirstLastPara="1" rIns="91425" wrap="square" tIns="91425">
+          <a:bodyPr spcFirstLastPara="1" wrap="square" lIns="91425" tIns="91425" rIns="91425" bIns="91425" anchor="t" anchorCtr="0">
             <a:normAutofit/>
           </a:bodyPr>
           <a:lstStyle/>
           <a:p>
-            <a:pPr indent="0" lvl="0" marL="0" rtl="0" algn="l">
+            <a:pPr marL="0" lvl="0" indent="0" algn="l" rtl="0">
               <a:spcBef>
                 <a:spcPts val="0"/>
               </a:spcBef>
@@ -11838,12 +12318,12 @@
           </a:ln>
         </p:spPr>
         <p:txBody>
-          <a:bodyPr anchorCtr="0" anchor="t" bIns="91425" lIns="91425" spcFirstLastPara="1" rIns="91425" wrap="square" tIns="91425">
+          <a:bodyPr spcFirstLastPara="1" wrap="square" lIns="91425" tIns="91425" rIns="91425" bIns="91425" anchor="t" anchorCtr="0">
             <a:normAutofit/>
           </a:bodyPr>
           <a:lstStyle/>
           <a:p>
-            <a:pPr indent="0" lvl="0" marL="0" rtl="0" algn="l">
+            <a:pPr marL="0" lvl="0" indent="0" algn="l" rtl="0">
               <a:spcBef>
                 <a:spcPts val="0"/>
               </a:spcBef>
@@ -11896,12 +12376,12 @@
           </a:ln>
         </p:spPr>
         <p:txBody>
-          <a:bodyPr anchorCtr="0" anchor="t" bIns="91425" lIns="91425" spcFirstLastPara="1" rIns="91425" wrap="square" tIns="91425">
+          <a:bodyPr spcFirstLastPara="1" wrap="square" lIns="91425" tIns="91425" rIns="91425" bIns="91425" anchor="t" anchorCtr="0">
             <a:normAutofit/>
           </a:bodyPr>
           <a:lstStyle/>
           <a:p>
-            <a:pPr indent="0" lvl="0" marL="0" rtl="0" algn="l">
+            <a:pPr marL="0" lvl="0" indent="0" algn="l" rtl="0">
               <a:spcBef>
                 <a:spcPts val="0"/>
               </a:spcBef>
@@ -11954,12 +12434,12 @@
           </a:ln>
         </p:spPr>
         <p:txBody>
-          <a:bodyPr anchorCtr="0" anchor="t" bIns="91425" lIns="91425" spcFirstLastPara="1" rIns="91425" wrap="square" tIns="91425">
+          <a:bodyPr spcFirstLastPara="1" wrap="square" lIns="91425" tIns="91425" rIns="91425" bIns="91425" anchor="t" anchorCtr="0">
             <a:normAutofit/>
           </a:bodyPr>
           <a:lstStyle/>
           <a:p>
-            <a:pPr indent="0" lvl="0" marL="0" rtl="0" algn="l">
+            <a:pPr marL="0" lvl="0" indent="0" algn="l" rtl="0">
               <a:spcBef>
                 <a:spcPts val="0"/>
               </a:spcBef>
@@ -12012,12 +12492,12 @@
           </a:ln>
         </p:spPr>
         <p:txBody>
-          <a:bodyPr anchorCtr="0" anchor="t" bIns="91425" lIns="91425" spcFirstLastPara="1" rIns="91425" wrap="square" tIns="91425">
+          <a:bodyPr spcFirstLastPara="1" wrap="square" lIns="91425" tIns="91425" rIns="91425" bIns="91425" anchor="t" anchorCtr="0">
             <a:normAutofit/>
           </a:bodyPr>
           <a:lstStyle/>
           <a:p>
-            <a:pPr indent="0" lvl="0" marL="0" rtl="0" algn="l">
+            <a:pPr marL="0" lvl="0" indent="0" algn="l" rtl="0">
               <a:spcBef>
                 <a:spcPts val="0"/>
               </a:spcBef>
@@ -12070,12 +12550,12 @@
           </a:ln>
         </p:spPr>
         <p:txBody>
-          <a:bodyPr anchorCtr="0" anchor="t" bIns="91425" lIns="91425" spcFirstLastPara="1" rIns="91425" wrap="square" tIns="91425">
+          <a:bodyPr spcFirstLastPara="1" wrap="square" lIns="91425" tIns="91425" rIns="91425" bIns="91425" anchor="t" anchorCtr="0">
             <a:normAutofit/>
           </a:bodyPr>
           <a:lstStyle/>
           <a:p>
-            <a:pPr indent="0" lvl="0" marL="0" rtl="0" algn="l">
+            <a:pPr marL="0" lvl="0" indent="0" algn="l" rtl="0">
               <a:spcBef>
                 <a:spcPts val="0"/>
               </a:spcBef>
@@ -12128,12 +12608,12 @@
           </a:ln>
         </p:spPr>
         <p:txBody>
-          <a:bodyPr anchorCtr="0" anchor="t" bIns="91425" lIns="91425" spcFirstLastPara="1" rIns="91425" wrap="square" tIns="91425">
+          <a:bodyPr spcFirstLastPara="1" wrap="square" lIns="91425" tIns="91425" rIns="91425" bIns="91425" anchor="t" anchorCtr="0">
             <a:normAutofit/>
           </a:bodyPr>
           <a:lstStyle/>
           <a:p>
-            <a:pPr indent="0" lvl="0" marL="0" rtl="0" algn="l">
+            <a:pPr marL="0" lvl="0" indent="0" algn="l" rtl="0">
               <a:spcBef>
                 <a:spcPts val="0"/>
               </a:spcBef>
@@ -12175,7 +12655,7 @@
 </file>
 
 <file path=ppt/slides/slide9.xml><?xml version="1.0" encoding="utf-8"?>
-<p:sld xmlns:a="http://schemas.openxmlformats.org/drawingml/2006/main" xmlns:r="http://schemas.openxmlformats.org/officeDocument/2006/relationships" xmlns:mc="http://schemas.openxmlformats.org/markup-compatibility/2006" xmlns:mv="urn:schemas-microsoft-com:mac:vml" xmlns:p="http://schemas.openxmlformats.org/presentationml/2006/main" xmlns:c="http://schemas.openxmlformats.org/drawingml/2006/chart" xmlns:dgm="http://schemas.openxmlformats.org/drawingml/2006/diagram" xmlns:o="urn:schemas-microsoft-com:office:office" xmlns:v="urn:schemas-microsoft-com:vml" xmlns:pvml="urn:schemas-microsoft-com:office:powerpoint" xmlns:com="http://schemas.openxmlformats.org/drawingml/2006/compatibility" xmlns:p14="http://schemas.microsoft.com/office/powerpoint/2010/main" xmlns:p15="http://schemas.microsoft.com/office/powerpoint/2012/main" xmlns:ahyp="http://schemas.microsoft.com/office/drawing/2018/hyperlinkcolor">
+<p:sld xmlns:a="http://schemas.openxmlformats.org/drawingml/2006/main" xmlns:r="http://schemas.openxmlformats.org/officeDocument/2006/relationships" xmlns:p="http://schemas.openxmlformats.org/presentationml/2006/main">
   <p:cSld>
     <p:bg>
       <p:bgPr>
@@ -12187,11 +12667,12 @@
             <a:fillRect/>
           </a:stretch>
         </a:blipFill>
+        <a:effectLst/>
       </p:bgPr>
     </p:bg>
     <p:spTree>
       <p:nvGrpSpPr>
-        <p:cNvPr id="102" name="Shape 102"/>
+        <p:cNvPr id="1" name="Shape 102"/>
         <p:cNvGrpSpPr/>
         <p:nvPr/>
       </p:nvGrpSpPr>
@@ -12223,12 +12704,12 @@
           </a:ln>
         </p:spPr>
         <p:txBody>
-          <a:bodyPr anchorCtr="0" anchor="t" bIns="91425" lIns="91425" spcFirstLastPara="1" rIns="91425" wrap="square" tIns="91425">
+          <a:bodyPr spcFirstLastPara="1" wrap="square" lIns="91425" tIns="91425" rIns="91425" bIns="91425" anchor="t" anchorCtr="0">
             <a:normAutofit/>
           </a:bodyPr>
           <a:lstStyle/>
           <a:p>
-            <a:pPr indent="0" lvl="0" marL="0" rtl="0" algn="l">
+            <a:pPr marL="0" lvl="0" indent="0" algn="l" rtl="0">
               <a:spcBef>
                 <a:spcPts val="0"/>
               </a:spcBef>
@@ -12281,12 +12762,12 @@
           </a:ln>
         </p:spPr>
         <p:txBody>
-          <a:bodyPr anchorCtr="0" anchor="t" bIns="91425" lIns="91425" spcFirstLastPara="1" rIns="91425" wrap="square" tIns="91425">
+          <a:bodyPr spcFirstLastPara="1" wrap="square" lIns="91425" tIns="91425" rIns="91425" bIns="91425" anchor="t" anchorCtr="0">
             <a:normAutofit/>
           </a:bodyPr>
           <a:lstStyle/>
           <a:p>
-            <a:pPr indent="0" lvl="0" marL="0" rtl="0" algn="l">
+            <a:pPr marL="0" lvl="0" indent="0" algn="l" rtl="0">
               <a:spcBef>
                 <a:spcPts val="0"/>
               </a:spcBef>
@@ -12339,12 +12820,12 @@
           </a:ln>
         </p:spPr>
         <p:txBody>
-          <a:bodyPr anchorCtr="0" anchor="t" bIns="91425" lIns="91425" spcFirstLastPara="1" rIns="91425" wrap="square" tIns="91425">
+          <a:bodyPr spcFirstLastPara="1" wrap="square" lIns="91425" tIns="91425" rIns="91425" bIns="91425" anchor="t" anchorCtr="0">
             <a:normAutofit/>
           </a:bodyPr>
           <a:lstStyle/>
           <a:p>
-            <a:pPr indent="0" lvl="0" marL="0" rtl="0" algn="l">
+            <a:pPr marL="0" lvl="0" indent="0" algn="l" rtl="0">
               <a:spcBef>
                 <a:spcPts val="0"/>
               </a:spcBef>
@@ -12386,7 +12867,288 @@
 </file>
 
 <file path=ppt/theme/theme1.xml><?xml version="1.0" encoding="utf-8"?>
-<a:theme xmlns:a="http://schemas.openxmlformats.org/drawingml/2006/main" xmlns:r="http://schemas.openxmlformats.org/officeDocument/2006/relationships">
+<a:theme xmlns:a="http://schemas.openxmlformats.org/drawingml/2006/main" name="Simple Light">
+  <a:themeElements>
+    <a:clrScheme name="Simple Light">
+      <a:dk1>
+        <a:srgbClr val="000000"/>
+      </a:dk1>
+      <a:lt1>
+        <a:srgbClr val="FFFFFF"/>
+      </a:lt1>
+      <a:dk2>
+        <a:srgbClr val="595959"/>
+      </a:dk2>
+      <a:lt2>
+        <a:srgbClr val="EEEEEE"/>
+      </a:lt2>
+      <a:accent1>
+        <a:srgbClr val="4285F4"/>
+      </a:accent1>
+      <a:accent2>
+        <a:srgbClr val="212121"/>
+      </a:accent2>
+      <a:accent3>
+        <a:srgbClr val="78909C"/>
+      </a:accent3>
+      <a:accent4>
+        <a:srgbClr val="FFAB40"/>
+      </a:accent4>
+      <a:accent5>
+        <a:srgbClr val="0097A7"/>
+      </a:accent5>
+      <a:accent6>
+        <a:srgbClr val="EEFF41"/>
+      </a:accent6>
+      <a:hlink>
+        <a:srgbClr val="0097A7"/>
+      </a:hlink>
+      <a:folHlink>
+        <a:srgbClr val="0097A7"/>
+      </a:folHlink>
+    </a:clrScheme>
+    <a:fontScheme name="Office">
+      <a:majorFont>
+        <a:latin typeface="Arial"/>
+        <a:ea typeface=""/>
+        <a:cs typeface=""/>
+        <a:font script="Jpan" typeface="ＭＳ Ｐゴシック"/>
+        <a:font script="Hang" typeface="맑은 고딕"/>
+        <a:font script="Hans" typeface="宋体"/>
+        <a:font script="Hant" typeface="新細明體"/>
+        <a:font script="Arab" typeface="Times New Roman"/>
+        <a:font script="Hebr" typeface="Times New Roman"/>
+        <a:font script="Thai" typeface="Angsana New"/>
+        <a:font script="Ethi" typeface="Nyala"/>
+        <a:font script="Beng" typeface="Vrinda"/>
+        <a:font script="Gujr" typeface="Shruti"/>
+        <a:font script="Khmr" typeface="MoolBoran"/>
+        <a:font script="Knda" typeface="Tunga"/>
+        <a:font script="Guru" typeface="Raavi"/>
+        <a:font script="Cans" typeface="Euphemia"/>
+        <a:font script="Cher" typeface="Plantagenet Cherokee"/>
+        <a:font script="Yiii" typeface="Microsoft Yi Baiti"/>
+        <a:font script="Tibt" typeface="Microsoft Himalaya"/>
+        <a:font script="Thaa" typeface="MV Boli"/>
+        <a:font script="Deva" typeface="Mangal"/>
+        <a:font script="Telu" typeface="Gautami"/>
+        <a:font script="Taml" typeface="Latha"/>
+        <a:font script="Syrc" typeface="Estrangelo Edessa"/>
+        <a:font script="Orya" typeface="Kalinga"/>
+        <a:font script="Mlym" typeface="Kartika"/>
+        <a:font script="Laoo" typeface="DokChampa"/>
+        <a:font script="Sinh" typeface="Iskoola Pota"/>
+        <a:font script="Mong" typeface="Mongolian Baiti"/>
+        <a:font script="Viet" typeface="Times New Roman"/>
+        <a:font script="Uigh" typeface="Microsoft Uighur"/>
+        <a:font script="Geor" typeface="Sylfaen"/>
+      </a:majorFont>
+      <a:minorFont>
+        <a:latin typeface="Arial"/>
+        <a:ea typeface=""/>
+        <a:cs typeface=""/>
+        <a:font script="Jpan" typeface="ＭＳ Ｐゴシック"/>
+        <a:font script="Hang" typeface="맑은 고딕"/>
+        <a:font script="Hans" typeface="宋体"/>
+        <a:font script="Hant" typeface="新細明體"/>
+        <a:font script="Arab" typeface="Arial"/>
+        <a:font script="Hebr" typeface="Arial"/>
+        <a:font script="Thai" typeface="Cordia New"/>
+        <a:font script="Ethi" typeface="Nyala"/>
+        <a:font script="Beng" typeface="Vrinda"/>
+        <a:font script="Gujr" typeface="Shruti"/>
+        <a:font script="Khmr" typeface="DaunPenh"/>
+        <a:font script="Knda" typeface="Tunga"/>
+        <a:font script="Guru" typeface="Raavi"/>
+        <a:font script="Cans" typeface="Euphemia"/>
+        <a:font script="Cher" typeface="Plantagenet Cherokee"/>
+        <a:font script="Yiii" typeface="Microsoft Yi Baiti"/>
+        <a:font script="Tibt" typeface="Microsoft Himalaya"/>
+        <a:font script="Thaa" typeface="MV Boli"/>
+        <a:font script="Deva" typeface="Mangal"/>
+        <a:font script="Telu" typeface="Gautami"/>
+        <a:font script="Taml" typeface="Latha"/>
+        <a:font script="Syrc" typeface="Estrangelo Edessa"/>
+        <a:font script="Orya" typeface="Kalinga"/>
+        <a:font script="Mlym" typeface="Kartika"/>
+        <a:font script="Laoo" typeface="DokChampa"/>
+        <a:font script="Sinh" typeface="Iskoola Pota"/>
+        <a:font script="Mong" typeface="Mongolian Baiti"/>
+        <a:font script="Viet" typeface="Arial"/>
+        <a:font script="Uigh" typeface="Microsoft Uighur"/>
+        <a:font script="Geor" typeface="Sylfaen"/>
+      </a:minorFont>
+    </a:fontScheme>
+    <a:fmtScheme name="Office">
+      <a:fillStyleLst>
+        <a:solidFill>
+          <a:schemeClr val="phClr"/>
+        </a:solidFill>
+        <a:gradFill rotWithShape="1">
+          <a:gsLst>
+            <a:gs pos="0">
+              <a:schemeClr val="phClr">
+                <a:tint val="50000"/>
+                <a:satMod val="300000"/>
+              </a:schemeClr>
+            </a:gs>
+            <a:gs pos="35000">
+              <a:schemeClr val="phClr">
+                <a:tint val="37000"/>
+                <a:satMod val="300000"/>
+              </a:schemeClr>
+            </a:gs>
+            <a:gs pos="100000">
+              <a:schemeClr val="phClr">
+                <a:tint val="15000"/>
+                <a:satMod val="350000"/>
+              </a:schemeClr>
+            </a:gs>
+          </a:gsLst>
+          <a:lin ang="16200000" scaled="1"/>
+        </a:gradFill>
+        <a:gradFill rotWithShape="1">
+          <a:gsLst>
+            <a:gs pos="0">
+              <a:schemeClr val="phClr">
+                <a:tint val="100000"/>
+                <a:shade val="100000"/>
+                <a:satMod val="130000"/>
+              </a:schemeClr>
+            </a:gs>
+            <a:gs pos="100000">
+              <a:schemeClr val="phClr">
+                <a:tint val="50000"/>
+                <a:shade val="100000"/>
+                <a:satMod val="350000"/>
+              </a:schemeClr>
+            </a:gs>
+          </a:gsLst>
+          <a:lin ang="16200000" scaled="0"/>
+        </a:gradFill>
+      </a:fillStyleLst>
+      <a:lnStyleLst>
+        <a:ln w="9525" cap="flat" cmpd="sng" algn="ctr">
+          <a:solidFill>
+            <a:schemeClr val="phClr">
+              <a:shade val="95000"/>
+              <a:satMod val="105000"/>
+            </a:schemeClr>
+          </a:solidFill>
+          <a:prstDash val="solid"/>
+        </a:ln>
+        <a:ln w="25400" cap="flat" cmpd="sng" algn="ctr">
+          <a:solidFill>
+            <a:schemeClr val="phClr"/>
+          </a:solidFill>
+          <a:prstDash val="solid"/>
+        </a:ln>
+        <a:ln w="38100" cap="flat" cmpd="sng" algn="ctr">
+          <a:solidFill>
+            <a:schemeClr val="phClr"/>
+          </a:solidFill>
+          <a:prstDash val="solid"/>
+        </a:ln>
+      </a:lnStyleLst>
+      <a:effectStyleLst>
+        <a:effectStyle>
+          <a:effectLst>
+            <a:outerShdw blurRad="40000" dist="20000" dir="5400000" rotWithShape="0">
+              <a:srgbClr val="000000">
+                <a:alpha val="38000"/>
+              </a:srgbClr>
+            </a:outerShdw>
+          </a:effectLst>
+        </a:effectStyle>
+        <a:effectStyle>
+          <a:effectLst>
+            <a:outerShdw blurRad="40000" dist="23000" dir="5400000" rotWithShape="0">
+              <a:srgbClr val="000000">
+                <a:alpha val="35000"/>
+              </a:srgbClr>
+            </a:outerShdw>
+          </a:effectLst>
+        </a:effectStyle>
+        <a:effectStyle>
+          <a:effectLst>
+            <a:outerShdw blurRad="40000" dist="23000" dir="5400000" rotWithShape="0">
+              <a:srgbClr val="000000">
+                <a:alpha val="35000"/>
+              </a:srgbClr>
+            </a:outerShdw>
+          </a:effectLst>
+          <a:scene3d>
+            <a:camera prst="orthographicFront">
+              <a:rot lat="0" lon="0" rev="0"/>
+            </a:camera>
+            <a:lightRig rig="threePt" dir="t">
+              <a:rot lat="0" lon="0" rev="1200000"/>
+            </a:lightRig>
+          </a:scene3d>
+          <a:sp3d>
+            <a:bevelT w="63500" h="25400"/>
+          </a:sp3d>
+        </a:effectStyle>
+      </a:effectStyleLst>
+      <a:bgFillStyleLst>
+        <a:solidFill>
+          <a:schemeClr val="phClr"/>
+        </a:solidFill>
+        <a:gradFill rotWithShape="1">
+          <a:gsLst>
+            <a:gs pos="0">
+              <a:schemeClr val="phClr">
+                <a:tint val="40000"/>
+                <a:satMod val="350000"/>
+              </a:schemeClr>
+            </a:gs>
+            <a:gs pos="40000">
+              <a:schemeClr val="phClr">
+                <a:tint val="45000"/>
+                <a:shade val="99000"/>
+                <a:satMod val="350000"/>
+              </a:schemeClr>
+            </a:gs>
+            <a:gs pos="100000">
+              <a:schemeClr val="phClr">
+                <a:shade val="20000"/>
+                <a:satMod val="255000"/>
+              </a:schemeClr>
+            </a:gs>
+          </a:gsLst>
+          <a:path path="circle">
+            <a:fillToRect l="50000" t="-80000" r="50000" b="180000"/>
+          </a:path>
+        </a:gradFill>
+        <a:gradFill rotWithShape="1">
+          <a:gsLst>
+            <a:gs pos="0">
+              <a:schemeClr val="phClr">
+                <a:tint val="80000"/>
+                <a:satMod val="300000"/>
+              </a:schemeClr>
+            </a:gs>
+            <a:gs pos="100000">
+              <a:schemeClr val="phClr">
+                <a:shade val="30000"/>
+                <a:satMod val="200000"/>
+              </a:schemeClr>
+            </a:gs>
+          </a:gsLst>
+          <a:path path="circle">
+            <a:fillToRect l="50000" t="50000" r="50000" b="50000"/>
+          </a:path>
+        </a:gradFill>
+      </a:bgFillStyleLst>
+    </a:fmtScheme>
+  </a:themeElements>
+  <a:objectDefaults/>
+  <a:extraClrSchemeLst/>
+</a:theme>
+</file>
+
+<file path=ppt/theme/theme2.xml><?xml version="1.0" encoding="utf-8"?>
+<a:theme xmlns:a="http://schemas.openxmlformats.org/drawingml/2006/main">
   <a:themeElements>
     <a:clrScheme name="Default">
       <a:dk1>
@@ -12661,284 +13423,7 @@
       </a:bgFillStyleLst>
     </a:fmtScheme>
   </a:themeElements>
-</a:theme>
-</file>
-
-<file path=ppt/theme/theme2.xml><?xml version="1.0" encoding="utf-8"?>
-<a:theme xmlns:a="http://schemas.openxmlformats.org/drawingml/2006/main" xmlns:r="http://schemas.openxmlformats.org/officeDocument/2006/relationships" name="Simple Light">
-  <a:themeElements>
-    <a:clrScheme name="Simple Light">
-      <a:dk1>
-        <a:srgbClr val="000000"/>
-      </a:dk1>
-      <a:lt1>
-        <a:srgbClr val="FFFFFF"/>
-      </a:lt1>
-      <a:dk2>
-        <a:srgbClr val="595959"/>
-      </a:dk2>
-      <a:lt2>
-        <a:srgbClr val="EEEEEE"/>
-      </a:lt2>
-      <a:accent1>
-        <a:srgbClr val="4285F4"/>
-      </a:accent1>
-      <a:accent2>
-        <a:srgbClr val="212121"/>
-      </a:accent2>
-      <a:accent3>
-        <a:srgbClr val="78909C"/>
-      </a:accent3>
-      <a:accent4>
-        <a:srgbClr val="FFAB40"/>
-      </a:accent4>
-      <a:accent5>
-        <a:srgbClr val="0097A7"/>
-      </a:accent5>
-      <a:accent6>
-        <a:srgbClr val="EEFF41"/>
-      </a:accent6>
-      <a:hlink>
-        <a:srgbClr val="0097A7"/>
-      </a:hlink>
-      <a:folHlink>
-        <a:srgbClr val="0097A7"/>
-      </a:folHlink>
-    </a:clrScheme>
-    <a:fontScheme name="Office">
-      <a:majorFont>
-        <a:latin typeface="Arial"/>
-        <a:ea typeface=""/>
-        <a:cs typeface=""/>
-        <a:font script="Jpan" typeface="ＭＳ Ｐゴシック"/>
-        <a:font script="Hang" typeface="맑은 고딕"/>
-        <a:font script="Hans" typeface="宋体"/>
-        <a:font script="Hant" typeface="新細明體"/>
-        <a:font script="Arab" typeface="Times New Roman"/>
-        <a:font script="Hebr" typeface="Times New Roman"/>
-        <a:font script="Thai" typeface="Angsana New"/>
-        <a:font script="Ethi" typeface="Nyala"/>
-        <a:font script="Beng" typeface="Vrinda"/>
-        <a:font script="Gujr" typeface="Shruti"/>
-        <a:font script="Khmr" typeface="MoolBoran"/>
-        <a:font script="Knda" typeface="Tunga"/>
-        <a:font script="Guru" typeface="Raavi"/>
-        <a:font script="Cans" typeface="Euphemia"/>
-        <a:font script="Cher" typeface="Plantagenet Cherokee"/>
-        <a:font script="Yiii" typeface="Microsoft Yi Baiti"/>
-        <a:font script="Tibt" typeface="Microsoft Himalaya"/>
-        <a:font script="Thaa" typeface="MV Boli"/>
-        <a:font script="Deva" typeface="Mangal"/>
-        <a:font script="Telu" typeface="Gautami"/>
-        <a:font script="Taml" typeface="Latha"/>
-        <a:font script="Syrc" typeface="Estrangelo Edessa"/>
-        <a:font script="Orya" typeface="Kalinga"/>
-        <a:font script="Mlym" typeface="Kartika"/>
-        <a:font script="Laoo" typeface="DokChampa"/>
-        <a:font script="Sinh" typeface="Iskoola Pota"/>
-        <a:font script="Mong" typeface="Mongolian Baiti"/>
-        <a:font script="Viet" typeface="Times New Roman"/>
-        <a:font script="Uigh" typeface="Microsoft Uighur"/>
-        <a:font script="Geor" typeface="Sylfaen"/>
-      </a:majorFont>
-      <a:minorFont>
-        <a:latin typeface="Arial"/>
-        <a:ea typeface=""/>
-        <a:cs typeface=""/>
-        <a:font script="Jpan" typeface="ＭＳ Ｐゴシック"/>
-        <a:font script="Hang" typeface="맑은 고딕"/>
-        <a:font script="Hans" typeface="宋体"/>
-        <a:font script="Hant" typeface="新細明體"/>
-        <a:font script="Arab" typeface="Arial"/>
-        <a:font script="Hebr" typeface="Arial"/>
-        <a:font script="Thai" typeface="Cordia New"/>
-        <a:font script="Ethi" typeface="Nyala"/>
-        <a:font script="Beng" typeface="Vrinda"/>
-        <a:font script="Gujr" typeface="Shruti"/>
-        <a:font script="Khmr" typeface="DaunPenh"/>
-        <a:font script="Knda" typeface="Tunga"/>
-        <a:font script="Guru" typeface="Raavi"/>
-        <a:font script="Cans" typeface="Euphemia"/>
-        <a:font script="Cher" typeface="Plantagenet Cherokee"/>
-        <a:font script="Yiii" typeface="Microsoft Yi Baiti"/>
-        <a:font script="Tibt" typeface="Microsoft Himalaya"/>
-        <a:font script="Thaa" typeface="MV Boli"/>
-        <a:font script="Deva" typeface="Mangal"/>
-        <a:font script="Telu" typeface="Gautami"/>
-        <a:font script="Taml" typeface="Latha"/>
-        <a:font script="Syrc" typeface="Estrangelo Edessa"/>
-        <a:font script="Orya" typeface="Kalinga"/>
-        <a:font script="Mlym" typeface="Kartika"/>
-        <a:font script="Laoo" typeface="DokChampa"/>
-        <a:font script="Sinh" typeface="Iskoola Pota"/>
-        <a:font script="Mong" typeface="Mongolian Baiti"/>
-        <a:font script="Viet" typeface="Arial"/>
-        <a:font script="Uigh" typeface="Microsoft Uighur"/>
-        <a:font script="Geor" typeface="Sylfaen"/>
-      </a:minorFont>
-    </a:fontScheme>
-    <a:fmtScheme name="Office">
-      <a:fillStyleLst>
-        <a:solidFill>
-          <a:schemeClr val="phClr"/>
-        </a:solidFill>
-        <a:gradFill rotWithShape="1">
-          <a:gsLst>
-            <a:gs pos="0">
-              <a:schemeClr val="phClr">
-                <a:tint val="50000"/>
-                <a:satMod val="300000"/>
-              </a:schemeClr>
-            </a:gs>
-            <a:gs pos="35000">
-              <a:schemeClr val="phClr">
-                <a:tint val="37000"/>
-                <a:satMod val="300000"/>
-              </a:schemeClr>
-            </a:gs>
-            <a:gs pos="100000">
-              <a:schemeClr val="phClr">
-                <a:tint val="15000"/>
-                <a:satMod val="350000"/>
-              </a:schemeClr>
-            </a:gs>
-          </a:gsLst>
-          <a:lin ang="16200000" scaled="1"/>
-        </a:gradFill>
-        <a:gradFill rotWithShape="1">
-          <a:gsLst>
-            <a:gs pos="0">
-              <a:schemeClr val="phClr">
-                <a:tint val="100000"/>
-                <a:shade val="100000"/>
-                <a:satMod val="130000"/>
-              </a:schemeClr>
-            </a:gs>
-            <a:gs pos="100000">
-              <a:schemeClr val="phClr">
-                <a:tint val="50000"/>
-                <a:shade val="100000"/>
-                <a:satMod val="350000"/>
-              </a:schemeClr>
-            </a:gs>
-          </a:gsLst>
-          <a:lin ang="16200000" scaled="0"/>
-        </a:gradFill>
-      </a:fillStyleLst>
-      <a:lnStyleLst>
-        <a:ln w="9525" cap="flat" cmpd="sng" algn="ctr">
-          <a:solidFill>
-            <a:schemeClr val="phClr">
-              <a:shade val="95000"/>
-              <a:satMod val="105000"/>
-            </a:schemeClr>
-          </a:solidFill>
-          <a:prstDash val="solid"/>
-        </a:ln>
-        <a:ln w="25400" cap="flat" cmpd="sng" algn="ctr">
-          <a:solidFill>
-            <a:schemeClr val="phClr"/>
-          </a:solidFill>
-          <a:prstDash val="solid"/>
-        </a:ln>
-        <a:ln w="38100" cap="flat" cmpd="sng" algn="ctr">
-          <a:solidFill>
-            <a:schemeClr val="phClr"/>
-          </a:solidFill>
-          <a:prstDash val="solid"/>
-        </a:ln>
-      </a:lnStyleLst>
-      <a:effectStyleLst>
-        <a:effectStyle>
-          <a:effectLst>
-            <a:outerShdw blurRad="40000" dist="20000" dir="5400000" rotWithShape="0">
-              <a:srgbClr val="000000">
-                <a:alpha val="38000"/>
-              </a:srgbClr>
-            </a:outerShdw>
-          </a:effectLst>
-        </a:effectStyle>
-        <a:effectStyle>
-          <a:effectLst>
-            <a:outerShdw blurRad="40000" dist="23000" dir="5400000" rotWithShape="0">
-              <a:srgbClr val="000000">
-                <a:alpha val="35000"/>
-              </a:srgbClr>
-            </a:outerShdw>
-          </a:effectLst>
-        </a:effectStyle>
-        <a:effectStyle>
-          <a:effectLst>
-            <a:outerShdw blurRad="40000" dist="23000" dir="5400000" rotWithShape="0">
-              <a:srgbClr val="000000">
-                <a:alpha val="35000"/>
-              </a:srgbClr>
-            </a:outerShdw>
-          </a:effectLst>
-          <a:scene3d>
-            <a:camera prst="orthographicFront">
-              <a:rot lat="0" lon="0" rev="0"/>
-            </a:camera>
-            <a:lightRig rig="threePt" dir="t">
-              <a:rot lat="0" lon="0" rev="1200000"/>
-            </a:lightRig>
-          </a:scene3d>
-          <a:sp3d>
-            <a:bevelT w="63500" h="25400"/>
-          </a:sp3d>
-        </a:effectStyle>
-      </a:effectStyleLst>
-      <a:bgFillStyleLst>
-        <a:solidFill>
-          <a:schemeClr val="phClr"/>
-        </a:solidFill>
-        <a:gradFill rotWithShape="1">
-          <a:gsLst>
-            <a:gs pos="0">
-              <a:schemeClr val="phClr">
-                <a:tint val="40000"/>
-                <a:satMod val="350000"/>
-              </a:schemeClr>
-            </a:gs>
-            <a:gs pos="40000">
-              <a:schemeClr val="phClr">
-                <a:tint val="45000"/>
-                <a:shade val="99000"/>
-                <a:satMod val="350000"/>
-              </a:schemeClr>
-            </a:gs>
-            <a:gs pos="100000">
-              <a:schemeClr val="phClr">
-                <a:shade val="20000"/>
-                <a:satMod val="255000"/>
-              </a:schemeClr>
-            </a:gs>
-          </a:gsLst>
-          <a:path path="circle">
-            <a:fillToRect l="50000" t="-80000" r="50000" b="180000"/>
-          </a:path>
-        </a:gradFill>
-        <a:gradFill rotWithShape="1">
-          <a:gsLst>
-            <a:gs pos="0">
-              <a:schemeClr val="phClr">
-                <a:tint val="80000"/>
-                <a:satMod val="300000"/>
-              </a:schemeClr>
-            </a:gs>
-            <a:gs pos="100000">
-              <a:schemeClr val="phClr">
-                <a:shade val="30000"/>
-                <a:satMod val="200000"/>
-              </a:schemeClr>
-            </a:gs>
-          </a:gsLst>
-          <a:path path="circle">
-            <a:fillToRect l="50000" t="50000" r="50000" b="50000"/>
-          </a:path>
-        </a:gradFill>
-      </a:bgFillStyleLst>
-    </a:fmtScheme>
-  </a:themeElements>
+  <a:objectDefaults/>
+  <a:extraClrSchemeLst/>
 </a:theme>
 </file>